--- a/Portofolio-Analisis-Telco-Churn.pptx
+++ b/Portofolio-Analisis-Telco-Churn.pptx
@@ -3093,7 +3093,7 @@
     <p:bg>
       <p:bgPr>
         <a:solidFill>
-          <a:srgbClr val="1E3A8A"/>
+          <a:srgbClr val="EFE7D8"/>
         </a:solidFill>
         <a:effectLst/>
       </p:bgPr>
@@ -3107,14 +3107,74 @@
       <p:grpSpPr/>
       <p:sp>
         <p:nvSpPr>
-          <p:cNvPr id="2" name="TextBox 1"/>
+          <p:cNvPr id="2" name="Rectangle 1"/>
+          <p:cNvSpPr/>
+          <p:nvPr/>
+        </p:nvSpPr>
+        <p:spPr>
+          <a:xfrm>
+            <a:off x="7818120" y="0"/>
+            <a:ext cx="4373575" cy="6858000"/>
+          </a:xfrm>
+          <a:prstGeom prst="rect">
+            <a:avLst/>
+          </a:prstGeom>
+          <a:solidFill>
+            <a:srgbClr val="4E7FA6"/>
+          </a:solidFill>
+          <a:ln>
+            <a:noFill/>
+          </a:ln>
+          <a:effectLst/>
+        </p:spPr>
+        <p:txBody>
+          <a:bodyPr rtlCol="0" anchor="ctr"/>
+          <a:lstStyle/>
+          <a:p>
+            <a:pPr algn="ctr"/>
+          </a:p>
+        </p:txBody>
+      </p:sp>
+      <p:sp>
+        <p:nvSpPr>
+          <p:cNvPr id="3" name="Rectangle 2"/>
+          <p:cNvSpPr/>
+          <p:nvPr/>
+        </p:nvSpPr>
+        <p:spPr>
+          <a:xfrm>
+            <a:off x="7708392" y="0"/>
+            <a:ext cx="109728" cy="6858000"/>
+          </a:xfrm>
+          <a:prstGeom prst="rect">
+            <a:avLst/>
+          </a:prstGeom>
+          <a:solidFill>
+            <a:srgbClr val="C75B7F"/>
+          </a:solidFill>
+          <a:ln>
+            <a:noFill/>
+          </a:ln>
+          <a:effectLst/>
+        </p:spPr>
+        <p:txBody>
+          <a:bodyPr rtlCol="0" anchor="ctr"/>
+          <a:lstStyle/>
+          <a:p>
+            <a:pPr algn="ctr"/>
+          </a:p>
+        </p:txBody>
+      </p:sp>
+      <p:sp>
+        <p:nvSpPr>
+          <p:cNvPr id="4" name="TextBox 3"/>
           <p:cNvSpPr txBox="1"/>
           <p:nvPr/>
         </p:nvSpPr>
         <p:spPr>
           <a:xfrm>
-            <a:off x="914400" y="1463040"/>
-            <a:ext cx="10332720" cy="2011680"/>
+            <a:off x="777240" y="1371600"/>
+            <a:ext cx="6720840" cy="2011680"/>
           </a:xfrm>
           <a:prstGeom prst="rect">
             <a:avLst/>
@@ -3122,37 +3182,60 @@
           <a:noFill/>
         </p:spPr>
         <p:txBody>
-          <a:bodyPr wrap="square">
+          <a:bodyPr wrap="square" lIns="0" rIns="0" tIns="0" bIns="0">
             <a:spAutoFit/>
           </a:bodyPr>
           <a:lstStyle/>
           <a:p>
             <a:pPr>
-              <a:spcAft>
-                <a:spcPts val="800"/>
-              </a:spcAft>
-            </a:pPr>
-            <a:r>
-              <a:rPr sz="4000" b="1" i="0">
-                <a:solidFill>
-                  <a:srgbClr val="FFFFFF"/>
-                </a:solidFill>
-              </a:rPr>
-              <a:t>Analisis Telco Customer Churn dengan SQL dan Python</a:t>
-            </a:r>
-          </a:p>
-        </p:txBody>
-      </p:sp>
-      <p:sp>
-        <p:nvSpPr>
-          <p:cNvPr id="3" name="TextBox 2"/>
+              <a:lnSpc>
+                <a:spcPct val="104000"/>
+              </a:lnSpc>
+              <a:spcAft>
+                <a:spcPts val="0"/>
+              </a:spcAft>
+            </a:pPr>
+            <a:r>
+              <a:rPr sz="3700" b="1" i="0">
+                <a:solidFill>
+                  <a:srgbClr val="2E3138"/>
+                </a:solidFill>
+                <a:latin typeface="Liberation Serif"/>
+              </a:rPr>
+              <a:t>Analisis Telco Customer Churn</a:t>
+            </a:r>
+          </a:p>
+          <a:p>
+            <a:pPr>
+              <a:lnSpc>
+                <a:spcPct val="104000"/>
+              </a:lnSpc>
+              <a:spcAft>
+                <a:spcPts val="0"/>
+              </a:spcAft>
+            </a:pPr>
+            <a:r>
+              <a:rPr sz="3700" b="1" i="0">
+                <a:solidFill>
+                  <a:srgbClr val="2E3138"/>
+                </a:solidFill>
+                <a:latin typeface="Liberation Serif"/>
+              </a:rPr>
+              <a:t>dengan SQL dan Python</a:t>
+            </a:r>
+          </a:p>
+        </p:txBody>
+      </p:sp>
+      <p:sp>
+        <p:nvSpPr>
+          <p:cNvPr id="5" name="TextBox 4"/>
           <p:cNvSpPr txBox="1"/>
           <p:nvPr/>
         </p:nvSpPr>
         <p:spPr>
           <a:xfrm>
-            <a:off x="914400" y="3474720"/>
-            <a:ext cx="10332720" cy="1097280"/>
+            <a:off x="777240" y="3474720"/>
+            <a:ext cx="6492240" cy="1280160"/>
           </a:xfrm>
           <a:prstGeom prst="rect">
             <a:avLst/>
@@ -3160,37 +3243,41 @@
           <a:noFill/>
         </p:spPr>
         <p:txBody>
-          <a:bodyPr wrap="square">
+          <a:bodyPr wrap="square" lIns="0" rIns="0" tIns="0" bIns="0">
             <a:spAutoFit/>
           </a:bodyPr>
           <a:lstStyle/>
           <a:p>
             <a:pPr>
-              <a:spcAft>
-                <a:spcPts val="800"/>
-              </a:spcAft>
-            </a:pPr>
-            <a:r>
-              <a:rPr sz="2000" b="0" i="0">
-                <a:solidFill>
-                  <a:srgbClr val="FFFFFF"/>
-                </a:solidFill>
-              </a:rPr>
-              <a:t>Studi Kasus: IBM Sample Telco Customer Churn — Siapa yang Pergi, Kenapa, dan Berapa Pendapatan yang Hilang</a:t>
-            </a:r>
-          </a:p>
-        </p:txBody>
-      </p:sp>
-      <p:sp>
-        <p:nvSpPr>
-          <p:cNvPr id="4" name="TextBox 3"/>
+              <a:lnSpc>
+                <a:spcPct val="125000"/>
+              </a:lnSpc>
+              <a:spcAft>
+                <a:spcPts val="0"/>
+              </a:spcAft>
+            </a:pPr>
+            <a:r>
+              <a:rPr sz="1700" b="0" i="0">
+                <a:solidFill>
+                  <a:srgbClr val="33536E"/>
+                </a:solidFill>
+                <a:latin typeface="Noto Sans"/>
+              </a:rPr>
+              <a:t>Studi Kasus: IBM Sample Telco Customer Churn. Siapa yang Pergi, Kenapa, dan Berapa Pendapatan yang Hilang</a:t>
+            </a:r>
+          </a:p>
+        </p:txBody>
+      </p:sp>
+      <p:sp>
+        <p:nvSpPr>
+          <p:cNvPr id="6" name="TextBox 5"/>
           <p:cNvSpPr txBox="1"/>
           <p:nvPr/>
         </p:nvSpPr>
         <p:spPr>
           <a:xfrm>
-            <a:off x="914400" y="5120640"/>
-            <a:ext cx="10332720" cy="914400"/>
+            <a:off x="777240" y="5532120"/>
+            <a:ext cx="6675120" cy="914400"/>
           </a:xfrm>
           <a:prstGeom prst="rect">
             <a:avLst/>
@@ -3198,37 +3285,60 @@
           <a:noFill/>
         </p:spPr>
         <p:txBody>
-          <a:bodyPr wrap="square">
+          <a:bodyPr wrap="square" lIns="0" rIns="0" tIns="0" bIns="0">
             <a:spAutoFit/>
           </a:bodyPr>
           <a:lstStyle/>
           <a:p>
             <a:pPr>
-              <a:spcAft>
-                <a:spcPts val="800"/>
-              </a:spcAft>
-            </a:pPr>
-            <a:r>
-              <a:rPr sz="2400" b="1" i="0">
-                <a:solidFill>
-                  <a:srgbClr val="93C5FD"/>
-                </a:solidFill>
+              <a:lnSpc>
+                <a:spcPct val="100000"/>
+              </a:lnSpc>
+              <a:spcAft>
+                <a:spcPts val="300"/>
+              </a:spcAft>
+            </a:pPr>
+            <a:r>
+              <a:rPr sz="1700" b="1" i="0">
+                <a:solidFill>
+                  <a:srgbClr val="2E3138"/>
+                </a:solidFill>
+                <a:latin typeface="Noto Sans"/>
               </a:rPr>
               <a:t>BAGHIZ ASSHIDDIQIE ARASYA</a:t>
             </a:r>
           </a:p>
-        </p:txBody>
-      </p:sp>
-      <p:sp>
-        <p:nvSpPr>
-          <p:cNvPr id="5" name="TextBox 4"/>
+          <a:p>
+            <a:pPr>
+              <a:lnSpc>
+                <a:spcPct val="100000"/>
+              </a:lnSpc>
+              <a:spcAft>
+                <a:spcPts val="0"/>
+              </a:spcAft>
+            </a:pPr>
+            <a:r>
+              <a:rPr sz="1350" b="0" i="0">
+                <a:solidFill>
+                  <a:srgbClr val="5F636B"/>
+                </a:solidFill>
+                <a:latin typeface="Noto Sans"/>
+              </a:rPr>
+              <a:t>Data Analyst Portfolio Project</a:t>
+            </a:r>
+          </a:p>
+        </p:txBody>
+      </p:sp>
+      <p:sp>
+        <p:nvSpPr>
+          <p:cNvPr id="7" name="TextBox 6"/>
           <p:cNvSpPr txBox="1"/>
           <p:nvPr/>
         </p:nvSpPr>
         <p:spPr>
           <a:xfrm>
-            <a:off x="914400" y="5760720"/>
-            <a:ext cx="10332720" cy="731520"/>
+            <a:off x="8229600" y="1874519"/>
+            <a:ext cx="3611880" cy="3291840"/>
           </a:xfrm>
           <a:prstGeom prst="rect">
             <a:avLst/>
@@ -3236,23 +3346,65 @@
           <a:noFill/>
         </p:spPr>
         <p:txBody>
-          <a:bodyPr wrap="square">
+          <a:bodyPr wrap="square" lIns="0" rIns="0" tIns="0" bIns="0">
             <a:spAutoFit/>
           </a:bodyPr>
           <a:lstStyle/>
           <a:p>
             <a:pPr>
-              <a:spcAft>
-                <a:spcPts val="800"/>
-              </a:spcAft>
-            </a:pPr>
-            <a:r>
-              <a:rPr sz="1400" b="0" i="0">
-                <a:solidFill>
-                  <a:srgbClr val="6B7280"/>
-                </a:solidFill>
-              </a:rPr>
-              <a:t>Data Analyst Portfolio Project</a:t>
+              <a:lnSpc>
+                <a:spcPct val="100000"/>
+              </a:lnSpc>
+              <a:spcAft>
+                <a:spcPts val="600"/>
+              </a:spcAft>
+            </a:pPr>
+            <a:r>
+              <a:rPr sz="8000" b="1" i="0">
+                <a:solidFill>
+                  <a:srgbClr val="FFFFFF"/>
+                </a:solidFill>
+                <a:latin typeface="Noto Sans"/>
+              </a:rPr>
+              <a:t>26,6%</a:t>
+            </a:r>
+          </a:p>
+          <a:p>
+            <a:pPr>
+              <a:lnSpc>
+                <a:spcPct val="100000"/>
+              </a:lnSpc>
+              <a:spcAft>
+                <a:spcPts val="600"/>
+              </a:spcAft>
+            </a:pPr>
+            <a:r>
+              <a:rPr sz="1600" b="1" i="0">
+                <a:solidFill>
+                  <a:srgbClr val="FFFFFF"/>
+                </a:solidFill>
+                <a:latin typeface="Noto Sans"/>
+              </a:rPr>
+              <a:t>churn rate keseluruhan</a:t>
+            </a:r>
+          </a:p>
+          <a:p>
+            <a:pPr>
+              <a:lnSpc>
+                <a:spcPct val="120000"/>
+              </a:lnSpc>
+              <a:spcAft>
+                <a:spcPts val="0"/>
+              </a:spcAft>
+            </a:pPr>
+            <a:r>
+              <a:rPr sz="1450" b="0" i="0">
+                <a:solidFill>
+                  <a:srgbClr val="FFFFFF"/>
+                </a:solidFill>
+                <a:latin typeface="Noto Sans"/>
+              </a:rPr>
+              <a:t>1.869 dari 7.032 pelanggan berhenti berlangganan</a:t>
             </a:r>
           </a:p>
         </p:txBody>
@@ -3271,7 +3423,7 @@
     <p:bg>
       <p:bgPr>
         <a:solidFill>
-          <a:srgbClr val="1E3A8A"/>
+          <a:srgbClr val="EFE7D8"/>
         </a:solidFill>
         <a:effectLst/>
       </p:bgPr>
@@ -3285,14 +3437,44 @@
       <p:grpSpPr/>
       <p:sp>
         <p:nvSpPr>
-          <p:cNvPr id="2" name="TextBox 1"/>
+          <p:cNvPr id="2" name="Rectangle 1"/>
+          <p:cNvSpPr/>
+          <p:nvPr/>
+        </p:nvSpPr>
+        <p:spPr>
+          <a:xfrm>
+            <a:off x="640080" y="502920"/>
+            <a:ext cx="146304" cy="475488"/>
+          </a:xfrm>
+          <a:prstGeom prst="rect">
+            <a:avLst/>
+          </a:prstGeom>
+          <a:solidFill>
+            <a:srgbClr val="C75B7F"/>
+          </a:solidFill>
+          <a:ln>
+            <a:noFill/>
+          </a:ln>
+          <a:effectLst/>
+        </p:spPr>
+        <p:txBody>
+          <a:bodyPr rtlCol="0" anchor="ctr"/>
+          <a:lstStyle/>
+          <a:p>
+            <a:pPr algn="ctr"/>
+          </a:p>
+        </p:txBody>
+      </p:sp>
+      <p:sp>
+        <p:nvSpPr>
+          <p:cNvPr id="3" name="TextBox 2"/>
           <p:cNvSpPr txBox="1"/>
           <p:nvPr/>
         </p:nvSpPr>
         <p:spPr>
           <a:xfrm>
-            <a:off x="914400" y="1645920"/>
-            <a:ext cx="10332720" cy="1097280"/>
+            <a:off x="960120" y="347472"/>
+            <a:ext cx="10607040" cy="868680"/>
           </a:xfrm>
           <a:prstGeom prst="rect">
             <a:avLst/>
@@ -3300,21 +3482,25 @@
           <a:noFill/>
         </p:spPr>
         <p:txBody>
-          <a:bodyPr wrap="square">
+          <a:bodyPr wrap="square" lIns="0" rIns="0" tIns="0" bIns="0">
             <a:spAutoFit/>
           </a:bodyPr>
           <a:lstStyle/>
           <a:p>
             <a:pPr>
-              <a:spcAft>
-                <a:spcPts val="800"/>
-              </a:spcAft>
-            </a:pPr>
-            <a:r>
-              <a:rPr sz="3600" b="1" i="0">
-                <a:solidFill>
-                  <a:srgbClr val="FFFFFF"/>
-                </a:solidFill>
+              <a:lnSpc>
+                <a:spcPct val="100000"/>
+              </a:lnSpc>
+              <a:spcAft>
+                <a:spcPts val="0"/>
+              </a:spcAft>
+            </a:pPr>
+            <a:r>
+              <a:rPr sz="3200" b="1" i="0">
+                <a:solidFill>
+                  <a:srgbClr val="2E3138"/>
+                </a:solidFill>
+                <a:latin typeface="Liberation Serif"/>
               </a:rPr>
               <a:t>Kesimpulan</a:t>
             </a:r>
@@ -3323,14 +3509,14 @@
       </p:sp>
       <p:sp>
         <p:nvSpPr>
-          <p:cNvPr id="3" name="TextBox 2"/>
+          <p:cNvPr id="4" name="TextBox 3"/>
           <p:cNvSpPr txBox="1"/>
           <p:nvPr/>
         </p:nvSpPr>
         <p:spPr>
           <a:xfrm>
-            <a:off x="914400" y="2743200"/>
-            <a:ext cx="10332720" cy="2743200"/>
+            <a:off x="640080" y="1463040"/>
+            <a:ext cx="6858000" cy="4206240"/>
           </a:xfrm>
           <a:prstGeom prst="rect">
             <a:avLst/>
@@ -3338,82 +3524,86 @@
           <a:noFill/>
         </p:spPr>
         <p:txBody>
-          <a:bodyPr wrap="square">
+          <a:bodyPr wrap="square" lIns="0" rIns="0" tIns="0" bIns="0">
             <a:spAutoFit/>
           </a:bodyPr>
           <a:lstStyle/>
           <a:p>
             <a:pPr marL="171450" indent="-171450">
-              <a:spcBef>
-                <a:spcPts val="200"/>
-              </a:spcBef>
-              <a:spcAft>
-                <a:spcPts val="1000"/>
+              <a:lnSpc>
+                <a:spcPct val="112000"/>
+              </a:lnSpc>
+              <a:spcAft>
+                <a:spcPts val="1100"/>
               </a:spcAft>
               <a:buChar char="•"/>
             </a:pPr>
             <a:r>
-              <a:rPr sz="1800" b="0" i="0">
-                <a:solidFill>
-                  <a:srgbClr val="FFFFFF"/>
-                </a:solidFill>
+              <a:rPr sz="1600" b="0" i="0">
+                <a:solidFill>
+                  <a:srgbClr val="2E3138"/>
+                </a:solidFill>
+                <a:latin typeface="Noto Sans"/>
               </a:rPr>
               <a:t>Kontrak bulanan, tahun pertama, dan fiber optic adalah tiga pendorong churn terbesar</a:t>
             </a:r>
           </a:p>
           <a:p>
             <a:pPr marL="171450" indent="-171450">
-              <a:spcBef>
-                <a:spcPts val="200"/>
-              </a:spcBef>
-              <a:spcAft>
-                <a:spcPts val="1000"/>
+              <a:lnSpc>
+                <a:spcPct val="112000"/>
+              </a:lnSpc>
+              <a:spcAft>
+                <a:spcPts val="1100"/>
               </a:spcAft>
               <a:buChar char="•"/>
             </a:pPr>
             <a:r>
-              <a:rPr sz="1800" b="0" i="0">
-                <a:solidFill>
-                  <a:srgbClr val="FFFFFF"/>
-                </a:solidFill>
+              <a:rPr sz="1600" b="0" i="0">
+                <a:solidFill>
+                  <a:srgbClr val="2E3138"/>
+                </a:solidFill>
+                <a:latin typeface="Noto Sans"/>
               </a:rPr>
               <a:t>Fokus retensi pada segmen kombinasi: fiber plus kontrak bulanan (54,6 persen) dan kontrak bulanan plus pelanggan baru (51,4 persen)</a:t>
             </a:r>
           </a:p>
           <a:p>
             <a:pPr marL="171450" indent="-171450">
-              <a:spcBef>
-                <a:spcPts val="200"/>
-              </a:spcBef>
-              <a:spcAft>
-                <a:spcPts val="1000"/>
+              <a:lnSpc>
+                <a:spcPct val="112000"/>
+              </a:lnSpc>
+              <a:spcAft>
+                <a:spcPts val="1100"/>
               </a:spcAft>
               <a:buChar char="•"/>
             </a:pPr>
             <a:r>
-              <a:rPr sz="1800" b="0" i="0">
-                <a:solidFill>
-                  <a:srgbClr val="FFFFFF"/>
-                </a:solidFill>
+              <a:rPr sz="1600" b="0" i="0">
+                <a:solidFill>
+                  <a:srgbClr val="2E3138"/>
+                </a:solidFill>
+                <a:latin typeface="Noto Sans"/>
               </a:rPr>
               <a:t>Churn bukan sekadar angka pelanggan: 139.131 USD pendapatan hilang setiap bulan</a:t>
             </a:r>
           </a:p>
           <a:p>
             <a:pPr marL="171450" indent="-171450">
-              <a:spcBef>
-                <a:spcPts val="200"/>
-              </a:spcBef>
-              <a:spcAft>
-                <a:spcPts val="1000"/>
+              <a:lnSpc>
+                <a:spcPct val="112000"/>
+              </a:lnSpc>
+              <a:spcAft>
+                <a:spcPts val="1100"/>
               </a:spcAft>
               <a:buChar char="•"/>
             </a:pPr>
             <a:r>
-              <a:rPr sz="1800" b="0" i="0">
-                <a:solidFill>
-                  <a:srgbClr val="FFFFFF"/>
-                </a:solidFill>
+              <a:rPr sz="1600" b="0" i="0">
+                <a:solidFill>
+                  <a:srgbClr val="2E3138"/>
+                </a:solidFill>
+                <a:latin typeface="Noto Sans"/>
               </a:rPr>
               <a:t>Tech stack: SQL di SQLite, Python dengan pandas, matplotlib, dan seaborn</a:t>
             </a:r>
@@ -3422,14 +3612,44 @@
       </p:sp>
       <p:sp>
         <p:nvSpPr>
-          <p:cNvPr id="4" name="TextBox 3"/>
+          <p:cNvPr id="5" name="Rectangle 4"/>
+          <p:cNvSpPr/>
+          <p:nvPr/>
+        </p:nvSpPr>
+        <p:spPr>
+          <a:xfrm>
+            <a:off x="7863840" y="1463040"/>
+            <a:ext cx="3685032" cy="4206240"/>
+          </a:xfrm>
+          <a:prstGeom prst="rect">
+            <a:avLst/>
+          </a:prstGeom>
+          <a:solidFill>
+            <a:srgbClr val="F7F1E5"/>
+          </a:solidFill>
+          <a:ln>
+            <a:noFill/>
+          </a:ln>
+          <a:effectLst/>
+        </p:spPr>
+        <p:txBody>
+          <a:bodyPr rtlCol="0" anchor="ctr"/>
+          <a:lstStyle/>
+          <a:p>
+            <a:pPr algn="ctr"/>
+          </a:p>
+        </p:txBody>
+      </p:sp>
+      <p:sp>
+        <p:nvSpPr>
+          <p:cNvPr id="6" name="TextBox 5"/>
           <p:cNvSpPr txBox="1"/>
           <p:nvPr/>
         </p:nvSpPr>
         <p:spPr>
           <a:xfrm>
-            <a:off x="914400" y="5669280"/>
-            <a:ext cx="10332720" cy="731520"/>
+            <a:off x="8183879" y="1783080"/>
+            <a:ext cx="3063240" cy="3566160"/>
           </a:xfrm>
           <a:prstGeom prst="rect">
             <a:avLst/>
@@ -3437,23 +3657,149 @@
           <a:noFill/>
         </p:spPr>
         <p:txBody>
-          <a:bodyPr wrap="square">
+          <a:bodyPr wrap="square" lIns="0" rIns="0" tIns="0" bIns="0">
             <a:spAutoFit/>
           </a:bodyPr>
           <a:lstStyle/>
           <a:p>
             <a:pPr>
-              <a:spcAft>
-                <a:spcPts val="800"/>
-              </a:spcAft>
-            </a:pPr>
-            <a:r>
-              <a:rPr sz="2000" b="1" i="0">
-                <a:solidFill>
-                  <a:srgbClr val="93C5FD"/>
-                </a:solidFill>
+              <a:lnSpc>
+                <a:spcPct val="100000"/>
+              </a:lnSpc>
+              <a:spcAft>
+                <a:spcPts val="400"/>
+              </a:spcAft>
+            </a:pPr>
+            <a:r>
+              <a:rPr sz="4000" b="1" i="0">
+                <a:solidFill>
+                  <a:srgbClr val="C75B7F"/>
+                </a:solidFill>
+                <a:latin typeface="Noto Sans"/>
+              </a:rPr>
+              <a:t>26,6%</a:t>
+            </a:r>
+          </a:p>
+          <a:p>
+            <a:pPr>
+              <a:lnSpc>
+                <a:spcPct val="125000"/>
+              </a:lnSpc>
+              <a:spcAft>
+                <a:spcPts val="0"/>
+              </a:spcAft>
+            </a:pPr>
+            <a:r>
+              <a:rPr sz="1450" b="0" i="0">
+                <a:solidFill>
+                  <a:srgbClr val="2E3138"/>
+                </a:solidFill>
+                <a:latin typeface="Noto Sans"/>
+              </a:rPr>
+              <a:t>satu dari empat pelanggan pergi. Retensi segmen rawan adalah tuas pendapatan terbesar.</a:t>
+            </a:r>
+          </a:p>
+        </p:txBody>
+      </p:sp>
+      <p:sp>
+        <p:nvSpPr>
+          <p:cNvPr id="7" name="TextBox 6"/>
+          <p:cNvSpPr txBox="1"/>
+          <p:nvPr/>
+        </p:nvSpPr>
+        <p:spPr>
+          <a:xfrm>
+            <a:off x="640080" y="5806440"/>
+            <a:ext cx="7863840" cy="868680"/>
+          </a:xfrm>
+          <a:prstGeom prst="rect">
+            <a:avLst/>
+          </a:prstGeom>
+          <a:noFill/>
+        </p:spPr>
+        <p:txBody>
+          <a:bodyPr wrap="square" lIns="0" rIns="0" tIns="0" bIns="0">
+            <a:spAutoFit/>
+          </a:bodyPr>
+          <a:lstStyle/>
+          <a:p>
+            <a:pPr>
+              <a:lnSpc>
+                <a:spcPct val="100000"/>
+              </a:lnSpc>
+              <a:spcAft>
+                <a:spcPts val="300"/>
+              </a:spcAft>
+            </a:pPr>
+            <a:r>
+              <a:rPr sz="2200" b="1" i="0">
+                <a:solidFill>
+                  <a:srgbClr val="2E3138"/>
+                </a:solidFill>
+                <a:latin typeface="Liberation Serif"/>
               </a:rPr>
               <a:t>BAGHIZ ASSHIDDIQIE ARASYA</a:t>
+            </a:r>
+          </a:p>
+          <a:p>
+            <a:pPr>
+              <a:lnSpc>
+                <a:spcPct val="100000"/>
+              </a:lnSpc>
+              <a:spcAft>
+                <a:spcPts val="0"/>
+              </a:spcAft>
+            </a:pPr>
+            <a:r>
+              <a:rPr sz="1450" b="0" i="0">
+                <a:solidFill>
+                  <a:srgbClr val="33536E"/>
+                </a:solidFill>
+                <a:latin typeface="Noto Sans"/>
+              </a:rPr>
+              <a:t>github.com/baghizash/telco-customer-churn-analysis</a:t>
+            </a:r>
+          </a:p>
+        </p:txBody>
+      </p:sp>
+      <p:sp>
+        <p:nvSpPr>
+          <p:cNvPr id="8" name="TextBox 7"/>
+          <p:cNvSpPr txBox="1"/>
+          <p:nvPr/>
+        </p:nvSpPr>
+        <p:spPr>
+          <a:xfrm>
+            <a:off x="7863840" y="5989320"/>
+            <a:ext cx="3685032" cy="548640"/>
+          </a:xfrm>
+          <a:prstGeom prst="rect">
+            <a:avLst/>
+          </a:prstGeom>
+          <a:noFill/>
+        </p:spPr>
+        <p:txBody>
+          <a:bodyPr wrap="square" lIns="0" rIns="0" tIns="0" bIns="0">
+            <a:spAutoFit/>
+          </a:bodyPr>
+          <a:lstStyle/>
+          <a:p>
+            <a:pPr>
+              <a:lnSpc>
+                <a:spcPct val="100000"/>
+              </a:lnSpc>
+              <a:spcAft>
+                <a:spcPts val="0"/>
+              </a:spcAft>
+            </a:pPr>
+            <a:r>
+              <a:rPr sz="1450" b="1" i="0">
+                <a:solidFill>
+                  <a:srgbClr val="C75B7F"/>
+                </a:solidFill>
+                <a:latin typeface="Noto Sans"/>
+              </a:rPr>
+              <a:t>Mari diskusi soal data dan retensi pelanggan.</a:t>
             </a:r>
           </a:p>
         </p:txBody>
@@ -3472,7 +3818,7 @@
     <p:bg>
       <p:bgPr>
         <a:solidFill>
-          <a:srgbClr val="FFFFFF"/>
+          <a:srgbClr val="EFE7D8"/>
         </a:solidFill>
         <a:effectLst/>
       </p:bgPr>
@@ -3486,82 +3832,73 @@
       <p:grpSpPr/>
       <p:sp>
         <p:nvSpPr>
-          <p:cNvPr id="2" name="TextBox 1"/>
-          <p:cNvSpPr txBox="1"/>
-          <p:nvPr/>
-        </p:nvSpPr>
-        <p:spPr>
-          <a:xfrm>
-            <a:off x="640080" y="274320"/>
-            <a:ext cx="10881360" cy="822960"/>
-          </a:xfrm>
-          <a:prstGeom prst="rect">
-            <a:avLst/>
-          </a:prstGeom>
-          <a:noFill/>
-        </p:spPr>
-        <p:txBody>
-          <a:bodyPr wrap="square">
-            <a:spAutoFit/>
-          </a:bodyPr>
-          <a:lstStyle/>
-          <a:p>
-            <a:pPr>
-              <a:spcAft>
-                <a:spcPts val="800"/>
-              </a:spcAft>
-            </a:pPr>
-            <a:r>
-              <a:rPr sz="3000" b="1" i="0">
-                <a:solidFill>
-                  <a:srgbClr val="1E3A8A"/>
-                </a:solidFill>
-              </a:rPr>
-              <a:t>Latar Belakang</a:t>
-            </a:r>
-          </a:p>
-        </p:txBody>
-      </p:sp>
-      <p:sp>
-        <p:nvSpPr>
-          <p:cNvPr id="3" name="Rectangle 2"/>
+          <p:cNvPr id="2" name="Rectangle 1"/>
           <p:cNvSpPr/>
           <p:nvPr/>
         </p:nvSpPr>
         <p:spPr>
           <a:xfrm>
-            <a:off x="640080" y="1051560"/>
-            <a:ext cx="1371600" cy="54864"/>
+            <a:off x="640080" y="502920"/>
+            <a:ext cx="146304" cy="475488"/>
           </a:xfrm>
           <a:prstGeom prst="rect">
             <a:avLst/>
           </a:prstGeom>
           <a:solidFill>
-            <a:srgbClr val="0D9488"/>
+            <a:srgbClr val="C75B7F"/>
           </a:solidFill>
           <a:ln>
             <a:noFill/>
           </a:ln>
-        </p:spPr>
-        <p:style>
-          <a:lnRef idx="1">
-            <a:schemeClr val="accent1"/>
-          </a:lnRef>
-          <a:fillRef idx="3">
-            <a:schemeClr val="accent1"/>
-          </a:fillRef>
-          <a:effectRef idx="2">
-            <a:schemeClr val="accent1"/>
-          </a:effectRef>
-          <a:fontRef idx="minor">
-            <a:schemeClr val="lt1"/>
-          </a:fontRef>
-        </p:style>
+          <a:effectLst/>
+        </p:spPr>
         <p:txBody>
           <a:bodyPr rtlCol="0" anchor="ctr"/>
           <a:lstStyle/>
           <a:p>
             <a:pPr algn="ctr"/>
+          </a:p>
+        </p:txBody>
+      </p:sp>
+      <p:sp>
+        <p:nvSpPr>
+          <p:cNvPr id="3" name="TextBox 2"/>
+          <p:cNvSpPr txBox="1"/>
+          <p:nvPr/>
+        </p:nvSpPr>
+        <p:spPr>
+          <a:xfrm>
+            <a:off x="960120" y="347472"/>
+            <a:ext cx="10607040" cy="868680"/>
+          </a:xfrm>
+          <a:prstGeom prst="rect">
+            <a:avLst/>
+          </a:prstGeom>
+          <a:noFill/>
+        </p:spPr>
+        <p:txBody>
+          <a:bodyPr wrap="square" lIns="0" rIns="0" tIns="0" bIns="0">
+            <a:spAutoFit/>
+          </a:bodyPr>
+          <a:lstStyle/>
+          <a:p>
+            <a:pPr>
+              <a:lnSpc>
+                <a:spcPct val="100000"/>
+              </a:lnSpc>
+              <a:spcAft>
+                <a:spcPts val="0"/>
+              </a:spcAft>
+            </a:pPr>
+            <a:r>
+              <a:rPr sz="3200" b="1" i="0">
+                <a:solidFill>
+                  <a:srgbClr val="2E3138"/>
+                </a:solidFill>
+                <a:latin typeface="Liberation Serif"/>
+              </a:rPr>
+              <a:t>Latar Belakang</a:t>
+            </a:r>
           </a:p>
         </p:txBody>
       </p:sp>
@@ -3573,8 +3910,8 @@
         </p:nvSpPr>
         <p:spPr>
           <a:xfrm>
-            <a:off x="640080" y="1371600"/>
-            <a:ext cx="10881360" cy="4754880"/>
+            <a:off x="640080" y="1463040"/>
+            <a:ext cx="6858000" cy="4754880"/>
           </a:xfrm>
           <a:prstGeom prst="rect">
             <a:avLst/>
@@ -3582,84 +3919,301 @@
           <a:noFill/>
         </p:spPr>
         <p:txBody>
-          <a:bodyPr wrap="square">
+          <a:bodyPr wrap="square" lIns="0" rIns="0" tIns="0" bIns="0">
             <a:spAutoFit/>
           </a:bodyPr>
           <a:lstStyle/>
           <a:p>
             <a:pPr marL="171450" indent="-171450">
-              <a:spcBef>
+              <a:lnSpc>
+                <a:spcPct val="112000"/>
+              </a:lnSpc>
+              <a:spcAft>
+                <a:spcPts val="1100"/>
+              </a:spcAft>
+              <a:buChar char="•"/>
+            </a:pPr>
+            <a:r>
+              <a:rPr sz="1650" b="0" i="0">
+                <a:solidFill>
+                  <a:srgbClr val="2E3138"/>
+                </a:solidFill>
+                <a:latin typeface="Noto Sans"/>
+              </a:rPr>
+              <a:t>Dataset IBM Sample Telco Customer Churn: 7.032 pelanggan bersih dengan 21 kolom demografi, layanan, kontrak, dan tagihan</a:t>
+            </a:r>
+          </a:p>
+          <a:p>
+            <a:pPr marL="171450" indent="-171450">
+              <a:lnSpc>
+                <a:spcPct val="112000"/>
+              </a:lnSpc>
+              <a:spcAft>
+                <a:spcPts val="1100"/>
+              </a:spcAft>
+              <a:buChar char="•"/>
+            </a:pPr>
+            <a:r>
+              <a:rPr sz="1650" b="0" i="0">
+                <a:solidFill>
+                  <a:srgbClr val="2E3138"/>
+                </a:solidFill>
+                <a:latin typeface="Noto Sans"/>
+              </a:rPr>
+              <a:t>Pertanyaan utama: pelanggan mana yang berhenti berlangganan, kenapa mereka pergi, dan berapa pendapatan yang hilang</a:t>
+            </a:r>
+          </a:p>
+          <a:p>
+            <a:pPr marL="171450" indent="-171450">
+              <a:lnSpc>
+                <a:spcPct val="112000"/>
+              </a:lnSpc>
+              <a:spcAft>
+                <a:spcPts val="1100"/>
+              </a:spcAft>
+              <a:buChar char="•"/>
+            </a:pPr>
+            <a:r>
+              <a:rPr sz="1650" b="0" i="0">
+                <a:solidFill>
+                  <a:srgbClr val="2E3138"/>
+                </a:solidFill>
+                <a:latin typeface="Noto Sans"/>
+              </a:rPr>
+              <a:t>Churn rate keseluruhan 26,6 persen atau 1.869 pelanggan, lebih dari 1 dari 4 pelanggan pergi</a:t>
+            </a:r>
+          </a:p>
+          <a:p>
+            <a:pPr marL="171450" indent="-171450">
+              <a:lnSpc>
+                <a:spcPct val="112000"/>
+              </a:lnSpc>
+              <a:spcAft>
+                <a:spcPts val="1100"/>
+              </a:spcAft>
+              <a:buChar char="•"/>
+            </a:pPr>
+            <a:r>
+              <a:rPr sz="1650" b="0" i="0">
+                <a:solidFill>
+                  <a:srgbClr val="2E3138"/>
+                </a:solidFill>
+                <a:latin typeface="Noto Sans"/>
+              </a:rPr>
+              <a:t>Tujuan analisis: menemukan segmen paling rawan churn lalu menyusun rekomendasi retensi yang konkret dan terukur</a:t>
+            </a:r>
+          </a:p>
+        </p:txBody>
+      </p:sp>
+      <p:sp>
+        <p:nvSpPr>
+          <p:cNvPr id="5" name="Rectangle 4"/>
+          <p:cNvSpPr/>
+          <p:nvPr/>
+        </p:nvSpPr>
+        <p:spPr>
+          <a:xfrm>
+            <a:off x="7863840" y="1463040"/>
+            <a:ext cx="3685032" cy="4526280"/>
+          </a:xfrm>
+          <a:prstGeom prst="rect">
+            <a:avLst/>
+          </a:prstGeom>
+          <a:solidFill>
+            <a:srgbClr val="F7F1E5"/>
+          </a:solidFill>
+          <a:ln>
+            <a:noFill/>
+          </a:ln>
+          <a:effectLst/>
+        </p:spPr>
+        <p:txBody>
+          <a:bodyPr rtlCol="0" anchor="ctr"/>
+          <a:lstStyle/>
+          <a:p>
+            <a:pPr algn="ctr"/>
+          </a:p>
+        </p:txBody>
+      </p:sp>
+      <p:sp>
+        <p:nvSpPr>
+          <p:cNvPr id="6" name="TextBox 5"/>
+          <p:cNvSpPr txBox="1"/>
+          <p:nvPr/>
+        </p:nvSpPr>
+        <p:spPr>
+          <a:xfrm>
+            <a:off x="8183879" y="1783080"/>
+            <a:ext cx="3108960" cy="1051560"/>
+          </a:xfrm>
+          <a:prstGeom prst="rect">
+            <a:avLst/>
+          </a:prstGeom>
+          <a:noFill/>
+        </p:spPr>
+        <p:txBody>
+          <a:bodyPr wrap="square" lIns="0" rIns="0" tIns="0" bIns="0">
+            <a:spAutoFit/>
+          </a:bodyPr>
+          <a:lstStyle/>
+          <a:p>
+            <a:pPr>
+              <a:lnSpc>
+                <a:spcPct val="100000"/>
+              </a:lnSpc>
+              <a:spcAft>
                 <a:spcPts val="200"/>
-              </a:spcBef>
-              <a:spcAft>
-                <a:spcPts val="1000"/>
-              </a:spcAft>
-              <a:buChar char="•"/>
-            </a:pPr>
-            <a:r>
-              <a:rPr sz="1700" b="0" i="0">
-                <a:solidFill>
-                  <a:srgbClr val="1F2937"/>
-                </a:solidFill>
-              </a:rPr>
-              <a:t>Dataset IBM Sample Telco Customer Churn: 7.032 pelanggan bersih dengan 21 kolom demografi, layanan, kontrak, dan tagihan</a:t>
-            </a:r>
-          </a:p>
-          <a:p>
-            <a:pPr marL="171450" indent="-171450">
-              <a:spcBef>
+              </a:spcAft>
+            </a:pPr>
+            <a:r>
+              <a:rPr sz="3000" b="1" i="0">
+                <a:solidFill>
+                  <a:srgbClr val="4E7FA6"/>
+                </a:solidFill>
+                <a:latin typeface="Noto Sans"/>
+              </a:rPr>
+              <a:t>7.032</a:t>
+            </a:r>
+          </a:p>
+          <a:p>
+            <a:pPr>
+              <a:lnSpc>
+                <a:spcPct val="100000"/>
+              </a:lnSpc>
+              <a:spcAft>
+                <a:spcPts val="0"/>
+              </a:spcAft>
+            </a:pPr>
+            <a:r>
+              <a:rPr sz="1350" b="0" i="0">
+                <a:solidFill>
+                  <a:srgbClr val="2E3138"/>
+                </a:solidFill>
+                <a:latin typeface="Noto Sans"/>
+              </a:rPr>
+              <a:t>pelanggan bersih dianalisis</a:t>
+            </a:r>
+          </a:p>
+        </p:txBody>
+      </p:sp>
+      <p:sp>
+        <p:nvSpPr>
+          <p:cNvPr id="7" name="TextBox 6"/>
+          <p:cNvSpPr txBox="1"/>
+          <p:nvPr/>
+        </p:nvSpPr>
+        <p:spPr>
+          <a:xfrm>
+            <a:off x="8183879" y="3017520"/>
+            <a:ext cx="3108960" cy="1051560"/>
+          </a:xfrm>
+          <a:prstGeom prst="rect">
+            <a:avLst/>
+          </a:prstGeom>
+          <a:noFill/>
+        </p:spPr>
+        <p:txBody>
+          <a:bodyPr wrap="square" lIns="0" rIns="0" tIns="0" bIns="0">
+            <a:spAutoFit/>
+          </a:bodyPr>
+          <a:lstStyle/>
+          <a:p>
+            <a:pPr>
+              <a:lnSpc>
+                <a:spcPct val="100000"/>
+              </a:lnSpc>
+              <a:spcAft>
                 <a:spcPts val="200"/>
-              </a:spcBef>
-              <a:spcAft>
-                <a:spcPts val="1000"/>
-              </a:spcAft>
-              <a:buChar char="•"/>
-            </a:pPr>
-            <a:r>
-              <a:rPr sz="1700" b="0" i="0">
-                <a:solidFill>
-                  <a:srgbClr val="1F2937"/>
-                </a:solidFill>
-              </a:rPr>
-              <a:t>Pertanyaan utama: pelanggan mana yang berhenti berlangganan, kenapa mereka pergi, dan berapa pendapatan yang hilang</a:t>
-            </a:r>
-          </a:p>
-          <a:p>
-            <a:pPr marL="171450" indent="-171450">
-              <a:spcBef>
+              </a:spcAft>
+            </a:pPr>
+            <a:r>
+              <a:rPr sz="3000" b="1" i="0">
+                <a:solidFill>
+                  <a:srgbClr val="C75B7F"/>
+                </a:solidFill>
+                <a:latin typeface="Noto Sans"/>
+              </a:rPr>
+              <a:t>26,6%</a:t>
+            </a:r>
+          </a:p>
+          <a:p>
+            <a:pPr>
+              <a:lnSpc>
+                <a:spcPct val="100000"/>
+              </a:lnSpc>
+              <a:spcAft>
+                <a:spcPts val="0"/>
+              </a:spcAft>
+            </a:pPr>
+            <a:r>
+              <a:rPr sz="1350" b="0" i="0">
+                <a:solidFill>
+                  <a:srgbClr val="2E3138"/>
+                </a:solidFill>
+                <a:latin typeface="Noto Sans"/>
+              </a:rPr>
+              <a:t>churn rate keseluruhan</a:t>
+            </a:r>
+          </a:p>
+        </p:txBody>
+      </p:sp>
+      <p:sp>
+        <p:nvSpPr>
+          <p:cNvPr id="8" name="TextBox 7"/>
+          <p:cNvSpPr txBox="1"/>
+          <p:nvPr/>
+        </p:nvSpPr>
+        <p:spPr>
+          <a:xfrm>
+            <a:off x="8183879" y="4251960"/>
+            <a:ext cx="3108960" cy="1051560"/>
+          </a:xfrm>
+          <a:prstGeom prst="rect">
+            <a:avLst/>
+          </a:prstGeom>
+          <a:noFill/>
+        </p:spPr>
+        <p:txBody>
+          <a:bodyPr wrap="square" lIns="0" rIns="0" tIns="0" bIns="0">
+            <a:spAutoFit/>
+          </a:bodyPr>
+          <a:lstStyle/>
+          <a:p>
+            <a:pPr>
+              <a:lnSpc>
+                <a:spcPct val="100000"/>
+              </a:lnSpc>
+              <a:spcAft>
                 <a:spcPts val="200"/>
-              </a:spcBef>
-              <a:spcAft>
-                <a:spcPts val="1000"/>
-              </a:spcAft>
-              <a:buChar char="•"/>
-            </a:pPr>
-            <a:r>
-              <a:rPr sz="1700" b="0" i="0">
-                <a:solidFill>
-                  <a:srgbClr val="1F2937"/>
-                </a:solidFill>
-              </a:rPr>
-              <a:t>Churn rate keseluruhan 26,6 persen atau 1.869 pelanggan, lebih dari 1 dari 4 pelanggan pergi</a:t>
-            </a:r>
-          </a:p>
-          <a:p>
-            <a:pPr marL="171450" indent="-171450">
-              <a:spcBef>
-                <a:spcPts val="200"/>
-              </a:spcBef>
-              <a:spcAft>
-                <a:spcPts val="1000"/>
-              </a:spcAft>
-              <a:buChar char="•"/>
-            </a:pPr>
-            <a:r>
-              <a:rPr sz="1700" b="0" i="0">
-                <a:solidFill>
-                  <a:srgbClr val="1F2937"/>
-                </a:solidFill>
-              </a:rPr>
-              <a:t>Tujuan analisis: menemukan segmen paling rawan churn lalu menyusun rekomendasi retensi yang konkret dan terukur</a:t>
+              </a:spcAft>
+            </a:pPr>
+            <a:r>
+              <a:rPr sz="3000" b="1" i="0">
+                <a:solidFill>
+                  <a:srgbClr val="4E7FA6"/>
+                </a:solidFill>
+                <a:latin typeface="Noto Sans"/>
+              </a:rPr>
+              <a:t>1.869</a:t>
+            </a:r>
+          </a:p>
+          <a:p>
+            <a:pPr>
+              <a:lnSpc>
+                <a:spcPct val="100000"/>
+              </a:lnSpc>
+              <a:spcAft>
+                <a:spcPts val="0"/>
+              </a:spcAft>
+            </a:pPr>
+            <a:r>
+              <a:rPr sz="1350" b="0" i="0">
+                <a:solidFill>
+                  <a:srgbClr val="2E3138"/>
+                </a:solidFill>
+                <a:latin typeface="Noto Sans"/>
+              </a:rPr>
+              <a:t>pelanggan berhenti berlangganan</a:t>
             </a:r>
           </a:p>
         </p:txBody>
@@ -3678,7 +4232,7 @@
     <p:bg>
       <p:bgPr>
         <a:solidFill>
-          <a:srgbClr val="FFFFFF"/>
+          <a:srgbClr val="EFE7D8"/>
         </a:solidFill>
         <a:effectLst/>
       </p:bgPr>
@@ -3692,82 +4246,73 @@
       <p:grpSpPr/>
       <p:sp>
         <p:nvSpPr>
-          <p:cNvPr id="2" name="TextBox 1"/>
-          <p:cNvSpPr txBox="1"/>
-          <p:nvPr/>
-        </p:nvSpPr>
-        <p:spPr>
-          <a:xfrm>
-            <a:off x="640080" y="274320"/>
-            <a:ext cx="10881360" cy="822960"/>
-          </a:xfrm>
-          <a:prstGeom prst="rect">
-            <a:avLst/>
-          </a:prstGeom>
-          <a:noFill/>
-        </p:spPr>
-        <p:txBody>
-          <a:bodyPr wrap="square">
-            <a:spAutoFit/>
-          </a:bodyPr>
-          <a:lstStyle/>
-          <a:p>
-            <a:pPr>
-              <a:spcAft>
-                <a:spcPts val="800"/>
-              </a:spcAft>
-            </a:pPr>
-            <a:r>
-              <a:rPr sz="3000" b="1" i="0">
-                <a:solidFill>
-                  <a:srgbClr val="1E3A8A"/>
-                </a:solidFill>
-              </a:rPr>
-              <a:t>Data dan Metodologi</a:t>
-            </a:r>
-          </a:p>
-        </p:txBody>
-      </p:sp>
-      <p:sp>
-        <p:nvSpPr>
-          <p:cNvPr id="3" name="Rectangle 2"/>
+          <p:cNvPr id="2" name="Rectangle 1"/>
           <p:cNvSpPr/>
           <p:nvPr/>
         </p:nvSpPr>
         <p:spPr>
           <a:xfrm>
-            <a:off x="640080" y="1051560"/>
-            <a:ext cx="1371600" cy="54864"/>
+            <a:off x="640080" y="502920"/>
+            <a:ext cx="146304" cy="475488"/>
           </a:xfrm>
           <a:prstGeom prst="rect">
             <a:avLst/>
           </a:prstGeom>
           <a:solidFill>
-            <a:srgbClr val="0D9488"/>
+            <a:srgbClr val="C75B7F"/>
           </a:solidFill>
           <a:ln>
             <a:noFill/>
           </a:ln>
-        </p:spPr>
-        <p:style>
-          <a:lnRef idx="1">
-            <a:schemeClr val="accent1"/>
-          </a:lnRef>
-          <a:fillRef idx="3">
-            <a:schemeClr val="accent1"/>
-          </a:fillRef>
-          <a:effectRef idx="2">
-            <a:schemeClr val="accent1"/>
-          </a:effectRef>
-          <a:fontRef idx="minor">
-            <a:schemeClr val="lt1"/>
-          </a:fontRef>
-        </p:style>
+          <a:effectLst/>
+        </p:spPr>
         <p:txBody>
           <a:bodyPr rtlCol="0" anchor="ctr"/>
           <a:lstStyle/>
           <a:p>
             <a:pPr algn="ctr"/>
+          </a:p>
+        </p:txBody>
+      </p:sp>
+      <p:sp>
+        <p:nvSpPr>
+          <p:cNvPr id="3" name="TextBox 2"/>
+          <p:cNvSpPr txBox="1"/>
+          <p:nvPr/>
+        </p:nvSpPr>
+        <p:spPr>
+          <a:xfrm>
+            <a:off x="960120" y="347472"/>
+            <a:ext cx="10607040" cy="868680"/>
+          </a:xfrm>
+          <a:prstGeom prst="rect">
+            <a:avLst/>
+          </a:prstGeom>
+          <a:noFill/>
+        </p:spPr>
+        <p:txBody>
+          <a:bodyPr wrap="square" lIns="0" rIns="0" tIns="0" bIns="0">
+            <a:spAutoFit/>
+          </a:bodyPr>
+          <a:lstStyle/>
+          <a:p>
+            <a:pPr>
+              <a:lnSpc>
+                <a:spcPct val="100000"/>
+              </a:lnSpc>
+              <a:spcAft>
+                <a:spcPts val="0"/>
+              </a:spcAft>
+            </a:pPr>
+            <a:r>
+              <a:rPr sz="3200" b="1" i="0">
+                <a:solidFill>
+                  <a:srgbClr val="2E3138"/>
+                </a:solidFill>
+                <a:latin typeface="Liberation Serif"/>
+              </a:rPr>
+              <a:t>Data dan Metodologi</a:t>
+            </a:r>
           </a:p>
         </p:txBody>
       </p:sp>
@@ -3779,8 +4324,8 @@
         </p:nvSpPr>
         <p:spPr>
           <a:xfrm>
-            <a:off x="640080" y="1371600"/>
-            <a:ext cx="10881360" cy="4754880"/>
+            <a:off x="640080" y="1463040"/>
+            <a:ext cx="5577840" cy="4754880"/>
           </a:xfrm>
           <a:prstGeom prst="rect">
             <a:avLst/>
@@ -3788,103 +4333,198 @@
           <a:noFill/>
         </p:spPr>
         <p:txBody>
-          <a:bodyPr wrap="square">
+          <a:bodyPr wrap="square" lIns="0" rIns="0" tIns="0" bIns="0">
             <a:spAutoFit/>
           </a:bodyPr>
           <a:lstStyle/>
           <a:p>
             <a:pPr marL="171450" indent="-171450">
-              <a:spcBef>
+              <a:lnSpc>
+                <a:spcPct val="112000"/>
+              </a:lnSpc>
+              <a:spcAft>
+                <a:spcPts val="1100"/>
+              </a:spcAft>
+              <a:buChar char="•"/>
+            </a:pPr>
+            <a:r>
+              <a:rPr sz="1600" b="0" i="0">
+                <a:solidFill>
+                  <a:srgbClr val="2E3138"/>
+                </a:solidFill>
+                <a:latin typeface="Noto Sans"/>
+              </a:rPr>
+              <a:t>Data dimuat ke SQLite lalu dianalisis dengan query SQL asli: agregasi, grouping, dan perbandingan antar segmen</a:t>
+            </a:r>
+          </a:p>
+          <a:p>
+            <a:pPr marL="171450" indent="-171450">
+              <a:lnSpc>
+                <a:spcPct val="112000"/>
+              </a:lnSpc>
+              <a:spcAft>
+                <a:spcPts val="1100"/>
+              </a:spcAft>
+              <a:buChar char="•"/>
+            </a:pPr>
+            <a:r>
+              <a:rPr sz="1600" b="0" i="0">
+                <a:solidFill>
+                  <a:srgbClr val="2E3138"/>
+                </a:solidFill>
+                <a:latin typeface="Noto Sans"/>
+              </a:rPr>
+              <a:t>Pandas dipakai untuk eksplorasi lanjutan dan pembuatan 12 chart visual</a:t>
+            </a:r>
+          </a:p>
+          <a:p>
+            <a:pPr marL="171450" indent="-171450">
+              <a:lnSpc>
+                <a:spcPct val="112000"/>
+              </a:lnSpc>
+              <a:spcAft>
+                <a:spcPts val="1100"/>
+              </a:spcAft>
+              <a:buChar char="•"/>
+            </a:pPr>
+            <a:r>
+              <a:rPr sz="1600" b="0" i="0">
+                <a:solidFill>
+                  <a:srgbClr val="2E3138"/>
+                </a:solidFill>
+                <a:latin typeface="Noto Sans"/>
+              </a:rPr>
+              <a:t>Churn didefinisikan sebagai kolom Churn bernilai Yes; rate dihitung sebagai Yes dibagi total pelanggan</a:t>
+            </a:r>
+          </a:p>
+          <a:p>
+            <a:pPr marL="171450" indent="-171450">
+              <a:lnSpc>
+                <a:spcPct val="112000"/>
+              </a:lnSpc>
+              <a:spcAft>
+                <a:spcPts val="1100"/>
+              </a:spcAft>
+              <a:buChar char="•"/>
+            </a:pPr>
+            <a:r>
+              <a:rPr sz="1600" b="0" i="0">
+                <a:solidFill>
+                  <a:srgbClr val="2E3138"/>
+                </a:solidFill>
+                <a:latin typeface="Noto Sans"/>
+              </a:rPr>
+              <a:t>Segmen yang dianalisis: kontrak, masa berlangganan, layanan internet, metode pembayaran, tagihan, layanan dukungan, demografi, dan segmen kombinasi</a:t>
+            </a:r>
+          </a:p>
+        </p:txBody>
+      </p:sp>
+      <p:sp>
+        <p:nvSpPr>
+          <p:cNvPr id="5" name="Rectangle 4"/>
+          <p:cNvSpPr/>
+          <p:nvPr/>
+        </p:nvSpPr>
+        <p:spPr>
+          <a:xfrm>
+            <a:off x="6583680" y="1463040"/>
+            <a:ext cx="4965192" cy="4297680"/>
+          </a:xfrm>
+          <a:prstGeom prst="rect">
+            <a:avLst/>
+          </a:prstGeom>
+          <a:solidFill>
+            <a:srgbClr val="EFC3D2"/>
+          </a:solidFill>
+          <a:ln>
+            <a:noFill/>
+          </a:ln>
+          <a:effectLst/>
+        </p:spPr>
+        <p:txBody>
+          <a:bodyPr rtlCol="0" anchor="ctr"/>
+          <a:lstStyle/>
+          <a:p>
+            <a:pPr algn="ctr"/>
+          </a:p>
+        </p:txBody>
+      </p:sp>
+      <p:sp>
+        <p:nvSpPr>
+          <p:cNvPr id="6" name="TextBox 5"/>
+          <p:cNvSpPr txBox="1"/>
+          <p:nvPr/>
+        </p:nvSpPr>
+        <p:spPr>
+          <a:xfrm>
+            <a:off x="6949440" y="1783080"/>
+            <a:ext cx="4251960" cy="3749039"/>
+          </a:xfrm>
+          <a:prstGeom prst="rect">
+            <a:avLst/>
+          </a:prstGeom>
+          <a:noFill/>
+        </p:spPr>
+        <p:txBody>
+          <a:bodyPr wrap="square" lIns="0" rIns="0" tIns="0" bIns="0">
+            <a:spAutoFit/>
+          </a:bodyPr>
+          <a:lstStyle/>
+          <a:p>
+            <a:pPr>
+              <a:lnSpc>
+                <a:spcPct val="100000"/>
+              </a:lnSpc>
+              <a:spcAft>
                 <a:spcPts val="200"/>
-              </a:spcBef>
-              <a:spcAft>
-                <a:spcPts val="1000"/>
-              </a:spcAft>
-              <a:buChar char="•"/>
-            </a:pPr>
-            <a:r>
-              <a:rPr sz="1700" b="0" i="0">
-                <a:solidFill>
-                  <a:srgbClr val="1F2937"/>
-                </a:solidFill>
-              </a:rPr>
-              <a:t>Data dimuat ke SQLite lalu dianalisis dengan query SQL asli: agregasi, grouping, dan perbandingan antar segmen</a:t>
-            </a:r>
-          </a:p>
-          <a:p>
-            <a:pPr marL="171450" indent="-171450">
-              <a:spcBef>
-                <a:spcPts val="200"/>
-              </a:spcBef>
-              <a:spcAft>
-                <a:spcPts val="1000"/>
-              </a:spcAft>
-              <a:buChar char="•"/>
-            </a:pPr>
-            <a:r>
-              <a:rPr sz="1700" b="0" i="0">
-                <a:solidFill>
-                  <a:srgbClr val="1F2937"/>
-                </a:solidFill>
+              </a:spcAft>
+            </a:pPr>
+            <a:r>
+              <a:rPr sz="5400" b="1" i="0">
+                <a:solidFill>
+                  <a:srgbClr val="C75B7F"/>
+                </a:solidFill>
+                <a:latin typeface="Noto Sans"/>
+              </a:rPr>
+              <a:t>11</a:t>
+            </a:r>
+          </a:p>
+          <a:p>
+            <a:pPr>
+              <a:lnSpc>
+                <a:spcPct val="115000"/>
+              </a:lnSpc>
+              <a:spcAft>
+                <a:spcPts val="800"/>
+              </a:spcAft>
+            </a:pPr>
+            <a:r>
+              <a:rPr sz="1600" b="1" i="0">
+                <a:solidFill>
+                  <a:srgbClr val="2E3138"/>
+                </a:solidFill>
+                <a:latin typeface="Noto Sans"/>
+              </a:rPr>
+              <a:t>baris dihapus dari data, bukan diimputasi</a:t>
+            </a:r>
+          </a:p>
+          <a:p>
+            <a:pPr>
+              <a:lnSpc>
+                <a:spcPct val="125000"/>
+              </a:lnSpc>
+              <a:spcAft>
+                <a:spcPts val="0"/>
+              </a:spcAft>
+            </a:pPr>
+            <a:r>
+              <a:rPr sz="1500" b="0" i="0">
+                <a:solidFill>
+                  <a:srgbClr val="2E3138"/>
+                </a:solidFill>
+                <a:latin typeface="Noto Sans"/>
               </a:rPr>
               <a:t>Pembersihan penting: kolom TotalCharges tiba sebagai teks dengan 11 nilai kosong tersembunyi (semua tenure 0, belum pernah ditagih), 11 baris itu dihapus karena imputasi berarti mengarang data</a:t>
-            </a:r>
-          </a:p>
-          <a:p>
-            <a:pPr marL="171450" indent="-171450">
-              <a:spcBef>
-                <a:spcPts val="200"/>
-              </a:spcBef>
-              <a:spcAft>
-                <a:spcPts val="1000"/>
-              </a:spcAft>
-              <a:buChar char="•"/>
-            </a:pPr>
-            <a:r>
-              <a:rPr sz="1700" b="0" i="0">
-                <a:solidFill>
-                  <a:srgbClr val="1F2937"/>
-                </a:solidFill>
-              </a:rPr>
-              <a:t>Pandas dipakai untuk eksplorasi lanjutan dan pembuatan 12 chart visual</a:t>
-            </a:r>
-          </a:p>
-          <a:p>
-            <a:pPr marL="171450" indent="-171450">
-              <a:spcBef>
-                <a:spcPts val="200"/>
-              </a:spcBef>
-              <a:spcAft>
-                <a:spcPts val="1000"/>
-              </a:spcAft>
-              <a:buChar char="•"/>
-            </a:pPr>
-            <a:r>
-              <a:rPr sz="1700" b="0" i="0">
-                <a:solidFill>
-                  <a:srgbClr val="1F2937"/>
-                </a:solidFill>
-              </a:rPr>
-              <a:t>Churn didefinisikan sebagai kolom Churn bernilai Yes; rate dihitung sebagai Yes dibagi total pelanggan</a:t>
-            </a:r>
-          </a:p>
-          <a:p>
-            <a:pPr marL="171450" indent="-171450">
-              <a:spcBef>
-                <a:spcPts val="200"/>
-              </a:spcBef>
-              <a:spcAft>
-                <a:spcPts val="1000"/>
-              </a:spcAft>
-              <a:buChar char="•"/>
-            </a:pPr>
-            <a:r>
-              <a:rPr sz="1700" b="0" i="0">
-                <a:solidFill>
-                  <a:srgbClr val="1F2937"/>
-                </a:solidFill>
-              </a:rPr>
-              <a:t>Segmen yang dianalisis: kontrak, masa berlangganan, layanan internet, metode pembayaran, tagihan, layanan dukungan, demografi, dan segmen kombinasi</a:t>
             </a:r>
           </a:p>
         </p:txBody>
@@ -3903,7 +4543,7 @@
     <p:bg>
       <p:bgPr>
         <a:solidFill>
-          <a:srgbClr val="FFFFFF"/>
+          <a:srgbClr val="EFE7D8"/>
         </a:solidFill>
         <a:effectLst/>
       </p:bgPr>
@@ -3917,82 +4557,73 @@
       <p:grpSpPr/>
       <p:sp>
         <p:nvSpPr>
-          <p:cNvPr id="2" name="TextBox 1"/>
-          <p:cNvSpPr txBox="1"/>
-          <p:nvPr/>
-        </p:nvSpPr>
-        <p:spPr>
-          <a:xfrm>
-            <a:off x="640080" y="274320"/>
-            <a:ext cx="10881360" cy="822960"/>
-          </a:xfrm>
-          <a:prstGeom prst="rect">
-            <a:avLst/>
-          </a:prstGeom>
-          <a:noFill/>
-        </p:spPr>
-        <p:txBody>
-          <a:bodyPr wrap="square">
-            <a:spAutoFit/>
-          </a:bodyPr>
-          <a:lstStyle/>
-          <a:p>
-            <a:pPr>
-              <a:spcAft>
-                <a:spcPts val="800"/>
-              </a:spcAft>
-            </a:pPr>
-            <a:r>
-              <a:rPr sz="3000" b="1" i="0">
-                <a:solidFill>
-                  <a:srgbClr val="1E3A8A"/>
-                </a:solidFill>
-              </a:rPr>
-              <a:t>Temuan 1: Kontrak Bulanan Paling Berisiko</a:t>
-            </a:r>
-          </a:p>
-        </p:txBody>
-      </p:sp>
-      <p:sp>
-        <p:nvSpPr>
-          <p:cNvPr id="3" name="Rectangle 2"/>
+          <p:cNvPr id="2" name="Rectangle 1"/>
           <p:cNvSpPr/>
           <p:nvPr/>
         </p:nvSpPr>
         <p:spPr>
           <a:xfrm>
-            <a:off x="640080" y="1051560"/>
-            <a:ext cx="1371600" cy="54864"/>
+            <a:off x="640080" y="502920"/>
+            <a:ext cx="146304" cy="475488"/>
           </a:xfrm>
           <a:prstGeom prst="rect">
             <a:avLst/>
           </a:prstGeom>
           <a:solidFill>
-            <a:srgbClr val="0D9488"/>
+            <a:srgbClr val="C75B7F"/>
           </a:solidFill>
           <a:ln>
             <a:noFill/>
           </a:ln>
-        </p:spPr>
-        <p:style>
-          <a:lnRef idx="1">
-            <a:schemeClr val="accent1"/>
-          </a:lnRef>
-          <a:fillRef idx="3">
-            <a:schemeClr val="accent1"/>
-          </a:fillRef>
-          <a:effectRef idx="2">
-            <a:schemeClr val="accent1"/>
-          </a:effectRef>
-          <a:fontRef idx="minor">
-            <a:schemeClr val="lt1"/>
-          </a:fontRef>
-        </p:style>
+          <a:effectLst/>
+        </p:spPr>
         <p:txBody>
           <a:bodyPr rtlCol="0" anchor="ctr"/>
           <a:lstStyle/>
           <a:p>
             <a:pPr algn="ctr"/>
+          </a:p>
+        </p:txBody>
+      </p:sp>
+      <p:sp>
+        <p:nvSpPr>
+          <p:cNvPr id="3" name="TextBox 2"/>
+          <p:cNvSpPr txBox="1"/>
+          <p:nvPr/>
+        </p:nvSpPr>
+        <p:spPr>
+          <a:xfrm>
+            <a:off x="960120" y="347472"/>
+            <a:ext cx="10607040" cy="868680"/>
+          </a:xfrm>
+          <a:prstGeom prst="rect">
+            <a:avLst/>
+          </a:prstGeom>
+          <a:noFill/>
+        </p:spPr>
+        <p:txBody>
+          <a:bodyPr wrap="square" lIns="0" rIns="0" tIns="0" bIns="0">
+            <a:spAutoFit/>
+          </a:bodyPr>
+          <a:lstStyle/>
+          <a:p>
+            <a:pPr>
+              <a:lnSpc>
+                <a:spcPct val="100000"/>
+              </a:lnSpc>
+              <a:spcAft>
+                <a:spcPts val="0"/>
+              </a:spcAft>
+            </a:pPr>
+            <a:r>
+              <a:rPr sz="3200" b="1" i="0">
+                <a:solidFill>
+                  <a:srgbClr val="2E3138"/>
+                </a:solidFill>
+                <a:latin typeface="Liberation Serif"/>
+              </a:rPr>
+              <a:t>Temuan 1: Kontrak Bulanan Paling Berisiko</a:t>
+            </a:r>
           </a:p>
         </p:txBody>
       </p:sp>
@@ -4004,8 +4635,8 @@
         </p:nvSpPr>
         <p:spPr>
           <a:xfrm>
-            <a:off x="640080" y="1371600"/>
-            <a:ext cx="5120640" cy="4754880"/>
+            <a:off x="640080" y="1463040"/>
+            <a:ext cx="5029200" cy="3291840"/>
           </a:xfrm>
           <a:prstGeom prst="rect">
             <a:avLst/>
@@ -4013,91 +4644,217 @@
           <a:noFill/>
         </p:spPr>
         <p:txBody>
-          <a:bodyPr wrap="square">
+          <a:bodyPr wrap="square" lIns="0" rIns="0" tIns="0" bIns="0">
             <a:spAutoFit/>
           </a:bodyPr>
           <a:lstStyle/>
           <a:p>
             <a:pPr marL="171450" indent="-171450">
-              <a:spcBef>
+              <a:lnSpc>
+                <a:spcPct val="112000"/>
+              </a:lnSpc>
+              <a:spcAft>
+                <a:spcPts val="1100"/>
+              </a:spcAft>
+              <a:buChar char="•"/>
+            </a:pPr>
+            <a:r>
+              <a:rPr sz="1600" b="0" i="0">
+                <a:solidFill>
+                  <a:srgbClr val="2E3138"/>
+                </a:solidFill>
+                <a:latin typeface="Noto Sans"/>
+              </a:rPr>
+              <a:t>Kontrak bulanan (month-to-month) churn 42,7 persen, 15 kali lipat kontrak 2 tahun yang hanya 2,8 persen</a:t>
+            </a:r>
+          </a:p>
+          <a:p>
+            <a:pPr marL="171450" indent="-171450">
+              <a:lnSpc>
+                <a:spcPct val="112000"/>
+              </a:lnSpc>
+              <a:spcAft>
+                <a:spcPts val="1100"/>
+              </a:spcAft>
+              <a:buChar char="•"/>
+            </a:pPr>
+            <a:r>
+              <a:rPr sz="1600" b="0" i="0">
+                <a:solidFill>
+                  <a:srgbClr val="2E3138"/>
+                </a:solidFill>
+                <a:latin typeface="Noto Sans"/>
+              </a:rPr>
+              <a:t>Kontrak bulanan mencakup 55,1 persen pelanggan tetapi menyumbang 88,6 persen dari semua churn</a:t>
+            </a:r>
+          </a:p>
+          <a:p>
+            <a:pPr marL="171450" indent="-171450">
+              <a:lnSpc>
+                <a:spcPct val="112000"/>
+              </a:lnSpc>
+              <a:spcAft>
+                <a:spcPts val="1100"/>
+              </a:spcAft>
+              <a:buChar char="•"/>
+            </a:pPr>
+            <a:r>
+              <a:rPr sz="1600" b="0" i="0">
+                <a:solidFill>
+                  <a:srgbClr val="2E3138"/>
+                </a:solidFill>
+                <a:latin typeface="Noto Sans"/>
+              </a:rPr>
+              <a:t>Kontrak 1 tahun churn 11,3 persen, jauh lebih aman dibanding bulanan</a:t>
+            </a:r>
+          </a:p>
+          <a:p>
+            <a:pPr marL="171450" indent="-171450">
+              <a:lnSpc>
+                <a:spcPct val="112000"/>
+              </a:lnSpc>
+              <a:spcAft>
+                <a:spcPts val="1100"/>
+              </a:spcAft>
+              <a:buChar char="•"/>
+            </a:pPr>
+            <a:r>
+              <a:rPr sz="1600" b="0" i="0">
+                <a:solidFill>
+                  <a:srgbClr val="2E3138"/>
+                </a:solidFill>
+                <a:latin typeface="Noto Sans"/>
+              </a:rPr>
+              <a:t>Tanpa komitmen jangka panjang, pelanggan pergi kapan saja dan hampir tanpa hambatan</a:t>
+            </a:r>
+          </a:p>
+        </p:txBody>
+      </p:sp>
+      <p:sp>
+        <p:nvSpPr>
+          <p:cNvPr id="5" name="TextBox 4"/>
+          <p:cNvSpPr txBox="1"/>
+          <p:nvPr/>
+        </p:nvSpPr>
+        <p:spPr>
+          <a:xfrm>
+            <a:off x="640080" y="5120640"/>
+            <a:ext cx="2377440" cy="1051560"/>
+          </a:xfrm>
+          <a:prstGeom prst="rect">
+            <a:avLst/>
+          </a:prstGeom>
+          <a:noFill/>
+        </p:spPr>
+        <p:txBody>
+          <a:bodyPr wrap="square" lIns="0" rIns="0" tIns="0" bIns="0">
+            <a:spAutoFit/>
+          </a:bodyPr>
+          <a:lstStyle/>
+          <a:p>
+            <a:pPr>
+              <a:lnSpc>
+                <a:spcPct val="100000"/>
+              </a:lnSpc>
+              <a:spcAft>
                 <a:spcPts val="200"/>
-              </a:spcBef>
-              <a:spcAft>
-                <a:spcPts val="1000"/>
-              </a:spcAft>
-              <a:buChar char="•"/>
-            </a:pPr>
-            <a:r>
-              <a:rPr sz="1700" b="0" i="0">
-                <a:solidFill>
-                  <a:srgbClr val="1F2937"/>
-                </a:solidFill>
-              </a:rPr>
-              <a:t>Kontrak bulanan (month-to-month) churn 42,7 persen, 15 kali lipat kontrak 2 tahun yang hanya 2,8 persen</a:t>
-            </a:r>
-          </a:p>
-          <a:p>
-            <a:pPr marL="171450" indent="-171450">
-              <a:spcBef>
+              </a:spcAft>
+            </a:pPr>
+            <a:r>
+              <a:rPr sz="3200" b="1" i="0">
+                <a:solidFill>
+                  <a:srgbClr val="C75B7F"/>
+                </a:solidFill>
+                <a:latin typeface="Noto Sans"/>
+              </a:rPr>
+              <a:t>42,7%</a:t>
+            </a:r>
+          </a:p>
+          <a:p>
+            <a:pPr>
+              <a:lnSpc>
+                <a:spcPct val="100000"/>
+              </a:lnSpc>
+              <a:spcAft>
+                <a:spcPts val="0"/>
+              </a:spcAft>
+            </a:pPr>
+            <a:r>
+              <a:rPr sz="1300" b="0" i="0">
+                <a:solidFill>
+                  <a:srgbClr val="2E3138"/>
+                </a:solidFill>
+                <a:latin typeface="Noto Sans"/>
+              </a:rPr>
+              <a:t>kontrak bulanan</a:t>
+            </a:r>
+          </a:p>
+        </p:txBody>
+      </p:sp>
+      <p:sp>
+        <p:nvSpPr>
+          <p:cNvPr id="6" name="TextBox 5"/>
+          <p:cNvSpPr txBox="1"/>
+          <p:nvPr/>
+        </p:nvSpPr>
+        <p:spPr>
+          <a:xfrm>
+            <a:off x="3200400" y="5120640"/>
+            <a:ext cx="2377440" cy="1051560"/>
+          </a:xfrm>
+          <a:prstGeom prst="rect">
+            <a:avLst/>
+          </a:prstGeom>
+          <a:noFill/>
+        </p:spPr>
+        <p:txBody>
+          <a:bodyPr wrap="square" lIns="0" rIns="0" tIns="0" bIns="0">
+            <a:spAutoFit/>
+          </a:bodyPr>
+          <a:lstStyle/>
+          <a:p>
+            <a:pPr>
+              <a:lnSpc>
+                <a:spcPct val="100000"/>
+              </a:lnSpc>
+              <a:spcAft>
                 <a:spcPts val="200"/>
-              </a:spcBef>
-              <a:spcAft>
-                <a:spcPts val="1000"/>
-              </a:spcAft>
-              <a:buChar char="•"/>
-            </a:pPr>
-            <a:r>
-              <a:rPr sz="1700" b="0" i="0">
-                <a:solidFill>
-                  <a:srgbClr val="1F2937"/>
-                </a:solidFill>
-              </a:rPr>
-              <a:t>Kontrak bulanan mencakup 55,1 persen pelanggan tetapi menyumbang 88,6 persen dari semua churn</a:t>
-            </a:r>
-          </a:p>
-          <a:p>
-            <a:pPr marL="171450" indent="-171450">
-              <a:spcBef>
-                <a:spcPts val="200"/>
-              </a:spcBef>
-              <a:spcAft>
-                <a:spcPts val="1000"/>
-              </a:spcAft>
-              <a:buChar char="•"/>
-            </a:pPr>
-            <a:r>
-              <a:rPr sz="1700" b="0" i="0">
-                <a:solidFill>
-                  <a:srgbClr val="1F2937"/>
-                </a:solidFill>
-              </a:rPr>
-              <a:t>Kontrak 1 tahun churn 11,3 persen, jauh lebih aman dibanding bulanan</a:t>
-            </a:r>
-          </a:p>
-          <a:p>
-            <a:pPr marL="171450" indent="-171450">
-              <a:spcBef>
-                <a:spcPts val="200"/>
-              </a:spcBef>
-              <a:spcAft>
-                <a:spcPts val="1000"/>
-              </a:spcAft>
-              <a:buChar char="•"/>
-            </a:pPr>
-            <a:r>
-              <a:rPr sz="1700" b="0" i="0">
-                <a:solidFill>
-                  <a:srgbClr val="1F2937"/>
-                </a:solidFill>
-              </a:rPr>
-              <a:t>Tanpa komitmen jangka panjang, pelanggan pergi kapan saja dan hampir tanpa hambatan</a:t>
+              </a:spcAft>
+            </a:pPr>
+            <a:r>
+              <a:rPr sz="3200" b="1" i="0">
+                <a:solidFill>
+                  <a:srgbClr val="4E7FA6"/>
+                </a:solidFill>
+                <a:latin typeface="Noto Sans"/>
+              </a:rPr>
+              <a:t>2,8%</a:t>
+            </a:r>
+          </a:p>
+          <a:p>
+            <a:pPr>
+              <a:lnSpc>
+                <a:spcPct val="100000"/>
+              </a:lnSpc>
+              <a:spcAft>
+                <a:spcPts val="0"/>
+              </a:spcAft>
+            </a:pPr>
+            <a:r>
+              <a:rPr sz="1300" b="0" i="0">
+                <a:solidFill>
+                  <a:srgbClr val="2E3138"/>
+                </a:solidFill>
+                <a:latin typeface="Noto Sans"/>
+              </a:rPr>
+              <a:t>kontrak 2 tahun</a:t>
             </a:r>
           </a:p>
         </p:txBody>
       </p:sp>
       <p:pic>
         <p:nvPicPr>
-          <p:cNvPr id="5" name="Picture 4" descr="02_churn_contract.png"/>
+          <p:cNvPr id="7" name="Picture 6" descr="02_churn_contract.png"/>
           <p:cNvPicPr>
             <a:picLocks noChangeAspect="1"/>
           </p:cNvPicPr>
@@ -4111,8 +4868,8 @@
         </p:blipFill>
         <p:spPr>
           <a:xfrm>
-            <a:off x="6217920" y="1371600"/>
-            <a:ext cx="5303520" cy="3182112"/>
+            <a:off x="6126480" y="1463040"/>
+            <a:ext cx="5422392" cy="3290763"/>
           </a:xfrm>
           <a:prstGeom prst="rect">
             <a:avLst/>
@@ -4121,14 +4878,14 @@
       </p:pic>
       <p:sp>
         <p:nvSpPr>
-          <p:cNvPr id="6" name="TextBox 5"/>
+          <p:cNvPr id="8" name="TextBox 7"/>
           <p:cNvSpPr txBox="1"/>
           <p:nvPr/>
         </p:nvSpPr>
         <p:spPr>
           <a:xfrm>
-            <a:off x="6217920" y="4709160"/>
-            <a:ext cx="5303520" cy="457200"/>
+            <a:off x="6126480" y="4863531"/>
+            <a:ext cx="5422392" cy="365760"/>
           </a:xfrm>
           <a:prstGeom prst="rect">
             <a:avLst/>
@@ -4136,21 +4893,25 @@
           <a:noFill/>
         </p:spPr>
         <p:txBody>
-          <a:bodyPr wrap="square">
+          <a:bodyPr wrap="square" lIns="0" rIns="0" tIns="0" bIns="0">
             <a:spAutoFit/>
           </a:bodyPr>
           <a:lstStyle/>
           <a:p>
             <a:pPr algn="ctr">
-              <a:spcAft>
-                <a:spcPts val="800"/>
+              <a:lnSpc>
+                <a:spcPct val="100000"/>
+              </a:lnSpc>
+              <a:spcAft>
+                <a:spcPts val="0"/>
               </a:spcAft>
             </a:pPr>
             <a:r>
               <a:rPr sz="1200" b="0" i="1">
                 <a:solidFill>
-                  <a:srgbClr val="6B7280"/>
-                </a:solidFill>
+                  <a:srgbClr val="5F636B"/>
+                </a:solidFill>
+                <a:latin typeface="Noto Sans"/>
               </a:rPr>
               <a:t>Churn rate per jenis kontrak</a:t>
             </a:r>
@@ -4171,7 +4932,7 @@
     <p:bg>
       <p:bgPr>
         <a:solidFill>
-          <a:srgbClr val="FFFFFF"/>
+          <a:srgbClr val="EFE7D8"/>
         </a:solidFill>
         <a:effectLst/>
       </p:bgPr>
@@ -4185,77 +4946,26 @@
       <p:grpSpPr/>
       <p:sp>
         <p:nvSpPr>
-          <p:cNvPr id="2" name="TextBox 1"/>
-          <p:cNvSpPr txBox="1"/>
-          <p:nvPr/>
-        </p:nvSpPr>
-        <p:spPr>
-          <a:xfrm>
-            <a:off x="640080" y="274320"/>
-            <a:ext cx="10881360" cy="822960"/>
-          </a:xfrm>
-          <a:prstGeom prst="rect">
-            <a:avLst/>
-          </a:prstGeom>
-          <a:noFill/>
-        </p:spPr>
-        <p:txBody>
-          <a:bodyPr wrap="square">
-            <a:spAutoFit/>
-          </a:bodyPr>
-          <a:lstStyle/>
-          <a:p>
-            <a:pPr>
-              <a:spcAft>
-                <a:spcPts val="800"/>
-              </a:spcAft>
-            </a:pPr>
-            <a:r>
-              <a:rPr sz="3000" b="1" i="0">
-                <a:solidFill>
-                  <a:srgbClr val="1E3A8A"/>
-                </a:solidFill>
-              </a:rPr>
-              <a:t>Temuan 2: Tahun Pertama Paling Kritis</a:t>
-            </a:r>
-          </a:p>
-        </p:txBody>
-      </p:sp>
-      <p:sp>
-        <p:nvSpPr>
-          <p:cNvPr id="3" name="Rectangle 2"/>
+          <p:cNvPr id="2" name="Rectangle 1"/>
           <p:cNvSpPr/>
           <p:nvPr/>
         </p:nvSpPr>
         <p:spPr>
           <a:xfrm>
-            <a:off x="640080" y="1051560"/>
-            <a:ext cx="1371600" cy="54864"/>
+            <a:off x="640080" y="502920"/>
+            <a:ext cx="146304" cy="475488"/>
           </a:xfrm>
           <a:prstGeom prst="rect">
             <a:avLst/>
           </a:prstGeom>
           <a:solidFill>
-            <a:srgbClr val="0D9488"/>
+            <a:srgbClr val="C75B7F"/>
           </a:solidFill>
           <a:ln>
             <a:noFill/>
           </a:ln>
-        </p:spPr>
-        <p:style>
-          <a:lnRef idx="1">
-            <a:schemeClr val="accent1"/>
-          </a:lnRef>
-          <a:fillRef idx="3">
-            <a:schemeClr val="accent1"/>
-          </a:fillRef>
-          <a:effectRef idx="2">
-            <a:schemeClr val="accent1"/>
-          </a:effectRef>
-          <a:fontRef idx="minor">
-            <a:schemeClr val="lt1"/>
-          </a:fontRef>
-        </p:style>
+          <a:effectLst/>
+        </p:spPr>
         <p:txBody>
           <a:bodyPr rtlCol="0" anchor="ctr"/>
           <a:lstStyle/>
@@ -4266,14 +4976,14 @@
       </p:sp>
       <p:sp>
         <p:nvSpPr>
-          <p:cNvPr id="4" name="TextBox 3"/>
+          <p:cNvPr id="3" name="TextBox 2"/>
           <p:cNvSpPr txBox="1"/>
           <p:nvPr/>
         </p:nvSpPr>
         <p:spPr>
           <a:xfrm>
-            <a:off x="640080" y="1371600"/>
-            <a:ext cx="5120640" cy="4754880"/>
+            <a:off x="960120" y="347472"/>
+            <a:ext cx="10607040" cy="868680"/>
           </a:xfrm>
           <a:prstGeom prst="rect">
             <a:avLst/>
@@ -4281,91 +4991,34 @@
           <a:noFill/>
         </p:spPr>
         <p:txBody>
-          <a:bodyPr wrap="square">
+          <a:bodyPr wrap="square" lIns="0" rIns="0" tIns="0" bIns="0">
             <a:spAutoFit/>
           </a:bodyPr>
           <a:lstStyle/>
           <a:p>
-            <a:pPr marL="171450" indent="-171450">
-              <a:spcBef>
-                <a:spcPts val="200"/>
-              </a:spcBef>
-              <a:spcAft>
-                <a:spcPts val="1000"/>
-              </a:spcAft>
-              <a:buChar char="•"/>
-            </a:pPr>
-            <a:r>
-              <a:rPr sz="1700" b="0" i="0">
-                <a:solidFill>
-                  <a:srgbClr val="1F2937"/>
-                </a:solidFill>
-              </a:rPr>
-              <a:t>Pelanggan baru 0 sampai 12 bulan churn 47,7 persen, hampir separuh pergi di tahun pertama</a:t>
-            </a:r>
-          </a:p>
-          <a:p>
-            <a:pPr marL="171450" indent="-171450">
-              <a:spcBef>
-                <a:spcPts val="200"/>
-              </a:spcBef>
-              <a:spcAft>
-                <a:spcPts val="1000"/>
-              </a:spcAft>
-              <a:buChar char="•"/>
-            </a:pPr>
-            <a:r>
-              <a:rPr sz="1700" b="0" i="0">
-                <a:solidFill>
-                  <a:srgbClr val="1F2937"/>
-                </a:solidFill>
-              </a:rPr>
-              <a:t>Pelanggan baru menyumbang 55,5 persen dari semua churn, padahal hanya 30,9 persen dari basis pelanggan</a:t>
-            </a:r>
-          </a:p>
-          <a:p>
-            <a:pPr marL="171450" indent="-171450">
-              <a:spcBef>
-                <a:spcPts val="200"/>
-              </a:spcBef>
-              <a:spcAft>
-                <a:spcPts val="1000"/>
-              </a:spcAft>
-              <a:buChar char="•"/>
-            </a:pPr>
-            <a:r>
-              <a:rPr sz="1700" b="0" i="0">
-                <a:solidFill>
-                  <a:srgbClr val="1F2937"/>
-                </a:solidFill>
-              </a:rPr>
-              <a:t>Churn turun bertahap sampai 9,5 persen setelah 4 tahun berlangganan</a:t>
-            </a:r>
-          </a:p>
-          <a:p>
-            <a:pPr marL="171450" indent="-171450">
-              <a:spcBef>
-                <a:spcPts val="200"/>
-              </a:spcBef>
-              <a:spcAft>
-                <a:spcPts val="1000"/>
-              </a:spcAft>
-              <a:buChar char="•"/>
-            </a:pPr>
-            <a:r>
-              <a:rPr sz="1700" b="0" i="0">
-                <a:solidFill>
-                  <a:srgbClr val="1F2937"/>
-                </a:solidFill>
-              </a:rPr>
-              <a:t>Siapa yang bertahan melewati tahun pertama cenderung setia, jadi onboarding awal adalah investasi terbaik</a:t>
+            <a:pPr>
+              <a:lnSpc>
+                <a:spcPct val="100000"/>
+              </a:lnSpc>
+              <a:spcAft>
+                <a:spcPts val="0"/>
+              </a:spcAft>
+            </a:pPr>
+            <a:r>
+              <a:rPr sz="3200" b="1" i="0">
+                <a:solidFill>
+                  <a:srgbClr val="2E3138"/>
+                </a:solidFill>
+                <a:latin typeface="Liberation Serif"/>
+              </a:rPr>
+              <a:t>Temuan 2: Tahun Pertama Paling Kritis</a:t>
             </a:r>
           </a:p>
         </p:txBody>
       </p:sp>
       <p:pic>
         <p:nvPicPr>
-          <p:cNvPr id="5" name="Picture 4" descr="03_churn_tenure.png"/>
+          <p:cNvPr id="4" name="Picture 3" descr="03_churn_tenure.png"/>
           <p:cNvPicPr>
             <a:picLocks noChangeAspect="1"/>
           </p:cNvPicPr>
@@ -4379,14 +5032,56 @@
         </p:blipFill>
         <p:spPr>
           <a:xfrm>
-            <a:off x="6217920" y="1371600"/>
-            <a:ext cx="5303520" cy="3182112"/>
+            <a:off x="640080" y="1691640"/>
+            <a:ext cx="5422392" cy="3290763"/>
           </a:xfrm>
           <a:prstGeom prst="rect">
             <a:avLst/>
           </a:prstGeom>
         </p:spPr>
       </p:pic>
+      <p:sp>
+        <p:nvSpPr>
+          <p:cNvPr id="5" name="TextBox 4"/>
+          <p:cNvSpPr txBox="1"/>
+          <p:nvPr/>
+        </p:nvSpPr>
+        <p:spPr>
+          <a:xfrm>
+            <a:off x="640080" y="5092131"/>
+            <a:ext cx="5422392" cy="365760"/>
+          </a:xfrm>
+          <a:prstGeom prst="rect">
+            <a:avLst/>
+          </a:prstGeom>
+          <a:noFill/>
+        </p:spPr>
+        <p:txBody>
+          <a:bodyPr wrap="square" lIns="0" rIns="0" tIns="0" bIns="0">
+            <a:spAutoFit/>
+          </a:bodyPr>
+          <a:lstStyle/>
+          <a:p>
+            <a:pPr algn="ctr">
+              <a:lnSpc>
+                <a:spcPct val="100000"/>
+              </a:lnSpc>
+              <a:spcAft>
+                <a:spcPts val="0"/>
+              </a:spcAft>
+            </a:pPr>
+            <a:r>
+              <a:rPr sz="1200" b="0" i="1">
+                <a:solidFill>
+                  <a:srgbClr val="5F636B"/>
+                </a:solidFill>
+                <a:latin typeface="Noto Sans"/>
+              </a:rPr>
+              <a:t>Churn rate per masa berlangganan</a:t>
+            </a:r>
+          </a:p>
+        </p:txBody>
+      </p:sp>
       <p:sp>
         <p:nvSpPr>
           <p:cNvPr id="6" name="TextBox 5"/>
@@ -4395,8 +5090,8 @@
         </p:nvSpPr>
         <p:spPr>
           <a:xfrm>
-            <a:off x="6217920" y="4709160"/>
-            <a:ext cx="5303520" cy="457200"/>
+            <a:off x="6446520" y="1463040"/>
+            <a:ext cx="5102352" cy="1188720"/>
           </a:xfrm>
           <a:prstGeom prst="rect">
             <a:avLst/>
@@ -4404,23 +5099,149 @@
           <a:noFill/>
         </p:spPr>
         <p:txBody>
-          <a:bodyPr wrap="square">
+          <a:bodyPr wrap="square" lIns="0" rIns="0" tIns="0" bIns="0">
             <a:spAutoFit/>
           </a:bodyPr>
           <a:lstStyle/>
           <a:p>
-            <a:pPr algn="ctr">
-              <a:spcAft>
-                <a:spcPts val="800"/>
-              </a:spcAft>
-            </a:pPr>
-            <a:r>
-              <a:rPr sz="1200" b="0" i="1">
-                <a:solidFill>
-                  <a:srgbClr val="6B7280"/>
-                </a:solidFill>
-              </a:rPr>
-              <a:t>Churn rate per masa berlangganan</a:t>
+            <a:pPr>
+              <a:lnSpc>
+                <a:spcPct val="100000"/>
+              </a:lnSpc>
+              <a:spcAft>
+                <a:spcPts val="200"/>
+              </a:spcAft>
+            </a:pPr>
+            <a:r>
+              <a:rPr sz="4400" b="1" i="0">
+                <a:solidFill>
+                  <a:srgbClr val="C75B7F"/>
+                </a:solidFill>
+                <a:latin typeface="Noto Sans"/>
+              </a:rPr>
+              <a:t>47,7%</a:t>
+            </a:r>
+          </a:p>
+          <a:p>
+            <a:pPr>
+              <a:lnSpc>
+                <a:spcPct val="100000"/>
+              </a:lnSpc>
+              <a:spcAft>
+                <a:spcPts val="0"/>
+              </a:spcAft>
+            </a:pPr>
+            <a:r>
+              <a:rPr sz="1450" b="0" i="0">
+                <a:solidFill>
+                  <a:srgbClr val="2E3138"/>
+                </a:solidFill>
+                <a:latin typeface="Noto Sans"/>
+              </a:rPr>
+              <a:t>pelanggan baru pergi di tahun pertama</a:t>
+            </a:r>
+          </a:p>
+        </p:txBody>
+      </p:sp>
+      <p:sp>
+        <p:nvSpPr>
+          <p:cNvPr id="7" name="TextBox 6"/>
+          <p:cNvSpPr txBox="1"/>
+          <p:nvPr/>
+        </p:nvSpPr>
+        <p:spPr>
+          <a:xfrm>
+            <a:off x="6446520" y="2788920"/>
+            <a:ext cx="5102352" cy="3566160"/>
+          </a:xfrm>
+          <a:prstGeom prst="rect">
+            <a:avLst/>
+          </a:prstGeom>
+          <a:noFill/>
+        </p:spPr>
+        <p:txBody>
+          <a:bodyPr wrap="square" lIns="0" rIns="0" tIns="0" bIns="0">
+            <a:spAutoFit/>
+          </a:bodyPr>
+          <a:lstStyle/>
+          <a:p>
+            <a:pPr marL="171450" indent="-171450">
+              <a:lnSpc>
+                <a:spcPct val="112000"/>
+              </a:lnSpc>
+              <a:spcAft>
+                <a:spcPts val="1100"/>
+              </a:spcAft>
+              <a:buChar char="•"/>
+            </a:pPr>
+            <a:r>
+              <a:rPr sz="1600" b="0" i="0">
+                <a:solidFill>
+                  <a:srgbClr val="2E3138"/>
+                </a:solidFill>
+                <a:latin typeface="Noto Sans"/>
+              </a:rPr>
+              <a:t>Pelanggan baru 0 sampai 12 bulan churn 47,7 persen, hampir separuh pergi di tahun pertama</a:t>
+            </a:r>
+          </a:p>
+          <a:p>
+            <a:pPr marL="171450" indent="-171450">
+              <a:lnSpc>
+                <a:spcPct val="112000"/>
+              </a:lnSpc>
+              <a:spcAft>
+                <a:spcPts val="1100"/>
+              </a:spcAft>
+              <a:buChar char="•"/>
+            </a:pPr>
+            <a:r>
+              <a:rPr sz="1600" b="0" i="0">
+                <a:solidFill>
+                  <a:srgbClr val="2E3138"/>
+                </a:solidFill>
+                <a:latin typeface="Noto Sans"/>
+              </a:rPr>
+              <a:t>Pelanggan baru menyumbang 55,5 persen dari semua churn, padahal hanya 30,9 persen dari basis pelanggan</a:t>
+            </a:r>
+          </a:p>
+          <a:p>
+            <a:pPr marL="171450" indent="-171450">
+              <a:lnSpc>
+                <a:spcPct val="112000"/>
+              </a:lnSpc>
+              <a:spcAft>
+                <a:spcPts val="1100"/>
+              </a:spcAft>
+              <a:buChar char="•"/>
+            </a:pPr>
+            <a:r>
+              <a:rPr sz="1600" b="0" i="0">
+                <a:solidFill>
+                  <a:srgbClr val="2E3138"/>
+                </a:solidFill>
+                <a:latin typeface="Noto Sans"/>
+              </a:rPr>
+              <a:t>Churn turun bertahap sampai 9,5 persen setelah 4 tahun berlangganan</a:t>
+            </a:r>
+          </a:p>
+          <a:p>
+            <a:pPr marL="171450" indent="-171450">
+              <a:lnSpc>
+                <a:spcPct val="112000"/>
+              </a:lnSpc>
+              <a:spcAft>
+                <a:spcPts val="1100"/>
+              </a:spcAft>
+              <a:buChar char="•"/>
+            </a:pPr>
+            <a:r>
+              <a:rPr sz="1600" b="0" i="0">
+                <a:solidFill>
+                  <a:srgbClr val="2E3138"/>
+                </a:solidFill>
+                <a:latin typeface="Noto Sans"/>
+              </a:rPr>
+              <a:t>Siapa yang bertahan melewati tahun pertama cenderung setia, jadi onboarding awal adalah investasi terbaik</a:t>
             </a:r>
           </a:p>
         </p:txBody>
@@ -4439,7 +5260,7 @@
     <p:bg>
       <p:bgPr>
         <a:solidFill>
-          <a:srgbClr val="FFFFFF"/>
+          <a:srgbClr val="EFE7D8"/>
         </a:solidFill>
         <a:effectLst/>
       </p:bgPr>
@@ -4453,82 +5274,73 @@
       <p:grpSpPr/>
       <p:sp>
         <p:nvSpPr>
-          <p:cNvPr id="2" name="TextBox 1"/>
-          <p:cNvSpPr txBox="1"/>
-          <p:nvPr/>
-        </p:nvSpPr>
-        <p:spPr>
-          <a:xfrm>
-            <a:off x="640080" y="274320"/>
-            <a:ext cx="10881360" cy="822960"/>
-          </a:xfrm>
-          <a:prstGeom prst="rect">
-            <a:avLst/>
-          </a:prstGeom>
-          <a:noFill/>
-        </p:spPr>
-        <p:txBody>
-          <a:bodyPr wrap="square">
-            <a:spAutoFit/>
-          </a:bodyPr>
-          <a:lstStyle/>
-          <a:p>
-            <a:pPr>
-              <a:spcAft>
-                <a:spcPts val="800"/>
-              </a:spcAft>
-            </a:pPr>
-            <a:r>
-              <a:rPr sz="3000" b="1" i="0">
-                <a:solidFill>
-                  <a:srgbClr val="1E3A8A"/>
-                </a:solidFill>
-              </a:rPr>
-              <a:t>Temuan 3: Fiber Mahal tapi Ditinggalkan</a:t>
-            </a:r>
-          </a:p>
-        </p:txBody>
-      </p:sp>
-      <p:sp>
-        <p:nvSpPr>
-          <p:cNvPr id="3" name="Rectangle 2"/>
+          <p:cNvPr id="2" name="Rectangle 1"/>
           <p:cNvSpPr/>
           <p:nvPr/>
         </p:nvSpPr>
         <p:spPr>
           <a:xfrm>
-            <a:off x="640080" y="1051560"/>
-            <a:ext cx="1371600" cy="54864"/>
+            <a:off x="640080" y="502920"/>
+            <a:ext cx="146304" cy="475488"/>
           </a:xfrm>
           <a:prstGeom prst="rect">
             <a:avLst/>
           </a:prstGeom>
           <a:solidFill>
-            <a:srgbClr val="0D9488"/>
+            <a:srgbClr val="C75B7F"/>
           </a:solidFill>
           <a:ln>
             <a:noFill/>
           </a:ln>
-        </p:spPr>
-        <p:style>
-          <a:lnRef idx="1">
-            <a:schemeClr val="accent1"/>
-          </a:lnRef>
-          <a:fillRef idx="3">
-            <a:schemeClr val="accent1"/>
-          </a:fillRef>
-          <a:effectRef idx="2">
-            <a:schemeClr val="accent1"/>
-          </a:effectRef>
-          <a:fontRef idx="minor">
-            <a:schemeClr val="lt1"/>
-          </a:fontRef>
-        </p:style>
+          <a:effectLst/>
+        </p:spPr>
         <p:txBody>
           <a:bodyPr rtlCol="0" anchor="ctr"/>
           <a:lstStyle/>
           <a:p>
             <a:pPr algn="ctr"/>
+          </a:p>
+        </p:txBody>
+      </p:sp>
+      <p:sp>
+        <p:nvSpPr>
+          <p:cNvPr id="3" name="TextBox 2"/>
+          <p:cNvSpPr txBox="1"/>
+          <p:nvPr/>
+        </p:nvSpPr>
+        <p:spPr>
+          <a:xfrm>
+            <a:off x="960120" y="347472"/>
+            <a:ext cx="10607040" cy="868680"/>
+          </a:xfrm>
+          <a:prstGeom prst="rect">
+            <a:avLst/>
+          </a:prstGeom>
+          <a:noFill/>
+        </p:spPr>
+        <p:txBody>
+          <a:bodyPr wrap="square" lIns="0" rIns="0" tIns="0" bIns="0">
+            <a:spAutoFit/>
+          </a:bodyPr>
+          <a:lstStyle/>
+          <a:p>
+            <a:pPr>
+              <a:lnSpc>
+                <a:spcPct val="100000"/>
+              </a:lnSpc>
+              <a:spcAft>
+                <a:spcPts val="0"/>
+              </a:spcAft>
+            </a:pPr>
+            <a:r>
+              <a:rPr sz="3200" b="1" i="0">
+                <a:solidFill>
+                  <a:srgbClr val="2E3138"/>
+                </a:solidFill>
+                <a:latin typeface="Liberation Serif"/>
+              </a:rPr>
+              <a:t>Temuan 3: Fiber Mahal tapi Ditinggalkan</a:t>
+            </a:r>
           </a:p>
         </p:txBody>
       </p:sp>
@@ -4541,7 +5353,7 @@
         <p:spPr>
           <a:xfrm>
             <a:off x="640080" y="1371600"/>
-            <a:ext cx="5120640" cy="4754880"/>
+            <a:ext cx="5349240" cy="1600200"/>
           </a:xfrm>
           <a:prstGeom prst="rect">
             <a:avLst/>
@@ -4549,82 +5361,109 @@
           <a:noFill/>
         </p:spPr>
         <p:txBody>
-          <a:bodyPr wrap="square">
+          <a:bodyPr wrap="square" lIns="0" rIns="0" tIns="0" bIns="0">
             <a:spAutoFit/>
           </a:bodyPr>
           <a:lstStyle/>
           <a:p>
             <a:pPr marL="171450" indent="-171450">
-              <a:spcBef>
-                <a:spcPts val="200"/>
-              </a:spcBef>
-              <a:spcAft>
-                <a:spcPts val="1000"/>
+              <a:lnSpc>
+                <a:spcPct val="112000"/>
+              </a:lnSpc>
+              <a:spcAft>
+                <a:spcPts val="1100"/>
               </a:spcAft>
               <a:buChar char="•"/>
             </a:pPr>
             <a:r>
-              <a:rPr sz="1700" b="0" i="0">
-                <a:solidFill>
-                  <a:srgbClr val="1F2937"/>
-                </a:solidFill>
+              <a:rPr sz="1550" b="0" i="0">
+                <a:solidFill>
+                  <a:srgbClr val="2E3138"/>
+                </a:solidFill>
+                <a:latin typeface="Noto Sans"/>
               </a:rPr>
               <a:t>Pelanggan Fiber optic churn 41,9 persen, lebih dari dua kali DSL yang 19,0 persen</a:t>
             </a:r>
           </a:p>
           <a:p>
             <a:pPr marL="171450" indent="-171450">
-              <a:spcBef>
-                <a:spcPts val="200"/>
-              </a:spcBef>
-              <a:spcAft>
-                <a:spcPts val="1000"/>
+              <a:lnSpc>
+                <a:spcPct val="112000"/>
+              </a:lnSpc>
+              <a:spcAft>
+                <a:spcPts val="1100"/>
               </a:spcAft>
               <a:buChar char="•"/>
             </a:pPr>
             <a:r>
-              <a:rPr sz="1700" b="0" i="0">
-                <a:solidFill>
-                  <a:srgbClr val="1F2937"/>
-                </a:solidFill>
+              <a:rPr sz="1550" b="0" i="0">
+                <a:solidFill>
+                  <a:srgbClr val="2E3138"/>
+                </a:solidFill>
+                <a:latin typeface="Noto Sans"/>
+              </a:rPr>
+              <a:t>Tagihan bulanan 71 sampai 90 USD churn 37,8 persen, tertinggi di antara band tagihan</a:t>
+            </a:r>
+          </a:p>
+        </p:txBody>
+      </p:sp>
+      <p:sp>
+        <p:nvSpPr>
+          <p:cNvPr id="5" name="TextBox 4"/>
+          <p:cNvSpPr txBox="1"/>
+          <p:nvPr/>
+        </p:nvSpPr>
+        <p:spPr>
+          <a:xfrm>
+            <a:off x="6199632" y="1371600"/>
+            <a:ext cx="5349240" cy="1600200"/>
+          </a:xfrm>
+          <a:prstGeom prst="rect">
+            <a:avLst/>
+          </a:prstGeom>
+          <a:noFill/>
+        </p:spPr>
+        <p:txBody>
+          <a:bodyPr wrap="square" lIns="0" rIns="0" tIns="0" bIns="0">
+            <a:spAutoFit/>
+          </a:bodyPr>
+          <a:lstStyle/>
+          <a:p>
+            <a:pPr marL="171450" indent="-171450">
+              <a:lnSpc>
+                <a:spcPct val="112000"/>
+              </a:lnSpc>
+              <a:spcAft>
+                <a:spcPts val="1100"/>
+              </a:spcAft>
+              <a:buChar char="•"/>
+            </a:pPr>
+            <a:r>
+              <a:rPr sz="1550" b="0" i="0">
+                <a:solidFill>
+                  <a:srgbClr val="2E3138"/>
+                </a:solidFill>
+                <a:latin typeface="Noto Sans"/>
               </a:rPr>
               <a:t>Pelanggan yang membayar dengan cek elektronik churn 45,3 persen, hampir 3 kali lipat kartu kredit otomatis 15,3 persen</a:t>
             </a:r>
           </a:p>
           <a:p>
             <a:pPr marL="171450" indent="-171450">
-              <a:spcBef>
-                <a:spcPts val="200"/>
-              </a:spcBef>
-              <a:spcAft>
-                <a:spcPts val="1000"/>
+              <a:lnSpc>
+                <a:spcPct val="112000"/>
+              </a:lnSpc>
+              <a:spcAft>
+                <a:spcPts val="1100"/>
               </a:spcAft>
               <a:buChar char="•"/>
             </a:pPr>
             <a:r>
-              <a:rPr sz="1700" b="0" i="0">
-                <a:solidFill>
-                  <a:srgbClr val="1F2937"/>
-                </a:solidFill>
-              </a:rPr>
-              <a:t>Tagihan bulanan 71 sampai 90 USD churn 37,8 persen, tertinggi di antara band tagihan</a:t>
-            </a:r>
-          </a:p>
-          <a:p>
-            <a:pPr marL="171450" indent="-171450">
-              <a:spcBef>
-                <a:spcPts val="200"/>
-              </a:spcBef>
-              <a:spcAft>
-                <a:spcPts val="1000"/>
-              </a:spcAft>
-              <a:buChar char="•"/>
-            </a:pPr>
-            <a:r>
-              <a:rPr sz="1700" b="0" i="0">
-                <a:solidFill>
-                  <a:srgbClr val="1F2937"/>
-                </a:solidFill>
+              <a:rPr sz="1550" b="0" i="0">
+                <a:solidFill>
+                  <a:srgbClr val="2E3138"/>
+                </a:solidFill>
+                <a:latin typeface="Noto Sans"/>
               </a:rPr>
               <a:t>Sinyal masalah nilai: pelanggan membayar paling mahal tetapi merasa layanannya tidak sepadan, dan pembayaran manual membuat pergi terasa mudah</a:t>
             </a:r>
@@ -4633,7 +5472,7 @@
       </p:sp>
       <p:pic>
         <p:nvPicPr>
-          <p:cNvPr id="5" name="Picture 4" descr="04_churn_internet.png"/>
+          <p:cNvPr id="6" name="Picture 5" descr="04_churn_internet.png"/>
           <p:cNvPicPr>
             <a:picLocks noChangeAspect="1"/>
           </p:cNvPicPr>
@@ -4647,8 +5486,8 @@
         </p:blipFill>
         <p:spPr>
           <a:xfrm>
-            <a:off x="6217920" y="1371600"/>
-            <a:ext cx="5303520" cy="3182112"/>
+            <a:off x="640080" y="3017520"/>
+            <a:ext cx="5760720" cy="3496089"/>
           </a:xfrm>
           <a:prstGeom prst="rect">
             <a:avLst/>
@@ -4657,14 +5496,14 @@
       </p:pic>
       <p:sp>
         <p:nvSpPr>
-          <p:cNvPr id="6" name="TextBox 5"/>
+          <p:cNvPr id="7" name="TextBox 6"/>
           <p:cNvSpPr txBox="1"/>
           <p:nvPr/>
         </p:nvSpPr>
         <p:spPr>
           <a:xfrm>
-            <a:off x="6217920" y="4709160"/>
-            <a:ext cx="5303520" cy="457200"/>
+            <a:off x="640080" y="6605049"/>
+            <a:ext cx="5760720" cy="365760"/>
           </a:xfrm>
           <a:prstGeom prst="rect">
             <a:avLst/>
@@ -4672,23 +5511,149 @@
           <a:noFill/>
         </p:spPr>
         <p:txBody>
-          <a:bodyPr wrap="square">
+          <a:bodyPr wrap="square" lIns="0" rIns="0" tIns="0" bIns="0">
             <a:spAutoFit/>
           </a:bodyPr>
           <a:lstStyle/>
           <a:p>
             <a:pPr algn="ctr">
-              <a:spcAft>
-                <a:spcPts val="800"/>
+              <a:lnSpc>
+                <a:spcPct val="100000"/>
+              </a:lnSpc>
+              <a:spcAft>
+                <a:spcPts val="0"/>
               </a:spcAft>
             </a:pPr>
             <a:r>
               <a:rPr sz="1200" b="0" i="1">
                 <a:solidFill>
-                  <a:srgbClr val="6B7280"/>
-                </a:solidFill>
+                  <a:srgbClr val="5F636B"/>
+                </a:solidFill>
+                <a:latin typeface="Noto Sans"/>
               </a:rPr>
               <a:t>Churn rate per layanan internet</a:t>
+            </a:r>
+          </a:p>
+        </p:txBody>
+      </p:sp>
+      <p:sp>
+        <p:nvSpPr>
+          <p:cNvPr id="8" name="TextBox 7"/>
+          <p:cNvSpPr txBox="1"/>
+          <p:nvPr/>
+        </p:nvSpPr>
+        <p:spPr>
+          <a:xfrm>
+            <a:off x="6949440" y="3429000"/>
+            <a:ext cx="4480560" cy="1051560"/>
+          </a:xfrm>
+          <a:prstGeom prst="rect">
+            <a:avLst/>
+          </a:prstGeom>
+          <a:noFill/>
+        </p:spPr>
+        <p:txBody>
+          <a:bodyPr wrap="square" lIns="0" rIns="0" tIns="0" bIns="0">
+            <a:spAutoFit/>
+          </a:bodyPr>
+          <a:lstStyle/>
+          <a:p>
+            <a:pPr>
+              <a:lnSpc>
+                <a:spcPct val="100000"/>
+              </a:lnSpc>
+              <a:spcAft>
+                <a:spcPts val="200"/>
+              </a:spcAft>
+            </a:pPr>
+            <a:r>
+              <a:rPr sz="3600" b="1" i="0">
+                <a:solidFill>
+                  <a:srgbClr val="C75B7F"/>
+                </a:solidFill>
+                <a:latin typeface="Noto Sans"/>
+              </a:rPr>
+              <a:t>41,9%</a:t>
+            </a:r>
+          </a:p>
+          <a:p>
+            <a:pPr>
+              <a:lnSpc>
+                <a:spcPct val="100000"/>
+              </a:lnSpc>
+              <a:spcAft>
+                <a:spcPts val="0"/>
+              </a:spcAft>
+            </a:pPr>
+            <a:r>
+              <a:rPr sz="1350" b="0" i="0">
+                <a:solidFill>
+                  <a:srgbClr val="2E3138"/>
+                </a:solidFill>
+                <a:latin typeface="Noto Sans"/>
+              </a:rPr>
+              <a:t>churn pelanggan Fiber optic</a:t>
+            </a:r>
+          </a:p>
+        </p:txBody>
+      </p:sp>
+      <p:sp>
+        <p:nvSpPr>
+          <p:cNvPr id="9" name="TextBox 8"/>
+          <p:cNvSpPr txBox="1"/>
+          <p:nvPr/>
+        </p:nvSpPr>
+        <p:spPr>
+          <a:xfrm>
+            <a:off x="6949440" y="4892040"/>
+            <a:ext cx="4480560" cy="1051560"/>
+          </a:xfrm>
+          <a:prstGeom prst="rect">
+            <a:avLst/>
+          </a:prstGeom>
+          <a:noFill/>
+        </p:spPr>
+        <p:txBody>
+          <a:bodyPr wrap="square" lIns="0" rIns="0" tIns="0" bIns="0">
+            <a:spAutoFit/>
+          </a:bodyPr>
+          <a:lstStyle/>
+          <a:p>
+            <a:pPr>
+              <a:lnSpc>
+                <a:spcPct val="100000"/>
+              </a:lnSpc>
+              <a:spcAft>
+                <a:spcPts val="200"/>
+              </a:spcAft>
+            </a:pPr>
+            <a:r>
+              <a:rPr sz="3600" b="1" i="0">
+                <a:solidFill>
+                  <a:srgbClr val="C75B7F"/>
+                </a:solidFill>
+                <a:latin typeface="Noto Sans"/>
+              </a:rPr>
+              <a:t>45,3%</a:t>
+            </a:r>
+          </a:p>
+          <a:p>
+            <a:pPr>
+              <a:lnSpc>
+                <a:spcPct val="100000"/>
+              </a:lnSpc>
+              <a:spcAft>
+                <a:spcPts val="0"/>
+              </a:spcAft>
+            </a:pPr>
+            <a:r>
+              <a:rPr sz="1350" b="0" i="0">
+                <a:solidFill>
+                  <a:srgbClr val="2E3138"/>
+                </a:solidFill>
+                <a:latin typeface="Noto Sans"/>
+              </a:rPr>
+              <a:t>churn pembayar cek elektronik</a:t>
             </a:r>
           </a:p>
         </p:txBody>
@@ -4707,7 +5672,7 @@
     <p:bg>
       <p:bgPr>
         <a:solidFill>
-          <a:srgbClr val="FFFFFF"/>
+          <a:srgbClr val="EFE7D8"/>
         </a:solidFill>
         <a:effectLst/>
       </p:bgPr>
@@ -4721,82 +5686,73 @@
       <p:grpSpPr/>
       <p:sp>
         <p:nvSpPr>
-          <p:cNvPr id="2" name="TextBox 1"/>
-          <p:cNvSpPr txBox="1"/>
-          <p:nvPr/>
-        </p:nvSpPr>
-        <p:spPr>
-          <a:xfrm>
-            <a:off x="640080" y="274320"/>
-            <a:ext cx="10881360" cy="822960"/>
-          </a:xfrm>
-          <a:prstGeom prst="rect">
-            <a:avLst/>
-          </a:prstGeom>
-          <a:noFill/>
-        </p:spPr>
-        <p:txBody>
-          <a:bodyPr wrap="square">
-            <a:spAutoFit/>
-          </a:bodyPr>
-          <a:lstStyle/>
-          <a:p>
-            <a:pPr>
-              <a:spcAft>
-                <a:spcPts val="800"/>
-              </a:spcAft>
-            </a:pPr>
-            <a:r>
-              <a:rPr sz="3000" b="1" i="0">
-                <a:solidFill>
-                  <a:srgbClr val="1E3A8A"/>
-                </a:solidFill>
-              </a:rPr>
-              <a:t>Temuan 4: Dukungan Melindungi, Lansia Rentan</a:t>
-            </a:r>
-          </a:p>
-        </p:txBody>
-      </p:sp>
-      <p:sp>
-        <p:nvSpPr>
-          <p:cNvPr id="3" name="Rectangle 2"/>
+          <p:cNvPr id="2" name="Rectangle 1"/>
           <p:cNvSpPr/>
           <p:nvPr/>
         </p:nvSpPr>
         <p:spPr>
           <a:xfrm>
-            <a:off x="640080" y="1051560"/>
-            <a:ext cx="1371600" cy="54864"/>
+            <a:off x="640080" y="502920"/>
+            <a:ext cx="146304" cy="475488"/>
           </a:xfrm>
           <a:prstGeom prst="rect">
             <a:avLst/>
           </a:prstGeom>
           <a:solidFill>
-            <a:srgbClr val="0D9488"/>
+            <a:srgbClr val="C75B7F"/>
           </a:solidFill>
           <a:ln>
             <a:noFill/>
           </a:ln>
-        </p:spPr>
-        <p:style>
-          <a:lnRef idx="1">
-            <a:schemeClr val="accent1"/>
-          </a:lnRef>
-          <a:fillRef idx="3">
-            <a:schemeClr val="accent1"/>
-          </a:fillRef>
-          <a:effectRef idx="2">
-            <a:schemeClr val="accent1"/>
-          </a:effectRef>
-          <a:fontRef idx="minor">
-            <a:schemeClr val="lt1"/>
-          </a:fontRef>
-        </p:style>
+          <a:effectLst/>
+        </p:spPr>
         <p:txBody>
           <a:bodyPr rtlCol="0" anchor="ctr"/>
           <a:lstStyle/>
           <a:p>
             <a:pPr algn="ctr"/>
+          </a:p>
+        </p:txBody>
+      </p:sp>
+      <p:sp>
+        <p:nvSpPr>
+          <p:cNvPr id="3" name="TextBox 2"/>
+          <p:cNvSpPr txBox="1"/>
+          <p:nvPr/>
+        </p:nvSpPr>
+        <p:spPr>
+          <a:xfrm>
+            <a:off x="960120" y="347472"/>
+            <a:ext cx="10607040" cy="868680"/>
+          </a:xfrm>
+          <a:prstGeom prst="rect">
+            <a:avLst/>
+          </a:prstGeom>
+          <a:noFill/>
+        </p:spPr>
+        <p:txBody>
+          <a:bodyPr wrap="square" lIns="0" rIns="0" tIns="0" bIns="0">
+            <a:spAutoFit/>
+          </a:bodyPr>
+          <a:lstStyle/>
+          <a:p>
+            <a:pPr>
+              <a:lnSpc>
+                <a:spcPct val="100000"/>
+              </a:lnSpc>
+              <a:spcAft>
+                <a:spcPts val="0"/>
+              </a:spcAft>
+            </a:pPr>
+            <a:r>
+              <a:rPr sz="3200" b="1" i="0">
+                <a:solidFill>
+                  <a:srgbClr val="2E3138"/>
+                </a:solidFill>
+                <a:latin typeface="Liberation Serif"/>
+              </a:rPr>
+              <a:t>Temuan 4: Dukungan Melindungi, Lansia Rentan</a:t>
+            </a:r>
           </a:p>
         </p:txBody>
       </p:sp>
@@ -4809,7 +5765,7 @@
         <p:spPr>
           <a:xfrm>
             <a:off x="640080" y="1371600"/>
-            <a:ext cx="5120640" cy="4754880"/>
+            <a:ext cx="5349240" cy="1645920"/>
           </a:xfrm>
           <a:prstGeom prst="rect">
             <a:avLst/>
@@ -4817,82 +5773,109 @@
           <a:noFill/>
         </p:spPr>
         <p:txBody>
-          <a:bodyPr wrap="square">
+          <a:bodyPr wrap="square" lIns="0" rIns="0" tIns="0" bIns="0">
             <a:spAutoFit/>
           </a:bodyPr>
           <a:lstStyle/>
           <a:p>
             <a:pPr marL="171450" indent="-171450">
-              <a:spcBef>
-                <a:spcPts val="200"/>
-              </a:spcBef>
-              <a:spcAft>
-                <a:spcPts val="1000"/>
+              <a:lnSpc>
+                <a:spcPct val="112000"/>
+              </a:lnSpc>
+              <a:spcAft>
+                <a:spcPts val="1100"/>
               </a:spcAft>
               <a:buChar char="•"/>
             </a:pPr>
             <a:r>
-              <a:rPr sz="1700" b="0" i="0">
-                <a:solidFill>
-                  <a:srgbClr val="1F2937"/>
-                </a:solidFill>
+              <a:rPr sz="1550" b="0" i="0">
+                <a:solidFill>
+                  <a:srgbClr val="2E3138"/>
+                </a:solidFill>
+                <a:latin typeface="Noto Sans"/>
               </a:rPr>
               <a:t>Pelanggan internet tanpa Tech Support churn 41,6 persen, dibanding yang memakai hanya 15,2 persen</a:t>
             </a:r>
           </a:p>
           <a:p>
             <a:pPr marL="171450" indent="-171450">
-              <a:spcBef>
-                <a:spcPts val="200"/>
-              </a:spcBef>
-              <a:spcAft>
-                <a:spcPts val="1000"/>
+              <a:lnSpc>
+                <a:spcPct val="112000"/>
+              </a:lnSpc>
+              <a:spcAft>
+                <a:spcPts val="1100"/>
               </a:spcAft>
               <a:buChar char="•"/>
             </a:pPr>
             <a:r>
-              <a:rPr sz="1700" b="0" i="0">
-                <a:solidFill>
-                  <a:srgbClr val="1F2937"/>
-                </a:solidFill>
+              <a:rPr sz="1550" b="0" i="0">
+                <a:solidFill>
+                  <a:srgbClr val="2E3138"/>
+                </a:solidFill>
+                <a:latin typeface="Noto Sans"/>
               </a:rPr>
               <a:t>Tanpa Online Security churn 41,8 persen, dibanding yang memakai 14,6 persen</a:t>
             </a:r>
           </a:p>
+        </p:txBody>
+      </p:sp>
+      <p:sp>
+        <p:nvSpPr>
+          <p:cNvPr id="5" name="TextBox 4"/>
+          <p:cNvSpPr txBox="1"/>
+          <p:nvPr/>
+        </p:nvSpPr>
+        <p:spPr>
+          <a:xfrm>
+            <a:off x="6199632" y="1371600"/>
+            <a:ext cx="5349240" cy="1645920"/>
+          </a:xfrm>
+          <a:prstGeom prst="rect">
+            <a:avLst/>
+          </a:prstGeom>
+          <a:noFill/>
+        </p:spPr>
+        <p:txBody>
+          <a:bodyPr wrap="square" lIns="0" rIns="0" tIns="0" bIns="0">
+            <a:spAutoFit/>
+          </a:bodyPr>
+          <a:lstStyle/>
           <a:p>
             <a:pPr marL="171450" indent="-171450">
-              <a:spcBef>
-                <a:spcPts val="200"/>
-              </a:spcBef>
-              <a:spcAft>
-                <a:spcPts val="1000"/>
+              <a:lnSpc>
+                <a:spcPct val="112000"/>
+              </a:lnSpc>
+              <a:spcAft>
+                <a:spcPts val="1100"/>
               </a:spcAft>
               <a:buChar char="•"/>
             </a:pPr>
             <a:r>
-              <a:rPr sz="1700" b="0" i="0">
-                <a:solidFill>
-                  <a:srgbClr val="1F2937"/>
-                </a:solidFill>
+              <a:rPr sz="1550" b="0" i="0">
+                <a:solidFill>
+                  <a:srgbClr val="2E3138"/>
+                </a:solidFill>
+                <a:latin typeface="Noto Sans"/>
               </a:rPr>
               <a:t>Senior citizen churn 41,7 persen, pelanggan tanpa pasangan 33,0 persen, tanpa tanggungan 31,3 persen</a:t>
             </a:r>
           </a:p>
           <a:p>
             <a:pPr marL="171450" indent="-171450">
-              <a:spcBef>
-                <a:spcPts val="200"/>
-              </a:spcBef>
-              <a:spcAft>
-                <a:spcPts val="1000"/>
+              <a:lnSpc>
+                <a:spcPct val="112000"/>
+              </a:lnSpc>
+              <a:spcAft>
+                <a:spcPts val="1100"/>
               </a:spcAft>
               <a:buChar char="•"/>
             </a:pPr>
             <a:r>
-              <a:rPr sz="1700" b="0" i="0">
-                <a:solidFill>
-                  <a:srgbClr val="1F2937"/>
-                </a:solidFill>
+              <a:rPr sz="1550" b="0" i="0">
+                <a:solidFill>
+                  <a:srgbClr val="2E3138"/>
+                </a:solidFill>
+                <a:latin typeface="Noto Sans"/>
               </a:rPr>
               <a:t>Gender hampir tidak berpengaruh: perempuan 27,0 persen vs laki-laki 26,2 persen</a:t>
             </a:r>
@@ -4901,7 +5884,7 @@
       </p:sp>
       <p:pic>
         <p:nvPicPr>
-          <p:cNvPr id="5" name="Picture 4" descr="07_churn_support.png"/>
+          <p:cNvPr id="6" name="Picture 5" descr="07_churn_support.png"/>
           <p:cNvPicPr>
             <a:picLocks noChangeAspect="1"/>
           </p:cNvPicPr>
@@ -4915,8 +5898,8 @@
         </p:blipFill>
         <p:spPr>
           <a:xfrm>
-            <a:off x="6217920" y="1371600"/>
-            <a:ext cx="5303520" cy="3182112"/>
+            <a:off x="1691640" y="3063240"/>
+            <a:ext cx="8805672" cy="3295850"/>
           </a:xfrm>
           <a:prstGeom prst="rect">
             <a:avLst/>
@@ -4925,14 +5908,14 @@
       </p:pic>
       <p:sp>
         <p:nvSpPr>
-          <p:cNvPr id="6" name="TextBox 5"/>
+          <p:cNvPr id="7" name="TextBox 6"/>
           <p:cNvSpPr txBox="1"/>
           <p:nvPr/>
         </p:nvSpPr>
         <p:spPr>
           <a:xfrm>
-            <a:off x="6217920" y="4709160"/>
-            <a:ext cx="5303520" cy="457200"/>
+            <a:off x="1691640" y="6450530"/>
+            <a:ext cx="8805672" cy="365760"/>
           </a:xfrm>
           <a:prstGeom prst="rect">
             <a:avLst/>
@@ -4940,21 +5923,25 @@
           <a:noFill/>
         </p:spPr>
         <p:txBody>
-          <a:bodyPr wrap="square">
+          <a:bodyPr wrap="square" lIns="0" rIns="0" tIns="0" bIns="0">
             <a:spAutoFit/>
           </a:bodyPr>
           <a:lstStyle/>
           <a:p>
             <a:pPr algn="ctr">
-              <a:spcAft>
-                <a:spcPts val="800"/>
+              <a:lnSpc>
+                <a:spcPct val="100000"/>
+              </a:lnSpc>
+              <a:spcAft>
+                <a:spcPts val="0"/>
               </a:spcAft>
             </a:pPr>
             <a:r>
               <a:rPr sz="1200" b="0" i="1">
                 <a:solidFill>
-                  <a:srgbClr val="6B7280"/>
-                </a:solidFill>
+                  <a:srgbClr val="5F636B"/>
+                </a:solidFill>
+                <a:latin typeface="Noto Sans"/>
               </a:rPr>
               <a:t>Churn: Tech Support dan Online Security</a:t>
             </a:r>
@@ -4975,7 +5962,7 @@
     <p:bg>
       <p:bgPr>
         <a:solidFill>
-          <a:srgbClr val="FFFFFF"/>
+          <a:srgbClr val="EFE7D8"/>
         </a:solidFill>
         <a:effectLst/>
       </p:bgPr>
@@ -4989,82 +5976,73 @@
       <p:grpSpPr/>
       <p:sp>
         <p:nvSpPr>
-          <p:cNvPr id="2" name="TextBox 1"/>
-          <p:cNvSpPr txBox="1"/>
-          <p:nvPr/>
-        </p:nvSpPr>
-        <p:spPr>
-          <a:xfrm>
-            <a:off x="640080" y="274320"/>
-            <a:ext cx="10881360" cy="822960"/>
-          </a:xfrm>
-          <a:prstGeom prst="rect">
-            <a:avLst/>
-          </a:prstGeom>
-          <a:noFill/>
-        </p:spPr>
-        <p:txBody>
-          <a:bodyPr wrap="square">
-            <a:spAutoFit/>
-          </a:bodyPr>
-          <a:lstStyle/>
-          <a:p>
-            <a:pPr>
-              <a:spcAft>
-                <a:spcPts val="800"/>
-              </a:spcAft>
-            </a:pPr>
-            <a:r>
-              <a:rPr sz="3000" b="1" i="0">
-                <a:solidFill>
-                  <a:srgbClr val="1E3A8A"/>
-                </a:solidFill>
-              </a:rPr>
-              <a:t>Temuan 5: Risiko Menumpuk dan Pendapatan Hilang</a:t>
-            </a:r>
-          </a:p>
-        </p:txBody>
-      </p:sp>
-      <p:sp>
-        <p:nvSpPr>
-          <p:cNvPr id="3" name="Rectangle 2"/>
+          <p:cNvPr id="2" name="Rectangle 1"/>
           <p:cNvSpPr/>
           <p:nvPr/>
         </p:nvSpPr>
         <p:spPr>
           <a:xfrm>
-            <a:off x="640080" y="1051560"/>
-            <a:ext cx="1371600" cy="54864"/>
+            <a:off x="640080" y="502920"/>
+            <a:ext cx="146304" cy="475488"/>
           </a:xfrm>
           <a:prstGeom prst="rect">
             <a:avLst/>
           </a:prstGeom>
           <a:solidFill>
-            <a:srgbClr val="0D9488"/>
+            <a:srgbClr val="C75B7F"/>
           </a:solidFill>
           <a:ln>
             <a:noFill/>
           </a:ln>
-        </p:spPr>
-        <p:style>
-          <a:lnRef idx="1">
-            <a:schemeClr val="accent1"/>
-          </a:lnRef>
-          <a:fillRef idx="3">
-            <a:schemeClr val="accent1"/>
-          </a:fillRef>
-          <a:effectRef idx="2">
-            <a:schemeClr val="accent1"/>
-          </a:effectRef>
-          <a:fontRef idx="minor">
-            <a:schemeClr val="lt1"/>
-          </a:fontRef>
-        </p:style>
+          <a:effectLst/>
+        </p:spPr>
         <p:txBody>
           <a:bodyPr rtlCol="0" anchor="ctr"/>
           <a:lstStyle/>
           <a:p>
             <a:pPr algn="ctr"/>
+          </a:p>
+        </p:txBody>
+      </p:sp>
+      <p:sp>
+        <p:nvSpPr>
+          <p:cNvPr id="3" name="TextBox 2"/>
+          <p:cNvSpPr txBox="1"/>
+          <p:nvPr/>
+        </p:nvSpPr>
+        <p:spPr>
+          <a:xfrm>
+            <a:off x="960120" y="347472"/>
+            <a:ext cx="10607040" cy="868680"/>
+          </a:xfrm>
+          <a:prstGeom prst="rect">
+            <a:avLst/>
+          </a:prstGeom>
+          <a:noFill/>
+        </p:spPr>
+        <p:txBody>
+          <a:bodyPr wrap="square" lIns="0" rIns="0" tIns="0" bIns="0">
+            <a:spAutoFit/>
+          </a:bodyPr>
+          <a:lstStyle/>
+          <a:p>
+            <a:pPr>
+              <a:lnSpc>
+                <a:spcPct val="100000"/>
+              </a:lnSpc>
+              <a:spcAft>
+                <a:spcPts val="0"/>
+              </a:spcAft>
+            </a:pPr>
+            <a:r>
+              <a:rPr sz="3200" b="1" i="0">
+                <a:solidFill>
+                  <a:srgbClr val="2E3138"/>
+                </a:solidFill>
+                <a:latin typeface="Liberation Serif"/>
+              </a:rPr>
+              <a:t>Temuan 5: Risiko Menumpuk dan Pendapatan Hilang</a:t>
+            </a:r>
           </a:p>
         </p:txBody>
       </p:sp>
@@ -5076,8 +6054,8 @@
         </p:nvSpPr>
         <p:spPr>
           <a:xfrm>
-            <a:off x="640080" y="1371600"/>
-            <a:ext cx="5120640" cy="4754880"/>
+            <a:off x="640080" y="1463040"/>
+            <a:ext cx="5029200" cy="3200400"/>
           </a:xfrm>
           <a:prstGeom prst="rect">
             <a:avLst/>
@@ -5085,82 +6063,66 @@
           <a:noFill/>
         </p:spPr>
         <p:txBody>
-          <a:bodyPr wrap="square">
+          <a:bodyPr wrap="square" lIns="0" rIns="0" tIns="0" bIns="0">
             <a:spAutoFit/>
           </a:bodyPr>
           <a:lstStyle/>
           <a:p>
             <a:pPr marL="171450" indent="-171450">
-              <a:spcBef>
-                <a:spcPts val="200"/>
-              </a:spcBef>
-              <a:spcAft>
-                <a:spcPts val="1000"/>
+              <a:lnSpc>
+                <a:spcPct val="112000"/>
+              </a:lnSpc>
+              <a:spcAft>
+                <a:spcPts val="1100"/>
               </a:spcAft>
               <a:buChar char="•"/>
             </a:pPr>
             <a:r>
-              <a:rPr sz="1700" b="0" i="0">
-                <a:solidFill>
-                  <a:srgbClr val="1F2937"/>
-                </a:solidFill>
+              <a:rPr sz="1600" b="0" i="0">
+                <a:solidFill>
+                  <a:srgbClr val="2E3138"/>
+                </a:solidFill>
+                <a:latin typeface="Noto Sans"/>
               </a:rPr>
               <a:t>Fiber optic plus kontrak bulanan churn 54,6 persen, lebih dari separuh pergi</a:t>
             </a:r>
           </a:p>
           <a:p>
             <a:pPr marL="171450" indent="-171450">
-              <a:spcBef>
-                <a:spcPts val="200"/>
-              </a:spcBef>
-              <a:spcAft>
-                <a:spcPts val="1000"/>
+              <a:lnSpc>
+                <a:spcPct val="112000"/>
+              </a:lnSpc>
+              <a:spcAft>
+                <a:spcPts val="1100"/>
               </a:spcAft>
               <a:buChar char="•"/>
             </a:pPr>
             <a:r>
-              <a:rPr sz="1700" b="0" i="0">
-                <a:solidFill>
-                  <a:srgbClr val="1F2937"/>
-                </a:solidFill>
+              <a:rPr sz="1600" b="0" i="0">
+                <a:solidFill>
+                  <a:srgbClr val="2E3138"/>
+                </a:solidFill>
+                <a:latin typeface="Noto Sans"/>
               </a:rPr>
               <a:t>Kontrak bulanan plus pelanggan baru churn 51,4 persen, kombinasi dua faktor rawan</a:t>
             </a:r>
           </a:p>
           <a:p>
             <a:pPr marL="171450" indent="-171450">
-              <a:spcBef>
-                <a:spcPts val="200"/>
-              </a:spcBef>
-              <a:spcAft>
-                <a:spcPts val="1000"/>
+              <a:lnSpc>
+                <a:spcPct val="112000"/>
+              </a:lnSpc>
+              <a:spcAft>
+                <a:spcPts val="1100"/>
               </a:spcAft>
               <a:buChar char="•"/>
             </a:pPr>
             <a:r>
-              <a:rPr sz="1700" b="0" i="0">
-                <a:solidFill>
-                  <a:srgbClr val="1F2937"/>
-                </a:solidFill>
-              </a:rPr>
-              <a:t>Pendapatan yang hilang akibat churn: 139.131 USD per bulan, atau 30,5 persen dari seluruh pendapatan bulanan</a:t>
-            </a:r>
-          </a:p>
-          <a:p>
-            <a:pPr marL="171450" indent="-171450">
-              <a:spcBef>
-                <a:spcPts val="200"/>
-              </a:spcBef>
-              <a:spcAft>
-                <a:spcPts val="1000"/>
-              </a:spcAft>
-              <a:buChar char="•"/>
-            </a:pPr>
-            <a:r>
-              <a:rPr sz="1700" b="0" i="0">
-                <a:solidFill>
-                  <a:srgbClr val="1F2937"/>
-                </a:solidFill>
+              <a:rPr sz="1600" b="0" i="0">
+                <a:solidFill>
+                  <a:srgbClr val="2E3138"/>
+                </a:solidFill>
+                <a:latin typeface="Noto Sans"/>
               </a:rPr>
               <a:t>Pelanggan yang churn membayar rata-rata 74,44 USD per bulan vs 61,31 USD yang bertahan, yang pergi adalah pelanggan bernilai lebih tinggi</a:t>
             </a:r>
@@ -5183,8 +6145,8 @@
         </p:blipFill>
         <p:spPr>
           <a:xfrm>
-            <a:off x="6217920" y="1371600"/>
-            <a:ext cx="5303520" cy="3182112"/>
+            <a:off x="6126480" y="1463040"/>
+            <a:ext cx="5422392" cy="3096181"/>
           </a:xfrm>
           <a:prstGeom prst="rect">
             <a:avLst/>
@@ -5199,8 +6161,8 @@
         </p:nvSpPr>
         <p:spPr>
           <a:xfrm>
-            <a:off x="6217920" y="4709160"/>
-            <a:ext cx="5303520" cy="457200"/>
+            <a:off x="6126480" y="4668949"/>
+            <a:ext cx="5422392" cy="365760"/>
           </a:xfrm>
           <a:prstGeom prst="rect">
             <a:avLst/>
@@ -5208,23 +6170,141 @@
           <a:noFill/>
         </p:spPr>
         <p:txBody>
-          <a:bodyPr wrap="square">
+          <a:bodyPr wrap="square" lIns="0" rIns="0" tIns="0" bIns="0">
             <a:spAutoFit/>
           </a:bodyPr>
           <a:lstStyle/>
           <a:p>
             <a:pPr algn="ctr">
-              <a:spcAft>
-                <a:spcPts val="800"/>
+              <a:lnSpc>
+                <a:spcPct val="100000"/>
+              </a:lnSpc>
+              <a:spcAft>
+                <a:spcPts val="0"/>
               </a:spcAft>
             </a:pPr>
             <a:r>
               <a:rPr sz="1200" b="0" i="1">
                 <a:solidFill>
-                  <a:srgbClr val="6B7280"/>
-                </a:solidFill>
+                  <a:srgbClr val="5F636B"/>
+                </a:solidFill>
+                <a:latin typeface="Noto Sans"/>
               </a:rPr>
               <a:t>Churn pada segmen kombinasi paling rawan</a:t>
+            </a:r>
+          </a:p>
+        </p:txBody>
+      </p:sp>
+      <p:sp>
+        <p:nvSpPr>
+          <p:cNvPr id="7" name="Rectangle 6"/>
+          <p:cNvSpPr/>
+          <p:nvPr/>
+        </p:nvSpPr>
+        <p:spPr>
+          <a:xfrm>
+            <a:off x="640080" y="5212080"/>
+            <a:ext cx="10908792" cy="1051560"/>
+          </a:xfrm>
+          <a:prstGeom prst="rect">
+            <a:avLst/>
+          </a:prstGeom>
+          <a:solidFill>
+            <a:srgbClr val="4E7FA6"/>
+          </a:solidFill>
+          <a:ln>
+            <a:noFill/>
+          </a:ln>
+          <a:effectLst/>
+        </p:spPr>
+        <p:txBody>
+          <a:bodyPr rtlCol="0" anchor="ctr"/>
+          <a:lstStyle/>
+          <a:p>
+            <a:pPr algn="ctr"/>
+          </a:p>
+        </p:txBody>
+      </p:sp>
+      <p:sp>
+        <p:nvSpPr>
+          <p:cNvPr id="8" name="TextBox 7"/>
+          <p:cNvSpPr txBox="1"/>
+          <p:nvPr/>
+        </p:nvSpPr>
+        <p:spPr>
+          <a:xfrm>
+            <a:off x="960120" y="5413248"/>
+            <a:ext cx="3291840" cy="731520"/>
+          </a:xfrm>
+          <a:prstGeom prst="rect">
+            <a:avLst/>
+          </a:prstGeom>
+          <a:noFill/>
+        </p:spPr>
+        <p:txBody>
+          <a:bodyPr wrap="square" lIns="0" rIns="0" tIns="0" bIns="0">
+            <a:spAutoFit/>
+          </a:bodyPr>
+          <a:lstStyle/>
+          <a:p>
+            <a:pPr>
+              <a:lnSpc>
+                <a:spcPct val="100000"/>
+              </a:lnSpc>
+              <a:spcAft>
+                <a:spcPts val="0"/>
+              </a:spcAft>
+            </a:pPr>
+            <a:r>
+              <a:rPr sz="3000" b="1" i="0">
+                <a:solidFill>
+                  <a:srgbClr val="FFFFFF"/>
+                </a:solidFill>
+                <a:latin typeface="Noto Sans"/>
+              </a:rPr>
+              <a:t>139.131 USD</a:t>
+            </a:r>
+          </a:p>
+        </p:txBody>
+      </p:sp>
+      <p:sp>
+        <p:nvSpPr>
+          <p:cNvPr id="9" name="TextBox 8"/>
+          <p:cNvSpPr txBox="1"/>
+          <p:nvPr/>
+        </p:nvSpPr>
+        <p:spPr>
+          <a:xfrm>
+            <a:off x="4343400" y="5394960"/>
+            <a:ext cx="6949440" cy="777240"/>
+          </a:xfrm>
+          <a:prstGeom prst="rect">
+            <a:avLst/>
+          </a:prstGeom>
+          <a:noFill/>
+        </p:spPr>
+        <p:txBody>
+          <a:bodyPr wrap="square" lIns="0" rIns="0" tIns="0" bIns="0">
+            <a:spAutoFit/>
+          </a:bodyPr>
+          <a:lstStyle/>
+          <a:p>
+            <a:pPr>
+              <a:lnSpc>
+                <a:spcPct val="120000"/>
+              </a:lnSpc>
+              <a:spcAft>
+                <a:spcPts val="0"/>
+              </a:spcAft>
+            </a:pPr>
+            <a:r>
+              <a:rPr sz="1550" b="0" i="0">
+                <a:solidFill>
+                  <a:srgbClr val="FFFFFF"/>
+                </a:solidFill>
+                <a:latin typeface="Noto Sans"/>
+              </a:rPr>
+              <a:t>Pendapatan yang hilang akibat churn per bulan, atau 30,5 persen dari seluruh pendapatan bulanan</a:t>
             </a:r>
           </a:p>
         </p:txBody>
@@ -5243,7 +6323,7 @@
     <p:bg>
       <p:bgPr>
         <a:solidFill>
-          <a:srgbClr val="FFFFFF"/>
+          <a:srgbClr val="EFE7D8"/>
         </a:solidFill>
         <a:effectLst/>
       </p:bgPr>
@@ -5257,77 +6337,26 @@
       <p:grpSpPr/>
       <p:sp>
         <p:nvSpPr>
-          <p:cNvPr id="2" name="TextBox 1"/>
-          <p:cNvSpPr txBox="1"/>
-          <p:nvPr/>
-        </p:nvSpPr>
-        <p:spPr>
-          <a:xfrm>
-            <a:off x="640080" y="274320"/>
-            <a:ext cx="10881360" cy="822960"/>
-          </a:xfrm>
-          <a:prstGeom prst="rect">
-            <a:avLst/>
-          </a:prstGeom>
-          <a:noFill/>
-        </p:spPr>
-        <p:txBody>
-          <a:bodyPr wrap="square">
-            <a:spAutoFit/>
-          </a:bodyPr>
-          <a:lstStyle/>
-          <a:p>
-            <a:pPr>
-              <a:spcAft>
-                <a:spcPts val="800"/>
-              </a:spcAft>
-            </a:pPr>
-            <a:r>
-              <a:rPr sz="3000" b="1" i="0">
-                <a:solidFill>
-                  <a:srgbClr val="1E3A8A"/>
-                </a:solidFill>
-              </a:rPr>
-              <a:t>Rekomendasi Retensi</a:t>
-            </a:r>
-          </a:p>
-        </p:txBody>
-      </p:sp>
-      <p:sp>
-        <p:nvSpPr>
-          <p:cNvPr id="3" name="Rectangle 2"/>
+          <p:cNvPr id="2" name="Rectangle 1"/>
           <p:cNvSpPr/>
           <p:nvPr/>
         </p:nvSpPr>
         <p:spPr>
           <a:xfrm>
-            <a:off x="640080" y="1051560"/>
-            <a:ext cx="1371600" cy="54864"/>
+            <a:off x="640080" y="502920"/>
+            <a:ext cx="146304" cy="475488"/>
           </a:xfrm>
           <a:prstGeom prst="rect">
             <a:avLst/>
           </a:prstGeom>
           <a:solidFill>
-            <a:srgbClr val="0D9488"/>
+            <a:srgbClr val="C75B7F"/>
           </a:solidFill>
           <a:ln>
             <a:noFill/>
           </a:ln>
-        </p:spPr>
-        <p:style>
-          <a:lnRef idx="1">
-            <a:schemeClr val="accent1"/>
-          </a:lnRef>
-          <a:fillRef idx="3">
-            <a:schemeClr val="accent1"/>
-          </a:fillRef>
-          <a:effectRef idx="2">
-            <a:schemeClr val="accent1"/>
-          </a:effectRef>
-          <a:fontRef idx="minor">
-            <a:schemeClr val="lt1"/>
-          </a:fontRef>
-        </p:style>
+          <a:effectLst/>
+        </p:spPr>
         <p:txBody>
           <a:bodyPr rtlCol="0" anchor="ctr"/>
           <a:lstStyle/>
@@ -5338,14 +6367,14 @@
       </p:sp>
       <p:sp>
         <p:nvSpPr>
-          <p:cNvPr id="4" name="TextBox 3"/>
+          <p:cNvPr id="3" name="TextBox 2"/>
           <p:cNvSpPr txBox="1"/>
           <p:nvPr/>
         </p:nvSpPr>
         <p:spPr>
           <a:xfrm>
-            <a:off x="640080" y="1371600"/>
-            <a:ext cx="10881360" cy="4754880"/>
+            <a:off x="960120" y="347472"/>
+            <a:ext cx="10607040" cy="868680"/>
           </a:xfrm>
           <a:prstGeom prst="rect">
             <a:avLst/>
@@ -5353,120 +6382,637 @@
           <a:noFill/>
         </p:spPr>
         <p:txBody>
-          <a:bodyPr wrap="square">
+          <a:bodyPr wrap="square" lIns="0" rIns="0" tIns="0" bIns="0">
             <a:spAutoFit/>
           </a:bodyPr>
           <a:lstStyle/>
           <a:p>
-            <a:pPr marL="171450" indent="-171450">
-              <a:spcBef>
-                <a:spcPts val="200"/>
-              </a:spcBef>
-              <a:spcAft>
-                <a:spcPts val="1000"/>
-              </a:spcAft>
-              <a:buChar char="•"/>
-            </a:pPr>
-            <a:r>
-              <a:rPr sz="1700" b="0" i="0">
-                <a:solidFill>
-                  <a:srgbClr val="1F2937"/>
-                </a:solidFill>
+            <a:pPr>
+              <a:lnSpc>
+                <a:spcPct val="100000"/>
+              </a:lnSpc>
+              <a:spcAft>
+                <a:spcPts val="0"/>
+              </a:spcAft>
+            </a:pPr>
+            <a:r>
+              <a:rPr sz="3200" b="1" i="0">
+                <a:solidFill>
+                  <a:srgbClr val="2E3138"/>
+                </a:solidFill>
+                <a:latin typeface="Liberation Serif"/>
+              </a:rPr>
+              <a:t>Rekomendasi Retensi</a:t>
+            </a:r>
+          </a:p>
+        </p:txBody>
+      </p:sp>
+      <p:sp>
+        <p:nvSpPr>
+          <p:cNvPr id="4" name="Rectangle 3"/>
+          <p:cNvSpPr/>
+          <p:nvPr/>
+        </p:nvSpPr>
+        <p:spPr>
+          <a:xfrm>
+            <a:off x="640080" y="1417320"/>
+            <a:ext cx="5321808" cy="1408176"/>
+          </a:xfrm>
+          <a:prstGeom prst="rect">
+            <a:avLst/>
+          </a:prstGeom>
+          <a:solidFill>
+            <a:srgbClr val="F7F1E5"/>
+          </a:solidFill>
+          <a:ln>
+            <a:noFill/>
+          </a:ln>
+          <a:effectLst/>
+        </p:spPr>
+        <p:txBody>
+          <a:bodyPr rtlCol="0" anchor="ctr"/>
+          <a:lstStyle/>
+          <a:p>
+            <a:pPr algn="ctr"/>
+          </a:p>
+        </p:txBody>
+      </p:sp>
+      <p:sp>
+        <p:nvSpPr>
+          <p:cNvPr id="5" name="Rectangle 4"/>
+          <p:cNvSpPr/>
+          <p:nvPr/>
+        </p:nvSpPr>
+        <p:spPr>
+          <a:xfrm>
+            <a:off x="841247" y="1636776"/>
+            <a:ext cx="128016" cy="128016"/>
+          </a:xfrm>
+          <a:prstGeom prst="rect">
+            <a:avLst/>
+          </a:prstGeom>
+          <a:solidFill>
+            <a:srgbClr val="C75B7F"/>
+          </a:solidFill>
+          <a:ln>
+            <a:noFill/>
+          </a:ln>
+          <a:effectLst/>
+        </p:spPr>
+        <p:txBody>
+          <a:bodyPr rtlCol="0" anchor="ctr"/>
+          <a:lstStyle/>
+          <a:p>
+            <a:pPr algn="ctr"/>
+          </a:p>
+        </p:txBody>
+      </p:sp>
+      <p:sp>
+        <p:nvSpPr>
+          <p:cNvPr id="6" name="TextBox 5"/>
+          <p:cNvSpPr txBox="1"/>
+          <p:nvPr/>
+        </p:nvSpPr>
+        <p:spPr>
+          <a:xfrm>
+            <a:off x="1143000" y="1600200"/>
+            <a:ext cx="4617720" cy="1097280"/>
+          </a:xfrm>
+          <a:prstGeom prst="rect">
+            <a:avLst/>
+          </a:prstGeom>
+          <a:noFill/>
+        </p:spPr>
+        <p:txBody>
+          <a:bodyPr wrap="square" lIns="0" rIns="0" tIns="0" bIns="0">
+            <a:spAutoFit/>
+          </a:bodyPr>
+          <a:lstStyle/>
+          <a:p>
+            <a:pPr>
+              <a:lnSpc>
+                <a:spcPct val="118000"/>
+              </a:lnSpc>
+              <a:spcAft>
+                <a:spcPts val="0"/>
+              </a:spcAft>
+            </a:pPr>
+            <a:r>
+              <a:rPr sz="1450" b="0" i="0">
+                <a:solidFill>
+                  <a:srgbClr val="2E3138"/>
+                </a:solidFill>
+                <a:latin typeface="Noto Sans"/>
               </a:rPr>
               <a:t>Bangun program onboarding 12 bulan pertama: sapa proaktif di bulan ke-1, 3, dan 6 plus cek kepuasan dini</a:t>
             </a:r>
           </a:p>
-          <a:p>
-            <a:pPr marL="171450" indent="-171450">
-              <a:spcBef>
-                <a:spcPts val="200"/>
-              </a:spcBef>
-              <a:spcAft>
-                <a:spcPts val="1000"/>
-              </a:spcAft>
-              <a:buChar char="•"/>
-            </a:pPr>
-            <a:r>
-              <a:rPr sz="1700" b="0" i="0">
-                <a:solidFill>
-                  <a:srgbClr val="1F2937"/>
-                </a:solidFill>
+        </p:txBody>
+      </p:sp>
+      <p:sp>
+        <p:nvSpPr>
+          <p:cNvPr id="7" name="Rectangle 6"/>
+          <p:cNvSpPr/>
+          <p:nvPr/>
+        </p:nvSpPr>
+        <p:spPr>
+          <a:xfrm>
+            <a:off x="6227064" y="1417320"/>
+            <a:ext cx="5321808" cy="1408176"/>
+          </a:xfrm>
+          <a:prstGeom prst="rect">
+            <a:avLst/>
+          </a:prstGeom>
+          <a:solidFill>
+            <a:srgbClr val="F7F1E5"/>
+          </a:solidFill>
+          <a:ln>
+            <a:noFill/>
+          </a:ln>
+          <a:effectLst/>
+        </p:spPr>
+        <p:txBody>
+          <a:bodyPr rtlCol="0" anchor="ctr"/>
+          <a:lstStyle/>
+          <a:p>
+            <a:pPr algn="ctr"/>
+          </a:p>
+        </p:txBody>
+      </p:sp>
+      <p:sp>
+        <p:nvSpPr>
+          <p:cNvPr id="8" name="Rectangle 7"/>
+          <p:cNvSpPr/>
+          <p:nvPr/>
+        </p:nvSpPr>
+        <p:spPr>
+          <a:xfrm>
+            <a:off x="6428232" y="1636776"/>
+            <a:ext cx="128016" cy="128016"/>
+          </a:xfrm>
+          <a:prstGeom prst="rect">
+            <a:avLst/>
+          </a:prstGeom>
+          <a:solidFill>
+            <a:srgbClr val="C75B7F"/>
+          </a:solidFill>
+          <a:ln>
+            <a:noFill/>
+          </a:ln>
+          <a:effectLst/>
+        </p:spPr>
+        <p:txBody>
+          <a:bodyPr rtlCol="0" anchor="ctr"/>
+          <a:lstStyle/>
+          <a:p>
+            <a:pPr algn="ctr"/>
+          </a:p>
+        </p:txBody>
+      </p:sp>
+      <p:sp>
+        <p:nvSpPr>
+          <p:cNvPr id="9" name="TextBox 8"/>
+          <p:cNvSpPr txBox="1"/>
+          <p:nvPr/>
+        </p:nvSpPr>
+        <p:spPr>
+          <a:xfrm>
+            <a:off x="6729984" y="1600200"/>
+            <a:ext cx="4617720" cy="1097280"/>
+          </a:xfrm>
+          <a:prstGeom prst="rect">
+            <a:avLst/>
+          </a:prstGeom>
+          <a:noFill/>
+        </p:spPr>
+        <p:txBody>
+          <a:bodyPr wrap="square" lIns="0" rIns="0" tIns="0" bIns="0">
+            <a:spAutoFit/>
+          </a:bodyPr>
+          <a:lstStyle/>
+          <a:p>
+            <a:pPr>
+              <a:lnSpc>
+                <a:spcPct val="118000"/>
+              </a:lnSpc>
+              <a:spcAft>
+                <a:spcPts val="0"/>
+              </a:spcAft>
+            </a:pPr>
+            <a:r>
+              <a:rPr sz="1450" b="0" i="0">
+                <a:solidFill>
+                  <a:srgbClr val="2E3138"/>
+                </a:solidFill>
+                <a:latin typeface="Noto Sans"/>
               </a:rPr>
               <a:t>Konversi kontrak bulanan ke kontrak tahunan dengan insentif: diskon loyalitas, harga terkunci, dan bonus layanan</a:t>
             </a:r>
           </a:p>
-          <a:p>
-            <a:pPr marL="171450" indent="-171450">
-              <a:spcBef>
-                <a:spcPts val="200"/>
-              </a:spcBef>
-              <a:spcAft>
-                <a:spcPts val="1000"/>
-              </a:spcAft>
-              <a:buChar char="•"/>
-            </a:pPr>
-            <a:r>
-              <a:rPr sz="1700" b="0" i="0">
-                <a:solidFill>
-                  <a:srgbClr val="1F2937"/>
-                </a:solidFill>
+        </p:txBody>
+      </p:sp>
+      <p:sp>
+        <p:nvSpPr>
+          <p:cNvPr id="10" name="Rectangle 9"/>
+          <p:cNvSpPr/>
+          <p:nvPr/>
+        </p:nvSpPr>
+        <p:spPr>
+          <a:xfrm>
+            <a:off x="640080" y="2990088"/>
+            <a:ext cx="5321808" cy="1408176"/>
+          </a:xfrm>
+          <a:prstGeom prst="rect">
+            <a:avLst/>
+          </a:prstGeom>
+          <a:solidFill>
+            <a:srgbClr val="F7F1E5"/>
+          </a:solidFill>
+          <a:ln>
+            <a:noFill/>
+          </a:ln>
+          <a:effectLst/>
+        </p:spPr>
+        <p:txBody>
+          <a:bodyPr rtlCol="0" anchor="ctr"/>
+          <a:lstStyle/>
+          <a:p>
+            <a:pPr algn="ctr"/>
+          </a:p>
+        </p:txBody>
+      </p:sp>
+      <p:sp>
+        <p:nvSpPr>
+          <p:cNvPr id="11" name="Rectangle 10"/>
+          <p:cNvSpPr/>
+          <p:nvPr/>
+        </p:nvSpPr>
+        <p:spPr>
+          <a:xfrm>
+            <a:off x="841247" y="3209544"/>
+            <a:ext cx="128016" cy="128016"/>
+          </a:xfrm>
+          <a:prstGeom prst="rect">
+            <a:avLst/>
+          </a:prstGeom>
+          <a:solidFill>
+            <a:srgbClr val="C75B7F"/>
+          </a:solidFill>
+          <a:ln>
+            <a:noFill/>
+          </a:ln>
+          <a:effectLst/>
+        </p:spPr>
+        <p:txBody>
+          <a:bodyPr rtlCol="0" anchor="ctr"/>
+          <a:lstStyle/>
+          <a:p>
+            <a:pPr algn="ctr"/>
+          </a:p>
+        </p:txBody>
+      </p:sp>
+      <p:sp>
+        <p:nvSpPr>
+          <p:cNvPr id="12" name="TextBox 11"/>
+          <p:cNvSpPr txBox="1"/>
+          <p:nvPr/>
+        </p:nvSpPr>
+        <p:spPr>
+          <a:xfrm>
+            <a:off x="1143000" y="3172968"/>
+            <a:ext cx="4617720" cy="1097280"/>
+          </a:xfrm>
+          <a:prstGeom prst="rect">
+            <a:avLst/>
+          </a:prstGeom>
+          <a:noFill/>
+        </p:spPr>
+        <p:txBody>
+          <a:bodyPr wrap="square" lIns="0" rIns="0" tIns="0" bIns="0">
+            <a:spAutoFit/>
+          </a:bodyPr>
+          <a:lstStyle/>
+          <a:p>
+            <a:pPr>
+              <a:lnSpc>
+                <a:spcPct val="118000"/>
+              </a:lnSpc>
+              <a:spcAft>
+                <a:spcPts val="0"/>
+              </a:spcAft>
+            </a:pPr>
+            <a:r>
+              <a:rPr sz="1450" b="0" i="0">
+                <a:solidFill>
+                  <a:srgbClr val="2E3138"/>
+                </a:solidFill>
+                <a:latin typeface="Noto Sans"/>
               </a:rPr>
               <a:t>Audit nilai layanan Fiber optic: tinjau kualitas jaringan per area, harga, dan komunikasi manfaatnya</a:t>
             </a:r>
           </a:p>
-          <a:p>
-            <a:pPr marL="171450" indent="-171450">
-              <a:spcBef>
-                <a:spcPts val="200"/>
-              </a:spcBef>
-              <a:spcAft>
-                <a:spcPts val="1000"/>
-              </a:spcAft>
-              <a:buChar char="•"/>
-            </a:pPr>
-            <a:r>
-              <a:rPr sz="1700" b="0" i="0">
-                <a:solidFill>
-                  <a:srgbClr val="1F2937"/>
-                </a:solidFill>
+        </p:txBody>
+      </p:sp>
+      <p:sp>
+        <p:nvSpPr>
+          <p:cNvPr id="13" name="Rectangle 12"/>
+          <p:cNvSpPr/>
+          <p:nvPr/>
+        </p:nvSpPr>
+        <p:spPr>
+          <a:xfrm>
+            <a:off x="6227064" y="2990088"/>
+            <a:ext cx="5321808" cy="1408176"/>
+          </a:xfrm>
+          <a:prstGeom prst="rect">
+            <a:avLst/>
+          </a:prstGeom>
+          <a:solidFill>
+            <a:srgbClr val="F7F1E5"/>
+          </a:solidFill>
+          <a:ln>
+            <a:noFill/>
+          </a:ln>
+          <a:effectLst/>
+        </p:spPr>
+        <p:txBody>
+          <a:bodyPr rtlCol="0" anchor="ctr"/>
+          <a:lstStyle/>
+          <a:p>
+            <a:pPr algn="ctr"/>
+          </a:p>
+        </p:txBody>
+      </p:sp>
+      <p:sp>
+        <p:nvSpPr>
+          <p:cNvPr id="14" name="Rectangle 13"/>
+          <p:cNvSpPr/>
+          <p:nvPr/>
+        </p:nvSpPr>
+        <p:spPr>
+          <a:xfrm>
+            <a:off x="6428232" y="3209544"/>
+            <a:ext cx="128016" cy="128016"/>
+          </a:xfrm>
+          <a:prstGeom prst="rect">
+            <a:avLst/>
+          </a:prstGeom>
+          <a:solidFill>
+            <a:srgbClr val="C75B7F"/>
+          </a:solidFill>
+          <a:ln>
+            <a:noFill/>
+          </a:ln>
+          <a:effectLst/>
+        </p:spPr>
+        <p:txBody>
+          <a:bodyPr rtlCol="0" anchor="ctr"/>
+          <a:lstStyle/>
+          <a:p>
+            <a:pPr algn="ctr"/>
+          </a:p>
+        </p:txBody>
+      </p:sp>
+      <p:sp>
+        <p:nvSpPr>
+          <p:cNvPr id="15" name="TextBox 14"/>
+          <p:cNvSpPr txBox="1"/>
+          <p:nvPr/>
+        </p:nvSpPr>
+        <p:spPr>
+          <a:xfrm>
+            <a:off x="6729984" y="3172968"/>
+            <a:ext cx="4617720" cy="1097280"/>
+          </a:xfrm>
+          <a:prstGeom prst="rect">
+            <a:avLst/>
+          </a:prstGeom>
+          <a:noFill/>
+        </p:spPr>
+        <p:txBody>
+          <a:bodyPr wrap="square" lIns="0" rIns="0" tIns="0" bIns="0">
+            <a:spAutoFit/>
+          </a:bodyPr>
+          <a:lstStyle/>
+          <a:p>
+            <a:pPr>
+              <a:lnSpc>
+                <a:spcPct val="118000"/>
+              </a:lnSpc>
+              <a:spcAft>
+                <a:spcPts val="0"/>
+              </a:spcAft>
+            </a:pPr>
+            <a:r>
+              <a:rPr sz="1450" b="0" i="0">
+                <a:solidFill>
+                  <a:srgbClr val="2E3138"/>
+                </a:solidFill>
+                <a:latin typeface="Noto Sans"/>
               </a:rPr>
               <a:t>Dorong auto-pay dan migrasi dari cek elektronik dengan insentif kecil</a:t>
             </a:r>
           </a:p>
-          <a:p>
-            <a:pPr marL="171450" indent="-171450">
-              <a:spcBef>
-                <a:spcPts val="200"/>
-              </a:spcBef>
-              <a:spcAft>
-                <a:spcPts val="1000"/>
-              </a:spcAft>
-              <a:buChar char="•"/>
-            </a:pPr>
-            <a:r>
-              <a:rPr sz="1700" b="0" i="0">
-                <a:solidFill>
-                  <a:srgbClr val="1F2937"/>
-                </a:solidFill>
+        </p:txBody>
+      </p:sp>
+      <p:sp>
+        <p:nvSpPr>
+          <p:cNvPr id="16" name="Rectangle 15"/>
+          <p:cNvSpPr/>
+          <p:nvPr/>
+        </p:nvSpPr>
+        <p:spPr>
+          <a:xfrm>
+            <a:off x="640080" y="4562856"/>
+            <a:ext cx="5321808" cy="1408176"/>
+          </a:xfrm>
+          <a:prstGeom prst="rect">
+            <a:avLst/>
+          </a:prstGeom>
+          <a:solidFill>
+            <a:srgbClr val="F7F1E5"/>
+          </a:solidFill>
+          <a:ln>
+            <a:noFill/>
+          </a:ln>
+          <a:effectLst/>
+        </p:spPr>
+        <p:txBody>
+          <a:bodyPr rtlCol="0" anchor="ctr"/>
+          <a:lstStyle/>
+          <a:p>
+            <a:pPr algn="ctr"/>
+          </a:p>
+        </p:txBody>
+      </p:sp>
+      <p:sp>
+        <p:nvSpPr>
+          <p:cNvPr id="17" name="Rectangle 16"/>
+          <p:cNvSpPr/>
+          <p:nvPr/>
+        </p:nvSpPr>
+        <p:spPr>
+          <a:xfrm>
+            <a:off x="841247" y="4782312"/>
+            <a:ext cx="128016" cy="128016"/>
+          </a:xfrm>
+          <a:prstGeom prst="rect">
+            <a:avLst/>
+          </a:prstGeom>
+          <a:solidFill>
+            <a:srgbClr val="C75B7F"/>
+          </a:solidFill>
+          <a:ln>
+            <a:noFill/>
+          </a:ln>
+          <a:effectLst/>
+        </p:spPr>
+        <p:txBody>
+          <a:bodyPr rtlCol="0" anchor="ctr"/>
+          <a:lstStyle/>
+          <a:p>
+            <a:pPr algn="ctr"/>
+          </a:p>
+        </p:txBody>
+      </p:sp>
+      <p:sp>
+        <p:nvSpPr>
+          <p:cNvPr id="18" name="TextBox 17"/>
+          <p:cNvSpPr txBox="1"/>
+          <p:nvPr/>
+        </p:nvSpPr>
+        <p:spPr>
+          <a:xfrm>
+            <a:off x="1143000" y="4745736"/>
+            <a:ext cx="4617720" cy="1097280"/>
+          </a:xfrm>
+          <a:prstGeom prst="rect">
+            <a:avLst/>
+          </a:prstGeom>
+          <a:noFill/>
+        </p:spPr>
+        <p:txBody>
+          <a:bodyPr wrap="square" lIns="0" rIns="0" tIns="0" bIns="0">
+            <a:spAutoFit/>
+          </a:bodyPr>
+          <a:lstStyle/>
+          <a:p>
+            <a:pPr>
+              <a:lnSpc>
+                <a:spcPct val="118000"/>
+              </a:lnSpc>
+              <a:spcAft>
+                <a:spcPts val="0"/>
+              </a:spcAft>
+            </a:pPr>
+            <a:r>
+              <a:rPr sz="1450" b="0" i="0">
+                <a:solidFill>
+                  <a:srgbClr val="2E3138"/>
+                </a:solidFill>
+                <a:latin typeface="Noto Sans"/>
               </a:rPr>
               <a:t>Tawarkan Tech Support dan Online Security proaktif, bundel dukungan gratis 3 bulan untuk segmen rawan</a:t>
             </a:r>
           </a:p>
-          <a:p>
-            <a:pPr marL="171450" indent="-171450">
-              <a:spcBef>
-                <a:spcPts val="200"/>
-              </a:spcBef>
-              <a:spcAft>
-                <a:spcPts val="1000"/>
-              </a:spcAft>
-              <a:buChar char="•"/>
-            </a:pPr>
-            <a:r>
-              <a:rPr sz="1700" b="0" i="0">
-                <a:solidFill>
-                  <a:srgbClr val="1F2937"/>
-                </a:solidFill>
+        </p:txBody>
+      </p:sp>
+      <p:sp>
+        <p:nvSpPr>
+          <p:cNvPr id="19" name="Rectangle 18"/>
+          <p:cNvSpPr/>
+          <p:nvPr/>
+        </p:nvSpPr>
+        <p:spPr>
+          <a:xfrm>
+            <a:off x="6227064" y="4562856"/>
+            <a:ext cx="5321808" cy="1408176"/>
+          </a:xfrm>
+          <a:prstGeom prst="rect">
+            <a:avLst/>
+          </a:prstGeom>
+          <a:solidFill>
+            <a:srgbClr val="F7F1E5"/>
+          </a:solidFill>
+          <a:ln>
+            <a:noFill/>
+          </a:ln>
+          <a:effectLst/>
+        </p:spPr>
+        <p:txBody>
+          <a:bodyPr rtlCol="0" anchor="ctr"/>
+          <a:lstStyle/>
+          <a:p>
+            <a:pPr algn="ctr"/>
+          </a:p>
+        </p:txBody>
+      </p:sp>
+      <p:sp>
+        <p:nvSpPr>
+          <p:cNvPr id="20" name="Rectangle 19"/>
+          <p:cNvSpPr/>
+          <p:nvPr/>
+        </p:nvSpPr>
+        <p:spPr>
+          <a:xfrm>
+            <a:off x="6428232" y="4782312"/>
+            <a:ext cx="128016" cy="128016"/>
+          </a:xfrm>
+          <a:prstGeom prst="rect">
+            <a:avLst/>
+          </a:prstGeom>
+          <a:solidFill>
+            <a:srgbClr val="C75B7F"/>
+          </a:solidFill>
+          <a:ln>
+            <a:noFill/>
+          </a:ln>
+          <a:effectLst/>
+        </p:spPr>
+        <p:txBody>
+          <a:bodyPr rtlCol="0" anchor="ctr"/>
+          <a:lstStyle/>
+          <a:p>
+            <a:pPr algn="ctr"/>
+          </a:p>
+        </p:txBody>
+      </p:sp>
+      <p:sp>
+        <p:nvSpPr>
+          <p:cNvPr id="21" name="TextBox 20"/>
+          <p:cNvSpPr txBox="1"/>
+          <p:nvPr/>
+        </p:nvSpPr>
+        <p:spPr>
+          <a:xfrm>
+            <a:off x="6729984" y="4745736"/>
+            <a:ext cx="4617720" cy="1097280"/>
+          </a:xfrm>
+          <a:prstGeom prst="rect">
+            <a:avLst/>
+          </a:prstGeom>
+          <a:noFill/>
+        </p:spPr>
+        <p:txBody>
+          <a:bodyPr wrap="square" lIns="0" rIns="0" tIns="0" bIns="0">
+            <a:spAutoFit/>
+          </a:bodyPr>
+          <a:lstStyle/>
+          <a:p>
+            <a:pPr>
+              <a:lnSpc>
+                <a:spcPct val="118000"/>
+              </a:lnSpc>
+              <a:spcAft>
+                <a:spcPts val="0"/>
+              </a:spcAft>
+            </a:pPr>
+            <a:r>
+              <a:rPr sz="1450" b="0" i="0">
+                <a:solidFill>
+                  <a:srgbClr val="2E3138"/>
+                </a:solidFill>
+                <a:latin typeface="Noto Sans"/>
               </a:rPr>
               <a:t>Perhatian khusus untuk lansia dan pelanggan yang hidup sendiri dengan jalur dukungan yang lebih personal</a:t>
             </a:r>

--- a/Portofolio-Analisis-Telco-Churn.pptx
+++ b/Portofolio-Analisis-Telco-Churn.pptx
@@ -3107,17 +3107,267 @@
       <p:grpSpPr/>
       <p:sp>
         <p:nvSpPr>
-          <p:cNvPr id="2" name="Rectangle 1"/>
-          <p:cNvSpPr/>
-          <p:nvPr/>
-        </p:nvSpPr>
-        <p:spPr>
-          <a:xfrm>
-            <a:off x="7818120" y="0"/>
-            <a:ext cx="4373575" cy="6858000"/>
+          <p:cNvPr id="2" name="TextBox 1"/>
+          <p:cNvSpPr txBox="1"/>
+          <p:nvPr/>
+        </p:nvSpPr>
+        <p:spPr>
+          <a:xfrm>
+            <a:off x="502920" y="868680"/>
+            <a:ext cx="6400800" cy="2011680"/>
           </a:xfrm>
           <a:prstGeom prst="rect">
             <a:avLst/>
+          </a:prstGeom>
+          <a:noFill/>
+        </p:spPr>
+        <p:txBody>
+          <a:bodyPr wrap="square" anchor="t" lIns="0" rIns="0" tIns="0" bIns="0">
+            <a:spAutoFit/>
+          </a:bodyPr>
+          <a:lstStyle/>
+          <a:p>
+            <a:pPr>
+              <a:lnSpc>
+                <a:spcPct val="105000"/>
+              </a:lnSpc>
+              <a:spcBef>
+                <a:spcPts val="0"/>
+              </a:spcBef>
+              <a:spcAft>
+                <a:spcPts val="0"/>
+              </a:spcAft>
+            </a:pPr>
+            <a:r>
+              <a:rPr sz="3800" b="1">
+                <a:solidFill>
+                  <a:srgbClr val="2E3138"/>
+                </a:solidFill>
+                <a:latin typeface="Liberation Serif"/>
+              </a:rPr>
+              <a:t>Analisis Telco</a:t>
+            </a:r>
+          </a:p>
+          <a:p>
+            <a:pPr>
+              <a:lnSpc>
+                <a:spcPct val="105000"/>
+              </a:lnSpc>
+              <a:spcBef>
+                <a:spcPts val="0"/>
+              </a:spcBef>
+              <a:spcAft>
+                <a:spcPts val="0"/>
+              </a:spcAft>
+            </a:pPr>
+            <a:r>
+              <a:rPr sz="3800" b="1">
+                <a:solidFill>
+                  <a:srgbClr val="4E7FA6"/>
+                </a:solidFill>
+                <a:latin typeface="Liberation Serif"/>
+              </a:rPr>
+              <a:t>Customer Churn</a:t>
+            </a:r>
+          </a:p>
+        </p:txBody>
+      </p:sp>
+      <p:sp>
+        <p:nvSpPr>
+          <p:cNvPr id="3" name="TextBox 2"/>
+          <p:cNvSpPr txBox="1"/>
+          <p:nvPr/>
+        </p:nvSpPr>
+        <p:spPr>
+          <a:xfrm>
+            <a:off x="502920" y="2606040"/>
+            <a:ext cx="5852160" cy="1188720"/>
+          </a:xfrm>
+          <a:prstGeom prst="rect">
+            <a:avLst/>
+          </a:prstGeom>
+          <a:noFill/>
+        </p:spPr>
+        <p:txBody>
+          <a:bodyPr wrap="square" anchor="t" lIns="0" rIns="0" tIns="0" bIns="0">
+            <a:spAutoFit/>
+          </a:bodyPr>
+          <a:lstStyle/>
+          <a:p>
+            <a:pPr>
+              <a:lnSpc>
+                <a:spcPct val="113000"/>
+              </a:lnSpc>
+              <a:spcBef>
+                <a:spcPts val="0"/>
+              </a:spcBef>
+              <a:spcAft>
+                <a:spcPts val="0"/>
+              </a:spcAft>
+            </a:pPr>
+            <a:r>
+              <a:rPr sz="1750" b="0">
+                <a:solidFill>
+                  <a:srgbClr val="2E3138"/>
+                </a:solidFill>
+                <a:latin typeface="Noto Sans"/>
+              </a:rPr>
+              <a:t>Siapa yang pergi, kenapa mereka pergi, dan berapa pendapatan yang hilang.</a:t>
+            </a:r>
+          </a:p>
+        </p:txBody>
+      </p:sp>
+      <p:sp>
+        <p:nvSpPr>
+          <p:cNvPr id="4" name="TextBox 3"/>
+          <p:cNvSpPr txBox="1"/>
+          <p:nvPr/>
+        </p:nvSpPr>
+        <p:spPr>
+          <a:xfrm>
+            <a:off x="502920" y="4114800"/>
+            <a:ext cx="5943600" cy="914400"/>
+          </a:xfrm>
+          <a:prstGeom prst="rect">
+            <a:avLst/>
+          </a:prstGeom>
+          <a:noFill/>
+        </p:spPr>
+        <p:txBody>
+          <a:bodyPr wrap="square" anchor="t" lIns="0" rIns="0" tIns="0" bIns="0">
+            <a:spAutoFit/>
+          </a:bodyPr>
+          <a:lstStyle/>
+          <a:p>
+            <a:pPr>
+              <a:lnSpc>
+                <a:spcPct val="113000"/>
+              </a:lnSpc>
+              <a:spcBef>
+                <a:spcPts val="0"/>
+              </a:spcBef>
+              <a:spcAft>
+                <a:spcPts val="0"/>
+              </a:spcAft>
+            </a:pPr>
+            <a:r>
+              <a:rPr sz="1300" b="0">
+                <a:solidFill>
+                  <a:srgbClr val="2E3138"/>
+                </a:solidFill>
+                <a:latin typeface="Noto Sans"/>
+              </a:rPr>
+              <a:t>Studi kasus IBM Sample Telco Customer Churn, dianalisis dengan SQL (SQLite) dan Python.</a:t>
+            </a:r>
+          </a:p>
+        </p:txBody>
+      </p:sp>
+      <p:sp>
+        <p:nvSpPr>
+          <p:cNvPr id="5" name="TextBox 4"/>
+          <p:cNvSpPr txBox="1"/>
+          <p:nvPr/>
+        </p:nvSpPr>
+        <p:spPr>
+          <a:xfrm>
+            <a:off x="502920" y="5989320"/>
+            <a:ext cx="5943600" cy="457200"/>
+          </a:xfrm>
+          <a:prstGeom prst="rect">
+            <a:avLst/>
+          </a:prstGeom>
+          <a:noFill/>
+        </p:spPr>
+        <p:txBody>
+          <a:bodyPr wrap="square" anchor="t" lIns="0" rIns="0" tIns="0" bIns="0">
+            <a:spAutoFit/>
+          </a:bodyPr>
+          <a:lstStyle/>
+          <a:p>
+            <a:pPr>
+              <a:lnSpc>
+                <a:spcPct val="113000"/>
+              </a:lnSpc>
+              <a:spcBef>
+                <a:spcPts val="0"/>
+              </a:spcBef>
+              <a:spcAft>
+                <a:spcPts val="0"/>
+              </a:spcAft>
+            </a:pPr>
+            <a:r>
+              <a:rPr sz="1400" b="1">
+                <a:solidFill>
+                  <a:srgbClr val="4E7FA6"/>
+                </a:solidFill>
+                <a:latin typeface="Noto Sans"/>
+              </a:rPr>
+              <a:t>BAGHIZ ASSHIDDIQIE ARASYA</a:t>
+            </a:r>
+          </a:p>
+        </p:txBody>
+      </p:sp>
+      <p:sp>
+        <p:nvSpPr>
+          <p:cNvPr id="6" name="Rounded Rectangle 5"/>
+          <p:cNvSpPr/>
+          <p:nvPr/>
+        </p:nvSpPr>
+        <p:spPr>
+          <a:xfrm>
+            <a:off x="6885432" y="850392"/>
+            <a:ext cx="4892040" cy="4160520"/>
+          </a:xfrm>
+          <a:prstGeom prst="roundRect">
+            <a:avLst>
+              <a:gd name="adj" fmla="val 5500"/>
+            </a:avLst>
+          </a:prstGeom>
+          <a:solidFill>
+            <a:srgbClr val="EFC3D2"/>
+          </a:solidFill>
+          <a:ln>
+            <a:noFill/>
+          </a:ln>
+          <a:effectLst/>
+        </p:spPr>
+        <p:style>
+          <a:lnRef idx="1">
+            <a:schemeClr val="accent1"/>
+          </a:lnRef>
+          <a:fillRef idx="3">
+            <a:schemeClr val="accent1"/>
+          </a:fillRef>
+          <a:effectRef idx="2">
+            <a:schemeClr val="accent1"/>
+          </a:effectRef>
+          <a:fontRef idx="minor">
+            <a:schemeClr val="lt1"/>
+          </a:fontRef>
+        </p:style>
+        <p:txBody>
+          <a:bodyPr rtlCol="0" anchor="ctr"/>
+          <a:lstStyle/>
+          <a:p>
+            <a:pPr algn="ctr"/>
+          </a:p>
+        </p:txBody>
+      </p:sp>
+      <p:sp>
+        <p:nvSpPr>
+          <p:cNvPr id="7" name="Rounded Rectangle 6"/>
+          <p:cNvSpPr/>
+          <p:nvPr/>
+        </p:nvSpPr>
+        <p:spPr>
+          <a:xfrm>
+            <a:off x="6812280" y="777240"/>
+            <a:ext cx="4892040" cy="4160520"/>
+          </a:xfrm>
+          <a:prstGeom prst="roundRect">
+            <a:avLst>
+              <a:gd name="adj" fmla="val 5500"/>
+            </a:avLst>
           </a:prstGeom>
           <a:solidFill>
             <a:srgbClr val="4E7FA6"/>
@@ -3127,6 +3377,20 @@
           </a:ln>
           <a:effectLst/>
         </p:spPr>
+        <p:style>
+          <a:lnRef idx="1">
+            <a:schemeClr val="accent1"/>
+          </a:lnRef>
+          <a:fillRef idx="3">
+            <a:schemeClr val="accent1"/>
+          </a:fillRef>
+          <a:effectRef idx="2">
+            <a:schemeClr val="accent1"/>
+          </a:effectRef>
+          <a:fontRef idx="minor">
+            <a:schemeClr val="lt1"/>
+          </a:fontRef>
+        </p:style>
         <p:txBody>
           <a:bodyPr rtlCol="0" anchor="ctr"/>
           <a:lstStyle/>
@@ -3137,17 +3401,130 @@
       </p:sp>
       <p:sp>
         <p:nvSpPr>
-          <p:cNvPr id="3" name="Rectangle 2"/>
-          <p:cNvSpPr/>
-          <p:nvPr/>
-        </p:nvSpPr>
-        <p:spPr>
-          <a:xfrm>
-            <a:off x="7708392" y="0"/>
-            <a:ext cx="109728" cy="6858000"/>
+          <p:cNvPr id="8" name="TextBox 7"/>
+          <p:cNvSpPr txBox="1"/>
+          <p:nvPr/>
+        </p:nvSpPr>
+        <p:spPr>
+          <a:xfrm>
+            <a:off x="7269480" y="1234440"/>
+            <a:ext cx="4023360" cy="3474720"/>
           </a:xfrm>
           <a:prstGeom prst="rect">
             <a:avLst/>
+          </a:prstGeom>
+          <a:noFill/>
+        </p:spPr>
+        <p:txBody>
+          <a:bodyPr wrap="square" anchor="t" lIns="0" rIns="0" tIns="0" bIns="0">
+            <a:spAutoFit/>
+          </a:bodyPr>
+          <a:lstStyle/>
+          <a:p>
+            <a:pPr>
+              <a:lnSpc>
+                <a:spcPct val="113000"/>
+              </a:lnSpc>
+              <a:spcBef>
+                <a:spcPts val="0"/>
+              </a:spcBef>
+              <a:spcAft>
+                <a:spcPts val="600"/>
+              </a:spcAft>
+            </a:pPr>
+            <a:r>
+              <a:rPr sz="1250" b="1">
+                <a:solidFill>
+                  <a:srgbClr val="F7F1E5"/>
+                </a:solidFill>
+                <a:latin typeface="Noto Sans"/>
+              </a:rPr>
+              <a:t>CHURN RATE KESELURUHAN</a:t>
+            </a:r>
+          </a:p>
+          <a:p>
+            <a:pPr>
+              <a:lnSpc>
+                <a:spcPct val="113000"/>
+              </a:lnSpc>
+              <a:spcBef>
+                <a:spcPts val="0"/>
+              </a:spcBef>
+              <a:spcAft>
+                <a:spcPts val="400"/>
+              </a:spcAft>
+            </a:pPr>
+            <a:r>
+              <a:rPr sz="7200" b="1">
+                <a:solidFill>
+                  <a:srgbClr val="FFFFFF"/>
+                </a:solidFill>
+                <a:latin typeface="Noto Sans"/>
+              </a:rPr>
+              <a:t>26,6%</a:t>
+            </a:r>
+          </a:p>
+          <a:p>
+            <a:pPr>
+              <a:lnSpc>
+                <a:spcPct val="113000"/>
+              </a:lnSpc>
+              <a:spcBef>
+                <a:spcPts val="0"/>
+              </a:spcBef>
+              <a:spcAft>
+                <a:spcPts val="800"/>
+              </a:spcAft>
+            </a:pPr>
+            <a:r>
+              <a:rPr sz="1900" b="1">
+                <a:solidFill>
+                  <a:srgbClr val="FFFFFF"/>
+                </a:solidFill>
+                <a:latin typeface="Noto Sans"/>
+              </a:rPr>
+              <a:t>1.869 pelanggan berhenti berlangganan</a:t>
+            </a:r>
+          </a:p>
+          <a:p>
+            <a:pPr>
+              <a:lnSpc>
+                <a:spcPct val="113000"/>
+              </a:lnSpc>
+              <a:spcBef>
+                <a:spcPts val="0"/>
+              </a:spcBef>
+              <a:spcAft>
+                <a:spcPts val="0"/>
+              </a:spcAft>
+            </a:pPr>
+            <a:r>
+              <a:rPr sz="1350" b="0">
+                <a:solidFill>
+                  <a:srgbClr val="F7F1E5"/>
+                </a:solidFill>
+                <a:latin typeface="Noto Sans"/>
+              </a:rPr>
+              <a:t>Dari 7.032 pelanggan bersih, lebih dari satu dari empat pelanggan pergi. Pendapatan yang hilang mencapai USD 139.130,85 per bulan.</a:t>
+            </a:r>
+          </a:p>
+        </p:txBody>
+      </p:sp>
+      <p:sp>
+        <p:nvSpPr>
+          <p:cNvPr id="9" name="Rounded Rectangle 8"/>
+          <p:cNvSpPr/>
+          <p:nvPr/>
+        </p:nvSpPr>
+        <p:spPr>
+          <a:xfrm>
+            <a:off x="6812280" y="5230368"/>
+            <a:ext cx="4892040" cy="713232"/>
+          </a:xfrm>
+          <a:prstGeom prst="roundRect">
+            <a:avLst>
+              <a:gd name="adj" fmla="val 5500"/>
+            </a:avLst>
           </a:prstGeom>
           <a:solidFill>
             <a:srgbClr val="C75B7F"/>
@@ -3157,6 +3534,20 @@
           </a:ln>
           <a:effectLst/>
         </p:spPr>
+        <p:style>
+          <a:lnRef idx="1">
+            <a:schemeClr val="accent1"/>
+          </a:lnRef>
+          <a:fillRef idx="3">
+            <a:schemeClr val="accent1"/>
+          </a:fillRef>
+          <a:effectRef idx="2">
+            <a:schemeClr val="accent1"/>
+          </a:effectRef>
+          <a:fontRef idx="minor">
+            <a:schemeClr val="lt1"/>
+          </a:fontRef>
+        </p:style>
         <p:txBody>
           <a:bodyPr rtlCol="0" anchor="ctr"/>
           <a:lstStyle/>
@@ -3167,14 +3558,14 @@
       </p:sp>
       <p:sp>
         <p:nvSpPr>
-          <p:cNvPr id="4" name="TextBox 3"/>
+          <p:cNvPr id="10" name="TextBox 9"/>
           <p:cNvSpPr txBox="1"/>
           <p:nvPr/>
         </p:nvSpPr>
         <p:spPr>
           <a:xfrm>
-            <a:off x="777240" y="1371600"/>
-            <a:ext cx="6720840" cy="2011680"/>
+            <a:off x="7086600" y="5358384"/>
+            <a:ext cx="4434840" cy="502920"/>
           </a:xfrm>
           <a:prstGeom prst="rect">
             <a:avLst/>
@@ -3182,229 +3573,30 @@
           <a:noFill/>
         </p:spPr>
         <p:txBody>
-          <a:bodyPr wrap="square" lIns="0" rIns="0" tIns="0" bIns="0">
+          <a:bodyPr wrap="square" anchor="t" lIns="0" rIns="0" tIns="0" bIns="0">
             <a:spAutoFit/>
           </a:bodyPr>
           <a:lstStyle/>
           <a:p>
             <a:pPr>
               <a:lnSpc>
-                <a:spcPct val="104000"/>
+                <a:spcPct val="113000"/>
               </a:lnSpc>
+              <a:spcBef>
+                <a:spcPts val="0"/>
+              </a:spcBef>
               <a:spcAft>
                 <a:spcPts val="0"/>
               </a:spcAft>
             </a:pPr>
             <a:r>
-              <a:rPr sz="3700" b="1" i="0">
-                <a:solidFill>
-                  <a:srgbClr val="2E3138"/>
-                </a:solidFill>
-                <a:latin typeface="Liberation Serif"/>
-              </a:rPr>
-              <a:t>Analisis Telco Customer Churn</a:t>
-            </a:r>
-          </a:p>
-          <a:p>
-            <a:pPr>
-              <a:lnSpc>
-                <a:spcPct val="104000"/>
-              </a:lnSpc>
-              <a:spcAft>
-                <a:spcPts val="0"/>
-              </a:spcAft>
-            </a:pPr>
-            <a:r>
-              <a:rPr sz="3700" b="1" i="0">
-                <a:solidFill>
-                  <a:srgbClr val="2E3138"/>
-                </a:solidFill>
-                <a:latin typeface="Liberation Serif"/>
-              </a:rPr>
-              <a:t>dengan SQL dan Python</a:t>
-            </a:r>
-          </a:p>
-        </p:txBody>
-      </p:sp>
-      <p:sp>
-        <p:nvSpPr>
-          <p:cNvPr id="5" name="TextBox 4"/>
-          <p:cNvSpPr txBox="1"/>
-          <p:nvPr/>
-        </p:nvSpPr>
-        <p:spPr>
-          <a:xfrm>
-            <a:off x="777240" y="3474720"/>
-            <a:ext cx="6492240" cy="1280160"/>
-          </a:xfrm>
-          <a:prstGeom prst="rect">
-            <a:avLst/>
-          </a:prstGeom>
-          <a:noFill/>
-        </p:spPr>
-        <p:txBody>
-          <a:bodyPr wrap="square" lIns="0" rIns="0" tIns="0" bIns="0">
-            <a:spAutoFit/>
-          </a:bodyPr>
-          <a:lstStyle/>
-          <a:p>
-            <a:pPr>
-              <a:lnSpc>
-                <a:spcPct val="125000"/>
-              </a:lnSpc>
-              <a:spcAft>
-                <a:spcPts val="0"/>
-              </a:spcAft>
-            </a:pPr>
-            <a:r>
-              <a:rPr sz="1700" b="0" i="0">
-                <a:solidFill>
-                  <a:srgbClr val="33536E"/>
+              <a:rPr sz="1250" b="1">
+                <a:solidFill>
+                  <a:srgbClr val="FFFFFF"/>
                 </a:solidFill>
                 <a:latin typeface="Noto Sans"/>
               </a:rPr>
-              <a:t>Studi Kasus: IBM Sample Telco Customer Churn. Siapa yang Pergi, Kenapa, dan Berapa Pendapatan yang Hilang</a:t>
-            </a:r>
-          </a:p>
-        </p:txBody>
-      </p:sp>
-      <p:sp>
-        <p:nvSpPr>
-          <p:cNvPr id="6" name="TextBox 5"/>
-          <p:cNvSpPr txBox="1"/>
-          <p:nvPr/>
-        </p:nvSpPr>
-        <p:spPr>
-          <a:xfrm>
-            <a:off x="777240" y="5532120"/>
-            <a:ext cx="6675120" cy="914400"/>
-          </a:xfrm>
-          <a:prstGeom prst="rect">
-            <a:avLst/>
-          </a:prstGeom>
-          <a:noFill/>
-        </p:spPr>
-        <p:txBody>
-          <a:bodyPr wrap="square" lIns="0" rIns="0" tIns="0" bIns="0">
-            <a:spAutoFit/>
-          </a:bodyPr>
-          <a:lstStyle/>
-          <a:p>
-            <a:pPr>
-              <a:lnSpc>
-                <a:spcPct val="100000"/>
-              </a:lnSpc>
-              <a:spcAft>
-                <a:spcPts val="300"/>
-              </a:spcAft>
-            </a:pPr>
-            <a:r>
-              <a:rPr sz="1700" b="1" i="0">
-                <a:solidFill>
-                  <a:srgbClr val="2E3138"/>
-                </a:solidFill>
-                <a:latin typeface="Noto Sans"/>
-              </a:rPr>
-              <a:t>BAGHIZ ASSHIDDIQIE ARASYA</a:t>
-            </a:r>
-          </a:p>
-          <a:p>
-            <a:pPr>
-              <a:lnSpc>
-                <a:spcPct val="100000"/>
-              </a:lnSpc>
-              <a:spcAft>
-                <a:spcPts val="0"/>
-              </a:spcAft>
-            </a:pPr>
-            <a:r>
-              <a:rPr sz="1350" b="0" i="0">
-                <a:solidFill>
-                  <a:srgbClr val="5F636B"/>
-                </a:solidFill>
-                <a:latin typeface="Noto Sans"/>
-              </a:rPr>
-              <a:t>Data Analyst Portfolio Project</a:t>
-            </a:r>
-          </a:p>
-        </p:txBody>
-      </p:sp>
-      <p:sp>
-        <p:nvSpPr>
-          <p:cNvPr id="7" name="TextBox 6"/>
-          <p:cNvSpPr txBox="1"/>
-          <p:nvPr/>
-        </p:nvSpPr>
-        <p:spPr>
-          <a:xfrm>
-            <a:off x="8229600" y="1874519"/>
-            <a:ext cx="3611880" cy="3291840"/>
-          </a:xfrm>
-          <a:prstGeom prst="rect">
-            <a:avLst/>
-          </a:prstGeom>
-          <a:noFill/>
-        </p:spPr>
-        <p:txBody>
-          <a:bodyPr wrap="square" lIns="0" rIns="0" tIns="0" bIns="0">
-            <a:spAutoFit/>
-          </a:bodyPr>
-          <a:lstStyle/>
-          <a:p>
-            <a:pPr>
-              <a:lnSpc>
-                <a:spcPct val="100000"/>
-              </a:lnSpc>
-              <a:spcAft>
-                <a:spcPts val="600"/>
-              </a:spcAft>
-            </a:pPr>
-            <a:r>
-              <a:rPr sz="8000" b="1" i="0">
-                <a:solidFill>
-                  <a:srgbClr val="FFFFFF"/>
-                </a:solidFill>
-                <a:latin typeface="Noto Sans"/>
-              </a:rPr>
-              <a:t>26,6%</a:t>
-            </a:r>
-          </a:p>
-          <a:p>
-            <a:pPr>
-              <a:lnSpc>
-                <a:spcPct val="100000"/>
-              </a:lnSpc>
-              <a:spcAft>
-                <a:spcPts val="600"/>
-              </a:spcAft>
-            </a:pPr>
-            <a:r>
-              <a:rPr sz="1600" b="1" i="0">
-                <a:solidFill>
-                  <a:srgbClr val="FFFFFF"/>
-                </a:solidFill>
-                <a:latin typeface="Noto Sans"/>
-              </a:rPr>
-              <a:t>churn rate keseluruhan</a:t>
-            </a:r>
-          </a:p>
-          <a:p>
-            <a:pPr>
-              <a:lnSpc>
-                <a:spcPct val="120000"/>
-              </a:lnSpc>
-              <a:spcAft>
-                <a:spcPts val="0"/>
-              </a:spcAft>
-            </a:pPr>
-            <a:r>
-              <a:rPr sz="1450" b="0" i="0">
-                <a:solidFill>
-                  <a:srgbClr val="FFFFFF"/>
-                </a:solidFill>
-                <a:latin typeface="Noto Sans"/>
-              </a:rPr>
-              <a:t>1.869 dari 7.032 pelanggan berhenti berlangganan</a:t>
+              <a:t>Plus paket dashboard Power BI: star schema, DAX, panduan rakit.</a:t>
             </a:r>
           </a:p>
         </p:txBody>
@@ -3437,17 +3629,64 @@
       <p:grpSpPr/>
       <p:sp>
         <p:nvSpPr>
-          <p:cNvPr id="2" name="Rectangle 1"/>
-          <p:cNvSpPr/>
-          <p:nvPr/>
-        </p:nvSpPr>
-        <p:spPr>
-          <a:xfrm>
-            <a:off x="640080" y="502920"/>
-            <a:ext cx="146304" cy="475488"/>
+          <p:cNvPr id="2" name="TextBox 1"/>
+          <p:cNvSpPr txBox="1"/>
+          <p:nvPr/>
+        </p:nvSpPr>
+        <p:spPr>
+          <a:xfrm>
+            <a:off x="502920" y="384048"/>
+            <a:ext cx="11155680" cy="914400"/>
           </a:xfrm>
           <a:prstGeom prst="rect">
             <a:avLst/>
+          </a:prstGeom>
+          <a:noFill/>
+        </p:spPr>
+        <p:txBody>
+          <a:bodyPr wrap="square" anchor="t" lIns="0" rIns="0" tIns="0" bIns="0">
+            <a:spAutoFit/>
+          </a:bodyPr>
+          <a:lstStyle/>
+          <a:p>
+            <a:pPr>
+              <a:lnSpc>
+                <a:spcPct val="113000"/>
+              </a:lnSpc>
+              <a:spcBef>
+                <a:spcPts val="0"/>
+              </a:spcBef>
+              <a:spcAft>
+                <a:spcPts val="0"/>
+              </a:spcAft>
+            </a:pPr>
+            <a:r>
+              <a:rPr sz="3100" b="1">
+                <a:solidFill>
+                  <a:srgbClr val="2E3138"/>
+                </a:solidFill>
+                <a:latin typeface="Liberation Serif"/>
+              </a:rPr>
+              <a:t>Penutup</a:t>
+            </a:r>
+          </a:p>
+        </p:txBody>
+      </p:sp>
+      <p:sp>
+        <p:nvSpPr>
+          <p:cNvPr id="3" name="Rounded Rectangle 2"/>
+          <p:cNvSpPr/>
+          <p:nvPr/>
+        </p:nvSpPr>
+        <p:spPr>
+          <a:xfrm>
+            <a:off x="521207" y="1097280"/>
+            <a:ext cx="777240" cy="82296"/>
+          </a:xfrm>
+          <a:prstGeom prst="roundRect">
+            <a:avLst>
+              <a:gd name="adj" fmla="val 5500"/>
+            </a:avLst>
           </a:prstGeom>
           <a:solidFill>
             <a:srgbClr val="C75B7F"/>
@@ -3457,6 +3696,20 @@
           </a:ln>
           <a:effectLst/>
         </p:spPr>
+        <p:style>
+          <a:lnRef idx="1">
+            <a:schemeClr val="accent1"/>
+          </a:lnRef>
+          <a:fillRef idx="3">
+            <a:schemeClr val="accent1"/>
+          </a:fillRef>
+          <a:effectRef idx="2">
+            <a:schemeClr val="accent1"/>
+          </a:effectRef>
+          <a:fontRef idx="minor">
+            <a:schemeClr val="lt1"/>
+          </a:fontRef>
+        </p:style>
         <p:txBody>
           <a:bodyPr rtlCol="0" anchor="ctr"/>
           <a:lstStyle/>
@@ -3467,162 +3720,65 @@
       </p:sp>
       <p:sp>
         <p:nvSpPr>
-          <p:cNvPr id="3" name="TextBox 2"/>
-          <p:cNvSpPr txBox="1"/>
-          <p:nvPr/>
-        </p:nvSpPr>
-        <p:spPr>
-          <a:xfrm>
-            <a:off x="960120" y="347472"/>
-            <a:ext cx="10607040" cy="868680"/>
-          </a:xfrm>
-          <a:prstGeom prst="rect">
-            <a:avLst/>
-          </a:prstGeom>
-          <a:noFill/>
-        </p:spPr>
-        <p:txBody>
-          <a:bodyPr wrap="square" lIns="0" rIns="0" tIns="0" bIns="0">
-            <a:spAutoFit/>
-          </a:bodyPr>
-          <a:lstStyle/>
-          <a:p>
-            <a:pPr>
-              <a:lnSpc>
-                <a:spcPct val="100000"/>
-              </a:lnSpc>
-              <a:spcAft>
-                <a:spcPts val="0"/>
-              </a:spcAft>
-            </a:pPr>
-            <a:r>
-              <a:rPr sz="3200" b="1" i="0">
-                <a:solidFill>
-                  <a:srgbClr val="2E3138"/>
-                </a:solidFill>
-                <a:latin typeface="Liberation Serif"/>
-              </a:rPr>
-              <a:t>Kesimpulan</a:t>
-            </a:r>
-          </a:p>
-        </p:txBody>
-      </p:sp>
-      <p:sp>
-        <p:nvSpPr>
-          <p:cNvPr id="4" name="TextBox 3"/>
-          <p:cNvSpPr txBox="1"/>
-          <p:nvPr/>
-        </p:nvSpPr>
-        <p:spPr>
-          <a:xfrm>
-            <a:off x="640080" y="1463040"/>
-            <a:ext cx="6858000" cy="4206240"/>
-          </a:xfrm>
-          <a:prstGeom prst="rect">
-            <a:avLst/>
-          </a:prstGeom>
-          <a:noFill/>
-        </p:spPr>
-        <p:txBody>
-          <a:bodyPr wrap="square" lIns="0" rIns="0" tIns="0" bIns="0">
-            <a:spAutoFit/>
-          </a:bodyPr>
-          <a:lstStyle/>
-          <a:p>
-            <a:pPr marL="171450" indent="-171450">
-              <a:lnSpc>
-                <a:spcPct val="112000"/>
-              </a:lnSpc>
-              <a:spcAft>
-                <a:spcPts val="1100"/>
-              </a:spcAft>
-              <a:buChar char="•"/>
-            </a:pPr>
-            <a:r>
-              <a:rPr sz="1600" b="0" i="0">
-                <a:solidFill>
-                  <a:srgbClr val="2E3138"/>
-                </a:solidFill>
-                <a:latin typeface="Noto Sans"/>
-              </a:rPr>
-              <a:t>Kontrak bulanan, tahun pertama, dan fiber optic adalah tiga pendorong churn terbesar</a:t>
-            </a:r>
-          </a:p>
-          <a:p>
-            <a:pPr marL="171450" indent="-171450">
-              <a:lnSpc>
-                <a:spcPct val="112000"/>
-              </a:lnSpc>
-              <a:spcAft>
-                <a:spcPts val="1100"/>
-              </a:spcAft>
-              <a:buChar char="•"/>
-            </a:pPr>
-            <a:r>
-              <a:rPr sz="1600" b="0" i="0">
-                <a:solidFill>
-                  <a:srgbClr val="2E3138"/>
-                </a:solidFill>
-                <a:latin typeface="Noto Sans"/>
-              </a:rPr>
-              <a:t>Fokus retensi pada segmen kombinasi: fiber plus kontrak bulanan (54,6 persen) dan kontrak bulanan plus pelanggan baru (51,4 persen)</a:t>
-            </a:r>
-          </a:p>
-          <a:p>
-            <a:pPr marL="171450" indent="-171450">
-              <a:lnSpc>
-                <a:spcPct val="112000"/>
-              </a:lnSpc>
-              <a:spcAft>
-                <a:spcPts val="1100"/>
-              </a:spcAft>
-              <a:buChar char="•"/>
-            </a:pPr>
-            <a:r>
-              <a:rPr sz="1600" b="0" i="0">
-                <a:solidFill>
-                  <a:srgbClr val="2E3138"/>
-                </a:solidFill>
-                <a:latin typeface="Noto Sans"/>
-              </a:rPr>
-              <a:t>Churn bukan sekadar angka pelanggan: 139.131 USD pendapatan hilang setiap bulan</a:t>
-            </a:r>
-          </a:p>
-          <a:p>
-            <a:pPr marL="171450" indent="-171450">
-              <a:lnSpc>
-                <a:spcPct val="112000"/>
-              </a:lnSpc>
-              <a:spcAft>
-                <a:spcPts val="1100"/>
-              </a:spcAft>
-              <a:buChar char="•"/>
-            </a:pPr>
-            <a:r>
-              <a:rPr sz="1600" b="0" i="0">
-                <a:solidFill>
-                  <a:srgbClr val="2E3138"/>
-                </a:solidFill>
-                <a:latin typeface="Noto Sans"/>
-              </a:rPr>
-              <a:t>Tech stack: SQL di SQLite, Python dengan pandas, matplotlib, dan seaborn</a:t>
-            </a:r>
-          </a:p>
-        </p:txBody>
-      </p:sp>
-      <p:sp>
-        <p:nvSpPr>
-          <p:cNvPr id="5" name="Rectangle 4"/>
+          <p:cNvPr id="4" name="Rounded Rectangle 3"/>
           <p:cNvSpPr/>
           <p:nvPr/>
         </p:nvSpPr>
         <p:spPr>
           <a:xfrm>
-            <a:off x="7863840" y="1463040"/>
-            <a:ext cx="3685032" cy="4206240"/>
-          </a:xfrm>
-          <a:prstGeom prst="rect">
-            <a:avLst/>
+            <a:off x="566928" y="1435608"/>
+            <a:ext cx="6720840" cy="3246120"/>
+          </a:xfrm>
+          <a:prstGeom prst="roundRect">
+            <a:avLst>
+              <a:gd name="adj" fmla="val 5500"/>
+            </a:avLst>
+          </a:prstGeom>
+          <a:solidFill>
+            <a:srgbClr val="D9C9AE"/>
+          </a:solidFill>
+          <a:ln>
+            <a:noFill/>
+          </a:ln>
+          <a:effectLst/>
+        </p:spPr>
+        <p:style>
+          <a:lnRef idx="1">
+            <a:schemeClr val="accent1"/>
+          </a:lnRef>
+          <a:fillRef idx="3">
+            <a:schemeClr val="accent1"/>
+          </a:fillRef>
+          <a:effectRef idx="2">
+            <a:schemeClr val="accent1"/>
+          </a:effectRef>
+          <a:fontRef idx="minor">
+            <a:schemeClr val="lt1"/>
+          </a:fontRef>
+        </p:style>
+        <p:txBody>
+          <a:bodyPr rtlCol="0" anchor="ctr"/>
+          <a:lstStyle/>
+          <a:p>
+            <a:pPr algn="ctr"/>
+          </a:p>
+        </p:txBody>
+      </p:sp>
+      <p:sp>
+        <p:nvSpPr>
+          <p:cNvPr id="5" name="Rounded Rectangle 4"/>
+          <p:cNvSpPr/>
+          <p:nvPr/>
+        </p:nvSpPr>
+        <p:spPr>
+          <a:xfrm>
+            <a:off x="502920" y="1371600"/>
+            <a:ext cx="6720840" cy="3246120"/>
+          </a:xfrm>
+          <a:prstGeom prst="roundRect">
+            <a:avLst>
+              <a:gd name="adj" fmla="val 5500"/>
+            </a:avLst>
           </a:prstGeom>
           <a:solidFill>
             <a:srgbClr val="F7F1E5"/>
@@ -3632,6 +3788,20 @@
           </a:ln>
           <a:effectLst/>
         </p:spPr>
+        <p:style>
+          <a:lnRef idx="1">
+            <a:schemeClr val="accent1"/>
+          </a:lnRef>
+          <a:fillRef idx="3">
+            <a:schemeClr val="accent1"/>
+          </a:fillRef>
+          <a:effectRef idx="2">
+            <a:schemeClr val="accent1"/>
+          </a:effectRef>
+          <a:fontRef idx="minor">
+            <a:schemeClr val="lt1"/>
+          </a:fontRef>
+        </p:style>
         <p:txBody>
           <a:bodyPr rtlCol="0" anchor="ctr"/>
           <a:lstStyle/>
@@ -3648,8 +3818,8 @@
         </p:nvSpPr>
         <p:spPr>
           <a:xfrm>
-            <a:off x="8183879" y="1783080"/>
-            <a:ext cx="3063240" cy="3566160"/>
+            <a:off x="868680" y="1691640"/>
+            <a:ext cx="6035040" cy="2697480"/>
           </a:xfrm>
           <a:prstGeom prst="rect">
             <a:avLst/>
@@ -3657,60 +3827,338 @@
           <a:noFill/>
         </p:spPr>
         <p:txBody>
-          <a:bodyPr wrap="square" lIns="0" rIns="0" tIns="0" bIns="0">
+          <a:bodyPr wrap="square" anchor="t" lIns="0" rIns="0" tIns="0" bIns="0">
             <a:spAutoFit/>
           </a:bodyPr>
           <a:lstStyle/>
           <a:p>
             <a:pPr>
               <a:lnSpc>
-                <a:spcPct val="100000"/>
+                <a:spcPct val="113000"/>
               </a:lnSpc>
+              <a:spcBef>
+                <a:spcPts val="0"/>
+              </a:spcBef>
+              <a:spcAft>
+                <a:spcPts val="800"/>
+              </a:spcAft>
+            </a:pPr>
+            <a:r>
+              <a:rPr sz="1600" b="1">
+                <a:solidFill>
+                  <a:srgbClr val="4E7FA6"/>
+                </a:solidFill>
+                <a:latin typeface="Liberation Serif"/>
+              </a:rPr>
+              <a:t>Kesimpulan</a:t>
+            </a:r>
+          </a:p>
+          <a:p>
+            <a:pPr>
+              <a:lnSpc>
+                <a:spcPct val="113000"/>
+              </a:lnSpc>
+              <a:spcBef>
+                <a:spcPts val="0"/>
+              </a:spcBef>
+              <a:spcAft>
+                <a:spcPts val="0"/>
+              </a:spcAft>
+            </a:pPr>
+            <a:r>
+              <a:rPr sz="1500" b="0">
+                <a:solidFill>
+                  <a:srgbClr val="2E3138"/>
+                </a:solidFill>
+                <a:latin typeface="Noto Sans"/>
+              </a:rPr>
+              <a:t>Kontrak bulanan, tahun pertama, dan fiber optic adalah tiga pendorong churn terbesar. Fokus retensi pada segmen kombinasi (fiber + bulanan 54,6%) adalah tuas pendapatan terbesar.</a:t>
+            </a:r>
+          </a:p>
+        </p:txBody>
+      </p:sp>
+      <p:sp>
+        <p:nvSpPr>
+          <p:cNvPr id="7" name="Rounded Rectangle 6"/>
+          <p:cNvSpPr/>
+          <p:nvPr/>
+        </p:nvSpPr>
+        <p:spPr>
+          <a:xfrm>
+            <a:off x="7543800" y="1371600"/>
+            <a:ext cx="4142232" cy="1536192"/>
+          </a:xfrm>
+          <a:prstGeom prst="roundRect">
+            <a:avLst>
+              <a:gd name="adj" fmla="val 5500"/>
+            </a:avLst>
+          </a:prstGeom>
+          <a:solidFill>
+            <a:srgbClr val="4E7FA6"/>
+          </a:solidFill>
+          <a:ln>
+            <a:noFill/>
+          </a:ln>
+          <a:effectLst/>
+        </p:spPr>
+        <p:style>
+          <a:lnRef idx="1">
+            <a:schemeClr val="accent1"/>
+          </a:lnRef>
+          <a:fillRef idx="3">
+            <a:schemeClr val="accent1"/>
+          </a:fillRef>
+          <a:effectRef idx="2">
+            <a:schemeClr val="accent1"/>
+          </a:effectRef>
+          <a:fontRef idx="minor">
+            <a:schemeClr val="lt1"/>
+          </a:fontRef>
+        </p:style>
+        <p:txBody>
+          <a:bodyPr rtlCol="0" anchor="ctr"/>
+          <a:lstStyle/>
+          <a:p>
+            <a:pPr algn="ctr"/>
+          </a:p>
+        </p:txBody>
+      </p:sp>
+      <p:sp>
+        <p:nvSpPr>
+          <p:cNvPr id="8" name="TextBox 7"/>
+          <p:cNvSpPr txBox="1"/>
+          <p:nvPr/>
+        </p:nvSpPr>
+        <p:spPr>
+          <a:xfrm>
+            <a:off x="7863840" y="1572768"/>
+            <a:ext cx="3520440" cy="1188720"/>
+          </a:xfrm>
+          <a:prstGeom prst="rect">
+            <a:avLst/>
+          </a:prstGeom>
+          <a:noFill/>
+        </p:spPr>
+        <p:txBody>
+          <a:bodyPr wrap="square" anchor="t" lIns="0" rIns="0" tIns="0" bIns="0">
+            <a:spAutoFit/>
+          </a:bodyPr>
+          <a:lstStyle/>
+          <a:p>
+            <a:pPr>
+              <a:lnSpc>
+                <a:spcPct val="113000"/>
+              </a:lnSpc>
+              <a:spcBef>
+                <a:spcPts val="0"/>
+              </a:spcBef>
               <a:spcAft>
                 <a:spcPts val="400"/>
               </a:spcAft>
             </a:pPr>
             <a:r>
-              <a:rPr sz="4000" b="1" i="0">
-                <a:solidFill>
-                  <a:srgbClr val="C75B7F"/>
+              <a:rPr sz="1450" b="1">
+                <a:solidFill>
+                  <a:srgbClr val="FFFFFF"/>
+                </a:solidFill>
+                <a:latin typeface="Liberation Serif"/>
+              </a:rPr>
+              <a:t>Rekomendasi utama</a:t>
+            </a:r>
+          </a:p>
+          <a:p>
+            <a:pPr>
+              <a:lnSpc>
+                <a:spcPct val="113000"/>
+              </a:lnSpc>
+              <a:spcBef>
+                <a:spcPts val="0"/>
+              </a:spcBef>
+              <a:spcAft>
+                <a:spcPts val="0"/>
+              </a:spcAft>
+            </a:pPr>
+            <a:r>
+              <a:rPr sz="1200" b="0">
+                <a:solidFill>
+                  <a:srgbClr val="F7F1E5"/>
                 </a:solidFill>
                 <a:latin typeface="Noto Sans"/>
               </a:rPr>
-              <a:t>26,6%</a:t>
-            </a:r>
-          </a:p>
+              <a:t>Onboarding 12 bulan pertama; konversi kontrak bulanan ke tahunan; audit nilai fiber optic; dorong auto-pay; bundel dukungan untuk segmen rawan.</a:t>
+            </a:r>
+          </a:p>
+        </p:txBody>
+      </p:sp>
+      <p:sp>
+        <p:nvSpPr>
+          <p:cNvPr id="9" name="Rounded Rectangle 8"/>
+          <p:cNvSpPr/>
+          <p:nvPr/>
+        </p:nvSpPr>
+        <p:spPr>
+          <a:xfrm>
+            <a:off x="7543800" y="3081528"/>
+            <a:ext cx="4142232" cy="1536192"/>
+          </a:xfrm>
+          <a:prstGeom prst="roundRect">
+            <a:avLst>
+              <a:gd name="adj" fmla="val 5500"/>
+            </a:avLst>
+          </a:prstGeom>
+          <a:solidFill>
+            <a:srgbClr val="F7F1E5"/>
+          </a:solidFill>
+          <a:ln>
+            <a:noFill/>
+          </a:ln>
+          <a:effectLst/>
+        </p:spPr>
+        <p:style>
+          <a:lnRef idx="1">
+            <a:schemeClr val="accent1"/>
+          </a:lnRef>
+          <a:fillRef idx="3">
+            <a:schemeClr val="accent1"/>
+          </a:fillRef>
+          <a:effectRef idx="2">
+            <a:schemeClr val="accent1"/>
+          </a:effectRef>
+          <a:fontRef idx="minor">
+            <a:schemeClr val="lt1"/>
+          </a:fontRef>
+        </p:style>
+        <p:txBody>
+          <a:bodyPr rtlCol="0" anchor="ctr"/>
+          <a:lstStyle/>
+          <a:p>
+            <a:pPr algn="ctr"/>
+          </a:p>
+        </p:txBody>
+      </p:sp>
+      <p:sp>
+        <p:nvSpPr>
+          <p:cNvPr id="10" name="TextBox 9"/>
+          <p:cNvSpPr txBox="1"/>
+          <p:nvPr/>
+        </p:nvSpPr>
+        <p:spPr>
+          <a:xfrm>
+            <a:off x="7863840" y="3282696"/>
+            <a:ext cx="3520440" cy="1188720"/>
+          </a:xfrm>
+          <a:prstGeom prst="rect">
+            <a:avLst/>
+          </a:prstGeom>
+          <a:noFill/>
+        </p:spPr>
+        <p:txBody>
+          <a:bodyPr wrap="square" anchor="t" lIns="0" rIns="0" tIns="0" bIns="0">
+            <a:spAutoFit/>
+          </a:bodyPr>
+          <a:lstStyle/>
           <a:p>
             <a:pPr>
               <a:lnSpc>
-                <a:spcPct val="125000"/>
+                <a:spcPct val="113000"/>
               </a:lnSpc>
+              <a:spcBef>
+                <a:spcPts val="0"/>
+              </a:spcBef>
               <a:spcAft>
-                <a:spcPts val="0"/>
+                <a:spcPts val="400"/>
               </a:spcAft>
             </a:pPr>
             <a:r>
-              <a:rPr sz="1450" b="0" i="0">
+              <a:rPr sz="1450" b="1">
+                <a:solidFill>
+                  <a:srgbClr val="4E7FA6"/>
+                </a:solidFill>
+                <a:latin typeface="Liberation Serif"/>
+              </a:rPr>
+              <a:t>Terbuka untuk direproduksi</a:t>
+            </a:r>
+          </a:p>
+          <a:p>
+            <a:pPr>
+              <a:lnSpc>
+                <a:spcPct val="113000"/>
+              </a:lnSpc>
+              <a:spcBef>
+                <a:spcPts val="0"/>
+              </a:spcBef>
+              <a:spcAft>
+                <a:spcPts val="0"/>
+              </a:spcAft>
+            </a:pPr>
+            <a:r>
+              <a:rPr sz="1200" b="0">
                 <a:solidFill>
                   <a:srgbClr val="2E3138"/>
                 </a:solidFill>
                 <a:latin typeface="Noto Sans"/>
               </a:rPr>
-              <a:t>satu dari empat pelanggan pergi. Retensi segmen rawan adalah tuas pendapatan terbesar.</a:t>
-            </a:r>
-          </a:p>
-        </p:txBody>
-      </p:sp>
-      <p:sp>
-        <p:nvSpPr>
-          <p:cNvPr id="7" name="TextBox 6"/>
+              <a:t>Notebook analisis, query SQL, dan data bersih terbuka di repo untuk dihitung ulang dari nol.</a:t>
+            </a:r>
+          </a:p>
+        </p:txBody>
+      </p:sp>
+      <p:sp>
+        <p:nvSpPr>
+          <p:cNvPr id="11" name="Rounded Rectangle 10"/>
+          <p:cNvSpPr/>
+          <p:nvPr/>
+        </p:nvSpPr>
+        <p:spPr>
+          <a:xfrm>
+            <a:off x="502920" y="4892040"/>
+            <a:ext cx="11183112" cy="1463040"/>
+          </a:xfrm>
+          <a:prstGeom prst="roundRect">
+            <a:avLst>
+              <a:gd name="adj" fmla="val 5500"/>
+            </a:avLst>
+          </a:prstGeom>
+          <a:solidFill>
+            <a:srgbClr val="4E7FA6"/>
+          </a:solidFill>
+          <a:ln>
+            <a:noFill/>
+          </a:ln>
+          <a:effectLst/>
+        </p:spPr>
+        <p:style>
+          <a:lnRef idx="1">
+            <a:schemeClr val="accent1"/>
+          </a:lnRef>
+          <a:fillRef idx="3">
+            <a:schemeClr val="accent1"/>
+          </a:fillRef>
+          <a:effectRef idx="2">
+            <a:schemeClr val="accent1"/>
+          </a:effectRef>
+          <a:fontRef idx="minor">
+            <a:schemeClr val="lt1"/>
+          </a:fontRef>
+        </p:style>
+        <p:txBody>
+          <a:bodyPr rtlCol="0" anchor="ctr"/>
+          <a:lstStyle/>
+          <a:p>
+            <a:pPr algn="ctr"/>
+          </a:p>
+        </p:txBody>
+      </p:sp>
+      <p:sp>
+        <p:nvSpPr>
+          <p:cNvPr id="12" name="TextBox 11"/>
           <p:cNvSpPr txBox="1"/>
           <p:nvPr/>
         </p:nvSpPr>
         <p:spPr>
           <a:xfrm>
-            <a:off x="640080" y="5806440"/>
-            <a:ext cx="7863840" cy="868680"/>
+            <a:off x="914400" y="5193792"/>
+            <a:ext cx="6949440" cy="914400"/>
           </a:xfrm>
           <a:prstGeom prst="rect">
             <a:avLst/>
@@ -3718,25 +4166,28 @@
           <a:noFill/>
         </p:spPr>
         <p:txBody>
-          <a:bodyPr wrap="square" lIns="0" rIns="0" tIns="0" bIns="0">
+          <a:bodyPr wrap="square" anchor="t" lIns="0" rIns="0" tIns="0" bIns="0">
             <a:spAutoFit/>
           </a:bodyPr>
           <a:lstStyle/>
           <a:p>
             <a:pPr>
               <a:lnSpc>
-                <a:spcPct val="100000"/>
+                <a:spcPct val="113000"/>
               </a:lnSpc>
+              <a:spcBef>
+                <a:spcPts val="0"/>
+              </a:spcBef>
               <a:spcAft>
                 <a:spcPts val="300"/>
               </a:spcAft>
             </a:pPr>
             <a:r>
-              <a:rPr sz="2200" b="1" i="0">
-                <a:solidFill>
-                  <a:srgbClr val="2E3138"/>
-                </a:solidFill>
-                <a:latin typeface="Liberation Serif"/>
+              <a:rPr sz="2300" b="1">
+                <a:solidFill>
+                  <a:srgbClr val="FFFFFF"/>
+                </a:solidFill>
+                <a:latin typeface="Noto Sans"/>
               </a:rPr>
               <a:t>BAGHIZ ASSHIDDIQIE ARASYA</a:t>
             </a:r>
@@ -3744,16 +4195,19 @@
           <a:p>
             <a:pPr>
               <a:lnSpc>
-                <a:spcPct val="100000"/>
+                <a:spcPct val="113000"/>
               </a:lnSpc>
+              <a:spcBef>
+                <a:spcPts val="0"/>
+              </a:spcBef>
               <a:spcAft>
                 <a:spcPts val="0"/>
               </a:spcAft>
             </a:pPr>
             <a:r>
-              <a:rPr sz="1450" b="0" i="0">
-                <a:solidFill>
-                  <a:srgbClr val="33536E"/>
+              <a:rPr sz="1350" b="0">
+                <a:solidFill>
+                  <a:srgbClr val="EFC3D2"/>
                 </a:solidFill>
                 <a:latin typeface="Noto Sans"/>
               </a:rPr>
@@ -3764,14 +4218,14 @@
       </p:sp>
       <p:sp>
         <p:nvSpPr>
-          <p:cNvPr id="8" name="TextBox 7"/>
+          <p:cNvPr id="13" name="TextBox 12"/>
           <p:cNvSpPr txBox="1"/>
           <p:nvPr/>
         </p:nvSpPr>
         <p:spPr>
           <a:xfrm>
-            <a:off x="7863840" y="5989320"/>
-            <a:ext cx="3685032" cy="548640"/>
+            <a:off x="8138160" y="5321808"/>
+            <a:ext cx="3154680" cy="777240"/>
           </a:xfrm>
           <a:prstGeom prst="rect">
             <a:avLst/>
@@ -3779,27 +4233,30 @@
           <a:noFill/>
         </p:spPr>
         <p:txBody>
-          <a:bodyPr wrap="square" lIns="0" rIns="0" tIns="0" bIns="0">
+          <a:bodyPr wrap="square" anchor="t" lIns="0" rIns="0" tIns="0" bIns="0">
             <a:spAutoFit/>
           </a:bodyPr>
           <a:lstStyle/>
           <a:p>
             <a:pPr>
               <a:lnSpc>
-                <a:spcPct val="100000"/>
+                <a:spcPct val="113000"/>
               </a:lnSpc>
+              <a:spcBef>
+                <a:spcPts val="0"/>
+              </a:spcBef>
               <a:spcAft>
                 <a:spcPts val="0"/>
               </a:spcAft>
             </a:pPr>
             <a:r>
-              <a:rPr sz="1450" b="1" i="0">
-                <a:solidFill>
-                  <a:srgbClr val="C75B7F"/>
+              <a:rPr sz="1250" b="0">
+                <a:solidFill>
+                  <a:srgbClr val="F7F1E5"/>
                 </a:solidFill>
                 <a:latin typeface="Noto Sans"/>
               </a:rPr>
-              <a:t>Mari diskusi soal data dan retensi pelanggan.</a:t>
+              <a:t>Terima kasih. Silakan jelajahi repo dan dashboardnya, semua angka terbuka untuk dicek ulang.</a:t>
             </a:r>
           </a:p>
         </p:txBody>
@@ -3832,17 +4289,64 @@
       <p:grpSpPr/>
       <p:sp>
         <p:nvSpPr>
-          <p:cNvPr id="2" name="Rectangle 1"/>
-          <p:cNvSpPr/>
-          <p:nvPr/>
-        </p:nvSpPr>
-        <p:spPr>
-          <a:xfrm>
-            <a:off x="640080" y="502920"/>
-            <a:ext cx="146304" cy="475488"/>
+          <p:cNvPr id="2" name="TextBox 1"/>
+          <p:cNvSpPr txBox="1"/>
+          <p:nvPr/>
+        </p:nvSpPr>
+        <p:spPr>
+          <a:xfrm>
+            <a:off x="502920" y="384048"/>
+            <a:ext cx="11155680" cy="914400"/>
           </a:xfrm>
           <a:prstGeom prst="rect">
             <a:avLst/>
+          </a:prstGeom>
+          <a:noFill/>
+        </p:spPr>
+        <p:txBody>
+          <a:bodyPr wrap="square" anchor="t" lIns="0" rIns="0" tIns="0" bIns="0">
+            <a:spAutoFit/>
+          </a:bodyPr>
+          <a:lstStyle/>
+          <a:p>
+            <a:pPr>
+              <a:lnSpc>
+                <a:spcPct val="113000"/>
+              </a:lnSpc>
+              <a:spcBef>
+                <a:spcPts val="0"/>
+              </a:spcBef>
+              <a:spcAft>
+                <a:spcPts val="0"/>
+              </a:spcAft>
+            </a:pPr>
+            <a:r>
+              <a:rPr sz="3100" b="1">
+                <a:solidFill>
+                  <a:srgbClr val="2E3138"/>
+                </a:solidFill>
+                <a:latin typeface="Liberation Serif"/>
+              </a:rPr>
+              <a:t>Latar Belakang</a:t>
+            </a:r>
+          </a:p>
+        </p:txBody>
+      </p:sp>
+      <p:sp>
+        <p:nvSpPr>
+          <p:cNvPr id="3" name="Rounded Rectangle 2"/>
+          <p:cNvSpPr/>
+          <p:nvPr/>
+        </p:nvSpPr>
+        <p:spPr>
+          <a:xfrm>
+            <a:off x="521207" y="1097280"/>
+            <a:ext cx="777240" cy="82296"/>
+          </a:xfrm>
+          <a:prstGeom prst="roundRect">
+            <a:avLst>
+              <a:gd name="adj" fmla="val 5500"/>
+            </a:avLst>
           </a:prstGeom>
           <a:solidFill>
             <a:srgbClr val="C75B7F"/>
@@ -3852,6 +4356,20 @@
           </a:ln>
           <a:effectLst/>
         </p:spPr>
+        <p:style>
+          <a:lnRef idx="1">
+            <a:schemeClr val="accent1"/>
+          </a:lnRef>
+          <a:fillRef idx="3">
+            <a:schemeClr val="accent1"/>
+          </a:fillRef>
+          <a:effectRef idx="2">
+            <a:schemeClr val="accent1"/>
+          </a:effectRef>
+          <a:fontRef idx="minor">
+            <a:schemeClr val="lt1"/>
+          </a:fontRef>
+        </p:style>
         <p:txBody>
           <a:bodyPr rtlCol="0" anchor="ctr"/>
           <a:lstStyle/>
@@ -3862,162 +4380,65 @@
       </p:sp>
       <p:sp>
         <p:nvSpPr>
-          <p:cNvPr id="3" name="TextBox 2"/>
-          <p:cNvSpPr txBox="1"/>
-          <p:nvPr/>
-        </p:nvSpPr>
-        <p:spPr>
-          <a:xfrm>
-            <a:off x="960120" y="347472"/>
-            <a:ext cx="10607040" cy="868680"/>
-          </a:xfrm>
-          <a:prstGeom prst="rect">
-            <a:avLst/>
-          </a:prstGeom>
-          <a:noFill/>
-        </p:spPr>
-        <p:txBody>
-          <a:bodyPr wrap="square" lIns="0" rIns="0" tIns="0" bIns="0">
-            <a:spAutoFit/>
-          </a:bodyPr>
-          <a:lstStyle/>
-          <a:p>
-            <a:pPr>
-              <a:lnSpc>
-                <a:spcPct val="100000"/>
-              </a:lnSpc>
-              <a:spcAft>
-                <a:spcPts val="0"/>
-              </a:spcAft>
-            </a:pPr>
-            <a:r>
-              <a:rPr sz="3200" b="1" i="0">
-                <a:solidFill>
-                  <a:srgbClr val="2E3138"/>
-                </a:solidFill>
-                <a:latin typeface="Liberation Serif"/>
-              </a:rPr>
-              <a:t>Latar Belakang</a:t>
-            </a:r>
-          </a:p>
-        </p:txBody>
-      </p:sp>
-      <p:sp>
-        <p:nvSpPr>
-          <p:cNvPr id="4" name="TextBox 3"/>
-          <p:cNvSpPr txBox="1"/>
-          <p:nvPr/>
-        </p:nvSpPr>
-        <p:spPr>
-          <a:xfrm>
-            <a:off x="640080" y="1463040"/>
-            <a:ext cx="6858000" cy="4754880"/>
-          </a:xfrm>
-          <a:prstGeom prst="rect">
-            <a:avLst/>
-          </a:prstGeom>
-          <a:noFill/>
-        </p:spPr>
-        <p:txBody>
-          <a:bodyPr wrap="square" lIns="0" rIns="0" tIns="0" bIns="0">
-            <a:spAutoFit/>
-          </a:bodyPr>
-          <a:lstStyle/>
-          <a:p>
-            <a:pPr marL="171450" indent="-171450">
-              <a:lnSpc>
-                <a:spcPct val="112000"/>
-              </a:lnSpc>
-              <a:spcAft>
-                <a:spcPts val="1100"/>
-              </a:spcAft>
-              <a:buChar char="•"/>
-            </a:pPr>
-            <a:r>
-              <a:rPr sz="1650" b="0" i="0">
-                <a:solidFill>
-                  <a:srgbClr val="2E3138"/>
-                </a:solidFill>
-                <a:latin typeface="Noto Sans"/>
-              </a:rPr>
-              <a:t>Dataset IBM Sample Telco Customer Churn: 7.032 pelanggan bersih dengan 21 kolom demografi, layanan, kontrak, dan tagihan</a:t>
-            </a:r>
-          </a:p>
-          <a:p>
-            <a:pPr marL="171450" indent="-171450">
-              <a:lnSpc>
-                <a:spcPct val="112000"/>
-              </a:lnSpc>
-              <a:spcAft>
-                <a:spcPts val="1100"/>
-              </a:spcAft>
-              <a:buChar char="•"/>
-            </a:pPr>
-            <a:r>
-              <a:rPr sz="1650" b="0" i="0">
-                <a:solidFill>
-                  <a:srgbClr val="2E3138"/>
-                </a:solidFill>
-                <a:latin typeface="Noto Sans"/>
-              </a:rPr>
-              <a:t>Pertanyaan utama: pelanggan mana yang berhenti berlangganan, kenapa mereka pergi, dan berapa pendapatan yang hilang</a:t>
-            </a:r>
-          </a:p>
-          <a:p>
-            <a:pPr marL="171450" indent="-171450">
-              <a:lnSpc>
-                <a:spcPct val="112000"/>
-              </a:lnSpc>
-              <a:spcAft>
-                <a:spcPts val="1100"/>
-              </a:spcAft>
-              <a:buChar char="•"/>
-            </a:pPr>
-            <a:r>
-              <a:rPr sz="1650" b="0" i="0">
-                <a:solidFill>
-                  <a:srgbClr val="2E3138"/>
-                </a:solidFill>
-                <a:latin typeface="Noto Sans"/>
-              </a:rPr>
-              <a:t>Churn rate keseluruhan 26,6 persen atau 1.869 pelanggan, lebih dari 1 dari 4 pelanggan pergi</a:t>
-            </a:r>
-          </a:p>
-          <a:p>
-            <a:pPr marL="171450" indent="-171450">
-              <a:lnSpc>
-                <a:spcPct val="112000"/>
-              </a:lnSpc>
-              <a:spcAft>
-                <a:spcPts val="1100"/>
-              </a:spcAft>
-              <a:buChar char="•"/>
-            </a:pPr>
-            <a:r>
-              <a:rPr sz="1650" b="0" i="0">
-                <a:solidFill>
-                  <a:srgbClr val="2E3138"/>
-                </a:solidFill>
-                <a:latin typeface="Noto Sans"/>
-              </a:rPr>
-              <a:t>Tujuan analisis: menemukan segmen paling rawan churn lalu menyusun rekomendasi retensi yang konkret dan terukur</a:t>
-            </a:r>
-          </a:p>
-        </p:txBody>
-      </p:sp>
-      <p:sp>
-        <p:nvSpPr>
-          <p:cNvPr id="5" name="Rectangle 4"/>
+          <p:cNvPr id="4" name="Rounded Rectangle 3"/>
           <p:cNvSpPr/>
           <p:nvPr/>
         </p:nvSpPr>
         <p:spPr>
           <a:xfrm>
-            <a:off x="7863840" y="1463040"/>
-            <a:ext cx="3685032" cy="4526280"/>
-          </a:xfrm>
-          <a:prstGeom prst="rect">
-            <a:avLst/>
+            <a:off x="566928" y="1481328"/>
+            <a:ext cx="6903720" cy="4206240"/>
+          </a:xfrm>
+          <a:prstGeom prst="roundRect">
+            <a:avLst>
+              <a:gd name="adj" fmla="val 5500"/>
+            </a:avLst>
+          </a:prstGeom>
+          <a:solidFill>
+            <a:srgbClr val="D9C9AE"/>
+          </a:solidFill>
+          <a:ln>
+            <a:noFill/>
+          </a:ln>
+          <a:effectLst/>
+        </p:spPr>
+        <p:style>
+          <a:lnRef idx="1">
+            <a:schemeClr val="accent1"/>
+          </a:lnRef>
+          <a:fillRef idx="3">
+            <a:schemeClr val="accent1"/>
+          </a:fillRef>
+          <a:effectRef idx="2">
+            <a:schemeClr val="accent1"/>
+          </a:effectRef>
+          <a:fontRef idx="minor">
+            <a:schemeClr val="lt1"/>
+          </a:fontRef>
+        </p:style>
+        <p:txBody>
+          <a:bodyPr rtlCol="0" anchor="ctr"/>
+          <a:lstStyle/>
+          <a:p>
+            <a:pPr algn="ctr"/>
+          </a:p>
+        </p:txBody>
+      </p:sp>
+      <p:sp>
+        <p:nvSpPr>
+          <p:cNvPr id="5" name="Rounded Rectangle 4"/>
+          <p:cNvSpPr/>
+          <p:nvPr/>
+        </p:nvSpPr>
+        <p:spPr>
+          <a:xfrm>
+            <a:off x="502920" y="1417320"/>
+            <a:ext cx="6903720" cy="4206240"/>
+          </a:xfrm>
+          <a:prstGeom prst="roundRect">
+            <a:avLst>
+              <a:gd name="adj" fmla="val 5500"/>
+            </a:avLst>
           </a:prstGeom>
           <a:solidFill>
             <a:srgbClr val="F7F1E5"/>
@@ -4027,6 +4448,20 @@
           </a:ln>
           <a:effectLst/>
         </p:spPr>
+        <p:style>
+          <a:lnRef idx="1">
+            <a:schemeClr val="accent1"/>
+          </a:lnRef>
+          <a:fillRef idx="3">
+            <a:schemeClr val="accent1"/>
+          </a:fillRef>
+          <a:effectRef idx="2">
+            <a:schemeClr val="accent1"/>
+          </a:effectRef>
+          <a:fontRef idx="minor">
+            <a:schemeClr val="lt1"/>
+          </a:fontRef>
+        </p:style>
         <p:txBody>
           <a:bodyPr rtlCol="0" anchor="ctr"/>
           <a:lstStyle/>
@@ -4043,8 +4478,8 @@
         </p:nvSpPr>
         <p:spPr>
           <a:xfrm>
-            <a:off x="8183879" y="1783080"/>
-            <a:ext cx="3108960" cy="1051560"/>
+            <a:off x="868680" y="1783080"/>
+            <a:ext cx="6217920" cy="3566160"/>
           </a:xfrm>
           <a:prstGeom prst="rect">
             <a:avLst/>
@@ -4052,23 +4487,161 @@
           <a:noFill/>
         </p:spPr>
         <p:txBody>
-          <a:bodyPr wrap="square" lIns="0" rIns="0" tIns="0" bIns="0">
+          <a:bodyPr wrap="square" anchor="t" lIns="0" rIns="0" tIns="0" bIns="0">
             <a:spAutoFit/>
           </a:bodyPr>
           <a:lstStyle/>
           <a:p>
             <a:pPr>
               <a:lnSpc>
-                <a:spcPct val="100000"/>
+                <a:spcPct val="113000"/>
               </a:lnSpc>
+              <a:spcBef>
+                <a:spcPts val="0"/>
+              </a:spcBef>
+              <a:spcAft>
+                <a:spcPts val="1000"/>
+              </a:spcAft>
+            </a:pPr>
+            <a:r>
+              <a:rPr sz="1550" b="0">
+                <a:solidFill>
+                  <a:srgbClr val="2E3138"/>
+                </a:solidFill>
+                <a:latin typeface="Noto Sans"/>
+              </a:rPr>
+              <a:t>Dataset IBM Sample Telco Customer Churn berisi 7.032 pelanggan bersih dengan 21 kolom: demografi, layanan, kontrak, dan tagihan.</a:t>
+            </a:r>
+          </a:p>
+          <a:p>
+            <a:pPr>
+              <a:lnSpc>
+                <a:spcPct val="113000"/>
+              </a:lnSpc>
+              <a:spcBef>
+                <a:spcPts val="0"/>
+              </a:spcBef>
+              <a:spcAft>
+                <a:spcPts val="1000"/>
+              </a:spcAft>
+            </a:pPr>
+            <a:r>
+              <a:rPr sz="1550" b="0">
+                <a:solidFill>
+                  <a:srgbClr val="2E3138"/>
+                </a:solidFill>
+                <a:latin typeface="Noto Sans"/>
+              </a:rPr>
+              <a:t>Pertanyaan utama analisis ini: pelanggan mana yang berhenti berlangganan, kenapa mereka pergi, dan berapa pendapatan yang hilang setiap bulan.</a:t>
+            </a:r>
+          </a:p>
+          <a:p>
+            <a:pPr>
+              <a:lnSpc>
+                <a:spcPct val="113000"/>
+              </a:lnSpc>
+              <a:spcBef>
+                <a:spcPts val="0"/>
+              </a:spcBef>
+              <a:spcAft>
+                <a:spcPts val="1000"/>
+              </a:spcAft>
+            </a:pPr>
+            <a:r>
+              <a:rPr sz="1550" b="0">
+                <a:solidFill>
+                  <a:srgbClr val="2E3138"/>
+                </a:solidFill>
+                <a:latin typeface="Noto Sans"/>
+              </a:rPr>
+              <a:t>Churn rate keseluruhan 26,6%: 1.869 pelanggan pergi. Bagi perusahaan telekomunikasi, mempertahankan pelanggan lama jauh lebih murah daripada mencari yang baru, jadi pola churn adalah informasi bisnis yang mahal.</a:t>
+            </a:r>
+          </a:p>
+        </p:txBody>
+      </p:sp>
+      <p:sp>
+        <p:nvSpPr>
+          <p:cNvPr id="7" name="Rounded Rectangle 6"/>
+          <p:cNvSpPr/>
+          <p:nvPr/>
+        </p:nvSpPr>
+        <p:spPr>
+          <a:xfrm>
+            <a:off x="7726679" y="1417320"/>
+            <a:ext cx="3959352" cy="1207008"/>
+          </a:xfrm>
+          <a:prstGeom prst="roundRect">
+            <a:avLst>
+              <a:gd name="adj" fmla="val 5500"/>
+            </a:avLst>
+          </a:prstGeom>
+          <a:solidFill>
+            <a:srgbClr val="F7F1E5"/>
+          </a:solidFill>
+          <a:ln>
+            <a:noFill/>
+          </a:ln>
+          <a:effectLst/>
+        </p:spPr>
+        <p:style>
+          <a:lnRef idx="1">
+            <a:schemeClr val="accent1"/>
+          </a:lnRef>
+          <a:fillRef idx="3">
+            <a:schemeClr val="accent1"/>
+          </a:fillRef>
+          <a:effectRef idx="2">
+            <a:schemeClr val="accent1"/>
+          </a:effectRef>
+          <a:fontRef idx="minor">
+            <a:schemeClr val="lt1"/>
+          </a:fontRef>
+        </p:style>
+        <p:txBody>
+          <a:bodyPr rtlCol="0" anchor="ctr"/>
+          <a:lstStyle/>
+          <a:p>
+            <a:pPr algn="ctr"/>
+          </a:p>
+        </p:txBody>
+      </p:sp>
+      <p:sp>
+        <p:nvSpPr>
+          <p:cNvPr id="8" name="TextBox 7"/>
+          <p:cNvSpPr txBox="1"/>
+          <p:nvPr/>
+        </p:nvSpPr>
+        <p:spPr>
+          <a:xfrm>
+            <a:off x="8046720" y="1581912"/>
+            <a:ext cx="3383280" cy="1024128"/>
+          </a:xfrm>
+          <a:prstGeom prst="rect">
+            <a:avLst/>
+          </a:prstGeom>
+          <a:noFill/>
+        </p:spPr>
+        <p:txBody>
+          <a:bodyPr wrap="square" anchor="t" lIns="0" rIns="0" tIns="0" bIns="0">
+            <a:spAutoFit/>
+          </a:bodyPr>
+          <a:lstStyle/>
+          <a:p>
+            <a:pPr>
+              <a:lnSpc>
+                <a:spcPct val="113000"/>
+              </a:lnSpc>
+              <a:spcBef>
+                <a:spcPts val="0"/>
+              </a:spcBef>
               <a:spcAft>
                 <a:spcPts val="200"/>
               </a:spcAft>
             </a:pPr>
             <a:r>
-              <a:rPr sz="3000" b="1" i="0">
-                <a:solidFill>
-                  <a:srgbClr val="4E7FA6"/>
+              <a:rPr sz="3200" b="1">
+                <a:solidFill>
+                  <a:srgbClr val="C75B7F"/>
                 </a:solidFill>
                 <a:latin typeface="Noto Sans"/>
               </a:rPr>
@@ -4078,14 +4651,17 @@
           <a:p>
             <a:pPr>
               <a:lnSpc>
-                <a:spcPct val="100000"/>
+                <a:spcPct val="113000"/>
               </a:lnSpc>
+              <a:spcBef>
+                <a:spcPts val="0"/>
+              </a:spcBef>
               <a:spcAft>
                 <a:spcPts val="0"/>
               </a:spcAft>
             </a:pPr>
             <a:r>
-              <a:rPr sz="1350" b="0" i="0">
+              <a:rPr sz="1250" b="0">
                 <a:solidFill>
                   <a:srgbClr val="2E3138"/>
                 </a:solidFill>
@@ -4098,14 +4674,60 @@
       </p:sp>
       <p:sp>
         <p:nvSpPr>
-          <p:cNvPr id="7" name="TextBox 6"/>
+          <p:cNvPr id="9" name="Rounded Rectangle 8"/>
+          <p:cNvSpPr/>
+          <p:nvPr/>
+        </p:nvSpPr>
+        <p:spPr>
+          <a:xfrm>
+            <a:off x="7726679" y="2770632"/>
+            <a:ext cx="3959352" cy="1207008"/>
+          </a:xfrm>
+          <a:prstGeom prst="roundRect">
+            <a:avLst>
+              <a:gd name="adj" fmla="val 5500"/>
+            </a:avLst>
+          </a:prstGeom>
+          <a:solidFill>
+            <a:srgbClr val="F7F1E5"/>
+          </a:solidFill>
+          <a:ln>
+            <a:noFill/>
+          </a:ln>
+          <a:effectLst/>
+        </p:spPr>
+        <p:style>
+          <a:lnRef idx="1">
+            <a:schemeClr val="accent1"/>
+          </a:lnRef>
+          <a:fillRef idx="3">
+            <a:schemeClr val="accent1"/>
+          </a:fillRef>
+          <a:effectRef idx="2">
+            <a:schemeClr val="accent1"/>
+          </a:effectRef>
+          <a:fontRef idx="minor">
+            <a:schemeClr val="lt1"/>
+          </a:fontRef>
+        </p:style>
+        <p:txBody>
+          <a:bodyPr rtlCol="0" anchor="ctr"/>
+          <a:lstStyle/>
+          <a:p>
+            <a:pPr algn="ctr"/>
+          </a:p>
+        </p:txBody>
+      </p:sp>
+      <p:sp>
+        <p:nvSpPr>
+          <p:cNvPr id="10" name="TextBox 9"/>
           <p:cNvSpPr txBox="1"/>
           <p:nvPr/>
         </p:nvSpPr>
         <p:spPr>
           <a:xfrm>
-            <a:off x="8183879" y="3017520"/>
-            <a:ext cx="3108960" cy="1051560"/>
+            <a:off x="8046720" y="2935224"/>
+            <a:ext cx="3383280" cy="1024128"/>
           </a:xfrm>
           <a:prstGeom prst="rect">
             <a:avLst/>
@@ -4113,60 +4735,112 @@
           <a:noFill/>
         </p:spPr>
         <p:txBody>
-          <a:bodyPr wrap="square" lIns="0" rIns="0" tIns="0" bIns="0">
+          <a:bodyPr wrap="square" anchor="t" lIns="0" rIns="0" tIns="0" bIns="0">
             <a:spAutoFit/>
           </a:bodyPr>
           <a:lstStyle/>
           <a:p>
             <a:pPr>
               <a:lnSpc>
-                <a:spcPct val="100000"/>
+                <a:spcPct val="113000"/>
               </a:lnSpc>
+              <a:spcBef>
+                <a:spcPts val="0"/>
+              </a:spcBef>
               <a:spcAft>
                 <a:spcPts val="200"/>
               </a:spcAft>
             </a:pPr>
             <a:r>
-              <a:rPr sz="3000" b="1" i="0">
+              <a:rPr sz="3200" b="1">
                 <a:solidFill>
                   <a:srgbClr val="C75B7F"/>
                 </a:solidFill>
                 <a:latin typeface="Noto Sans"/>
               </a:rPr>
-              <a:t>26,6%</a:t>
+              <a:t>1.869</a:t>
             </a:r>
           </a:p>
           <a:p>
             <a:pPr>
               <a:lnSpc>
-                <a:spcPct val="100000"/>
+                <a:spcPct val="113000"/>
               </a:lnSpc>
+              <a:spcBef>
+                <a:spcPts val="0"/>
+              </a:spcBef>
               <a:spcAft>
                 <a:spcPts val="0"/>
               </a:spcAft>
             </a:pPr>
             <a:r>
-              <a:rPr sz="1350" b="0" i="0">
+              <a:rPr sz="1250" b="0">
                 <a:solidFill>
                   <a:srgbClr val="2E3138"/>
                 </a:solidFill>
                 <a:latin typeface="Noto Sans"/>
               </a:rPr>
-              <a:t>churn rate keseluruhan</a:t>
-            </a:r>
-          </a:p>
-        </p:txBody>
-      </p:sp>
-      <p:sp>
-        <p:nvSpPr>
-          <p:cNvPr id="8" name="TextBox 7"/>
+              <a:t>pelanggan berhenti berlangganan</a:t>
+            </a:r>
+          </a:p>
+        </p:txBody>
+      </p:sp>
+      <p:sp>
+        <p:nvSpPr>
+          <p:cNvPr id="11" name="Rounded Rectangle 10"/>
+          <p:cNvSpPr/>
+          <p:nvPr/>
+        </p:nvSpPr>
+        <p:spPr>
+          <a:xfrm>
+            <a:off x="7726679" y="4123944"/>
+            <a:ext cx="3959352" cy="1499616"/>
+          </a:xfrm>
+          <a:prstGeom prst="roundRect">
+            <a:avLst>
+              <a:gd name="adj" fmla="val 5500"/>
+            </a:avLst>
+          </a:prstGeom>
+          <a:solidFill>
+            <a:srgbClr val="4E7FA6"/>
+          </a:solidFill>
+          <a:ln>
+            <a:noFill/>
+          </a:ln>
+          <a:effectLst/>
+        </p:spPr>
+        <p:style>
+          <a:lnRef idx="1">
+            <a:schemeClr val="accent1"/>
+          </a:lnRef>
+          <a:fillRef idx="3">
+            <a:schemeClr val="accent1"/>
+          </a:fillRef>
+          <a:effectRef idx="2">
+            <a:schemeClr val="accent1"/>
+          </a:effectRef>
+          <a:fontRef idx="minor">
+            <a:schemeClr val="lt1"/>
+          </a:fontRef>
+        </p:style>
+        <p:txBody>
+          <a:bodyPr rtlCol="0" anchor="ctr"/>
+          <a:lstStyle/>
+          <a:p>
+            <a:pPr algn="ctr"/>
+          </a:p>
+        </p:txBody>
+      </p:sp>
+      <p:sp>
+        <p:nvSpPr>
+          <p:cNvPr id="12" name="TextBox 11"/>
           <p:cNvSpPr txBox="1"/>
           <p:nvPr/>
         </p:nvSpPr>
         <p:spPr>
           <a:xfrm>
-            <a:off x="8183879" y="4251960"/>
-            <a:ext cx="3108960" cy="1051560"/>
+            <a:off x="8046720" y="4288536"/>
+            <a:ext cx="3383280" cy="1316736"/>
           </a:xfrm>
           <a:prstGeom prst="rect">
             <a:avLst/>
@@ -4174,46 +4848,97 @@
           <a:noFill/>
         </p:spPr>
         <p:txBody>
-          <a:bodyPr wrap="square" lIns="0" rIns="0" tIns="0" bIns="0">
+          <a:bodyPr wrap="square" anchor="t" lIns="0" rIns="0" tIns="0" bIns="0">
             <a:spAutoFit/>
           </a:bodyPr>
           <a:lstStyle/>
           <a:p>
             <a:pPr>
               <a:lnSpc>
-                <a:spcPct val="100000"/>
+                <a:spcPct val="113000"/>
               </a:lnSpc>
+              <a:spcBef>
+                <a:spcPts val="0"/>
+              </a:spcBef>
               <a:spcAft>
                 <a:spcPts val="200"/>
               </a:spcAft>
             </a:pPr>
             <a:r>
-              <a:rPr sz="3000" b="1" i="0">
-                <a:solidFill>
-                  <a:srgbClr val="4E7FA6"/>
+              <a:rPr sz="3200" b="1">
+                <a:solidFill>
+                  <a:srgbClr val="FFFFFF"/>
                 </a:solidFill>
                 <a:latin typeface="Noto Sans"/>
               </a:rPr>
-              <a:t>1.869</a:t>
+              <a:t>USD 139.131</a:t>
             </a:r>
           </a:p>
           <a:p>
             <a:pPr>
               <a:lnSpc>
-                <a:spcPct val="100000"/>
+                <a:spcPct val="113000"/>
               </a:lnSpc>
+              <a:spcBef>
+                <a:spcPts val="0"/>
+              </a:spcBef>
               <a:spcAft>
                 <a:spcPts val="0"/>
               </a:spcAft>
             </a:pPr>
             <a:r>
-              <a:rPr sz="1350" b="0" i="0">
-                <a:solidFill>
-                  <a:srgbClr val="2E3138"/>
+              <a:rPr sz="1250" b="0">
+                <a:solidFill>
+                  <a:srgbClr val="F7F1E5"/>
                 </a:solidFill>
                 <a:latin typeface="Noto Sans"/>
               </a:rPr>
-              <a:t>pelanggan berhenti berlangganan</a:t>
+              <a:t>pendapatan hilang per bulan akibat churn</a:t>
+            </a:r>
+          </a:p>
+        </p:txBody>
+      </p:sp>
+      <p:sp>
+        <p:nvSpPr>
+          <p:cNvPr id="13" name="TextBox 12"/>
+          <p:cNvSpPr txBox="1"/>
+          <p:nvPr/>
+        </p:nvSpPr>
+        <p:spPr>
+          <a:xfrm>
+            <a:off x="502920" y="6355080"/>
+            <a:ext cx="11155680" cy="365760"/>
+          </a:xfrm>
+          <a:prstGeom prst="rect">
+            <a:avLst/>
+          </a:prstGeom>
+          <a:noFill/>
+        </p:spPr>
+        <p:txBody>
+          <a:bodyPr wrap="square" anchor="t" lIns="0" rIns="0" tIns="0" bIns="0">
+            <a:spAutoFit/>
+          </a:bodyPr>
+          <a:lstStyle/>
+          <a:p>
+            <a:pPr>
+              <a:lnSpc>
+                <a:spcPct val="113000"/>
+              </a:lnSpc>
+              <a:spcBef>
+                <a:spcPts val="0"/>
+              </a:spcBef>
+              <a:spcAft>
+                <a:spcPts val="0"/>
+              </a:spcAft>
+            </a:pPr>
+            <a:r>
+              <a:rPr sz="1100" b="0">
+                <a:solidFill>
+                  <a:srgbClr val="7A6A58"/>
+                </a:solidFill>
+                <a:latin typeface="Noto Sans"/>
+              </a:rPr>
+              <a:t>Sumber data: IBM Sample Telco Customer Churn (dataset sampel publik untuk pembelajaran).</a:t>
             </a:r>
           </a:p>
         </p:txBody>
@@ -4246,17 +4971,64 @@
       <p:grpSpPr/>
       <p:sp>
         <p:nvSpPr>
-          <p:cNvPr id="2" name="Rectangle 1"/>
-          <p:cNvSpPr/>
-          <p:nvPr/>
-        </p:nvSpPr>
-        <p:spPr>
-          <a:xfrm>
-            <a:off x="640080" y="502920"/>
-            <a:ext cx="146304" cy="475488"/>
+          <p:cNvPr id="2" name="TextBox 1"/>
+          <p:cNvSpPr txBox="1"/>
+          <p:nvPr/>
+        </p:nvSpPr>
+        <p:spPr>
+          <a:xfrm>
+            <a:off x="502920" y="384048"/>
+            <a:ext cx="11155680" cy="914400"/>
           </a:xfrm>
           <a:prstGeom prst="rect">
             <a:avLst/>
+          </a:prstGeom>
+          <a:noFill/>
+        </p:spPr>
+        <p:txBody>
+          <a:bodyPr wrap="square" anchor="t" lIns="0" rIns="0" tIns="0" bIns="0">
+            <a:spAutoFit/>
+          </a:bodyPr>
+          <a:lstStyle/>
+          <a:p>
+            <a:pPr>
+              <a:lnSpc>
+                <a:spcPct val="113000"/>
+              </a:lnSpc>
+              <a:spcBef>
+                <a:spcPts val="0"/>
+              </a:spcBef>
+              <a:spcAft>
+                <a:spcPts val="0"/>
+              </a:spcAft>
+            </a:pPr>
+            <a:r>
+              <a:rPr sz="3100" b="1">
+                <a:solidFill>
+                  <a:srgbClr val="2E3138"/>
+                </a:solidFill>
+                <a:latin typeface="Liberation Serif"/>
+              </a:rPr>
+              <a:t>Data dan Metodologi</a:t>
+            </a:r>
+          </a:p>
+        </p:txBody>
+      </p:sp>
+      <p:sp>
+        <p:nvSpPr>
+          <p:cNvPr id="3" name="Rounded Rectangle 2"/>
+          <p:cNvSpPr/>
+          <p:nvPr/>
+        </p:nvSpPr>
+        <p:spPr>
+          <a:xfrm>
+            <a:off x="521207" y="1097280"/>
+            <a:ext cx="777240" cy="82296"/>
+          </a:xfrm>
+          <a:prstGeom prst="roundRect">
+            <a:avLst>
+              <a:gd name="adj" fmla="val 5500"/>
+            </a:avLst>
           </a:prstGeom>
           <a:solidFill>
             <a:srgbClr val="C75B7F"/>
@@ -4266,6 +5038,20 @@
           </a:ln>
           <a:effectLst/>
         </p:spPr>
+        <p:style>
+          <a:lnRef idx="1">
+            <a:schemeClr val="accent1"/>
+          </a:lnRef>
+          <a:fillRef idx="3">
+            <a:schemeClr val="accent1"/>
+          </a:fillRef>
+          <a:effectRef idx="2">
+            <a:schemeClr val="accent1"/>
+          </a:effectRef>
+          <a:fontRef idx="minor">
+            <a:schemeClr val="lt1"/>
+          </a:fontRef>
+        </p:style>
         <p:txBody>
           <a:bodyPr rtlCol="0" anchor="ctr"/>
           <a:lstStyle/>
@@ -4276,171 +5062,42 @@
       </p:sp>
       <p:sp>
         <p:nvSpPr>
-          <p:cNvPr id="3" name="TextBox 2"/>
-          <p:cNvSpPr txBox="1"/>
-          <p:nvPr/>
-        </p:nvSpPr>
-        <p:spPr>
-          <a:xfrm>
-            <a:off x="960120" y="347472"/>
-            <a:ext cx="10607040" cy="868680"/>
-          </a:xfrm>
-          <a:prstGeom prst="rect">
-            <a:avLst/>
-          </a:prstGeom>
-          <a:noFill/>
-        </p:spPr>
-        <p:txBody>
-          <a:bodyPr wrap="square" lIns="0" rIns="0" tIns="0" bIns="0">
-            <a:spAutoFit/>
-          </a:bodyPr>
-          <a:lstStyle/>
-          <a:p>
-            <a:pPr>
-              <a:lnSpc>
-                <a:spcPct val="100000"/>
-              </a:lnSpc>
-              <a:spcAft>
-                <a:spcPts val="0"/>
-              </a:spcAft>
-            </a:pPr>
-            <a:r>
-              <a:rPr sz="3200" b="1" i="0">
-                <a:solidFill>
-                  <a:srgbClr val="2E3138"/>
-                </a:solidFill>
-                <a:latin typeface="Liberation Serif"/>
-              </a:rPr>
-              <a:t>Data dan Metodologi</a:t>
-            </a:r>
-          </a:p>
-        </p:txBody>
-      </p:sp>
-      <p:sp>
-        <p:nvSpPr>
-          <p:cNvPr id="4" name="TextBox 3"/>
-          <p:cNvSpPr txBox="1"/>
-          <p:nvPr/>
-        </p:nvSpPr>
-        <p:spPr>
-          <a:xfrm>
-            <a:off x="640080" y="1463040"/>
-            <a:ext cx="5577840" cy="4754880"/>
-          </a:xfrm>
-          <a:prstGeom prst="rect">
-            <a:avLst/>
-          </a:prstGeom>
-          <a:noFill/>
-        </p:spPr>
-        <p:txBody>
-          <a:bodyPr wrap="square" lIns="0" rIns="0" tIns="0" bIns="0">
-            <a:spAutoFit/>
-          </a:bodyPr>
-          <a:lstStyle/>
-          <a:p>
-            <a:pPr marL="171450" indent="-171450">
-              <a:lnSpc>
-                <a:spcPct val="112000"/>
-              </a:lnSpc>
-              <a:spcAft>
-                <a:spcPts val="1100"/>
-              </a:spcAft>
-              <a:buChar char="•"/>
-            </a:pPr>
-            <a:r>
-              <a:rPr sz="1600" b="0" i="0">
-                <a:solidFill>
-                  <a:srgbClr val="2E3138"/>
-                </a:solidFill>
-                <a:latin typeface="Noto Sans"/>
-              </a:rPr>
-              <a:t>Data dimuat ke SQLite lalu dianalisis dengan query SQL asli: agregasi, grouping, dan perbandingan antar segmen</a:t>
-            </a:r>
-          </a:p>
-          <a:p>
-            <a:pPr marL="171450" indent="-171450">
-              <a:lnSpc>
-                <a:spcPct val="112000"/>
-              </a:lnSpc>
-              <a:spcAft>
-                <a:spcPts val="1100"/>
-              </a:spcAft>
-              <a:buChar char="•"/>
-            </a:pPr>
-            <a:r>
-              <a:rPr sz="1600" b="0" i="0">
-                <a:solidFill>
-                  <a:srgbClr val="2E3138"/>
-                </a:solidFill>
-                <a:latin typeface="Noto Sans"/>
-              </a:rPr>
-              <a:t>Pandas dipakai untuk eksplorasi lanjutan dan pembuatan 12 chart visual</a:t>
-            </a:r>
-          </a:p>
-          <a:p>
-            <a:pPr marL="171450" indent="-171450">
-              <a:lnSpc>
-                <a:spcPct val="112000"/>
-              </a:lnSpc>
-              <a:spcAft>
-                <a:spcPts val="1100"/>
-              </a:spcAft>
-              <a:buChar char="•"/>
-            </a:pPr>
-            <a:r>
-              <a:rPr sz="1600" b="0" i="0">
-                <a:solidFill>
-                  <a:srgbClr val="2E3138"/>
-                </a:solidFill>
-                <a:latin typeface="Noto Sans"/>
-              </a:rPr>
-              <a:t>Churn didefinisikan sebagai kolom Churn bernilai Yes; rate dihitung sebagai Yes dibagi total pelanggan</a:t>
-            </a:r>
-          </a:p>
-          <a:p>
-            <a:pPr marL="171450" indent="-171450">
-              <a:lnSpc>
-                <a:spcPct val="112000"/>
-              </a:lnSpc>
-              <a:spcAft>
-                <a:spcPts val="1100"/>
-              </a:spcAft>
-              <a:buChar char="•"/>
-            </a:pPr>
-            <a:r>
-              <a:rPr sz="1600" b="0" i="0">
-                <a:solidFill>
-                  <a:srgbClr val="2E3138"/>
-                </a:solidFill>
-                <a:latin typeface="Noto Sans"/>
-              </a:rPr>
-              <a:t>Segmen yang dianalisis: kontrak, masa berlangganan, layanan internet, metode pembayaran, tagihan, layanan dukungan, demografi, dan segmen kombinasi</a:t>
-            </a:r>
-          </a:p>
-        </p:txBody>
-      </p:sp>
-      <p:sp>
-        <p:nvSpPr>
-          <p:cNvPr id="5" name="Rectangle 4"/>
+          <p:cNvPr id="4" name="Rounded Rectangle 3"/>
           <p:cNvSpPr/>
           <p:nvPr/>
         </p:nvSpPr>
         <p:spPr>
           <a:xfrm>
-            <a:off x="6583680" y="1463040"/>
-            <a:ext cx="4965192" cy="4297680"/>
-          </a:xfrm>
-          <a:prstGeom prst="rect">
-            <a:avLst/>
+            <a:off x="502920" y="1417320"/>
+            <a:ext cx="3291840" cy="2011680"/>
+          </a:xfrm>
+          <a:prstGeom prst="roundRect">
+            <a:avLst>
+              <a:gd name="adj" fmla="val 5500"/>
+            </a:avLst>
           </a:prstGeom>
           <a:solidFill>
-            <a:srgbClr val="EFC3D2"/>
+            <a:srgbClr val="4E7FA6"/>
           </a:solidFill>
           <a:ln>
             <a:noFill/>
           </a:ln>
           <a:effectLst/>
         </p:spPr>
+        <p:style>
+          <a:lnRef idx="1">
+            <a:schemeClr val="accent1"/>
+          </a:lnRef>
+          <a:fillRef idx="3">
+            <a:schemeClr val="accent1"/>
+          </a:fillRef>
+          <a:effectRef idx="2">
+            <a:schemeClr val="accent1"/>
+          </a:effectRef>
+          <a:fontRef idx="minor">
+            <a:schemeClr val="lt1"/>
+          </a:fontRef>
+        </p:style>
         <p:txBody>
           <a:bodyPr rtlCol="0" anchor="ctr"/>
           <a:lstStyle/>
@@ -4451,14 +5108,14 @@
       </p:sp>
       <p:sp>
         <p:nvSpPr>
-          <p:cNvPr id="6" name="TextBox 5"/>
+          <p:cNvPr id="5" name="TextBox 4"/>
           <p:cNvSpPr txBox="1"/>
           <p:nvPr/>
         </p:nvSpPr>
         <p:spPr>
           <a:xfrm>
-            <a:off x="6949440" y="1783080"/>
-            <a:ext cx="4251960" cy="3749039"/>
+            <a:off x="822960" y="1664208"/>
+            <a:ext cx="2697480" cy="1737360"/>
           </a:xfrm>
           <a:prstGeom prst="rect">
             <a:avLst/>
@@ -4466,65 +5123,346 @@
           <a:noFill/>
         </p:spPr>
         <p:txBody>
-          <a:bodyPr wrap="square" lIns="0" rIns="0" tIns="0" bIns="0">
+          <a:bodyPr wrap="square" anchor="t" lIns="0" rIns="0" tIns="0" bIns="0">
             <a:spAutoFit/>
           </a:bodyPr>
           <a:lstStyle/>
           <a:p>
             <a:pPr>
               <a:lnSpc>
-                <a:spcPct val="100000"/>
+                <a:spcPct val="113000"/>
               </a:lnSpc>
+              <a:spcBef>
+                <a:spcPts val="0"/>
+              </a:spcBef>
               <a:spcAft>
-                <a:spcPts val="200"/>
+                <a:spcPts val="300"/>
               </a:spcAft>
             </a:pPr>
             <a:r>
-              <a:rPr sz="5400" b="1" i="0">
-                <a:solidFill>
-                  <a:srgbClr val="C75B7F"/>
+              <a:rPr sz="2800" b="1">
+                <a:solidFill>
+                  <a:srgbClr val="FFFFFF"/>
                 </a:solidFill>
                 <a:latin typeface="Noto Sans"/>
               </a:rPr>
-              <a:t>11</a:t>
+              <a:t>7.032</a:t>
             </a:r>
           </a:p>
           <a:p>
             <a:pPr>
               <a:lnSpc>
-                <a:spcPct val="115000"/>
+                <a:spcPct val="113000"/>
               </a:lnSpc>
+              <a:spcBef>
+                <a:spcPts val="0"/>
+              </a:spcBef>
               <a:spcAft>
-                <a:spcPts val="800"/>
+                <a:spcPts val="0"/>
               </a:spcAft>
             </a:pPr>
             <a:r>
-              <a:rPr sz="1600" b="1" i="0">
-                <a:solidFill>
-                  <a:srgbClr val="2E3138"/>
+              <a:rPr sz="1250" b="0">
+                <a:solidFill>
+                  <a:srgbClr val="F7F1E5"/>
                 </a:solidFill>
                 <a:latin typeface="Noto Sans"/>
               </a:rPr>
-              <a:t>baris dihapus dari data, bukan diimputasi</a:t>
-            </a:r>
-          </a:p>
+              <a:t>pelanggan bersih, basis semua angka di deck ini</a:t>
+            </a:r>
+          </a:p>
+        </p:txBody>
+      </p:sp>
+      <p:sp>
+        <p:nvSpPr>
+          <p:cNvPr id="6" name="Rounded Rectangle 5"/>
+          <p:cNvSpPr/>
+          <p:nvPr/>
+        </p:nvSpPr>
+        <p:spPr>
+          <a:xfrm>
+            <a:off x="502920" y="3611880"/>
+            <a:ext cx="3291840" cy="2011680"/>
+          </a:xfrm>
+          <a:prstGeom prst="roundRect">
+            <a:avLst>
+              <a:gd name="adj" fmla="val 5500"/>
+            </a:avLst>
+          </a:prstGeom>
+          <a:solidFill>
+            <a:srgbClr val="F7F1E5"/>
+          </a:solidFill>
+          <a:ln>
+            <a:noFill/>
+          </a:ln>
+          <a:effectLst/>
+        </p:spPr>
+        <p:style>
+          <a:lnRef idx="1">
+            <a:schemeClr val="accent1"/>
+          </a:lnRef>
+          <a:fillRef idx="3">
+            <a:schemeClr val="accent1"/>
+          </a:fillRef>
+          <a:effectRef idx="2">
+            <a:schemeClr val="accent1"/>
+          </a:effectRef>
+          <a:fontRef idx="minor">
+            <a:schemeClr val="lt1"/>
+          </a:fontRef>
+        </p:style>
+        <p:txBody>
+          <a:bodyPr rtlCol="0" anchor="ctr"/>
+          <a:lstStyle/>
+          <a:p>
+            <a:pPr algn="ctr"/>
+          </a:p>
+        </p:txBody>
+      </p:sp>
+      <p:sp>
+        <p:nvSpPr>
+          <p:cNvPr id="7" name="TextBox 6"/>
+          <p:cNvSpPr txBox="1"/>
+          <p:nvPr/>
+        </p:nvSpPr>
+        <p:spPr>
+          <a:xfrm>
+            <a:off x="822960" y="3858768"/>
+            <a:ext cx="2697480" cy="1737360"/>
+          </a:xfrm>
+          <a:prstGeom prst="rect">
+            <a:avLst/>
+          </a:prstGeom>
+          <a:noFill/>
+        </p:spPr>
+        <p:txBody>
+          <a:bodyPr wrap="square" anchor="t" lIns="0" rIns="0" tIns="0" bIns="0">
+            <a:spAutoFit/>
+          </a:bodyPr>
+          <a:lstStyle/>
           <a:p>
             <a:pPr>
               <a:lnSpc>
-                <a:spcPct val="125000"/>
+                <a:spcPct val="113000"/>
               </a:lnSpc>
+              <a:spcBef>
+                <a:spcPts val="0"/>
+              </a:spcBef>
               <a:spcAft>
-                <a:spcPts val="0"/>
+                <a:spcPts val="300"/>
               </a:spcAft>
             </a:pPr>
             <a:r>
-              <a:rPr sz="1500" b="0" i="0">
-                <a:solidFill>
-                  <a:srgbClr val="2E3138"/>
+              <a:rPr sz="2800" b="1">
+                <a:solidFill>
+                  <a:srgbClr val="C75B7F"/>
                 </a:solidFill>
                 <a:latin typeface="Noto Sans"/>
               </a:rPr>
-              <a:t>Pembersihan penting: kolom TotalCharges tiba sebagai teks dengan 11 nilai kosong tersembunyi (semua tenure 0, belum pernah ditagih), 11 baris itu dihapus karena imputasi berarti mengarang data</a:t>
+              <a:t>7.043</a:t>
+            </a:r>
+          </a:p>
+          <a:p>
+            <a:pPr>
+              <a:lnSpc>
+                <a:spcPct val="113000"/>
+              </a:lnSpc>
+              <a:spcBef>
+                <a:spcPts val="0"/>
+              </a:spcBef>
+              <a:spcAft>
+                <a:spcPts val="0"/>
+              </a:spcAft>
+            </a:pPr>
+            <a:r>
+              <a:rPr sz="1250" b="0">
+                <a:solidFill>
+                  <a:srgbClr val="2E3138"/>
+                </a:solidFill>
+                <a:latin typeface="Noto Sans"/>
+              </a:rPr>
+              <a:t>baris mentah; 11 baris dihapus pada pembersihan</a:t>
+            </a:r>
+          </a:p>
+        </p:txBody>
+      </p:sp>
+      <p:sp>
+        <p:nvSpPr>
+          <p:cNvPr id="8" name="Rounded Rectangle 7"/>
+          <p:cNvSpPr/>
+          <p:nvPr/>
+        </p:nvSpPr>
+        <p:spPr>
+          <a:xfrm>
+            <a:off x="4178808" y="1481328"/>
+            <a:ext cx="7571231" cy="4206240"/>
+          </a:xfrm>
+          <a:prstGeom prst="roundRect">
+            <a:avLst>
+              <a:gd name="adj" fmla="val 5500"/>
+            </a:avLst>
+          </a:prstGeom>
+          <a:solidFill>
+            <a:srgbClr val="D9C9AE"/>
+          </a:solidFill>
+          <a:ln>
+            <a:noFill/>
+          </a:ln>
+          <a:effectLst/>
+        </p:spPr>
+        <p:style>
+          <a:lnRef idx="1">
+            <a:schemeClr val="accent1"/>
+          </a:lnRef>
+          <a:fillRef idx="3">
+            <a:schemeClr val="accent1"/>
+          </a:fillRef>
+          <a:effectRef idx="2">
+            <a:schemeClr val="accent1"/>
+          </a:effectRef>
+          <a:fontRef idx="minor">
+            <a:schemeClr val="lt1"/>
+          </a:fontRef>
+        </p:style>
+        <p:txBody>
+          <a:bodyPr rtlCol="0" anchor="ctr"/>
+          <a:lstStyle/>
+          <a:p>
+            <a:pPr algn="ctr"/>
+          </a:p>
+        </p:txBody>
+      </p:sp>
+      <p:sp>
+        <p:nvSpPr>
+          <p:cNvPr id="9" name="Rounded Rectangle 8"/>
+          <p:cNvSpPr/>
+          <p:nvPr/>
+        </p:nvSpPr>
+        <p:spPr>
+          <a:xfrm>
+            <a:off x="4114800" y="1417320"/>
+            <a:ext cx="7571231" cy="4206240"/>
+          </a:xfrm>
+          <a:prstGeom prst="roundRect">
+            <a:avLst>
+              <a:gd name="adj" fmla="val 5500"/>
+            </a:avLst>
+          </a:prstGeom>
+          <a:solidFill>
+            <a:srgbClr val="F7F1E5"/>
+          </a:solidFill>
+          <a:ln>
+            <a:noFill/>
+          </a:ln>
+          <a:effectLst/>
+        </p:spPr>
+        <p:style>
+          <a:lnRef idx="1">
+            <a:schemeClr val="accent1"/>
+          </a:lnRef>
+          <a:fillRef idx="3">
+            <a:schemeClr val="accent1"/>
+          </a:fillRef>
+          <a:effectRef idx="2">
+            <a:schemeClr val="accent1"/>
+          </a:effectRef>
+          <a:fontRef idx="minor">
+            <a:schemeClr val="lt1"/>
+          </a:fontRef>
+        </p:style>
+        <p:txBody>
+          <a:bodyPr rtlCol="0" anchor="ctr"/>
+          <a:lstStyle/>
+          <a:p>
+            <a:pPr algn="ctr"/>
+          </a:p>
+        </p:txBody>
+      </p:sp>
+      <p:sp>
+        <p:nvSpPr>
+          <p:cNvPr id="10" name="TextBox 9"/>
+          <p:cNvSpPr txBox="1"/>
+          <p:nvPr/>
+        </p:nvSpPr>
+        <p:spPr>
+          <a:xfrm>
+            <a:off x="4480560" y="1755648"/>
+            <a:ext cx="6858000" cy="3611880"/>
+          </a:xfrm>
+          <a:prstGeom prst="rect">
+            <a:avLst/>
+          </a:prstGeom>
+          <a:noFill/>
+        </p:spPr>
+        <p:txBody>
+          <a:bodyPr wrap="square" anchor="t" lIns="0" rIns="0" tIns="0" bIns="0">
+            <a:spAutoFit/>
+          </a:bodyPr>
+          <a:lstStyle/>
+          <a:p>
+            <a:pPr>
+              <a:lnSpc>
+                <a:spcPct val="113000"/>
+              </a:lnSpc>
+              <a:spcBef>
+                <a:spcPts val="0"/>
+              </a:spcBef>
+              <a:spcAft>
+                <a:spcPts val="1000"/>
+              </a:spcAft>
+            </a:pPr>
+            <a:r>
+              <a:rPr sz="1500" b="0">
+                <a:solidFill>
+                  <a:srgbClr val="2E3138"/>
+                </a:solidFill>
+                <a:latin typeface="Noto Sans"/>
+              </a:rPr>
+              <a:t>Data dimuat ke SQLite, lalu dianalisis dengan query SQL asli: agregasi, grouping, dan perbandingan antar segmen. Pandas dipakai untuk eksplorasi lanjutan dan pembuatan 12 chart visual.</a:t>
+            </a:r>
+          </a:p>
+          <a:p>
+            <a:pPr>
+              <a:lnSpc>
+                <a:spcPct val="113000"/>
+              </a:lnSpc>
+              <a:spcBef>
+                <a:spcPts val="0"/>
+              </a:spcBef>
+              <a:spcAft>
+                <a:spcPts val="1000"/>
+              </a:spcAft>
+            </a:pPr>
+            <a:r>
+              <a:rPr sz="1500" b="0">
+                <a:solidFill>
+                  <a:srgbClr val="2E3138"/>
+                </a:solidFill>
+                <a:latin typeface="Noto Sans"/>
+              </a:rPr>
+              <a:t>Churn didefinisikan sebagai kolom Churn bernilai Yes; churn rate adalah jumlah Yes dibagi total pelanggan pada segmen yang sama.</a:t>
+            </a:r>
+          </a:p>
+          <a:p>
+            <a:pPr>
+              <a:lnSpc>
+                <a:spcPct val="113000"/>
+              </a:lnSpc>
+              <a:spcBef>
+                <a:spcPts val="0"/>
+              </a:spcBef>
+              <a:spcAft>
+                <a:spcPts val="1000"/>
+              </a:spcAft>
+            </a:pPr>
+            <a:r>
+              <a:rPr sz="1500" b="0">
+                <a:solidFill>
+                  <a:srgbClr val="2E3138"/>
+                </a:solidFill>
+                <a:latin typeface="Noto Sans"/>
+              </a:rPr>
+              <a:t>Pembersihan penting: kolom TotalCharges tiba sebagai teks dengan 11 nilai kosong tersembunyi (semua tenure 0, belum pernah ditagih). Ke-11 baris itu dihapus, bukan diimputasi, karena mengisi angka berarti mengarang data.</a:t>
             </a:r>
           </a:p>
         </p:txBody>
@@ -4557,17 +5495,64 @@
       <p:grpSpPr/>
       <p:sp>
         <p:nvSpPr>
-          <p:cNvPr id="2" name="Rectangle 1"/>
-          <p:cNvSpPr/>
-          <p:nvPr/>
-        </p:nvSpPr>
-        <p:spPr>
-          <a:xfrm>
-            <a:off x="640080" y="502920"/>
-            <a:ext cx="146304" cy="475488"/>
+          <p:cNvPr id="2" name="TextBox 1"/>
+          <p:cNvSpPr txBox="1"/>
+          <p:nvPr/>
+        </p:nvSpPr>
+        <p:spPr>
+          <a:xfrm>
+            <a:off x="502920" y="384048"/>
+            <a:ext cx="11155680" cy="914400"/>
           </a:xfrm>
           <a:prstGeom prst="rect">
             <a:avLst/>
+          </a:prstGeom>
+          <a:noFill/>
+        </p:spPr>
+        <p:txBody>
+          <a:bodyPr wrap="square" anchor="t" lIns="0" rIns="0" tIns="0" bIns="0">
+            <a:spAutoFit/>
+          </a:bodyPr>
+          <a:lstStyle/>
+          <a:p>
+            <a:pPr>
+              <a:lnSpc>
+                <a:spcPct val="113000"/>
+              </a:lnSpc>
+              <a:spcBef>
+                <a:spcPts val="0"/>
+              </a:spcBef>
+              <a:spcAft>
+                <a:spcPts val="0"/>
+              </a:spcAft>
+            </a:pPr>
+            <a:r>
+              <a:rPr sz="3100" b="1">
+                <a:solidFill>
+                  <a:srgbClr val="2E3138"/>
+                </a:solidFill>
+                <a:latin typeface="Liberation Serif"/>
+              </a:rPr>
+              <a:t>Temuan 1: Kontrak Bulanan Paling Berisiko</a:t>
+            </a:r>
+          </a:p>
+        </p:txBody>
+      </p:sp>
+      <p:sp>
+        <p:nvSpPr>
+          <p:cNvPr id="3" name="Rounded Rectangle 2"/>
+          <p:cNvSpPr/>
+          <p:nvPr/>
+        </p:nvSpPr>
+        <p:spPr>
+          <a:xfrm>
+            <a:off x="521207" y="1097280"/>
+            <a:ext cx="777240" cy="82296"/>
+          </a:xfrm>
+          <a:prstGeom prst="roundRect">
+            <a:avLst>
+              <a:gd name="adj" fmla="val 5500"/>
+            </a:avLst>
           </a:prstGeom>
           <a:solidFill>
             <a:srgbClr val="C75B7F"/>
@@ -4577,6 +5562,20 @@
           </a:ln>
           <a:effectLst/>
         </p:spPr>
+        <p:style>
+          <a:lnRef idx="1">
+            <a:schemeClr val="accent1"/>
+          </a:lnRef>
+          <a:fillRef idx="3">
+            <a:schemeClr val="accent1"/>
+          </a:fillRef>
+          <a:effectRef idx="2">
+            <a:schemeClr val="accent1"/>
+          </a:effectRef>
+          <a:fontRef idx="minor">
+            <a:schemeClr val="lt1"/>
+          </a:fontRef>
+        </p:style>
         <p:txBody>
           <a:bodyPr rtlCol="0" anchor="ctr"/>
           <a:lstStyle/>
@@ -4587,14 +5586,14 @@
       </p:sp>
       <p:sp>
         <p:nvSpPr>
-          <p:cNvPr id="3" name="TextBox 2"/>
+          <p:cNvPr id="4" name="TextBox 3"/>
           <p:cNvSpPr txBox="1"/>
           <p:nvPr/>
         </p:nvSpPr>
         <p:spPr>
           <a:xfrm>
-            <a:off x="960120" y="347472"/>
-            <a:ext cx="10607040" cy="868680"/>
+            <a:off x="502920" y="1463040"/>
+            <a:ext cx="4526280" cy="3291840"/>
           </a:xfrm>
           <a:prstGeom prst="rect">
             <a:avLst/>
@@ -4602,41 +5601,134 @@
           <a:noFill/>
         </p:spPr>
         <p:txBody>
-          <a:bodyPr wrap="square" lIns="0" rIns="0" tIns="0" bIns="0">
+          <a:bodyPr wrap="square" anchor="t" lIns="0" rIns="0" tIns="0" bIns="0">
             <a:spAutoFit/>
           </a:bodyPr>
           <a:lstStyle/>
           <a:p>
             <a:pPr>
               <a:lnSpc>
-                <a:spcPct val="100000"/>
+                <a:spcPct val="113000"/>
               </a:lnSpc>
+              <a:spcBef>
+                <a:spcPts val="0"/>
+              </a:spcBef>
               <a:spcAft>
-                <a:spcPts val="0"/>
+                <a:spcPts val="1000"/>
               </a:spcAft>
             </a:pPr>
             <a:r>
-              <a:rPr sz="3200" b="1" i="0">
+              <a:rPr sz="1550" b="0">
                 <a:solidFill>
                   <a:srgbClr val="2E3138"/>
                 </a:solidFill>
-                <a:latin typeface="Liberation Serif"/>
+                <a:latin typeface="Noto Sans"/>
               </a:rPr>
-              <a:t>Temuan 1: Kontrak Bulanan Paling Berisiko</a:t>
-            </a:r>
-          </a:p>
-        </p:txBody>
-      </p:sp>
-      <p:sp>
-        <p:nvSpPr>
-          <p:cNvPr id="4" name="TextBox 3"/>
+              <a:t>Kontrak month-to-month churn 42,7%, sekitar 15 kali lipat kontrak 2 tahun yang hanya 2,8%. Kontrak 1 tahun berada di tengah: 11,3%.</a:t>
+            </a:r>
+          </a:p>
+          <a:p>
+            <a:pPr>
+              <a:lnSpc>
+                <a:spcPct val="113000"/>
+              </a:lnSpc>
+              <a:spcBef>
+                <a:spcPts val="0"/>
+              </a:spcBef>
+              <a:spcAft>
+                <a:spcPts val="1000"/>
+              </a:spcAft>
+            </a:pPr>
+            <a:r>
+              <a:rPr sz="1550" b="0">
+                <a:solidFill>
+                  <a:srgbClr val="2E3138"/>
+                </a:solidFill>
+                <a:latin typeface="Noto Sans"/>
+              </a:rPr>
+              <a:t>Kontrak bulanan mencakup 55,1% pelanggan tetapi menyumbang 88,6% dari semua churn.</a:t>
+            </a:r>
+          </a:p>
+          <a:p>
+            <a:pPr>
+              <a:lnSpc>
+                <a:spcPct val="113000"/>
+              </a:lnSpc>
+              <a:spcBef>
+                <a:spcPts val="0"/>
+              </a:spcBef>
+              <a:spcAft>
+                <a:spcPts val="1000"/>
+              </a:spcAft>
+            </a:pPr>
+            <a:r>
+              <a:rPr sz="1550" b="0">
+                <a:solidFill>
+                  <a:srgbClr val="2E3138"/>
+                </a:solidFill>
+                <a:latin typeface="Noto Sans"/>
+              </a:rPr>
+              <a:t>Tanpa komitmen jangka panjang, pelanggan bisa pergi kapan saja, dan data menunjukkan mereka memang pergi.</a:t>
+            </a:r>
+          </a:p>
+        </p:txBody>
+      </p:sp>
+      <p:sp>
+        <p:nvSpPr>
+          <p:cNvPr id="5" name="Rounded Rectangle 4"/>
+          <p:cNvSpPr/>
+          <p:nvPr/>
+        </p:nvSpPr>
+        <p:spPr>
+          <a:xfrm>
+            <a:off x="502920" y="4846320"/>
+            <a:ext cx="4526280" cy="1170432"/>
+          </a:xfrm>
+          <a:prstGeom prst="roundRect">
+            <a:avLst>
+              <a:gd name="adj" fmla="val 5500"/>
+            </a:avLst>
+          </a:prstGeom>
+          <a:solidFill>
+            <a:srgbClr val="4E7FA6"/>
+          </a:solidFill>
+          <a:ln>
+            <a:noFill/>
+          </a:ln>
+          <a:effectLst/>
+        </p:spPr>
+        <p:style>
+          <a:lnRef idx="1">
+            <a:schemeClr val="accent1"/>
+          </a:lnRef>
+          <a:fillRef idx="3">
+            <a:schemeClr val="accent1"/>
+          </a:fillRef>
+          <a:effectRef idx="2">
+            <a:schemeClr val="accent1"/>
+          </a:effectRef>
+          <a:fontRef idx="minor">
+            <a:schemeClr val="lt1"/>
+          </a:fontRef>
+        </p:style>
+        <p:txBody>
+          <a:bodyPr rtlCol="0" anchor="ctr"/>
+          <a:lstStyle/>
+          <a:p>
+            <a:pPr algn="ctr"/>
+          </a:p>
+        </p:txBody>
+      </p:sp>
+      <p:sp>
+        <p:nvSpPr>
+          <p:cNvPr id="6" name="TextBox 5"/>
           <p:cNvSpPr txBox="1"/>
           <p:nvPr/>
         </p:nvSpPr>
         <p:spPr>
           <a:xfrm>
-            <a:off x="640080" y="1463040"/>
-            <a:ext cx="5029200" cy="3291840"/>
+            <a:off x="777240" y="5010912"/>
+            <a:ext cx="4023360" cy="896112"/>
           </a:xfrm>
           <a:prstGeom prst="rect">
             <a:avLst/>
@@ -4644,126 +5736,26 @@
           <a:noFill/>
         </p:spPr>
         <p:txBody>
-          <a:bodyPr wrap="square" lIns="0" rIns="0" tIns="0" bIns="0">
+          <a:bodyPr wrap="square" anchor="t" lIns="0" rIns="0" tIns="0" bIns="0">
             <a:spAutoFit/>
           </a:bodyPr>
           <a:lstStyle/>
           <a:p>
-            <a:pPr marL="171450" indent="-171450">
-              <a:lnSpc>
-                <a:spcPct val="112000"/>
-              </a:lnSpc>
-              <a:spcAft>
-                <a:spcPts val="1100"/>
-              </a:spcAft>
-              <a:buChar char="•"/>
-            </a:pPr>
-            <a:r>
-              <a:rPr sz="1600" b="0" i="0">
-                <a:solidFill>
-                  <a:srgbClr val="2E3138"/>
-                </a:solidFill>
-                <a:latin typeface="Noto Sans"/>
-              </a:rPr>
-              <a:t>Kontrak bulanan (month-to-month) churn 42,7 persen, 15 kali lipat kontrak 2 tahun yang hanya 2,8 persen</a:t>
-            </a:r>
-          </a:p>
-          <a:p>
-            <a:pPr marL="171450" indent="-171450">
-              <a:lnSpc>
-                <a:spcPct val="112000"/>
-              </a:lnSpc>
-              <a:spcAft>
-                <a:spcPts val="1100"/>
-              </a:spcAft>
-              <a:buChar char="•"/>
-            </a:pPr>
-            <a:r>
-              <a:rPr sz="1600" b="0" i="0">
-                <a:solidFill>
-                  <a:srgbClr val="2E3138"/>
-                </a:solidFill>
-                <a:latin typeface="Noto Sans"/>
-              </a:rPr>
-              <a:t>Kontrak bulanan mencakup 55,1 persen pelanggan tetapi menyumbang 88,6 persen dari semua churn</a:t>
-            </a:r>
-          </a:p>
-          <a:p>
-            <a:pPr marL="171450" indent="-171450">
-              <a:lnSpc>
-                <a:spcPct val="112000"/>
-              </a:lnSpc>
-              <a:spcAft>
-                <a:spcPts val="1100"/>
-              </a:spcAft>
-              <a:buChar char="•"/>
-            </a:pPr>
-            <a:r>
-              <a:rPr sz="1600" b="0" i="0">
-                <a:solidFill>
-                  <a:srgbClr val="2E3138"/>
-                </a:solidFill>
-                <a:latin typeface="Noto Sans"/>
-              </a:rPr>
-              <a:t>Kontrak 1 tahun churn 11,3 persen, jauh lebih aman dibanding bulanan</a:t>
-            </a:r>
-          </a:p>
-          <a:p>
-            <a:pPr marL="171450" indent="-171450">
-              <a:lnSpc>
-                <a:spcPct val="112000"/>
-              </a:lnSpc>
-              <a:spcAft>
-                <a:spcPts val="1100"/>
-              </a:spcAft>
-              <a:buChar char="•"/>
-            </a:pPr>
-            <a:r>
-              <a:rPr sz="1600" b="0" i="0">
-                <a:solidFill>
-                  <a:srgbClr val="2E3138"/>
-                </a:solidFill>
-                <a:latin typeface="Noto Sans"/>
-              </a:rPr>
-              <a:t>Tanpa komitmen jangka panjang, pelanggan pergi kapan saja dan hampir tanpa hambatan</a:t>
-            </a:r>
-          </a:p>
-        </p:txBody>
-      </p:sp>
-      <p:sp>
-        <p:nvSpPr>
-          <p:cNvPr id="5" name="TextBox 4"/>
-          <p:cNvSpPr txBox="1"/>
-          <p:nvPr/>
-        </p:nvSpPr>
-        <p:spPr>
-          <a:xfrm>
-            <a:off x="640080" y="5120640"/>
-            <a:ext cx="2377440" cy="1051560"/>
-          </a:xfrm>
-          <a:prstGeom prst="rect">
-            <a:avLst/>
-          </a:prstGeom>
-          <a:noFill/>
-        </p:spPr>
-        <p:txBody>
-          <a:bodyPr wrap="square" lIns="0" rIns="0" tIns="0" bIns="0">
-            <a:spAutoFit/>
-          </a:bodyPr>
-          <a:lstStyle/>
-          <a:p>
             <a:pPr>
               <a:lnSpc>
-                <a:spcPct val="100000"/>
+                <a:spcPct val="113000"/>
               </a:lnSpc>
+              <a:spcBef>
+                <a:spcPts val="0"/>
+              </a:spcBef>
               <a:spcAft>
                 <a:spcPts val="200"/>
               </a:spcAft>
             </a:pPr>
             <a:r>
-              <a:rPr sz="3200" b="1" i="0">
-                <a:solidFill>
-                  <a:srgbClr val="C75B7F"/>
+              <a:rPr sz="2700" b="1">
+                <a:solidFill>
+                  <a:srgbClr val="FFFFFF"/>
                 </a:solidFill>
                 <a:latin typeface="Noto Sans"/>
               </a:rPr>
@@ -4773,88 +5765,122 @@
           <a:p>
             <a:pPr>
               <a:lnSpc>
-                <a:spcPct val="100000"/>
+                <a:spcPct val="113000"/>
               </a:lnSpc>
+              <a:spcBef>
+                <a:spcPts val="0"/>
+              </a:spcBef>
               <a:spcAft>
                 <a:spcPts val="0"/>
               </a:spcAft>
             </a:pPr>
             <a:r>
-              <a:rPr sz="1300" b="0" i="0">
-                <a:solidFill>
-                  <a:srgbClr val="2E3138"/>
+              <a:rPr sz="1250" b="0">
+                <a:solidFill>
+                  <a:srgbClr val="F7F1E5"/>
                 </a:solidFill>
                 <a:latin typeface="Noto Sans"/>
               </a:rPr>
-              <a:t>kontrak bulanan</a:t>
-            </a:r>
-          </a:p>
-        </p:txBody>
-      </p:sp>
-      <p:sp>
-        <p:nvSpPr>
-          <p:cNvPr id="6" name="TextBox 5"/>
-          <p:cNvSpPr txBox="1"/>
-          <p:nvPr/>
-        </p:nvSpPr>
-        <p:spPr>
-          <a:xfrm>
-            <a:off x="3200400" y="5120640"/>
-            <a:ext cx="2377440" cy="1051560"/>
-          </a:xfrm>
-          <a:prstGeom prst="rect">
-            <a:avLst/>
-          </a:prstGeom>
-          <a:noFill/>
-        </p:spPr>
-        <p:txBody>
-          <a:bodyPr wrap="square" lIns="0" rIns="0" tIns="0" bIns="0">
-            <a:spAutoFit/>
-          </a:bodyPr>
-          <a:lstStyle/>
-          <a:p>
-            <a:pPr>
-              <a:lnSpc>
-                <a:spcPct val="100000"/>
-              </a:lnSpc>
-              <a:spcAft>
-                <a:spcPts val="200"/>
-              </a:spcAft>
-            </a:pPr>
-            <a:r>
-              <a:rPr sz="3200" b="1" i="0">
-                <a:solidFill>
-                  <a:srgbClr val="4E7FA6"/>
-                </a:solidFill>
-                <a:latin typeface="Noto Sans"/>
-              </a:rPr>
-              <a:t>2,8%</a:t>
-            </a:r>
-          </a:p>
-          <a:p>
-            <a:pPr>
-              <a:lnSpc>
-                <a:spcPct val="100000"/>
-              </a:lnSpc>
-              <a:spcAft>
-                <a:spcPts val="0"/>
-              </a:spcAft>
-            </a:pPr>
-            <a:r>
-              <a:rPr sz="1300" b="0" i="0">
-                <a:solidFill>
-                  <a:srgbClr val="2E3138"/>
-                </a:solidFill>
-                <a:latin typeface="Noto Sans"/>
-              </a:rPr>
-              <a:t>kontrak 2 tahun</a:t>
-            </a:r>
+              <a:t>churn kontrak bulanan, vs 2,8% kontrak 2 tahun</a:t>
+            </a:r>
+          </a:p>
+        </p:txBody>
+      </p:sp>
+      <p:sp>
+        <p:nvSpPr>
+          <p:cNvPr id="7" name="Rounded Rectangle 6"/>
+          <p:cNvSpPr/>
+          <p:nvPr/>
+        </p:nvSpPr>
+        <p:spPr>
+          <a:xfrm>
+            <a:off x="5413248" y="1481328"/>
+            <a:ext cx="6336792" cy="3977639"/>
+          </a:xfrm>
+          <a:prstGeom prst="roundRect">
+            <a:avLst>
+              <a:gd name="adj" fmla="val 5500"/>
+            </a:avLst>
+          </a:prstGeom>
+          <a:solidFill>
+            <a:srgbClr val="D9C9AE"/>
+          </a:solidFill>
+          <a:ln>
+            <a:noFill/>
+          </a:ln>
+          <a:effectLst/>
+        </p:spPr>
+        <p:style>
+          <a:lnRef idx="1">
+            <a:schemeClr val="accent1"/>
+          </a:lnRef>
+          <a:fillRef idx="3">
+            <a:schemeClr val="accent1"/>
+          </a:fillRef>
+          <a:effectRef idx="2">
+            <a:schemeClr val="accent1"/>
+          </a:effectRef>
+          <a:fontRef idx="minor">
+            <a:schemeClr val="lt1"/>
+          </a:fontRef>
+        </p:style>
+        <p:txBody>
+          <a:bodyPr rtlCol="0" anchor="ctr"/>
+          <a:lstStyle/>
+          <a:p>
+            <a:pPr algn="ctr"/>
+          </a:p>
+        </p:txBody>
+      </p:sp>
+      <p:sp>
+        <p:nvSpPr>
+          <p:cNvPr id="8" name="Rounded Rectangle 7"/>
+          <p:cNvSpPr/>
+          <p:nvPr/>
+        </p:nvSpPr>
+        <p:spPr>
+          <a:xfrm>
+            <a:off x="5349240" y="1417320"/>
+            <a:ext cx="6336792" cy="3977639"/>
+          </a:xfrm>
+          <a:prstGeom prst="roundRect">
+            <a:avLst>
+              <a:gd name="adj" fmla="val 5500"/>
+            </a:avLst>
+          </a:prstGeom>
+          <a:solidFill>
+            <a:srgbClr val="F7F1E5"/>
+          </a:solidFill>
+          <a:ln>
+            <a:noFill/>
+          </a:ln>
+          <a:effectLst/>
+        </p:spPr>
+        <p:style>
+          <a:lnRef idx="1">
+            <a:schemeClr val="accent1"/>
+          </a:lnRef>
+          <a:fillRef idx="3">
+            <a:schemeClr val="accent1"/>
+          </a:fillRef>
+          <a:effectRef idx="2">
+            <a:schemeClr val="accent1"/>
+          </a:effectRef>
+          <a:fontRef idx="minor">
+            <a:schemeClr val="lt1"/>
+          </a:fontRef>
+        </p:style>
+        <p:txBody>
+          <a:bodyPr rtlCol="0" anchor="ctr"/>
+          <a:lstStyle/>
+          <a:p>
+            <a:pPr algn="ctr"/>
           </a:p>
         </p:txBody>
       </p:sp>
       <p:pic>
         <p:nvPicPr>
-          <p:cNvPr id="7" name="Picture 6" descr="02_churn_contract.png"/>
+          <p:cNvPr id="9" name="Picture 8" descr="02_churn_contract.png"/>
           <p:cNvPicPr>
             <a:picLocks noChangeAspect="1"/>
           </p:cNvPicPr>
@@ -4868,8 +5894,8 @@
         </p:blipFill>
         <p:spPr>
           <a:xfrm>
-            <a:off x="6126480" y="1463040"/>
-            <a:ext cx="5422392" cy="3290763"/>
+            <a:off x="5572012" y="1618488"/>
+            <a:ext cx="5891247" cy="3575303"/>
           </a:xfrm>
           <a:prstGeom prst="rect">
             <a:avLst/>
@@ -4878,14 +5904,14 @@
       </p:pic>
       <p:sp>
         <p:nvSpPr>
-          <p:cNvPr id="8" name="TextBox 7"/>
+          <p:cNvPr id="10" name="TextBox 9"/>
           <p:cNvSpPr txBox="1"/>
           <p:nvPr/>
         </p:nvSpPr>
         <p:spPr>
           <a:xfrm>
-            <a:off x="6126480" y="4863531"/>
-            <a:ext cx="5422392" cy="365760"/>
+            <a:off x="5349240" y="5486399"/>
+            <a:ext cx="6336792" cy="274320"/>
           </a:xfrm>
           <a:prstGeom prst="rect">
             <a:avLst/>
@@ -4893,27 +5919,30 @@
           <a:noFill/>
         </p:spPr>
         <p:txBody>
-          <a:bodyPr wrap="square" lIns="0" rIns="0" tIns="0" bIns="0">
+          <a:bodyPr wrap="square" anchor="t" lIns="0" rIns="0" tIns="0" bIns="0">
             <a:spAutoFit/>
           </a:bodyPr>
           <a:lstStyle/>
           <a:p>
-            <a:pPr algn="ctr">
+            <a:pPr>
               <a:lnSpc>
-                <a:spcPct val="100000"/>
+                <a:spcPct val="113000"/>
               </a:lnSpc>
+              <a:spcBef>
+                <a:spcPts val="0"/>
+              </a:spcBef>
               <a:spcAft>
                 <a:spcPts val="0"/>
               </a:spcAft>
             </a:pPr>
             <a:r>
-              <a:rPr sz="1200" b="0" i="1">
-                <a:solidFill>
-                  <a:srgbClr val="5F636B"/>
+              <a:rPr sz="1050" b="0">
+                <a:solidFill>
+                  <a:srgbClr val="7A6A58"/>
                 </a:solidFill>
                 <a:latin typeface="Noto Sans"/>
               </a:rPr>
-              <a:t>Churn rate per jenis kontrak</a:t>
+              <a:t>Chart: churn rate per jenis kontrak.</a:t>
             </a:r>
           </a:p>
         </p:txBody>
@@ -4946,17 +5975,64 @@
       <p:grpSpPr/>
       <p:sp>
         <p:nvSpPr>
-          <p:cNvPr id="2" name="Rectangle 1"/>
-          <p:cNvSpPr/>
-          <p:nvPr/>
-        </p:nvSpPr>
-        <p:spPr>
-          <a:xfrm>
-            <a:off x="640080" y="502920"/>
-            <a:ext cx="146304" cy="475488"/>
+          <p:cNvPr id="2" name="TextBox 1"/>
+          <p:cNvSpPr txBox="1"/>
+          <p:nvPr/>
+        </p:nvSpPr>
+        <p:spPr>
+          <a:xfrm>
+            <a:off x="502920" y="384048"/>
+            <a:ext cx="11155680" cy="914400"/>
           </a:xfrm>
           <a:prstGeom prst="rect">
             <a:avLst/>
+          </a:prstGeom>
+          <a:noFill/>
+        </p:spPr>
+        <p:txBody>
+          <a:bodyPr wrap="square" anchor="t" lIns="0" rIns="0" tIns="0" bIns="0">
+            <a:spAutoFit/>
+          </a:bodyPr>
+          <a:lstStyle/>
+          <a:p>
+            <a:pPr>
+              <a:lnSpc>
+                <a:spcPct val="113000"/>
+              </a:lnSpc>
+              <a:spcBef>
+                <a:spcPts val="0"/>
+              </a:spcBef>
+              <a:spcAft>
+                <a:spcPts val="0"/>
+              </a:spcAft>
+            </a:pPr>
+            <a:r>
+              <a:rPr sz="3100" b="1">
+                <a:solidFill>
+                  <a:srgbClr val="2E3138"/>
+                </a:solidFill>
+                <a:latin typeface="Liberation Serif"/>
+              </a:rPr>
+              <a:t>Temuan 2: Tahun Pertama Paling Kritis</a:t>
+            </a:r>
+          </a:p>
+        </p:txBody>
+      </p:sp>
+      <p:sp>
+        <p:nvSpPr>
+          <p:cNvPr id="3" name="Rounded Rectangle 2"/>
+          <p:cNvSpPr/>
+          <p:nvPr/>
+        </p:nvSpPr>
+        <p:spPr>
+          <a:xfrm>
+            <a:off x="521207" y="1097280"/>
+            <a:ext cx="777240" cy="82296"/>
+          </a:xfrm>
+          <a:prstGeom prst="roundRect">
+            <a:avLst>
+              <a:gd name="adj" fmla="val 5500"/>
+            </a:avLst>
           </a:prstGeom>
           <a:solidFill>
             <a:srgbClr val="C75B7F"/>
@@ -4966,6 +6042,20 @@
           </a:ln>
           <a:effectLst/>
         </p:spPr>
+        <p:style>
+          <a:lnRef idx="1">
+            <a:schemeClr val="accent1"/>
+          </a:lnRef>
+          <a:fillRef idx="3">
+            <a:schemeClr val="accent1"/>
+          </a:fillRef>
+          <a:effectRef idx="2">
+            <a:schemeClr val="accent1"/>
+          </a:effectRef>
+          <a:fontRef idx="minor">
+            <a:schemeClr val="lt1"/>
+          </a:fontRef>
+        </p:style>
         <p:txBody>
           <a:bodyPr rtlCol="0" anchor="ctr"/>
           <a:lstStyle/>
@@ -4976,49 +6066,99 @@
       </p:sp>
       <p:sp>
         <p:nvSpPr>
-          <p:cNvPr id="3" name="TextBox 2"/>
-          <p:cNvSpPr txBox="1"/>
-          <p:nvPr/>
-        </p:nvSpPr>
-        <p:spPr>
-          <a:xfrm>
-            <a:off x="960120" y="347472"/>
-            <a:ext cx="10607040" cy="868680"/>
-          </a:xfrm>
-          <a:prstGeom prst="rect">
-            <a:avLst/>
-          </a:prstGeom>
-          <a:noFill/>
-        </p:spPr>
-        <p:txBody>
-          <a:bodyPr wrap="square" lIns="0" rIns="0" tIns="0" bIns="0">
-            <a:spAutoFit/>
-          </a:bodyPr>
-          <a:lstStyle/>
-          <a:p>
-            <a:pPr>
-              <a:lnSpc>
-                <a:spcPct val="100000"/>
-              </a:lnSpc>
-              <a:spcAft>
-                <a:spcPts val="0"/>
-              </a:spcAft>
-            </a:pPr>
-            <a:r>
-              <a:rPr sz="3200" b="1" i="0">
-                <a:solidFill>
-                  <a:srgbClr val="2E3138"/>
-                </a:solidFill>
-                <a:latin typeface="Liberation Serif"/>
-              </a:rPr>
-              <a:t>Temuan 2: Tahun Pertama Paling Kritis</a:t>
-            </a:r>
+          <p:cNvPr id="4" name="Rounded Rectangle 3"/>
+          <p:cNvSpPr/>
+          <p:nvPr/>
+        </p:nvSpPr>
+        <p:spPr>
+          <a:xfrm>
+            <a:off x="566928" y="1481328"/>
+            <a:ext cx="5120640" cy="3520440"/>
+          </a:xfrm>
+          <a:prstGeom prst="roundRect">
+            <a:avLst>
+              <a:gd name="adj" fmla="val 5500"/>
+            </a:avLst>
+          </a:prstGeom>
+          <a:solidFill>
+            <a:srgbClr val="D9C9AE"/>
+          </a:solidFill>
+          <a:ln>
+            <a:noFill/>
+          </a:ln>
+          <a:effectLst/>
+        </p:spPr>
+        <p:style>
+          <a:lnRef idx="1">
+            <a:schemeClr val="accent1"/>
+          </a:lnRef>
+          <a:fillRef idx="3">
+            <a:schemeClr val="accent1"/>
+          </a:fillRef>
+          <a:effectRef idx="2">
+            <a:schemeClr val="accent1"/>
+          </a:effectRef>
+          <a:fontRef idx="minor">
+            <a:schemeClr val="lt1"/>
+          </a:fontRef>
+        </p:style>
+        <p:txBody>
+          <a:bodyPr rtlCol="0" anchor="ctr"/>
+          <a:lstStyle/>
+          <a:p>
+            <a:pPr algn="ctr"/>
+          </a:p>
+        </p:txBody>
+      </p:sp>
+      <p:sp>
+        <p:nvSpPr>
+          <p:cNvPr id="5" name="Rounded Rectangle 4"/>
+          <p:cNvSpPr/>
+          <p:nvPr/>
+        </p:nvSpPr>
+        <p:spPr>
+          <a:xfrm>
+            <a:off x="502920" y="1417320"/>
+            <a:ext cx="5120640" cy="3520440"/>
+          </a:xfrm>
+          <a:prstGeom prst="roundRect">
+            <a:avLst>
+              <a:gd name="adj" fmla="val 5500"/>
+            </a:avLst>
+          </a:prstGeom>
+          <a:solidFill>
+            <a:srgbClr val="F7F1E5"/>
+          </a:solidFill>
+          <a:ln>
+            <a:noFill/>
+          </a:ln>
+          <a:effectLst/>
+        </p:spPr>
+        <p:style>
+          <a:lnRef idx="1">
+            <a:schemeClr val="accent1"/>
+          </a:lnRef>
+          <a:fillRef idx="3">
+            <a:schemeClr val="accent1"/>
+          </a:fillRef>
+          <a:effectRef idx="2">
+            <a:schemeClr val="accent1"/>
+          </a:effectRef>
+          <a:fontRef idx="minor">
+            <a:schemeClr val="lt1"/>
+          </a:fontRef>
+        </p:style>
+        <p:txBody>
+          <a:bodyPr rtlCol="0" anchor="ctr"/>
+          <a:lstStyle/>
+          <a:p>
+            <a:pPr algn="ctr"/>
           </a:p>
         </p:txBody>
       </p:sp>
       <p:pic>
         <p:nvPicPr>
-          <p:cNvPr id="4" name="Picture 3" descr="03_churn_tenure.png"/>
+          <p:cNvPr id="6" name="Picture 5" descr="03_churn_tenure.png"/>
           <p:cNvPicPr>
             <a:picLocks noChangeAspect="1"/>
           </p:cNvPicPr>
@@ -5032,8 +6172,8 @@
         </p:blipFill>
         <p:spPr>
           <a:xfrm>
-            <a:off x="640080" y="1691640"/>
-            <a:ext cx="5422392" cy="3290763"/>
+            <a:off x="704088" y="1745808"/>
+            <a:ext cx="4718303" cy="2863463"/>
           </a:xfrm>
           <a:prstGeom prst="rect">
             <a:avLst/>
@@ -5042,14 +6182,14 @@
       </p:pic>
       <p:sp>
         <p:nvSpPr>
-          <p:cNvPr id="5" name="TextBox 4"/>
+          <p:cNvPr id="7" name="TextBox 6"/>
           <p:cNvSpPr txBox="1"/>
           <p:nvPr/>
         </p:nvSpPr>
         <p:spPr>
           <a:xfrm>
-            <a:off x="640080" y="5092131"/>
-            <a:ext cx="5422392" cy="365760"/>
+            <a:off x="502920" y="5029200"/>
+            <a:ext cx="5120640" cy="274320"/>
           </a:xfrm>
           <a:prstGeom prst="rect">
             <a:avLst/>
@@ -5057,41 +6197,44 @@
           <a:noFill/>
         </p:spPr>
         <p:txBody>
-          <a:bodyPr wrap="square" lIns="0" rIns="0" tIns="0" bIns="0">
+          <a:bodyPr wrap="square" anchor="t" lIns="0" rIns="0" tIns="0" bIns="0">
             <a:spAutoFit/>
           </a:bodyPr>
           <a:lstStyle/>
           <a:p>
-            <a:pPr algn="ctr">
+            <a:pPr>
               <a:lnSpc>
-                <a:spcPct val="100000"/>
+                <a:spcPct val="113000"/>
               </a:lnSpc>
+              <a:spcBef>
+                <a:spcPts val="0"/>
+              </a:spcBef>
               <a:spcAft>
                 <a:spcPts val="0"/>
               </a:spcAft>
             </a:pPr>
             <a:r>
-              <a:rPr sz="1200" b="0" i="1">
-                <a:solidFill>
-                  <a:srgbClr val="5F636B"/>
+              <a:rPr sz="1050" b="0">
+                <a:solidFill>
+                  <a:srgbClr val="7A6A58"/>
                 </a:solidFill>
                 <a:latin typeface="Noto Sans"/>
               </a:rPr>
-              <a:t>Churn rate per masa berlangganan</a:t>
-            </a:r>
-          </a:p>
-        </p:txBody>
-      </p:sp>
-      <p:sp>
-        <p:nvSpPr>
-          <p:cNvPr id="6" name="TextBox 5"/>
+              <a:t>Chart: churn rate per masa berlangganan.</a:t>
+            </a:r>
+          </a:p>
+        </p:txBody>
+      </p:sp>
+      <p:sp>
+        <p:nvSpPr>
+          <p:cNvPr id="8" name="TextBox 7"/>
           <p:cNvSpPr txBox="1"/>
           <p:nvPr/>
         </p:nvSpPr>
         <p:spPr>
           <a:xfrm>
-            <a:off x="6446520" y="1463040"/>
-            <a:ext cx="5102352" cy="1188720"/>
+            <a:off x="5989320" y="1481328"/>
+            <a:ext cx="5715000" cy="3474720"/>
           </a:xfrm>
           <a:prstGeom prst="rect">
             <a:avLst/>
@@ -5099,60 +6242,134 @@
           <a:noFill/>
         </p:spPr>
         <p:txBody>
-          <a:bodyPr wrap="square" lIns="0" rIns="0" tIns="0" bIns="0">
+          <a:bodyPr wrap="square" anchor="t" lIns="0" rIns="0" tIns="0" bIns="0">
             <a:spAutoFit/>
           </a:bodyPr>
           <a:lstStyle/>
           <a:p>
             <a:pPr>
               <a:lnSpc>
-                <a:spcPct val="100000"/>
+                <a:spcPct val="113000"/>
               </a:lnSpc>
+              <a:spcBef>
+                <a:spcPts val="0"/>
+              </a:spcBef>
               <a:spcAft>
-                <a:spcPts val="200"/>
+                <a:spcPts val="1000"/>
               </a:spcAft>
             </a:pPr>
             <a:r>
-              <a:rPr sz="4400" b="1" i="0">
-                <a:solidFill>
-                  <a:srgbClr val="C75B7F"/>
+              <a:rPr sz="1550" b="0">
+                <a:solidFill>
+                  <a:srgbClr val="2E3138"/>
                 </a:solidFill>
                 <a:latin typeface="Noto Sans"/>
               </a:rPr>
-              <a:t>47,7%</a:t>
+              <a:t>Pelanggan baru (0-12 bulan) churn 47,7%: hampir separuh pergi di tahun pertama.</a:t>
             </a:r>
           </a:p>
           <a:p>
             <a:pPr>
               <a:lnSpc>
-                <a:spcPct val="100000"/>
+                <a:spcPct val="113000"/>
               </a:lnSpc>
+              <a:spcBef>
+                <a:spcPts val="0"/>
+              </a:spcBef>
               <a:spcAft>
-                <a:spcPts val="0"/>
+                <a:spcPts val="1000"/>
               </a:spcAft>
             </a:pPr>
             <a:r>
-              <a:rPr sz="1450" b="0" i="0">
+              <a:rPr sz="1550" b="0">
                 <a:solidFill>
                   <a:srgbClr val="2E3138"/>
                 </a:solidFill>
                 <a:latin typeface="Noto Sans"/>
               </a:rPr>
-              <a:t>pelanggan baru pergi di tahun pertama</a:t>
-            </a:r>
-          </a:p>
-        </p:txBody>
-      </p:sp>
-      <p:sp>
-        <p:nvSpPr>
-          <p:cNvPr id="7" name="TextBox 6"/>
+              <a:t>Kelompok ini hanya 30,9% dari basis pelanggan, tetapi menyumbang 55,5% dari semua churn.</a:t>
+            </a:r>
+          </a:p>
+          <a:p>
+            <a:pPr>
+              <a:lnSpc>
+                <a:spcPct val="113000"/>
+              </a:lnSpc>
+              <a:spcBef>
+                <a:spcPts val="0"/>
+              </a:spcBef>
+              <a:spcAft>
+                <a:spcPts val="1000"/>
+              </a:spcAft>
+            </a:pPr>
+            <a:r>
+              <a:rPr sz="1550" b="0">
+                <a:solidFill>
+                  <a:srgbClr val="2E3138"/>
+                </a:solidFill>
+                <a:latin typeface="Noto Sans"/>
+              </a:rPr>
+              <a:t>Churn turun bertahap sampai 9,5% setelah 4 tahun berlangganan. Siapa yang bertahan melewati tahun pertama cenderung bertahan lama.</a:t>
+            </a:r>
+          </a:p>
+        </p:txBody>
+      </p:sp>
+      <p:sp>
+        <p:nvSpPr>
+          <p:cNvPr id="9" name="Rounded Rectangle 8"/>
+          <p:cNvSpPr/>
+          <p:nvPr/>
+        </p:nvSpPr>
+        <p:spPr>
+          <a:xfrm>
+            <a:off x="502920" y="5193792"/>
+            <a:ext cx="11183112" cy="932688"/>
+          </a:xfrm>
+          <a:prstGeom prst="roundRect">
+            <a:avLst>
+              <a:gd name="adj" fmla="val 5500"/>
+            </a:avLst>
+          </a:prstGeom>
+          <a:solidFill>
+            <a:srgbClr val="F7F1E5"/>
+          </a:solidFill>
+          <a:ln>
+            <a:noFill/>
+          </a:ln>
+          <a:effectLst/>
+        </p:spPr>
+        <p:style>
+          <a:lnRef idx="1">
+            <a:schemeClr val="accent1"/>
+          </a:lnRef>
+          <a:fillRef idx="3">
+            <a:schemeClr val="accent1"/>
+          </a:fillRef>
+          <a:effectRef idx="2">
+            <a:schemeClr val="accent1"/>
+          </a:effectRef>
+          <a:fontRef idx="minor">
+            <a:schemeClr val="lt1"/>
+          </a:fontRef>
+        </p:style>
+        <p:txBody>
+          <a:bodyPr rtlCol="0" anchor="ctr"/>
+          <a:lstStyle/>
+          <a:p>
+            <a:pPr algn="ctr"/>
+          </a:p>
+        </p:txBody>
+      </p:sp>
+      <p:sp>
+        <p:nvSpPr>
+          <p:cNvPr id="10" name="TextBox 9"/>
           <p:cNvSpPr txBox="1"/>
           <p:nvPr/>
         </p:nvSpPr>
         <p:spPr>
           <a:xfrm>
-            <a:off x="6446520" y="2788920"/>
-            <a:ext cx="5102352" cy="3566160"/>
+            <a:off x="960120" y="5394960"/>
+            <a:ext cx="10424160" cy="548640"/>
           </a:xfrm>
           <a:prstGeom prst="rect">
             <a:avLst/>
@@ -5160,88 +6377,30 @@
           <a:noFill/>
         </p:spPr>
         <p:txBody>
-          <a:bodyPr wrap="square" lIns="0" rIns="0" tIns="0" bIns="0">
+          <a:bodyPr wrap="square" anchor="ctr" lIns="0" rIns="0" tIns="0" bIns="0">
             <a:spAutoFit/>
           </a:bodyPr>
           <a:lstStyle/>
           <a:p>
-            <a:pPr marL="171450" indent="-171450">
+            <a:pPr>
               <a:lnSpc>
-                <a:spcPct val="112000"/>
+                <a:spcPct val="113000"/>
               </a:lnSpc>
+              <a:spcBef>
+                <a:spcPts val="0"/>
+              </a:spcBef>
               <a:spcAft>
-                <a:spcPts val="1100"/>
+                <a:spcPts val="0"/>
               </a:spcAft>
-              <a:buChar char="•"/>
             </a:pPr>
             <a:r>
-              <a:rPr sz="1600" b="0" i="0">
-                <a:solidFill>
-                  <a:srgbClr val="2E3138"/>
+              <a:rPr sz="1600" b="1">
+                <a:solidFill>
+                  <a:srgbClr val="4E7FA6"/>
                 </a:solidFill>
                 <a:latin typeface="Noto Sans"/>
               </a:rPr>
-              <a:t>Pelanggan baru 0 sampai 12 bulan churn 47,7 persen, hampir separuh pergi di tahun pertama</a:t>
-            </a:r>
-          </a:p>
-          <a:p>
-            <a:pPr marL="171450" indent="-171450">
-              <a:lnSpc>
-                <a:spcPct val="112000"/>
-              </a:lnSpc>
-              <a:spcAft>
-                <a:spcPts val="1100"/>
-              </a:spcAft>
-              <a:buChar char="•"/>
-            </a:pPr>
-            <a:r>
-              <a:rPr sz="1600" b="0" i="0">
-                <a:solidFill>
-                  <a:srgbClr val="2E3138"/>
-                </a:solidFill>
-                <a:latin typeface="Noto Sans"/>
-              </a:rPr>
-              <a:t>Pelanggan baru menyumbang 55,5 persen dari semua churn, padahal hanya 30,9 persen dari basis pelanggan</a:t>
-            </a:r>
-          </a:p>
-          <a:p>
-            <a:pPr marL="171450" indent="-171450">
-              <a:lnSpc>
-                <a:spcPct val="112000"/>
-              </a:lnSpc>
-              <a:spcAft>
-                <a:spcPts val="1100"/>
-              </a:spcAft>
-              <a:buChar char="•"/>
-            </a:pPr>
-            <a:r>
-              <a:rPr sz="1600" b="0" i="0">
-                <a:solidFill>
-                  <a:srgbClr val="2E3138"/>
-                </a:solidFill>
-                <a:latin typeface="Noto Sans"/>
-              </a:rPr>
-              <a:t>Churn turun bertahap sampai 9,5 persen setelah 4 tahun berlangganan</a:t>
-            </a:r>
-          </a:p>
-          <a:p>
-            <a:pPr marL="171450" indent="-171450">
-              <a:lnSpc>
-                <a:spcPct val="112000"/>
-              </a:lnSpc>
-              <a:spcAft>
-                <a:spcPts val="1100"/>
-              </a:spcAft>
-              <a:buChar char="•"/>
-            </a:pPr>
-            <a:r>
-              <a:rPr sz="1600" b="0" i="0">
-                <a:solidFill>
-                  <a:srgbClr val="2E3138"/>
-                </a:solidFill>
-                <a:latin typeface="Noto Sans"/>
-              </a:rPr>
-              <a:t>Siapa yang bertahan melewati tahun pertama cenderung setia, jadi onboarding awal adalah investasi terbaik</a:t>
+              <a:t>47,7% pelanggan baru pergi di tahun pertama</a:t>
             </a:r>
           </a:p>
         </p:txBody>
@@ -5274,17 +6433,64 @@
       <p:grpSpPr/>
       <p:sp>
         <p:nvSpPr>
-          <p:cNvPr id="2" name="Rectangle 1"/>
-          <p:cNvSpPr/>
-          <p:nvPr/>
-        </p:nvSpPr>
-        <p:spPr>
-          <a:xfrm>
-            <a:off x="640080" y="502920"/>
-            <a:ext cx="146304" cy="475488"/>
+          <p:cNvPr id="2" name="TextBox 1"/>
+          <p:cNvSpPr txBox="1"/>
+          <p:nvPr/>
+        </p:nvSpPr>
+        <p:spPr>
+          <a:xfrm>
+            <a:off x="502920" y="384048"/>
+            <a:ext cx="11155680" cy="914400"/>
           </a:xfrm>
           <a:prstGeom prst="rect">
             <a:avLst/>
+          </a:prstGeom>
+          <a:noFill/>
+        </p:spPr>
+        <p:txBody>
+          <a:bodyPr wrap="square" anchor="t" lIns="0" rIns="0" tIns="0" bIns="0">
+            <a:spAutoFit/>
+          </a:bodyPr>
+          <a:lstStyle/>
+          <a:p>
+            <a:pPr>
+              <a:lnSpc>
+                <a:spcPct val="113000"/>
+              </a:lnSpc>
+              <a:spcBef>
+                <a:spcPts val="0"/>
+              </a:spcBef>
+              <a:spcAft>
+                <a:spcPts val="0"/>
+              </a:spcAft>
+            </a:pPr>
+            <a:r>
+              <a:rPr sz="3100" b="1">
+                <a:solidFill>
+                  <a:srgbClr val="2E3138"/>
+                </a:solidFill>
+                <a:latin typeface="Liberation Serif"/>
+              </a:rPr>
+              <a:t>Temuan 3: Fiber Mahal tapi Ditinggalkan</a:t>
+            </a:r>
+          </a:p>
+        </p:txBody>
+      </p:sp>
+      <p:sp>
+        <p:nvSpPr>
+          <p:cNvPr id="3" name="Rounded Rectangle 2"/>
+          <p:cNvSpPr/>
+          <p:nvPr/>
+        </p:nvSpPr>
+        <p:spPr>
+          <a:xfrm>
+            <a:off x="521207" y="1097280"/>
+            <a:ext cx="777240" cy="82296"/>
+          </a:xfrm>
+          <a:prstGeom prst="roundRect">
+            <a:avLst>
+              <a:gd name="adj" fmla="val 5500"/>
+            </a:avLst>
           </a:prstGeom>
           <a:solidFill>
             <a:srgbClr val="C75B7F"/>
@@ -5294,6 +6500,20 @@
           </a:ln>
           <a:effectLst/>
         </p:spPr>
+        <p:style>
+          <a:lnRef idx="1">
+            <a:schemeClr val="accent1"/>
+          </a:lnRef>
+          <a:fillRef idx="3">
+            <a:schemeClr val="accent1"/>
+          </a:fillRef>
+          <a:effectRef idx="2">
+            <a:schemeClr val="accent1"/>
+          </a:effectRef>
+          <a:fontRef idx="minor">
+            <a:schemeClr val="lt1"/>
+          </a:fontRef>
+        </p:style>
         <p:txBody>
           <a:bodyPr rtlCol="0" anchor="ctr"/>
           <a:lstStyle/>
@@ -5304,14 +6524,60 @@
       </p:sp>
       <p:sp>
         <p:nvSpPr>
-          <p:cNvPr id="3" name="TextBox 2"/>
+          <p:cNvPr id="4" name="Rounded Rectangle 3"/>
+          <p:cNvSpPr/>
+          <p:nvPr/>
+        </p:nvSpPr>
+        <p:spPr>
+          <a:xfrm>
+            <a:off x="502920" y="1417320"/>
+            <a:ext cx="4572000" cy="1783080"/>
+          </a:xfrm>
+          <a:prstGeom prst="roundRect">
+            <a:avLst>
+              <a:gd name="adj" fmla="val 5500"/>
+            </a:avLst>
+          </a:prstGeom>
+          <a:solidFill>
+            <a:srgbClr val="4E7FA6"/>
+          </a:solidFill>
+          <a:ln>
+            <a:noFill/>
+          </a:ln>
+          <a:effectLst/>
+        </p:spPr>
+        <p:style>
+          <a:lnRef idx="1">
+            <a:schemeClr val="accent1"/>
+          </a:lnRef>
+          <a:fillRef idx="3">
+            <a:schemeClr val="accent1"/>
+          </a:fillRef>
+          <a:effectRef idx="2">
+            <a:schemeClr val="accent1"/>
+          </a:effectRef>
+          <a:fontRef idx="minor">
+            <a:schemeClr val="lt1"/>
+          </a:fontRef>
+        </p:style>
+        <p:txBody>
+          <a:bodyPr rtlCol="0" anchor="ctr"/>
+          <a:lstStyle/>
+          <a:p>
+            <a:pPr algn="ctr"/>
+          </a:p>
+        </p:txBody>
+      </p:sp>
+      <p:sp>
+        <p:nvSpPr>
+          <p:cNvPr id="5" name="TextBox 4"/>
           <p:cNvSpPr txBox="1"/>
           <p:nvPr/>
         </p:nvSpPr>
         <p:spPr>
           <a:xfrm>
-            <a:off x="960120" y="347472"/>
-            <a:ext cx="10607040" cy="868680"/>
+            <a:off x="822960" y="1627632"/>
+            <a:ext cx="3977639" cy="1463040"/>
           </a:xfrm>
           <a:prstGeom prst="rect">
             <a:avLst/>
@@ -5319,41 +6585,66 @@
           <a:noFill/>
         </p:spPr>
         <p:txBody>
-          <a:bodyPr wrap="square" lIns="0" rIns="0" tIns="0" bIns="0">
+          <a:bodyPr wrap="square" anchor="t" lIns="0" rIns="0" tIns="0" bIns="0">
             <a:spAutoFit/>
           </a:bodyPr>
           <a:lstStyle/>
           <a:p>
             <a:pPr>
               <a:lnSpc>
-                <a:spcPct val="100000"/>
+                <a:spcPct val="113000"/>
               </a:lnSpc>
+              <a:spcBef>
+                <a:spcPts val="0"/>
+              </a:spcBef>
               <a:spcAft>
-                <a:spcPts val="0"/>
+                <a:spcPts val="200"/>
               </a:spcAft>
             </a:pPr>
             <a:r>
-              <a:rPr sz="3200" b="1" i="0">
-                <a:solidFill>
-                  <a:srgbClr val="2E3138"/>
-                </a:solidFill>
-                <a:latin typeface="Liberation Serif"/>
+              <a:rPr sz="4400" b="1">
+                <a:solidFill>
+                  <a:srgbClr val="FFFFFF"/>
+                </a:solidFill>
+                <a:latin typeface="Noto Sans"/>
               </a:rPr>
-              <a:t>Temuan 3: Fiber Mahal tapi Ditinggalkan</a:t>
-            </a:r>
-          </a:p>
-        </p:txBody>
-      </p:sp>
-      <p:sp>
-        <p:nvSpPr>
-          <p:cNvPr id="4" name="TextBox 3"/>
+              <a:t>41,9%</a:t>
+            </a:r>
+          </a:p>
+          <a:p>
+            <a:pPr>
+              <a:lnSpc>
+                <a:spcPct val="113000"/>
+              </a:lnSpc>
+              <a:spcBef>
+                <a:spcPts val="0"/>
+              </a:spcBef>
+              <a:spcAft>
+                <a:spcPts val="0"/>
+              </a:spcAft>
+            </a:pPr>
+            <a:r>
+              <a:rPr sz="1250" b="0">
+                <a:solidFill>
+                  <a:srgbClr val="F7F1E5"/>
+                </a:solidFill>
+                <a:latin typeface="Noto Sans"/>
+              </a:rPr>
+              <a:t>churn pelanggan fiber optic, lebih dari dua kali DSL (19,0%)</a:t>
+            </a:r>
+          </a:p>
+        </p:txBody>
+      </p:sp>
+      <p:sp>
+        <p:nvSpPr>
+          <p:cNvPr id="6" name="TextBox 5"/>
           <p:cNvSpPr txBox="1"/>
           <p:nvPr/>
         </p:nvSpPr>
         <p:spPr>
           <a:xfrm>
-            <a:off x="640080" y="1371600"/>
-            <a:ext cx="5349240" cy="1600200"/>
+            <a:off x="502920" y="3429000"/>
+            <a:ext cx="4572000" cy="2651760"/>
           </a:xfrm>
           <a:prstGeom prst="rect">
             <a:avLst/>
@@ -5361,118 +6652,173 @@
           <a:noFill/>
         </p:spPr>
         <p:txBody>
-          <a:bodyPr wrap="square" lIns="0" rIns="0" tIns="0" bIns="0">
+          <a:bodyPr wrap="square" anchor="t" lIns="0" rIns="0" tIns="0" bIns="0">
             <a:spAutoFit/>
           </a:bodyPr>
           <a:lstStyle/>
           <a:p>
-            <a:pPr marL="171450" indent="-171450">
+            <a:pPr>
               <a:lnSpc>
-                <a:spcPct val="112000"/>
+                <a:spcPct val="113000"/>
               </a:lnSpc>
+              <a:spcBef>
+                <a:spcPts val="0"/>
+              </a:spcBef>
               <a:spcAft>
-                <a:spcPts val="1100"/>
+                <a:spcPts val="1000"/>
               </a:spcAft>
-              <a:buChar char="•"/>
             </a:pPr>
             <a:r>
-              <a:rPr sz="1550" b="0" i="0">
+              <a:rPr sz="1450" b="0">
                 <a:solidFill>
                   <a:srgbClr val="2E3138"/>
                 </a:solidFill>
                 <a:latin typeface="Noto Sans"/>
               </a:rPr>
-              <a:t>Pelanggan Fiber optic churn 41,9 persen, lebih dari dua kali DSL yang 19,0 persen</a:t>
-            </a:r>
-          </a:p>
-          <a:p>
-            <a:pPr marL="171450" indent="-171450">
+              <a:t>Pelanggan fiber optic churn 41,9%, sementara DSL hanya 19,0% dan pelanggan tanpa internet 7,4%.</a:t>
+            </a:r>
+          </a:p>
+          <a:p>
+            <a:pPr>
               <a:lnSpc>
-                <a:spcPct val="112000"/>
+                <a:spcPct val="113000"/>
               </a:lnSpc>
+              <a:spcBef>
+                <a:spcPts val="0"/>
+              </a:spcBef>
               <a:spcAft>
-                <a:spcPts val="1100"/>
+                <a:spcPts val="1000"/>
               </a:spcAft>
-              <a:buChar char="•"/>
             </a:pPr>
             <a:r>
-              <a:rPr sz="1550" b="0" i="0">
+              <a:rPr sz="1450" b="0">
                 <a:solidFill>
                   <a:srgbClr val="2E3138"/>
                 </a:solidFill>
                 <a:latin typeface="Noto Sans"/>
               </a:rPr>
-              <a:t>Tagihan bulanan 71 sampai 90 USD churn 37,8 persen, tertinggi di antara band tagihan</a:t>
-            </a:r>
-          </a:p>
-        </p:txBody>
-      </p:sp>
-      <p:sp>
-        <p:nvSpPr>
-          <p:cNvPr id="5" name="TextBox 4"/>
-          <p:cNvSpPr txBox="1"/>
-          <p:nvPr/>
-        </p:nvSpPr>
-        <p:spPr>
-          <a:xfrm>
-            <a:off x="6199632" y="1371600"/>
-            <a:ext cx="5349240" cy="1600200"/>
-          </a:xfrm>
-          <a:prstGeom prst="rect">
-            <a:avLst/>
-          </a:prstGeom>
-          <a:noFill/>
-        </p:spPr>
-        <p:txBody>
-          <a:bodyPr wrap="square" lIns="0" rIns="0" tIns="0" bIns="0">
-            <a:spAutoFit/>
-          </a:bodyPr>
-          <a:lstStyle/>
-          <a:p>
-            <a:pPr marL="171450" indent="-171450">
+              <a:t>Tagihan bulanan 71-90 USD adalah band paling rawan: churn 37,8%. Pembayar electronic check churn 45,3%, hampir 3 kali kartu kredit otomatis (15,3%).</a:t>
+            </a:r>
+          </a:p>
+          <a:p>
+            <a:pPr>
               <a:lnSpc>
-                <a:spcPct val="112000"/>
+                <a:spcPct val="113000"/>
               </a:lnSpc>
+              <a:spcBef>
+                <a:spcPts val="0"/>
+              </a:spcBef>
               <a:spcAft>
-                <a:spcPts val="1100"/>
+                <a:spcPts val="1000"/>
               </a:spcAft>
-              <a:buChar char="•"/>
             </a:pPr>
             <a:r>
-              <a:rPr sz="1550" b="0" i="0">
+              <a:rPr sz="1450" b="0">
                 <a:solidFill>
                   <a:srgbClr val="2E3138"/>
                 </a:solidFill>
                 <a:latin typeface="Noto Sans"/>
               </a:rPr>
-              <a:t>Pelanggan yang membayar dengan cek elektronik churn 45,3 persen, hampir 3 kali lipat kartu kredit otomatis 15,3 persen</a:t>
-            </a:r>
-          </a:p>
-          <a:p>
-            <a:pPr marL="171450" indent="-171450">
-              <a:lnSpc>
-                <a:spcPct val="112000"/>
-              </a:lnSpc>
-              <a:spcAft>
-                <a:spcPts val="1100"/>
-              </a:spcAft>
-              <a:buChar char="•"/>
-            </a:pPr>
-            <a:r>
-              <a:rPr sz="1550" b="0" i="0">
-                <a:solidFill>
-                  <a:srgbClr val="2E3138"/>
-                </a:solidFill>
-                <a:latin typeface="Noto Sans"/>
-              </a:rPr>
-              <a:t>Sinyal masalah nilai: pelanggan membayar paling mahal tetapi merasa layanannya tidak sepadan, dan pembayaran manual membuat pergi terasa mudah</a:t>
-            </a:r>
+              <a:t>Sinyal masalah nilai: pelanggan membayar paling mahal, merasa layanan tidak sepadan, dan pembayaran manual membuat pergi terasa mudah.</a:t>
+            </a:r>
+          </a:p>
+        </p:txBody>
+      </p:sp>
+      <p:sp>
+        <p:nvSpPr>
+          <p:cNvPr id="7" name="Rounded Rectangle 6"/>
+          <p:cNvSpPr/>
+          <p:nvPr/>
+        </p:nvSpPr>
+        <p:spPr>
+          <a:xfrm>
+            <a:off x="5458968" y="1481328"/>
+            <a:ext cx="6291072" cy="4206240"/>
+          </a:xfrm>
+          <a:prstGeom prst="roundRect">
+            <a:avLst>
+              <a:gd name="adj" fmla="val 5500"/>
+            </a:avLst>
+          </a:prstGeom>
+          <a:solidFill>
+            <a:srgbClr val="D9C9AE"/>
+          </a:solidFill>
+          <a:ln>
+            <a:noFill/>
+          </a:ln>
+          <a:effectLst/>
+        </p:spPr>
+        <p:style>
+          <a:lnRef idx="1">
+            <a:schemeClr val="accent1"/>
+          </a:lnRef>
+          <a:fillRef idx="3">
+            <a:schemeClr val="accent1"/>
+          </a:fillRef>
+          <a:effectRef idx="2">
+            <a:schemeClr val="accent1"/>
+          </a:effectRef>
+          <a:fontRef idx="minor">
+            <a:schemeClr val="lt1"/>
+          </a:fontRef>
+        </p:style>
+        <p:txBody>
+          <a:bodyPr rtlCol="0" anchor="ctr"/>
+          <a:lstStyle/>
+          <a:p>
+            <a:pPr algn="ctr"/>
+          </a:p>
+        </p:txBody>
+      </p:sp>
+      <p:sp>
+        <p:nvSpPr>
+          <p:cNvPr id="8" name="Rounded Rectangle 7"/>
+          <p:cNvSpPr/>
+          <p:nvPr/>
+        </p:nvSpPr>
+        <p:spPr>
+          <a:xfrm>
+            <a:off x="5394960" y="1417320"/>
+            <a:ext cx="6291072" cy="4206240"/>
+          </a:xfrm>
+          <a:prstGeom prst="roundRect">
+            <a:avLst>
+              <a:gd name="adj" fmla="val 5500"/>
+            </a:avLst>
+          </a:prstGeom>
+          <a:solidFill>
+            <a:srgbClr val="F7F1E5"/>
+          </a:solidFill>
+          <a:ln>
+            <a:noFill/>
+          </a:ln>
+          <a:effectLst/>
+        </p:spPr>
+        <p:style>
+          <a:lnRef idx="1">
+            <a:schemeClr val="accent1"/>
+          </a:lnRef>
+          <a:fillRef idx="3">
+            <a:schemeClr val="accent1"/>
+          </a:fillRef>
+          <a:effectRef idx="2">
+            <a:schemeClr val="accent1"/>
+          </a:effectRef>
+          <a:fontRef idx="minor">
+            <a:schemeClr val="lt1"/>
+          </a:fontRef>
+        </p:style>
+        <p:txBody>
+          <a:bodyPr rtlCol="0" anchor="ctr"/>
+          <a:lstStyle/>
+          <a:p>
+            <a:pPr algn="ctr"/>
           </a:p>
         </p:txBody>
       </p:sp>
       <p:pic>
         <p:nvPicPr>
-          <p:cNvPr id="6" name="Picture 5" descr="04_churn_internet.png"/>
+          <p:cNvPr id="9" name="Picture 8" descr="04_churn_internet.png"/>
           <p:cNvPicPr>
             <a:picLocks noChangeAspect="1"/>
           </p:cNvPicPr>
@@ -5486,8 +6832,8 @@
         </p:blipFill>
         <p:spPr>
           <a:xfrm>
-            <a:off x="640080" y="3017520"/>
-            <a:ext cx="5760720" cy="3496089"/>
+            <a:off x="5596128" y="1733550"/>
+            <a:ext cx="5888736" cy="3573779"/>
           </a:xfrm>
           <a:prstGeom prst="rect">
             <a:avLst/>
@@ -5496,14 +6842,14 @@
       </p:pic>
       <p:sp>
         <p:nvSpPr>
-          <p:cNvPr id="7" name="TextBox 6"/>
+          <p:cNvPr id="10" name="TextBox 9"/>
           <p:cNvSpPr txBox="1"/>
           <p:nvPr/>
         </p:nvSpPr>
         <p:spPr>
           <a:xfrm>
-            <a:off x="640080" y="6605049"/>
-            <a:ext cx="5760720" cy="365760"/>
+            <a:off x="5394960" y="5714999"/>
+            <a:ext cx="6291072" cy="274320"/>
           </a:xfrm>
           <a:prstGeom prst="rect">
             <a:avLst/>
@@ -5511,149 +6857,30 @@
           <a:noFill/>
         </p:spPr>
         <p:txBody>
-          <a:bodyPr wrap="square" lIns="0" rIns="0" tIns="0" bIns="0">
+          <a:bodyPr wrap="square" anchor="t" lIns="0" rIns="0" tIns="0" bIns="0">
             <a:spAutoFit/>
           </a:bodyPr>
           <a:lstStyle/>
           <a:p>
-            <a:pPr algn="ctr">
+            <a:pPr>
               <a:lnSpc>
-                <a:spcPct val="100000"/>
+                <a:spcPct val="113000"/>
               </a:lnSpc>
+              <a:spcBef>
+                <a:spcPts val="0"/>
+              </a:spcBef>
               <a:spcAft>
                 <a:spcPts val="0"/>
               </a:spcAft>
             </a:pPr>
             <a:r>
-              <a:rPr sz="1200" b="0" i="1">
-                <a:solidFill>
-                  <a:srgbClr val="5F636B"/>
+              <a:rPr sz="1050" b="0">
+                <a:solidFill>
+                  <a:srgbClr val="7A6A58"/>
                 </a:solidFill>
                 <a:latin typeface="Noto Sans"/>
               </a:rPr>
-              <a:t>Churn rate per layanan internet</a:t>
-            </a:r>
-          </a:p>
-        </p:txBody>
-      </p:sp>
-      <p:sp>
-        <p:nvSpPr>
-          <p:cNvPr id="8" name="TextBox 7"/>
-          <p:cNvSpPr txBox="1"/>
-          <p:nvPr/>
-        </p:nvSpPr>
-        <p:spPr>
-          <a:xfrm>
-            <a:off x="6949440" y="3429000"/>
-            <a:ext cx="4480560" cy="1051560"/>
-          </a:xfrm>
-          <a:prstGeom prst="rect">
-            <a:avLst/>
-          </a:prstGeom>
-          <a:noFill/>
-        </p:spPr>
-        <p:txBody>
-          <a:bodyPr wrap="square" lIns="0" rIns="0" tIns="0" bIns="0">
-            <a:spAutoFit/>
-          </a:bodyPr>
-          <a:lstStyle/>
-          <a:p>
-            <a:pPr>
-              <a:lnSpc>
-                <a:spcPct val="100000"/>
-              </a:lnSpc>
-              <a:spcAft>
-                <a:spcPts val="200"/>
-              </a:spcAft>
-            </a:pPr>
-            <a:r>
-              <a:rPr sz="3600" b="1" i="0">
-                <a:solidFill>
-                  <a:srgbClr val="C75B7F"/>
-                </a:solidFill>
-                <a:latin typeface="Noto Sans"/>
-              </a:rPr>
-              <a:t>41,9%</a:t>
-            </a:r>
-          </a:p>
-          <a:p>
-            <a:pPr>
-              <a:lnSpc>
-                <a:spcPct val="100000"/>
-              </a:lnSpc>
-              <a:spcAft>
-                <a:spcPts val="0"/>
-              </a:spcAft>
-            </a:pPr>
-            <a:r>
-              <a:rPr sz="1350" b="0" i="0">
-                <a:solidFill>
-                  <a:srgbClr val="2E3138"/>
-                </a:solidFill>
-                <a:latin typeface="Noto Sans"/>
-              </a:rPr>
-              <a:t>churn pelanggan Fiber optic</a:t>
-            </a:r>
-          </a:p>
-        </p:txBody>
-      </p:sp>
-      <p:sp>
-        <p:nvSpPr>
-          <p:cNvPr id="9" name="TextBox 8"/>
-          <p:cNvSpPr txBox="1"/>
-          <p:nvPr/>
-        </p:nvSpPr>
-        <p:spPr>
-          <a:xfrm>
-            <a:off x="6949440" y="4892040"/>
-            <a:ext cx="4480560" cy="1051560"/>
-          </a:xfrm>
-          <a:prstGeom prst="rect">
-            <a:avLst/>
-          </a:prstGeom>
-          <a:noFill/>
-        </p:spPr>
-        <p:txBody>
-          <a:bodyPr wrap="square" lIns="0" rIns="0" tIns="0" bIns="0">
-            <a:spAutoFit/>
-          </a:bodyPr>
-          <a:lstStyle/>
-          <a:p>
-            <a:pPr>
-              <a:lnSpc>
-                <a:spcPct val="100000"/>
-              </a:lnSpc>
-              <a:spcAft>
-                <a:spcPts val="200"/>
-              </a:spcAft>
-            </a:pPr>
-            <a:r>
-              <a:rPr sz="3600" b="1" i="0">
-                <a:solidFill>
-                  <a:srgbClr val="C75B7F"/>
-                </a:solidFill>
-                <a:latin typeface="Noto Sans"/>
-              </a:rPr>
-              <a:t>45,3%</a:t>
-            </a:r>
-          </a:p>
-          <a:p>
-            <a:pPr>
-              <a:lnSpc>
-                <a:spcPct val="100000"/>
-              </a:lnSpc>
-              <a:spcAft>
-                <a:spcPts val="0"/>
-              </a:spcAft>
-            </a:pPr>
-            <a:r>
-              <a:rPr sz="1350" b="0" i="0">
-                <a:solidFill>
-                  <a:srgbClr val="2E3138"/>
-                </a:solidFill>
-                <a:latin typeface="Noto Sans"/>
-              </a:rPr>
-              <a:t>churn pembayar cek elektronik</a:t>
+              <a:t>Chart: churn rate per layanan internet.</a:t>
             </a:r>
           </a:p>
         </p:txBody>
@@ -5686,17 +6913,64 @@
       <p:grpSpPr/>
       <p:sp>
         <p:nvSpPr>
-          <p:cNvPr id="2" name="Rectangle 1"/>
-          <p:cNvSpPr/>
-          <p:nvPr/>
-        </p:nvSpPr>
-        <p:spPr>
-          <a:xfrm>
-            <a:off x="640080" y="502920"/>
-            <a:ext cx="146304" cy="475488"/>
+          <p:cNvPr id="2" name="TextBox 1"/>
+          <p:cNvSpPr txBox="1"/>
+          <p:nvPr/>
+        </p:nvSpPr>
+        <p:spPr>
+          <a:xfrm>
+            <a:off x="502920" y="384048"/>
+            <a:ext cx="11155680" cy="914400"/>
           </a:xfrm>
           <a:prstGeom prst="rect">
             <a:avLst/>
+          </a:prstGeom>
+          <a:noFill/>
+        </p:spPr>
+        <p:txBody>
+          <a:bodyPr wrap="square" anchor="t" lIns="0" rIns="0" tIns="0" bIns="0">
+            <a:spAutoFit/>
+          </a:bodyPr>
+          <a:lstStyle/>
+          <a:p>
+            <a:pPr>
+              <a:lnSpc>
+                <a:spcPct val="113000"/>
+              </a:lnSpc>
+              <a:spcBef>
+                <a:spcPts val="0"/>
+              </a:spcBef>
+              <a:spcAft>
+                <a:spcPts val="0"/>
+              </a:spcAft>
+            </a:pPr>
+            <a:r>
+              <a:rPr sz="3100" b="1">
+                <a:solidFill>
+                  <a:srgbClr val="2E3138"/>
+                </a:solidFill>
+                <a:latin typeface="Liberation Serif"/>
+              </a:rPr>
+              <a:t>Temuan 4: Dukungan Melindungi, Lansia Rentan</a:t>
+            </a:r>
+          </a:p>
+        </p:txBody>
+      </p:sp>
+      <p:sp>
+        <p:nvSpPr>
+          <p:cNvPr id="3" name="Rounded Rectangle 2"/>
+          <p:cNvSpPr/>
+          <p:nvPr/>
+        </p:nvSpPr>
+        <p:spPr>
+          <a:xfrm>
+            <a:off x="521207" y="1097280"/>
+            <a:ext cx="777240" cy="82296"/>
+          </a:xfrm>
+          <a:prstGeom prst="roundRect">
+            <a:avLst>
+              <a:gd name="adj" fmla="val 5500"/>
+            </a:avLst>
           </a:prstGeom>
           <a:solidFill>
             <a:srgbClr val="C75B7F"/>
@@ -5706,6 +6980,20 @@
           </a:ln>
           <a:effectLst/>
         </p:spPr>
+        <p:style>
+          <a:lnRef idx="1">
+            <a:schemeClr val="accent1"/>
+          </a:lnRef>
+          <a:fillRef idx="3">
+            <a:schemeClr val="accent1"/>
+          </a:fillRef>
+          <a:effectRef idx="2">
+            <a:schemeClr val="accent1"/>
+          </a:effectRef>
+          <a:fontRef idx="minor">
+            <a:schemeClr val="lt1"/>
+          </a:fontRef>
+        </p:style>
         <p:txBody>
           <a:bodyPr rtlCol="0" anchor="ctr"/>
           <a:lstStyle/>
@@ -5716,169 +7004,93 @@
       </p:sp>
       <p:sp>
         <p:nvSpPr>
-          <p:cNvPr id="3" name="TextBox 2"/>
-          <p:cNvSpPr txBox="1"/>
-          <p:nvPr/>
-        </p:nvSpPr>
-        <p:spPr>
-          <a:xfrm>
-            <a:off x="960120" y="347472"/>
-            <a:ext cx="10607040" cy="868680"/>
-          </a:xfrm>
-          <a:prstGeom prst="rect">
-            <a:avLst/>
-          </a:prstGeom>
-          <a:noFill/>
-        </p:spPr>
-        <p:txBody>
-          <a:bodyPr wrap="square" lIns="0" rIns="0" tIns="0" bIns="0">
-            <a:spAutoFit/>
-          </a:bodyPr>
-          <a:lstStyle/>
-          <a:p>
-            <a:pPr>
-              <a:lnSpc>
-                <a:spcPct val="100000"/>
-              </a:lnSpc>
-              <a:spcAft>
-                <a:spcPts val="0"/>
-              </a:spcAft>
-            </a:pPr>
-            <a:r>
-              <a:rPr sz="3200" b="1" i="0">
-                <a:solidFill>
-                  <a:srgbClr val="2E3138"/>
-                </a:solidFill>
-                <a:latin typeface="Liberation Serif"/>
-              </a:rPr>
-              <a:t>Temuan 4: Dukungan Melindungi, Lansia Rentan</a:t>
-            </a:r>
-          </a:p>
-        </p:txBody>
-      </p:sp>
-      <p:sp>
-        <p:nvSpPr>
-          <p:cNvPr id="4" name="TextBox 3"/>
-          <p:cNvSpPr txBox="1"/>
-          <p:nvPr/>
-        </p:nvSpPr>
-        <p:spPr>
-          <a:xfrm>
-            <a:off x="640080" y="1371600"/>
-            <a:ext cx="5349240" cy="1645920"/>
-          </a:xfrm>
-          <a:prstGeom prst="rect">
-            <a:avLst/>
-          </a:prstGeom>
-          <a:noFill/>
-        </p:spPr>
-        <p:txBody>
-          <a:bodyPr wrap="square" lIns="0" rIns="0" tIns="0" bIns="0">
-            <a:spAutoFit/>
-          </a:bodyPr>
-          <a:lstStyle/>
-          <a:p>
-            <a:pPr marL="171450" indent="-171450">
-              <a:lnSpc>
-                <a:spcPct val="112000"/>
-              </a:lnSpc>
-              <a:spcAft>
-                <a:spcPts val="1100"/>
-              </a:spcAft>
-              <a:buChar char="•"/>
-            </a:pPr>
-            <a:r>
-              <a:rPr sz="1550" b="0" i="0">
-                <a:solidFill>
-                  <a:srgbClr val="2E3138"/>
-                </a:solidFill>
-                <a:latin typeface="Noto Sans"/>
-              </a:rPr>
-              <a:t>Pelanggan internet tanpa Tech Support churn 41,6 persen, dibanding yang memakai hanya 15,2 persen</a:t>
-            </a:r>
-          </a:p>
-          <a:p>
-            <a:pPr marL="171450" indent="-171450">
-              <a:lnSpc>
-                <a:spcPct val="112000"/>
-              </a:lnSpc>
-              <a:spcAft>
-                <a:spcPts val="1100"/>
-              </a:spcAft>
-              <a:buChar char="•"/>
-            </a:pPr>
-            <a:r>
-              <a:rPr sz="1550" b="0" i="0">
-                <a:solidFill>
-                  <a:srgbClr val="2E3138"/>
-                </a:solidFill>
-                <a:latin typeface="Noto Sans"/>
-              </a:rPr>
-              <a:t>Tanpa Online Security churn 41,8 persen, dibanding yang memakai 14,6 persen</a:t>
-            </a:r>
-          </a:p>
-        </p:txBody>
-      </p:sp>
-      <p:sp>
-        <p:nvSpPr>
-          <p:cNvPr id="5" name="TextBox 4"/>
-          <p:cNvSpPr txBox="1"/>
-          <p:nvPr/>
-        </p:nvSpPr>
-        <p:spPr>
-          <a:xfrm>
-            <a:off x="6199632" y="1371600"/>
-            <a:ext cx="5349240" cy="1645920"/>
-          </a:xfrm>
-          <a:prstGeom prst="rect">
-            <a:avLst/>
-          </a:prstGeom>
-          <a:noFill/>
-        </p:spPr>
-        <p:txBody>
-          <a:bodyPr wrap="square" lIns="0" rIns="0" tIns="0" bIns="0">
-            <a:spAutoFit/>
-          </a:bodyPr>
-          <a:lstStyle/>
-          <a:p>
-            <a:pPr marL="171450" indent="-171450">
-              <a:lnSpc>
-                <a:spcPct val="112000"/>
-              </a:lnSpc>
-              <a:spcAft>
-                <a:spcPts val="1100"/>
-              </a:spcAft>
-              <a:buChar char="•"/>
-            </a:pPr>
-            <a:r>
-              <a:rPr sz="1550" b="0" i="0">
-                <a:solidFill>
-                  <a:srgbClr val="2E3138"/>
-                </a:solidFill>
-                <a:latin typeface="Noto Sans"/>
-              </a:rPr>
-              <a:t>Senior citizen churn 41,7 persen, pelanggan tanpa pasangan 33,0 persen, tanpa tanggungan 31,3 persen</a:t>
-            </a:r>
-          </a:p>
-          <a:p>
-            <a:pPr marL="171450" indent="-171450">
-              <a:lnSpc>
-                <a:spcPct val="112000"/>
-              </a:lnSpc>
-              <a:spcAft>
-                <a:spcPts val="1100"/>
-              </a:spcAft>
-              <a:buChar char="•"/>
-            </a:pPr>
-            <a:r>
-              <a:rPr sz="1550" b="0" i="0">
-                <a:solidFill>
-                  <a:srgbClr val="2E3138"/>
-                </a:solidFill>
-                <a:latin typeface="Noto Sans"/>
-              </a:rPr>
-              <a:t>Gender hampir tidak berpengaruh: perempuan 27,0 persen vs laki-laki 26,2 persen</a:t>
-            </a:r>
+          <p:cNvPr id="4" name="Rounded Rectangle 3"/>
+          <p:cNvSpPr/>
+          <p:nvPr/>
+        </p:nvSpPr>
+        <p:spPr>
+          <a:xfrm>
+            <a:off x="566928" y="1481328"/>
+            <a:ext cx="5120640" cy="3520440"/>
+          </a:xfrm>
+          <a:prstGeom prst="roundRect">
+            <a:avLst>
+              <a:gd name="adj" fmla="val 5500"/>
+            </a:avLst>
+          </a:prstGeom>
+          <a:solidFill>
+            <a:srgbClr val="D9C9AE"/>
+          </a:solidFill>
+          <a:ln>
+            <a:noFill/>
+          </a:ln>
+          <a:effectLst/>
+        </p:spPr>
+        <p:style>
+          <a:lnRef idx="1">
+            <a:schemeClr val="accent1"/>
+          </a:lnRef>
+          <a:fillRef idx="3">
+            <a:schemeClr val="accent1"/>
+          </a:fillRef>
+          <a:effectRef idx="2">
+            <a:schemeClr val="accent1"/>
+          </a:effectRef>
+          <a:fontRef idx="minor">
+            <a:schemeClr val="lt1"/>
+          </a:fontRef>
+        </p:style>
+        <p:txBody>
+          <a:bodyPr rtlCol="0" anchor="ctr"/>
+          <a:lstStyle/>
+          <a:p>
+            <a:pPr algn="ctr"/>
+          </a:p>
+        </p:txBody>
+      </p:sp>
+      <p:sp>
+        <p:nvSpPr>
+          <p:cNvPr id="5" name="Rounded Rectangle 4"/>
+          <p:cNvSpPr/>
+          <p:nvPr/>
+        </p:nvSpPr>
+        <p:spPr>
+          <a:xfrm>
+            <a:off x="502920" y="1417320"/>
+            <a:ext cx="5120640" cy="3520440"/>
+          </a:xfrm>
+          <a:prstGeom prst="roundRect">
+            <a:avLst>
+              <a:gd name="adj" fmla="val 5500"/>
+            </a:avLst>
+          </a:prstGeom>
+          <a:solidFill>
+            <a:srgbClr val="F7F1E5"/>
+          </a:solidFill>
+          <a:ln>
+            <a:noFill/>
+          </a:ln>
+          <a:effectLst/>
+        </p:spPr>
+        <p:style>
+          <a:lnRef idx="1">
+            <a:schemeClr val="accent1"/>
+          </a:lnRef>
+          <a:fillRef idx="3">
+            <a:schemeClr val="accent1"/>
+          </a:fillRef>
+          <a:effectRef idx="2">
+            <a:schemeClr val="accent1"/>
+          </a:effectRef>
+          <a:fontRef idx="minor">
+            <a:schemeClr val="lt1"/>
+          </a:fontRef>
+        </p:style>
+        <p:txBody>
+          <a:bodyPr rtlCol="0" anchor="ctr"/>
+          <a:lstStyle/>
+          <a:p>
+            <a:pPr algn="ctr"/>
           </a:p>
         </p:txBody>
       </p:sp>
@@ -5898,8 +7110,8 @@
         </p:blipFill>
         <p:spPr>
           <a:xfrm>
-            <a:off x="1691640" y="3063240"/>
-            <a:ext cx="8805672" cy="3295850"/>
+            <a:off x="704088" y="2294539"/>
+            <a:ext cx="4718303" cy="1766000"/>
           </a:xfrm>
           <a:prstGeom prst="rect">
             <a:avLst/>
@@ -5914,8 +7126,8 @@
         </p:nvSpPr>
         <p:spPr>
           <a:xfrm>
-            <a:off x="1691640" y="6450530"/>
-            <a:ext cx="8805672" cy="365760"/>
+            <a:off x="502920" y="5029200"/>
+            <a:ext cx="5120640" cy="274320"/>
           </a:xfrm>
           <a:prstGeom prst="rect">
             <a:avLst/>
@@ -5923,27 +7135,210 @@
           <a:noFill/>
         </p:spPr>
         <p:txBody>
-          <a:bodyPr wrap="square" lIns="0" rIns="0" tIns="0" bIns="0">
+          <a:bodyPr wrap="square" anchor="t" lIns="0" rIns="0" tIns="0" bIns="0">
             <a:spAutoFit/>
           </a:bodyPr>
           <a:lstStyle/>
           <a:p>
-            <a:pPr algn="ctr">
+            <a:pPr>
               <a:lnSpc>
-                <a:spcPct val="100000"/>
+                <a:spcPct val="113000"/>
               </a:lnSpc>
+              <a:spcBef>
+                <a:spcPts val="0"/>
+              </a:spcBef>
               <a:spcAft>
                 <a:spcPts val="0"/>
               </a:spcAft>
             </a:pPr>
             <a:r>
-              <a:rPr sz="1200" b="0" i="1">
-                <a:solidFill>
-                  <a:srgbClr val="5F636B"/>
+              <a:rPr sz="1050" b="0">
+                <a:solidFill>
+                  <a:srgbClr val="7A6A58"/>
                 </a:solidFill>
                 <a:latin typeface="Noto Sans"/>
               </a:rPr>
-              <a:t>Churn: Tech Support dan Online Security</a:t>
+              <a:t>Chart: churn dengan dan tanpa Tech Support dan Online Security.</a:t>
+            </a:r>
+          </a:p>
+        </p:txBody>
+      </p:sp>
+      <p:sp>
+        <p:nvSpPr>
+          <p:cNvPr id="8" name="TextBox 7"/>
+          <p:cNvSpPr txBox="1"/>
+          <p:nvPr/>
+        </p:nvSpPr>
+        <p:spPr>
+          <a:xfrm>
+            <a:off x="5989320" y="1481328"/>
+            <a:ext cx="5715000" cy="3474720"/>
+          </a:xfrm>
+          <a:prstGeom prst="rect">
+            <a:avLst/>
+          </a:prstGeom>
+          <a:noFill/>
+        </p:spPr>
+        <p:txBody>
+          <a:bodyPr wrap="square" anchor="t" lIns="0" rIns="0" tIns="0" bIns="0">
+            <a:spAutoFit/>
+          </a:bodyPr>
+          <a:lstStyle/>
+          <a:p>
+            <a:pPr>
+              <a:lnSpc>
+                <a:spcPct val="113000"/>
+              </a:lnSpc>
+              <a:spcBef>
+                <a:spcPts val="0"/>
+              </a:spcBef>
+              <a:spcAft>
+                <a:spcPts val="1000"/>
+              </a:spcAft>
+            </a:pPr>
+            <a:r>
+              <a:rPr sz="1550" b="0">
+                <a:solidFill>
+                  <a:srgbClr val="2E3138"/>
+                </a:solidFill>
+                <a:latin typeface="Noto Sans"/>
+              </a:rPr>
+              <a:t>Tanpa Tech Support, churn 41,6%; dengan Tech Support hanya 15,2%. Tanpa Online Security churn 41,8%, dengan layanan itu 14,6%.</a:t>
+            </a:r>
+          </a:p>
+          <a:p>
+            <a:pPr>
+              <a:lnSpc>
+                <a:spcPct val="113000"/>
+              </a:lnSpc>
+              <a:spcBef>
+                <a:spcPts val="0"/>
+              </a:spcBef>
+              <a:spcAft>
+                <a:spcPts val="1000"/>
+              </a:spcAft>
+            </a:pPr>
+            <a:r>
+              <a:rPr sz="1550" b="0">
+                <a:solidFill>
+                  <a:srgbClr val="2E3138"/>
+                </a:solidFill>
+                <a:latin typeface="Noto Sans"/>
+              </a:rPr>
+              <a:t>Senior citizen churn 41,7%; pelanggan tanpa pasangan 33,0%; tanpa tanggungan 31,3%. Gender hampir tidak berpengaruh: perempuan 27,0% vs laki-laki 26,2%.</a:t>
+            </a:r>
+          </a:p>
+          <a:p>
+            <a:pPr>
+              <a:lnSpc>
+                <a:spcPct val="113000"/>
+              </a:lnSpc>
+              <a:spcBef>
+                <a:spcPts val="0"/>
+              </a:spcBef>
+              <a:spcAft>
+                <a:spcPts val="1000"/>
+              </a:spcAft>
+            </a:pPr>
+            <a:r>
+              <a:rPr sz="1550" b="0">
+                <a:solidFill>
+                  <a:srgbClr val="2E3138"/>
+                </a:solidFill>
+                <a:latin typeface="Noto Sans"/>
+              </a:rPr>
+              <a:t>Layanan dukungan bekerja seperti asuransi loyalitas: pelanggan yang merasa ditolong memilih bertahan.</a:t>
+            </a:r>
+          </a:p>
+        </p:txBody>
+      </p:sp>
+      <p:sp>
+        <p:nvSpPr>
+          <p:cNvPr id="9" name="Rounded Rectangle 8"/>
+          <p:cNvSpPr/>
+          <p:nvPr/>
+        </p:nvSpPr>
+        <p:spPr>
+          <a:xfrm>
+            <a:off x="502920" y="5193792"/>
+            <a:ext cx="11183112" cy="932688"/>
+          </a:xfrm>
+          <a:prstGeom prst="roundRect">
+            <a:avLst>
+              <a:gd name="adj" fmla="val 5500"/>
+            </a:avLst>
+          </a:prstGeom>
+          <a:solidFill>
+            <a:srgbClr val="F7F1E5"/>
+          </a:solidFill>
+          <a:ln>
+            <a:noFill/>
+          </a:ln>
+          <a:effectLst/>
+        </p:spPr>
+        <p:style>
+          <a:lnRef idx="1">
+            <a:schemeClr val="accent1"/>
+          </a:lnRef>
+          <a:fillRef idx="3">
+            <a:schemeClr val="accent1"/>
+          </a:fillRef>
+          <a:effectRef idx="2">
+            <a:schemeClr val="accent1"/>
+          </a:effectRef>
+          <a:fontRef idx="minor">
+            <a:schemeClr val="lt1"/>
+          </a:fontRef>
+        </p:style>
+        <p:txBody>
+          <a:bodyPr rtlCol="0" anchor="ctr"/>
+          <a:lstStyle/>
+          <a:p>
+            <a:pPr algn="ctr"/>
+          </a:p>
+        </p:txBody>
+      </p:sp>
+      <p:sp>
+        <p:nvSpPr>
+          <p:cNvPr id="10" name="TextBox 9"/>
+          <p:cNvSpPr txBox="1"/>
+          <p:nvPr/>
+        </p:nvSpPr>
+        <p:spPr>
+          <a:xfrm>
+            <a:off x="960120" y="5394960"/>
+            <a:ext cx="10424160" cy="548640"/>
+          </a:xfrm>
+          <a:prstGeom prst="rect">
+            <a:avLst/>
+          </a:prstGeom>
+          <a:noFill/>
+        </p:spPr>
+        <p:txBody>
+          <a:bodyPr wrap="square" anchor="ctr" lIns="0" rIns="0" tIns="0" bIns="0">
+            <a:spAutoFit/>
+          </a:bodyPr>
+          <a:lstStyle/>
+          <a:p>
+            <a:pPr>
+              <a:lnSpc>
+                <a:spcPct val="113000"/>
+              </a:lnSpc>
+              <a:spcBef>
+                <a:spcPts val="0"/>
+              </a:spcBef>
+              <a:spcAft>
+                <a:spcPts val="0"/>
+              </a:spcAft>
+            </a:pPr>
+            <a:r>
+              <a:rPr sz="1600" b="1">
+                <a:solidFill>
+                  <a:srgbClr val="4E7FA6"/>
+                </a:solidFill>
+                <a:latin typeface="Noto Sans"/>
+              </a:rPr>
+              <a:t>Dukungan teknis memangkas churn dari 41,6% ke 15,2%</a:t>
             </a:r>
           </a:p>
         </p:txBody>
@@ -5976,17 +7371,64 @@
       <p:grpSpPr/>
       <p:sp>
         <p:nvSpPr>
-          <p:cNvPr id="2" name="Rectangle 1"/>
-          <p:cNvSpPr/>
-          <p:nvPr/>
-        </p:nvSpPr>
-        <p:spPr>
-          <a:xfrm>
-            <a:off x="640080" y="502920"/>
-            <a:ext cx="146304" cy="475488"/>
+          <p:cNvPr id="2" name="TextBox 1"/>
+          <p:cNvSpPr txBox="1"/>
+          <p:nvPr/>
+        </p:nvSpPr>
+        <p:spPr>
+          <a:xfrm>
+            <a:off x="502920" y="384048"/>
+            <a:ext cx="11155680" cy="914400"/>
           </a:xfrm>
           <a:prstGeom prst="rect">
             <a:avLst/>
+          </a:prstGeom>
+          <a:noFill/>
+        </p:spPr>
+        <p:txBody>
+          <a:bodyPr wrap="square" anchor="t" lIns="0" rIns="0" tIns="0" bIns="0">
+            <a:spAutoFit/>
+          </a:bodyPr>
+          <a:lstStyle/>
+          <a:p>
+            <a:pPr>
+              <a:lnSpc>
+                <a:spcPct val="113000"/>
+              </a:lnSpc>
+              <a:spcBef>
+                <a:spcPts val="0"/>
+              </a:spcBef>
+              <a:spcAft>
+                <a:spcPts val="0"/>
+              </a:spcAft>
+            </a:pPr>
+            <a:r>
+              <a:rPr sz="3100" b="1">
+                <a:solidFill>
+                  <a:srgbClr val="2E3138"/>
+                </a:solidFill>
+                <a:latin typeface="Liberation Serif"/>
+              </a:rPr>
+              <a:t>Temuan 5: Risiko Menumpuk, Pendapatan Hilang</a:t>
+            </a:r>
+          </a:p>
+        </p:txBody>
+      </p:sp>
+      <p:sp>
+        <p:nvSpPr>
+          <p:cNvPr id="3" name="Rounded Rectangle 2"/>
+          <p:cNvSpPr/>
+          <p:nvPr/>
+        </p:nvSpPr>
+        <p:spPr>
+          <a:xfrm>
+            <a:off x="521207" y="1097280"/>
+            <a:ext cx="777240" cy="82296"/>
+          </a:xfrm>
+          <a:prstGeom prst="roundRect">
+            <a:avLst>
+              <a:gd name="adj" fmla="val 5500"/>
+            </a:avLst>
           </a:prstGeom>
           <a:solidFill>
             <a:srgbClr val="C75B7F"/>
@@ -5996,6 +7438,20 @@
           </a:ln>
           <a:effectLst/>
         </p:spPr>
+        <p:style>
+          <a:lnRef idx="1">
+            <a:schemeClr val="accent1"/>
+          </a:lnRef>
+          <a:fillRef idx="3">
+            <a:schemeClr val="accent1"/>
+          </a:fillRef>
+          <a:effectRef idx="2">
+            <a:schemeClr val="accent1"/>
+          </a:effectRef>
+          <a:fontRef idx="minor">
+            <a:schemeClr val="lt1"/>
+          </a:fontRef>
+        </p:style>
         <p:txBody>
           <a:bodyPr rtlCol="0" anchor="ctr"/>
           <a:lstStyle/>
@@ -6006,14 +7462,14 @@
       </p:sp>
       <p:sp>
         <p:nvSpPr>
-          <p:cNvPr id="3" name="TextBox 2"/>
+          <p:cNvPr id="4" name="TextBox 3"/>
           <p:cNvSpPr txBox="1"/>
           <p:nvPr/>
         </p:nvSpPr>
         <p:spPr>
           <a:xfrm>
-            <a:off x="960120" y="347472"/>
-            <a:ext cx="10607040" cy="868680"/>
+            <a:off x="502920" y="1463040"/>
+            <a:ext cx="4526280" cy="3291840"/>
           </a:xfrm>
           <a:prstGeom prst="rect">
             <a:avLst/>
@@ -6021,41 +7477,112 @@
           <a:noFill/>
         </p:spPr>
         <p:txBody>
-          <a:bodyPr wrap="square" lIns="0" rIns="0" tIns="0" bIns="0">
+          <a:bodyPr wrap="square" anchor="t" lIns="0" rIns="0" tIns="0" bIns="0">
             <a:spAutoFit/>
           </a:bodyPr>
           <a:lstStyle/>
           <a:p>
             <a:pPr>
               <a:lnSpc>
-                <a:spcPct val="100000"/>
+                <a:spcPct val="113000"/>
               </a:lnSpc>
+              <a:spcBef>
+                <a:spcPts val="0"/>
+              </a:spcBef>
               <a:spcAft>
-                <a:spcPts val="0"/>
+                <a:spcPts val="1000"/>
               </a:spcAft>
             </a:pPr>
             <a:r>
-              <a:rPr sz="3200" b="1" i="0">
+              <a:rPr sz="1550" b="0">
                 <a:solidFill>
                   <a:srgbClr val="2E3138"/>
                 </a:solidFill>
-                <a:latin typeface="Liberation Serif"/>
+                <a:latin typeface="Noto Sans"/>
               </a:rPr>
-              <a:t>Temuan 5: Risiko Menumpuk dan Pendapatan Hilang</a:t>
-            </a:r>
-          </a:p>
-        </p:txBody>
-      </p:sp>
-      <p:sp>
-        <p:nvSpPr>
-          <p:cNvPr id="4" name="TextBox 3"/>
+              <a:t>Kombinasi fiber optic + kontrak bulanan churn 54,6%: lebih dari separuh pergi. Kontrak bulanan + pelanggan baru churn 51,4%.</a:t>
+            </a:r>
+          </a:p>
+          <a:p>
+            <a:pPr>
+              <a:lnSpc>
+                <a:spcPct val="113000"/>
+              </a:lnSpc>
+              <a:spcBef>
+                <a:spcPts val="0"/>
+              </a:spcBef>
+              <a:spcAft>
+                <a:spcPts val="1000"/>
+              </a:spcAft>
+            </a:pPr>
+            <a:r>
+              <a:rPr sz="1550" b="0">
+                <a:solidFill>
+                  <a:srgbClr val="2E3138"/>
+                </a:solidFill>
+                <a:latin typeface="Noto Sans"/>
+              </a:rPr>
+              <a:t>Pelanggan yang churn membayar rata-rata USD 74,44 per bulan, lebih tinggi dari yang bertahan (USD 61,31). Yang pergi justru pelanggan bernilai lebih besar.</a:t>
+            </a:r>
+          </a:p>
+        </p:txBody>
+      </p:sp>
+      <p:sp>
+        <p:nvSpPr>
+          <p:cNvPr id="5" name="Rounded Rectangle 4"/>
+          <p:cNvSpPr/>
+          <p:nvPr/>
+        </p:nvSpPr>
+        <p:spPr>
+          <a:xfrm>
+            <a:off x="502920" y="4846320"/>
+            <a:ext cx="4526280" cy="1170432"/>
+          </a:xfrm>
+          <a:prstGeom prst="roundRect">
+            <a:avLst>
+              <a:gd name="adj" fmla="val 5500"/>
+            </a:avLst>
+          </a:prstGeom>
+          <a:solidFill>
+            <a:srgbClr val="4E7FA6"/>
+          </a:solidFill>
+          <a:ln>
+            <a:noFill/>
+          </a:ln>
+          <a:effectLst/>
+        </p:spPr>
+        <p:style>
+          <a:lnRef idx="1">
+            <a:schemeClr val="accent1"/>
+          </a:lnRef>
+          <a:fillRef idx="3">
+            <a:schemeClr val="accent1"/>
+          </a:fillRef>
+          <a:effectRef idx="2">
+            <a:schemeClr val="accent1"/>
+          </a:effectRef>
+          <a:fontRef idx="minor">
+            <a:schemeClr val="lt1"/>
+          </a:fontRef>
+        </p:style>
+        <p:txBody>
+          <a:bodyPr rtlCol="0" anchor="ctr"/>
+          <a:lstStyle/>
+          <a:p>
+            <a:pPr algn="ctr"/>
+          </a:p>
+        </p:txBody>
+      </p:sp>
+      <p:sp>
+        <p:nvSpPr>
+          <p:cNvPr id="6" name="TextBox 5"/>
           <p:cNvSpPr txBox="1"/>
           <p:nvPr/>
         </p:nvSpPr>
         <p:spPr>
           <a:xfrm>
-            <a:off x="640080" y="1463040"/>
-            <a:ext cx="5029200" cy="3200400"/>
+            <a:off x="777240" y="5010912"/>
+            <a:ext cx="4023360" cy="896112"/>
           </a:xfrm>
           <a:prstGeom prst="rect">
             <a:avLst/>
@@ -6063,75 +7590,151 @@
           <a:noFill/>
         </p:spPr>
         <p:txBody>
-          <a:bodyPr wrap="square" lIns="0" rIns="0" tIns="0" bIns="0">
+          <a:bodyPr wrap="square" anchor="t" lIns="0" rIns="0" tIns="0" bIns="0">
             <a:spAutoFit/>
           </a:bodyPr>
           <a:lstStyle/>
           <a:p>
-            <a:pPr marL="171450" indent="-171450">
+            <a:pPr>
               <a:lnSpc>
-                <a:spcPct val="112000"/>
+                <a:spcPct val="113000"/>
               </a:lnSpc>
+              <a:spcBef>
+                <a:spcPts val="0"/>
+              </a:spcBef>
               <a:spcAft>
-                <a:spcPts val="1100"/>
+                <a:spcPts val="200"/>
               </a:spcAft>
-              <a:buChar char="•"/>
             </a:pPr>
             <a:r>
-              <a:rPr sz="1600" b="0" i="0">
-                <a:solidFill>
-                  <a:srgbClr val="2E3138"/>
+              <a:rPr sz="2700" b="1">
+                <a:solidFill>
+                  <a:srgbClr val="FFFFFF"/>
                 </a:solidFill>
                 <a:latin typeface="Noto Sans"/>
               </a:rPr>
-              <a:t>Fiber optic plus kontrak bulanan churn 54,6 persen, lebih dari separuh pergi</a:t>
-            </a:r>
-          </a:p>
-          <a:p>
-            <a:pPr marL="171450" indent="-171450">
+              <a:t>USD 139.130,85</a:t>
+            </a:r>
+          </a:p>
+          <a:p>
+            <a:pPr>
               <a:lnSpc>
-                <a:spcPct val="112000"/>
+                <a:spcPct val="113000"/>
               </a:lnSpc>
+              <a:spcBef>
+                <a:spcPts val="0"/>
+              </a:spcBef>
               <a:spcAft>
-                <a:spcPts val="1100"/>
+                <a:spcPts val="0"/>
               </a:spcAft>
-              <a:buChar char="•"/>
             </a:pPr>
             <a:r>
-              <a:rPr sz="1600" b="0" i="0">
-                <a:solidFill>
-                  <a:srgbClr val="2E3138"/>
+              <a:rPr sz="1250" b="0">
+                <a:solidFill>
+                  <a:srgbClr val="F7F1E5"/>
                 </a:solidFill>
                 <a:latin typeface="Noto Sans"/>
               </a:rPr>
-              <a:t>Kontrak bulanan plus pelanggan baru churn 51,4 persen, kombinasi dua faktor rawan</a:t>
-            </a:r>
-          </a:p>
-          <a:p>
-            <a:pPr marL="171450" indent="-171450">
-              <a:lnSpc>
-                <a:spcPct val="112000"/>
-              </a:lnSpc>
-              <a:spcAft>
-                <a:spcPts val="1100"/>
-              </a:spcAft>
-              <a:buChar char="•"/>
-            </a:pPr>
-            <a:r>
-              <a:rPr sz="1600" b="0" i="0">
-                <a:solidFill>
-                  <a:srgbClr val="2E3138"/>
-                </a:solidFill>
-                <a:latin typeface="Noto Sans"/>
-              </a:rPr>
-              <a:t>Pelanggan yang churn membayar rata-rata 74,44 USD per bulan vs 61,31 USD yang bertahan, yang pergi adalah pelanggan bernilai lebih tinggi</a:t>
-            </a:r>
+              <a:t>revenue at risk per bulan, 30,5% dari pendapatan bulanan</a:t>
+            </a:r>
+          </a:p>
+        </p:txBody>
+      </p:sp>
+      <p:sp>
+        <p:nvSpPr>
+          <p:cNvPr id="7" name="Rounded Rectangle 6"/>
+          <p:cNvSpPr/>
+          <p:nvPr/>
+        </p:nvSpPr>
+        <p:spPr>
+          <a:xfrm>
+            <a:off x="5413248" y="1481328"/>
+            <a:ext cx="6336792" cy="3977639"/>
+          </a:xfrm>
+          <a:prstGeom prst="roundRect">
+            <a:avLst>
+              <a:gd name="adj" fmla="val 5500"/>
+            </a:avLst>
+          </a:prstGeom>
+          <a:solidFill>
+            <a:srgbClr val="D9C9AE"/>
+          </a:solidFill>
+          <a:ln>
+            <a:noFill/>
+          </a:ln>
+          <a:effectLst/>
+        </p:spPr>
+        <p:style>
+          <a:lnRef idx="1">
+            <a:schemeClr val="accent1"/>
+          </a:lnRef>
+          <a:fillRef idx="3">
+            <a:schemeClr val="accent1"/>
+          </a:fillRef>
+          <a:effectRef idx="2">
+            <a:schemeClr val="accent1"/>
+          </a:effectRef>
+          <a:fontRef idx="minor">
+            <a:schemeClr val="lt1"/>
+          </a:fontRef>
+        </p:style>
+        <p:txBody>
+          <a:bodyPr rtlCol="0" anchor="ctr"/>
+          <a:lstStyle/>
+          <a:p>
+            <a:pPr algn="ctr"/>
+          </a:p>
+        </p:txBody>
+      </p:sp>
+      <p:sp>
+        <p:nvSpPr>
+          <p:cNvPr id="8" name="Rounded Rectangle 7"/>
+          <p:cNvSpPr/>
+          <p:nvPr/>
+        </p:nvSpPr>
+        <p:spPr>
+          <a:xfrm>
+            <a:off x="5349240" y="1417320"/>
+            <a:ext cx="6336792" cy="3977639"/>
+          </a:xfrm>
+          <a:prstGeom prst="roundRect">
+            <a:avLst>
+              <a:gd name="adj" fmla="val 5500"/>
+            </a:avLst>
+          </a:prstGeom>
+          <a:solidFill>
+            <a:srgbClr val="F7F1E5"/>
+          </a:solidFill>
+          <a:ln>
+            <a:noFill/>
+          </a:ln>
+          <a:effectLst/>
+        </p:spPr>
+        <p:style>
+          <a:lnRef idx="1">
+            <a:schemeClr val="accent1"/>
+          </a:lnRef>
+          <a:fillRef idx="3">
+            <a:schemeClr val="accent1"/>
+          </a:fillRef>
+          <a:effectRef idx="2">
+            <a:schemeClr val="accent1"/>
+          </a:effectRef>
+          <a:fontRef idx="minor">
+            <a:schemeClr val="lt1"/>
+          </a:fontRef>
+        </p:style>
+        <p:txBody>
+          <a:bodyPr rtlCol="0" anchor="ctr"/>
+          <a:lstStyle/>
+          <a:p>
+            <a:pPr algn="ctr"/>
           </a:p>
         </p:txBody>
       </p:sp>
       <p:pic>
         <p:nvPicPr>
-          <p:cNvPr id="5" name="Picture 4" descr="10_churn_combo.png"/>
+          <p:cNvPr id="9" name="Picture 8" descr="10_churn_combo.png"/>
           <p:cNvPicPr>
             <a:picLocks noChangeAspect="1"/>
           </p:cNvPicPr>
@@ -6145,8 +7748,8 @@
         </p:blipFill>
         <p:spPr>
           <a:xfrm>
-            <a:off x="6126480" y="1463040"/>
-            <a:ext cx="5422392" cy="3096181"/>
+            <a:off x="5550407" y="1711855"/>
+            <a:ext cx="5934456" cy="3388569"/>
           </a:xfrm>
           <a:prstGeom prst="rect">
             <a:avLst/>
@@ -6155,14 +7758,14 @@
       </p:pic>
       <p:sp>
         <p:nvSpPr>
-          <p:cNvPr id="6" name="TextBox 5"/>
+          <p:cNvPr id="10" name="TextBox 9"/>
           <p:cNvSpPr txBox="1"/>
           <p:nvPr/>
         </p:nvSpPr>
         <p:spPr>
           <a:xfrm>
-            <a:off x="6126480" y="4668949"/>
-            <a:ext cx="5422392" cy="365760"/>
+            <a:off x="5349240" y="5486399"/>
+            <a:ext cx="6336792" cy="274320"/>
           </a:xfrm>
           <a:prstGeom prst="rect">
             <a:avLst/>
@@ -6170,141 +7773,30 @@
           <a:noFill/>
         </p:spPr>
         <p:txBody>
-          <a:bodyPr wrap="square" lIns="0" rIns="0" tIns="0" bIns="0">
+          <a:bodyPr wrap="square" anchor="t" lIns="0" rIns="0" tIns="0" bIns="0">
             <a:spAutoFit/>
           </a:bodyPr>
           <a:lstStyle/>
           <a:p>
-            <a:pPr algn="ctr">
+            <a:pPr>
               <a:lnSpc>
-                <a:spcPct val="100000"/>
+                <a:spcPct val="113000"/>
               </a:lnSpc>
+              <a:spcBef>
+                <a:spcPts val="0"/>
+              </a:spcBef>
               <a:spcAft>
                 <a:spcPts val="0"/>
               </a:spcAft>
             </a:pPr>
             <a:r>
-              <a:rPr sz="1200" b="0" i="1">
-                <a:solidFill>
-                  <a:srgbClr val="5F636B"/>
+              <a:rPr sz="1050" b="0">
+                <a:solidFill>
+                  <a:srgbClr val="7A6A58"/>
                 </a:solidFill>
                 <a:latin typeface="Noto Sans"/>
               </a:rPr>
-              <a:t>Churn pada segmen kombinasi paling rawan</a:t>
-            </a:r>
-          </a:p>
-        </p:txBody>
-      </p:sp>
-      <p:sp>
-        <p:nvSpPr>
-          <p:cNvPr id="7" name="Rectangle 6"/>
-          <p:cNvSpPr/>
-          <p:nvPr/>
-        </p:nvSpPr>
-        <p:spPr>
-          <a:xfrm>
-            <a:off x="640080" y="5212080"/>
-            <a:ext cx="10908792" cy="1051560"/>
-          </a:xfrm>
-          <a:prstGeom prst="rect">
-            <a:avLst/>
-          </a:prstGeom>
-          <a:solidFill>
-            <a:srgbClr val="4E7FA6"/>
-          </a:solidFill>
-          <a:ln>
-            <a:noFill/>
-          </a:ln>
-          <a:effectLst/>
-        </p:spPr>
-        <p:txBody>
-          <a:bodyPr rtlCol="0" anchor="ctr"/>
-          <a:lstStyle/>
-          <a:p>
-            <a:pPr algn="ctr"/>
-          </a:p>
-        </p:txBody>
-      </p:sp>
-      <p:sp>
-        <p:nvSpPr>
-          <p:cNvPr id="8" name="TextBox 7"/>
-          <p:cNvSpPr txBox="1"/>
-          <p:nvPr/>
-        </p:nvSpPr>
-        <p:spPr>
-          <a:xfrm>
-            <a:off x="960120" y="5413248"/>
-            <a:ext cx="3291840" cy="731520"/>
-          </a:xfrm>
-          <a:prstGeom prst="rect">
-            <a:avLst/>
-          </a:prstGeom>
-          <a:noFill/>
-        </p:spPr>
-        <p:txBody>
-          <a:bodyPr wrap="square" lIns="0" rIns="0" tIns="0" bIns="0">
-            <a:spAutoFit/>
-          </a:bodyPr>
-          <a:lstStyle/>
-          <a:p>
-            <a:pPr>
-              <a:lnSpc>
-                <a:spcPct val="100000"/>
-              </a:lnSpc>
-              <a:spcAft>
-                <a:spcPts val="0"/>
-              </a:spcAft>
-            </a:pPr>
-            <a:r>
-              <a:rPr sz="3000" b="1" i="0">
-                <a:solidFill>
-                  <a:srgbClr val="FFFFFF"/>
-                </a:solidFill>
-                <a:latin typeface="Noto Sans"/>
-              </a:rPr>
-              <a:t>139.131 USD</a:t>
-            </a:r>
-          </a:p>
-        </p:txBody>
-      </p:sp>
-      <p:sp>
-        <p:nvSpPr>
-          <p:cNvPr id="9" name="TextBox 8"/>
-          <p:cNvSpPr txBox="1"/>
-          <p:nvPr/>
-        </p:nvSpPr>
-        <p:spPr>
-          <a:xfrm>
-            <a:off x="4343400" y="5394960"/>
-            <a:ext cx="6949440" cy="777240"/>
-          </a:xfrm>
-          <a:prstGeom prst="rect">
-            <a:avLst/>
-          </a:prstGeom>
-          <a:noFill/>
-        </p:spPr>
-        <p:txBody>
-          <a:bodyPr wrap="square" lIns="0" rIns="0" tIns="0" bIns="0">
-            <a:spAutoFit/>
-          </a:bodyPr>
-          <a:lstStyle/>
-          <a:p>
-            <a:pPr>
-              <a:lnSpc>
-                <a:spcPct val="120000"/>
-              </a:lnSpc>
-              <a:spcAft>
-                <a:spcPts val="0"/>
-              </a:spcAft>
-            </a:pPr>
-            <a:r>
-              <a:rPr sz="1550" b="0" i="0">
-                <a:solidFill>
-                  <a:srgbClr val="FFFFFF"/>
-                </a:solidFill>
-                <a:latin typeface="Noto Sans"/>
-              </a:rPr>
-              <a:t>Pendapatan yang hilang akibat churn per bulan, atau 30,5 persen dari seluruh pendapatan bulanan</a:t>
+              <a:t>Chart: churn pada segmen kombinasi paling rawan.</a:t>
             </a:r>
           </a:p>
         </p:txBody>
@@ -6337,17 +7829,64 @@
       <p:grpSpPr/>
       <p:sp>
         <p:nvSpPr>
-          <p:cNvPr id="2" name="Rectangle 1"/>
-          <p:cNvSpPr/>
-          <p:nvPr/>
-        </p:nvSpPr>
-        <p:spPr>
-          <a:xfrm>
-            <a:off x="640080" y="502920"/>
-            <a:ext cx="146304" cy="475488"/>
+          <p:cNvPr id="2" name="TextBox 1"/>
+          <p:cNvSpPr txBox="1"/>
+          <p:nvPr/>
+        </p:nvSpPr>
+        <p:spPr>
+          <a:xfrm>
+            <a:off x="502920" y="384048"/>
+            <a:ext cx="11155680" cy="914400"/>
           </a:xfrm>
           <a:prstGeom prst="rect">
             <a:avLst/>
+          </a:prstGeom>
+          <a:noFill/>
+        </p:spPr>
+        <p:txBody>
+          <a:bodyPr wrap="square" anchor="t" lIns="0" rIns="0" tIns="0" bIns="0">
+            <a:spAutoFit/>
+          </a:bodyPr>
+          <a:lstStyle/>
+          <a:p>
+            <a:pPr>
+              <a:lnSpc>
+                <a:spcPct val="113000"/>
+              </a:lnSpc>
+              <a:spcBef>
+                <a:spcPts val="0"/>
+              </a:spcBef>
+              <a:spcAft>
+                <a:spcPts val="0"/>
+              </a:spcAft>
+            </a:pPr>
+            <a:r>
+              <a:rPr sz="3100" b="1">
+                <a:solidFill>
+                  <a:srgbClr val="2E3138"/>
+                </a:solidFill>
+                <a:latin typeface="Liberation Serif"/>
+              </a:rPr>
+              <a:t>Dashboard Power BI</a:t>
+            </a:r>
+          </a:p>
+        </p:txBody>
+      </p:sp>
+      <p:sp>
+        <p:nvSpPr>
+          <p:cNvPr id="3" name="Rounded Rectangle 2"/>
+          <p:cNvSpPr/>
+          <p:nvPr/>
+        </p:nvSpPr>
+        <p:spPr>
+          <a:xfrm>
+            <a:off x="521207" y="1097280"/>
+            <a:ext cx="777240" cy="82296"/>
+          </a:xfrm>
+          <a:prstGeom prst="roundRect">
+            <a:avLst>
+              <a:gd name="adj" fmla="val 5500"/>
+            </a:avLst>
           </a:prstGeom>
           <a:solidFill>
             <a:srgbClr val="C75B7F"/>
@@ -6357,6 +7896,20 @@
           </a:ln>
           <a:effectLst/>
         </p:spPr>
+        <p:style>
+          <a:lnRef idx="1">
+            <a:schemeClr val="accent1"/>
+          </a:lnRef>
+          <a:fillRef idx="3">
+            <a:schemeClr val="accent1"/>
+          </a:fillRef>
+          <a:effectRef idx="2">
+            <a:schemeClr val="accent1"/>
+          </a:effectRef>
+          <a:fontRef idx="minor">
+            <a:schemeClr val="lt1"/>
+          </a:fontRef>
+        </p:style>
         <p:txBody>
           <a:bodyPr rtlCol="0" anchor="ctr"/>
           <a:lstStyle/>
@@ -6367,59 +7920,65 @@
       </p:sp>
       <p:sp>
         <p:nvSpPr>
-          <p:cNvPr id="3" name="TextBox 2"/>
-          <p:cNvSpPr txBox="1"/>
-          <p:nvPr/>
-        </p:nvSpPr>
-        <p:spPr>
-          <a:xfrm>
-            <a:off x="960120" y="347472"/>
-            <a:ext cx="10607040" cy="868680"/>
-          </a:xfrm>
-          <a:prstGeom prst="rect">
-            <a:avLst/>
-          </a:prstGeom>
-          <a:noFill/>
-        </p:spPr>
-        <p:txBody>
-          <a:bodyPr wrap="square" lIns="0" rIns="0" tIns="0" bIns="0">
-            <a:spAutoFit/>
-          </a:bodyPr>
-          <a:lstStyle/>
-          <a:p>
-            <a:pPr>
-              <a:lnSpc>
-                <a:spcPct val="100000"/>
-              </a:lnSpc>
-              <a:spcAft>
-                <a:spcPts val="0"/>
-              </a:spcAft>
-            </a:pPr>
-            <a:r>
-              <a:rPr sz="3200" b="1" i="0">
-                <a:solidFill>
-                  <a:srgbClr val="2E3138"/>
-                </a:solidFill>
-                <a:latin typeface="Liberation Serif"/>
-              </a:rPr>
-              <a:t>Rekomendasi Retensi</a:t>
-            </a:r>
-          </a:p>
-        </p:txBody>
-      </p:sp>
-      <p:sp>
-        <p:nvSpPr>
-          <p:cNvPr id="4" name="Rectangle 3"/>
+          <p:cNvPr id="4" name="Rounded Rectangle 3"/>
           <p:cNvSpPr/>
           <p:nvPr/>
         </p:nvSpPr>
         <p:spPr>
           <a:xfrm>
-            <a:off x="640080" y="1417320"/>
-            <a:ext cx="5321808" cy="1408176"/>
-          </a:xfrm>
-          <a:prstGeom prst="rect">
-            <a:avLst/>
+            <a:off x="566928" y="1481328"/>
+            <a:ext cx="6903720" cy="4160520"/>
+          </a:xfrm>
+          <a:prstGeom prst="roundRect">
+            <a:avLst>
+              <a:gd name="adj" fmla="val 5500"/>
+            </a:avLst>
+          </a:prstGeom>
+          <a:solidFill>
+            <a:srgbClr val="D9C9AE"/>
+          </a:solidFill>
+          <a:ln>
+            <a:noFill/>
+          </a:ln>
+          <a:effectLst/>
+        </p:spPr>
+        <p:style>
+          <a:lnRef idx="1">
+            <a:schemeClr val="accent1"/>
+          </a:lnRef>
+          <a:fillRef idx="3">
+            <a:schemeClr val="accent1"/>
+          </a:fillRef>
+          <a:effectRef idx="2">
+            <a:schemeClr val="accent1"/>
+          </a:effectRef>
+          <a:fontRef idx="minor">
+            <a:schemeClr val="lt1"/>
+          </a:fontRef>
+        </p:style>
+        <p:txBody>
+          <a:bodyPr rtlCol="0" anchor="ctr"/>
+          <a:lstStyle/>
+          <a:p>
+            <a:pPr algn="ctr"/>
+          </a:p>
+        </p:txBody>
+      </p:sp>
+      <p:sp>
+        <p:nvSpPr>
+          <p:cNvPr id="5" name="Rounded Rectangle 4"/>
+          <p:cNvSpPr/>
+          <p:nvPr/>
+        </p:nvSpPr>
+        <p:spPr>
+          <a:xfrm>
+            <a:off x="502920" y="1417320"/>
+            <a:ext cx="6903720" cy="4160520"/>
+          </a:xfrm>
+          <a:prstGeom prst="roundRect">
+            <a:avLst>
+              <a:gd name="adj" fmla="val 5500"/>
+            </a:avLst>
           </a:prstGeom>
           <a:solidFill>
             <a:srgbClr val="F7F1E5"/>
@@ -6429,6 +7988,20 @@
           </a:ln>
           <a:effectLst/>
         </p:spPr>
+        <p:style>
+          <a:lnRef idx="1">
+            <a:schemeClr val="accent1"/>
+          </a:lnRef>
+          <a:fillRef idx="3">
+            <a:schemeClr val="accent1"/>
+          </a:fillRef>
+          <a:effectRef idx="2">
+            <a:schemeClr val="accent1"/>
+          </a:effectRef>
+          <a:fontRef idx="minor">
+            <a:schemeClr val="lt1"/>
+          </a:fontRef>
+        </p:style>
         <p:txBody>
           <a:bodyPr rtlCol="0" anchor="ctr"/>
           <a:lstStyle/>
@@ -6437,46 +8010,40 @@
           </a:p>
         </p:txBody>
       </p:sp>
-      <p:sp>
-        <p:nvSpPr>
-          <p:cNvPr id="5" name="Rectangle 4"/>
-          <p:cNvSpPr/>
-          <p:nvPr/>
-        </p:nvSpPr>
-        <p:spPr>
-          <a:xfrm>
-            <a:off x="841247" y="1636776"/>
-            <a:ext cx="128016" cy="128016"/>
+      <p:pic>
+        <p:nvPicPr>
+          <p:cNvPr id="6" name="Picture 5" descr="dashboard_preview_halaman1.png"/>
+          <p:cNvPicPr>
+            <a:picLocks noChangeAspect="1"/>
+          </p:cNvPicPr>
+          <p:nvPr/>
+        </p:nvPicPr>
+        <p:blipFill>
+          <a:blip r:embed="rId2"/>
+          <a:stretch>
+            <a:fillRect/>
+          </a:stretch>
+        </p:blipFill>
+        <p:spPr>
+          <a:xfrm>
+            <a:off x="704088" y="1669065"/>
+            <a:ext cx="6501383" cy="3657028"/>
           </a:xfrm>
           <a:prstGeom prst="rect">
             <a:avLst/>
           </a:prstGeom>
-          <a:solidFill>
-            <a:srgbClr val="C75B7F"/>
-          </a:solidFill>
-          <a:ln>
-            <a:noFill/>
-          </a:ln>
-          <a:effectLst/>
-        </p:spPr>
-        <p:txBody>
-          <a:bodyPr rtlCol="0" anchor="ctr"/>
-          <a:lstStyle/>
-          <a:p>
-            <a:pPr algn="ctr"/>
-          </a:p>
-        </p:txBody>
-      </p:sp>
-      <p:sp>
-        <p:nvSpPr>
-          <p:cNvPr id="6" name="TextBox 5"/>
+        </p:spPr>
+      </p:pic>
+      <p:sp>
+        <p:nvSpPr>
+          <p:cNvPr id="7" name="TextBox 6"/>
           <p:cNvSpPr txBox="1"/>
           <p:nvPr/>
         </p:nvSpPr>
         <p:spPr>
           <a:xfrm>
-            <a:off x="1143000" y="1600200"/>
-            <a:ext cx="4617720" cy="1097280"/>
+            <a:off x="502920" y="5669279"/>
+            <a:ext cx="6903720" cy="274320"/>
           </a:xfrm>
           <a:prstGeom prst="rect">
             <a:avLst/>
@@ -6484,44 +8051,94 @@
           <a:noFill/>
         </p:spPr>
         <p:txBody>
-          <a:bodyPr wrap="square" lIns="0" rIns="0" tIns="0" bIns="0">
+          <a:bodyPr wrap="square" anchor="t" lIns="0" rIns="0" tIns="0" bIns="0">
             <a:spAutoFit/>
           </a:bodyPr>
           <a:lstStyle/>
           <a:p>
             <a:pPr>
               <a:lnSpc>
-                <a:spcPct val="118000"/>
+                <a:spcPct val="113000"/>
               </a:lnSpc>
+              <a:spcBef>
+                <a:spcPts val="0"/>
+              </a:spcBef>
               <a:spcAft>
                 <a:spcPts val="0"/>
               </a:spcAft>
             </a:pPr>
             <a:r>
-              <a:rPr sz="1450" b="0" i="0">
-                <a:solidFill>
-                  <a:srgbClr val="2E3138"/>
+              <a:rPr sz="1050" b="0">
+                <a:solidFill>
+                  <a:srgbClr val="7A6A58"/>
                 </a:solidFill>
                 <a:latin typeface="Noto Sans"/>
               </a:rPr>
-              <a:t>Bangun program onboarding 12 bulan pertama: sapa proaktif di bulan ke-1, 3, dan 6 plus cek kepuasan dini</a:t>
-            </a:r>
-          </a:p>
-        </p:txBody>
-      </p:sp>
-      <p:sp>
-        <p:nvSpPr>
-          <p:cNvPr id="7" name="Rectangle 6"/>
-          <p:cNvSpPr/>
-          <p:nvPr/>
-        </p:nvSpPr>
-        <p:spPr>
-          <a:xfrm>
-            <a:off x="6227064" y="1417320"/>
-            <a:ext cx="5321808" cy="1408176"/>
+              <a:t>Pratinjau halaman 1 dashboard, dirender dari kit Power BI proyek ini.</a:t>
+            </a:r>
+          </a:p>
+        </p:txBody>
+      </p:sp>
+      <p:sp>
+        <p:nvSpPr>
+          <p:cNvPr id="8" name="TextBox 7"/>
+          <p:cNvSpPr txBox="1"/>
+          <p:nvPr/>
+        </p:nvSpPr>
+        <p:spPr>
+          <a:xfrm>
+            <a:off x="7726679" y="1417320"/>
+            <a:ext cx="3959352" cy="365760"/>
           </a:xfrm>
           <a:prstGeom prst="rect">
             <a:avLst/>
+          </a:prstGeom>
+          <a:noFill/>
+        </p:spPr>
+        <p:txBody>
+          <a:bodyPr wrap="square" anchor="t" lIns="0" rIns="0" tIns="0" bIns="0">
+            <a:spAutoFit/>
+          </a:bodyPr>
+          <a:lstStyle/>
+          <a:p>
+            <a:pPr>
+              <a:lnSpc>
+                <a:spcPct val="113000"/>
+              </a:lnSpc>
+              <a:spcBef>
+                <a:spcPts val="0"/>
+              </a:spcBef>
+              <a:spcAft>
+                <a:spcPts val="0"/>
+              </a:spcAft>
+            </a:pPr>
+            <a:r>
+              <a:rPr sz="1300" b="1">
+                <a:solidFill>
+                  <a:srgbClr val="4E7FA6"/>
+                </a:solidFill>
+                <a:latin typeface="Noto Sans"/>
+              </a:rPr>
+              <a:t>ISI DASHBOARD</a:t>
+            </a:r>
+          </a:p>
+        </p:txBody>
+      </p:sp>
+      <p:sp>
+        <p:nvSpPr>
+          <p:cNvPr id="9" name="Rounded Rectangle 8"/>
+          <p:cNvSpPr/>
+          <p:nvPr/>
+        </p:nvSpPr>
+        <p:spPr>
+          <a:xfrm>
+            <a:off x="7726679" y="1810512"/>
+            <a:ext cx="3959352" cy="731520"/>
+          </a:xfrm>
+          <a:prstGeom prst="roundRect">
+            <a:avLst>
+              <a:gd name="adj" fmla="val 5500"/>
+            </a:avLst>
           </a:prstGeom>
           <a:solidFill>
             <a:srgbClr val="F7F1E5"/>
@@ -6531,6 +8148,20 @@
           </a:ln>
           <a:effectLst/>
         </p:spPr>
+        <p:style>
+          <a:lnRef idx="1">
+            <a:schemeClr val="accent1"/>
+          </a:lnRef>
+          <a:fillRef idx="3">
+            <a:schemeClr val="accent1"/>
+          </a:fillRef>
+          <a:effectRef idx="2">
+            <a:schemeClr val="accent1"/>
+          </a:effectRef>
+          <a:fontRef idx="minor">
+            <a:schemeClr val="lt1"/>
+          </a:fontRef>
+        </p:style>
         <p:txBody>
           <a:bodyPr rtlCol="0" anchor="ctr"/>
           <a:lstStyle/>
@@ -6541,89 +8172,86 @@
       </p:sp>
       <p:sp>
         <p:nvSpPr>
-          <p:cNvPr id="8" name="Rectangle 7"/>
-          <p:cNvSpPr/>
-          <p:nvPr/>
-        </p:nvSpPr>
-        <p:spPr>
-          <a:xfrm>
-            <a:off x="6428232" y="1636776"/>
-            <a:ext cx="128016" cy="128016"/>
+          <p:cNvPr id="10" name="TextBox 9"/>
+          <p:cNvSpPr txBox="1"/>
+          <p:nvPr/>
+        </p:nvSpPr>
+        <p:spPr>
+          <a:xfrm>
+            <a:off x="7973568" y="1901952"/>
+            <a:ext cx="3520440" cy="566928"/>
           </a:xfrm>
           <a:prstGeom prst="rect">
             <a:avLst/>
           </a:prstGeom>
-          <a:solidFill>
-            <a:srgbClr val="C75B7F"/>
-          </a:solidFill>
-          <a:ln>
-            <a:noFill/>
-          </a:ln>
-          <a:effectLst/>
-        </p:spPr>
-        <p:txBody>
-          <a:bodyPr rtlCol="0" anchor="ctr"/>
-          <a:lstStyle/>
-          <a:p>
-            <a:pPr algn="ctr"/>
-          </a:p>
-        </p:txBody>
-      </p:sp>
-      <p:sp>
-        <p:nvSpPr>
-          <p:cNvPr id="9" name="TextBox 8"/>
-          <p:cNvSpPr txBox="1"/>
-          <p:nvPr/>
-        </p:nvSpPr>
-        <p:spPr>
-          <a:xfrm>
-            <a:off x="6729984" y="1600200"/>
-            <a:ext cx="4617720" cy="1097280"/>
-          </a:xfrm>
-          <a:prstGeom prst="rect">
-            <a:avLst/>
-          </a:prstGeom>
           <a:noFill/>
         </p:spPr>
         <p:txBody>
-          <a:bodyPr wrap="square" lIns="0" rIns="0" tIns="0" bIns="0">
+          <a:bodyPr wrap="square" anchor="t" lIns="0" rIns="0" tIns="0" bIns="0">
             <a:spAutoFit/>
           </a:bodyPr>
           <a:lstStyle/>
           <a:p>
             <a:pPr>
               <a:lnSpc>
-                <a:spcPct val="118000"/>
+                <a:spcPct val="113000"/>
               </a:lnSpc>
+              <a:spcBef>
+                <a:spcPts val="0"/>
+              </a:spcBef>
               <a:spcAft>
-                <a:spcPts val="0"/>
+                <a:spcPts val="100"/>
               </a:spcAft>
             </a:pPr>
             <a:r>
-              <a:rPr sz="1450" b="0" i="0">
-                <a:solidFill>
-                  <a:srgbClr val="2E3138"/>
+              <a:rPr sz="1050" b="1">
+                <a:solidFill>
+                  <a:srgbClr val="C75B7F"/>
                 </a:solidFill>
                 <a:latin typeface="Noto Sans"/>
               </a:rPr>
-              <a:t>Konversi kontrak bulanan ke kontrak tahunan dengan insentif: diskon loyalitas, harga terkunci, dan bonus layanan</a:t>
-            </a:r>
-          </a:p>
-        </p:txBody>
-      </p:sp>
-      <p:sp>
-        <p:nvSpPr>
-          <p:cNvPr id="10" name="Rectangle 9"/>
+              <a:t>Halaman 1</a:t>
+            </a:r>
+          </a:p>
+          <a:p>
+            <a:pPr>
+              <a:lnSpc>
+                <a:spcPct val="113000"/>
+              </a:lnSpc>
+              <a:spcBef>
+                <a:spcPts val="0"/>
+              </a:spcBef>
+              <a:spcAft>
+                <a:spcPts val="0"/>
+              </a:spcAft>
+            </a:pPr>
+            <a:r>
+              <a:rPr sz="1300" b="1">
+                <a:solidFill>
+                  <a:srgbClr val="2E3138"/>
+                </a:solidFill>
+                <a:latin typeface="Noto Sans"/>
+              </a:rPr>
+              <a:t>Ringkasan Churn</a:t>
+            </a:r>
+          </a:p>
+        </p:txBody>
+      </p:sp>
+      <p:sp>
+        <p:nvSpPr>
+          <p:cNvPr id="11" name="Rounded Rectangle 10"/>
           <p:cNvSpPr/>
           <p:nvPr/>
         </p:nvSpPr>
         <p:spPr>
           <a:xfrm>
-            <a:off x="640080" y="2990088"/>
-            <a:ext cx="5321808" cy="1408176"/>
-          </a:xfrm>
-          <a:prstGeom prst="rect">
-            <a:avLst/>
+            <a:off x="7726679" y="2651760"/>
+            <a:ext cx="3959352" cy="731520"/>
+          </a:xfrm>
+          <a:prstGeom prst="roundRect">
+            <a:avLst>
+              <a:gd name="adj" fmla="val 5500"/>
+            </a:avLst>
           </a:prstGeom>
           <a:solidFill>
             <a:srgbClr val="F7F1E5"/>
@@ -6633,6 +8261,20 @@
           </a:ln>
           <a:effectLst/>
         </p:spPr>
+        <p:style>
+          <a:lnRef idx="1">
+            <a:schemeClr val="accent1"/>
+          </a:lnRef>
+          <a:fillRef idx="3">
+            <a:schemeClr val="accent1"/>
+          </a:fillRef>
+          <a:effectRef idx="2">
+            <a:schemeClr val="accent1"/>
+          </a:effectRef>
+          <a:fontRef idx="minor">
+            <a:schemeClr val="lt1"/>
+          </a:fontRef>
+        </p:style>
         <p:txBody>
           <a:bodyPr rtlCol="0" anchor="ctr"/>
           <a:lstStyle/>
@@ -6643,89 +8285,86 @@
       </p:sp>
       <p:sp>
         <p:nvSpPr>
-          <p:cNvPr id="11" name="Rectangle 10"/>
-          <p:cNvSpPr/>
-          <p:nvPr/>
-        </p:nvSpPr>
-        <p:spPr>
-          <a:xfrm>
-            <a:off x="841247" y="3209544"/>
-            <a:ext cx="128016" cy="128016"/>
+          <p:cNvPr id="12" name="TextBox 11"/>
+          <p:cNvSpPr txBox="1"/>
+          <p:nvPr/>
+        </p:nvSpPr>
+        <p:spPr>
+          <a:xfrm>
+            <a:off x="7973568" y="2743200"/>
+            <a:ext cx="3520440" cy="566928"/>
           </a:xfrm>
           <a:prstGeom prst="rect">
             <a:avLst/>
           </a:prstGeom>
-          <a:solidFill>
-            <a:srgbClr val="C75B7F"/>
-          </a:solidFill>
-          <a:ln>
-            <a:noFill/>
-          </a:ln>
-          <a:effectLst/>
-        </p:spPr>
-        <p:txBody>
-          <a:bodyPr rtlCol="0" anchor="ctr"/>
-          <a:lstStyle/>
-          <a:p>
-            <a:pPr algn="ctr"/>
-          </a:p>
-        </p:txBody>
-      </p:sp>
-      <p:sp>
-        <p:nvSpPr>
-          <p:cNvPr id="12" name="TextBox 11"/>
-          <p:cNvSpPr txBox="1"/>
-          <p:nvPr/>
-        </p:nvSpPr>
-        <p:spPr>
-          <a:xfrm>
-            <a:off x="1143000" y="3172968"/>
-            <a:ext cx="4617720" cy="1097280"/>
-          </a:xfrm>
-          <a:prstGeom prst="rect">
-            <a:avLst/>
-          </a:prstGeom>
           <a:noFill/>
         </p:spPr>
         <p:txBody>
-          <a:bodyPr wrap="square" lIns="0" rIns="0" tIns="0" bIns="0">
+          <a:bodyPr wrap="square" anchor="t" lIns="0" rIns="0" tIns="0" bIns="0">
             <a:spAutoFit/>
           </a:bodyPr>
           <a:lstStyle/>
           <a:p>
             <a:pPr>
               <a:lnSpc>
-                <a:spcPct val="118000"/>
+                <a:spcPct val="113000"/>
               </a:lnSpc>
+              <a:spcBef>
+                <a:spcPts val="0"/>
+              </a:spcBef>
               <a:spcAft>
-                <a:spcPts val="0"/>
+                <a:spcPts val="100"/>
               </a:spcAft>
             </a:pPr>
             <a:r>
-              <a:rPr sz="1450" b="0" i="0">
-                <a:solidFill>
-                  <a:srgbClr val="2E3138"/>
+              <a:rPr sz="1050" b="1">
+                <a:solidFill>
+                  <a:srgbClr val="C75B7F"/>
                 </a:solidFill>
                 <a:latin typeface="Noto Sans"/>
               </a:rPr>
-              <a:t>Audit nilai layanan Fiber optic: tinjau kualitas jaringan per area, harga, dan komunikasi manfaatnya</a:t>
-            </a:r>
-          </a:p>
-        </p:txBody>
-      </p:sp>
-      <p:sp>
-        <p:nvSpPr>
-          <p:cNvPr id="13" name="Rectangle 12"/>
+              <a:t>Halaman 2</a:t>
+            </a:r>
+          </a:p>
+          <a:p>
+            <a:pPr>
+              <a:lnSpc>
+                <a:spcPct val="113000"/>
+              </a:lnSpc>
+              <a:spcBef>
+                <a:spcPts val="0"/>
+              </a:spcBef>
+              <a:spcAft>
+                <a:spcPts val="0"/>
+              </a:spcAft>
+            </a:pPr>
+            <a:r>
+              <a:rPr sz="1300" b="1">
+                <a:solidFill>
+                  <a:srgbClr val="2E3138"/>
+                </a:solidFill>
+                <a:latin typeface="Noto Sans"/>
+              </a:rPr>
+              <a:t>Kontrak, Tenure, dan Pembayaran</a:t>
+            </a:r>
+          </a:p>
+        </p:txBody>
+      </p:sp>
+      <p:sp>
+        <p:nvSpPr>
+          <p:cNvPr id="13" name="Rounded Rectangle 12"/>
           <p:cNvSpPr/>
           <p:nvPr/>
         </p:nvSpPr>
         <p:spPr>
           <a:xfrm>
-            <a:off x="6227064" y="2990088"/>
-            <a:ext cx="5321808" cy="1408176"/>
-          </a:xfrm>
-          <a:prstGeom prst="rect">
-            <a:avLst/>
+            <a:off x="7726679" y="3493008"/>
+            <a:ext cx="3959352" cy="731520"/>
+          </a:xfrm>
+          <a:prstGeom prst="roundRect">
+            <a:avLst>
+              <a:gd name="adj" fmla="val 5500"/>
+            </a:avLst>
           </a:prstGeom>
           <a:solidFill>
             <a:srgbClr val="F7F1E5"/>
@@ -6735,6 +8374,20 @@
           </a:ln>
           <a:effectLst/>
         </p:spPr>
+        <p:style>
+          <a:lnRef idx="1">
+            <a:schemeClr val="accent1"/>
+          </a:lnRef>
+          <a:fillRef idx="3">
+            <a:schemeClr val="accent1"/>
+          </a:fillRef>
+          <a:effectRef idx="2">
+            <a:schemeClr val="accent1"/>
+          </a:effectRef>
+          <a:fontRef idx="minor">
+            <a:schemeClr val="lt1"/>
+          </a:fontRef>
+        </p:style>
         <p:txBody>
           <a:bodyPr rtlCol="0" anchor="ctr"/>
           <a:lstStyle/>
@@ -6745,89 +8398,86 @@
       </p:sp>
       <p:sp>
         <p:nvSpPr>
-          <p:cNvPr id="14" name="Rectangle 13"/>
-          <p:cNvSpPr/>
-          <p:nvPr/>
-        </p:nvSpPr>
-        <p:spPr>
-          <a:xfrm>
-            <a:off x="6428232" y="3209544"/>
-            <a:ext cx="128016" cy="128016"/>
+          <p:cNvPr id="14" name="TextBox 13"/>
+          <p:cNvSpPr txBox="1"/>
+          <p:nvPr/>
+        </p:nvSpPr>
+        <p:spPr>
+          <a:xfrm>
+            <a:off x="7973568" y="3584448"/>
+            <a:ext cx="3520440" cy="566928"/>
           </a:xfrm>
           <a:prstGeom prst="rect">
             <a:avLst/>
           </a:prstGeom>
-          <a:solidFill>
-            <a:srgbClr val="C75B7F"/>
-          </a:solidFill>
-          <a:ln>
-            <a:noFill/>
-          </a:ln>
-          <a:effectLst/>
-        </p:spPr>
-        <p:txBody>
-          <a:bodyPr rtlCol="0" anchor="ctr"/>
-          <a:lstStyle/>
-          <a:p>
-            <a:pPr algn="ctr"/>
-          </a:p>
-        </p:txBody>
-      </p:sp>
-      <p:sp>
-        <p:nvSpPr>
-          <p:cNvPr id="15" name="TextBox 14"/>
-          <p:cNvSpPr txBox="1"/>
-          <p:nvPr/>
-        </p:nvSpPr>
-        <p:spPr>
-          <a:xfrm>
-            <a:off x="6729984" y="3172968"/>
-            <a:ext cx="4617720" cy="1097280"/>
-          </a:xfrm>
-          <a:prstGeom prst="rect">
-            <a:avLst/>
-          </a:prstGeom>
           <a:noFill/>
         </p:spPr>
         <p:txBody>
-          <a:bodyPr wrap="square" lIns="0" rIns="0" tIns="0" bIns="0">
+          <a:bodyPr wrap="square" anchor="t" lIns="0" rIns="0" tIns="0" bIns="0">
             <a:spAutoFit/>
           </a:bodyPr>
           <a:lstStyle/>
           <a:p>
             <a:pPr>
               <a:lnSpc>
-                <a:spcPct val="118000"/>
+                <a:spcPct val="113000"/>
               </a:lnSpc>
+              <a:spcBef>
+                <a:spcPts val="0"/>
+              </a:spcBef>
               <a:spcAft>
-                <a:spcPts val="0"/>
+                <a:spcPts val="100"/>
               </a:spcAft>
             </a:pPr>
             <a:r>
-              <a:rPr sz="1450" b="0" i="0">
-                <a:solidFill>
-                  <a:srgbClr val="2E3138"/>
+              <a:rPr sz="1050" b="1">
+                <a:solidFill>
+                  <a:srgbClr val="C75B7F"/>
                 </a:solidFill>
                 <a:latin typeface="Noto Sans"/>
               </a:rPr>
-              <a:t>Dorong auto-pay dan migrasi dari cek elektronik dengan insentif kecil</a:t>
-            </a:r>
-          </a:p>
-        </p:txBody>
-      </p:sp>
-      <p:sp>
-        <p:nvSpPr>
-          <p:cNvPr id="16" name="Rectangle 15"/>
+              <a:t>Halaman 3</a:t>
+            </a:r>
+          </a:p>
+          <a:p>
+            <a:pPr>
+              <a:lnSpc>
+                <a:spcPct val="113000"/>
+              </a:lnSpc>
+              <a:spcBef>
+                <a:spcPts val="0"/>
+              </a:spcBef>
+              <a:spcAft>
+                <a:spcPts val="0"/>
+              </a:spcAft>
+            </a:pPr>
+            <a:r>
+              <a:rPr sz="1300" b="1">
+                <a:solidFill>
+                  <a:srgbClr val="2E3138"/>
+                </a:solidFill>
+                <a:latin typeface="Noto Sans"/>
+              </a:rPr>
+              <a:t>Layanan, Dukungan, dan Demografi</a:t>
+            </a:r>
+          </a:p>
+        </p:txBody>
+      </p:sp>
+      <p:sp>
+        <p:nvSpPr>
+          <p:cNvPr id="15" name="Rounded Rectangle 14"/>
           <p:cNvSpPr/>
           <p:nvPr/>
         </p:nvSpPr>
         <p:spPr>
           <a:xfrm>
-            <a:off x="640080" y="4562856"/>
-            <a:ext cx="5321808" cy="1408176"/>
-          </a:xfrm>
-          <a:prstGeom prst="rect">
-            <a:avLst/>
+            <a:off x="7726679" y="4334256"/>
+            <a:ext cx="3959352" cy="731520"/>
+          </a:xfrm>
+          <a:prstGeom prst="roundRect">
+            <a:avLst>
+              <a:gd name="adj" fmla="val 5500"/>
+            </a:avLst>
           </a:prstGeom>
           <a:solidFill>
             <a:srgbClr val="F7F1E5"/>
@@ -6837,6 +8487,20 @@
           </a:ln>
           <a:effectLst/>
         </p:spPr>
+        <p:style>
+          <a:lnRef idx="1">
+            <a:schemeClr val="accent1"/>
+          </a:lnRef>
+          <a:fillRef idx="3">
+            <a:schemeClr val="accent1"/>
+          </a:fillRef>
+          <a:effectRef idx="2">
+            <a:schemeClr val="accent1"/>
+          </a:effectRef>
+          <a:fontRef idx="minor">
+            <a:schemeClr val="lt1"/>
+          </a:fontRef>
+        </p:style>
         <p:txBody>
           <a:bodyPr rtlCol="0" anchor="ctr"/>
           <a:lstStyle/>
@@ -6847,26 +8511,154 @@
       </p:sp>
       <p:sp>
         <p:nvSpPr>
-          <p:cNvPr id="17" name="Rectangle 16"/>
-          <p:cNvSpPr/>
-          <p:nvPr/>
-        </p:nvSpPr>
-        <p:spPr>
-          <a:xfrm>
-            <a:off x="841247" y="4782312"/>
-            <a:ext cx="128016" cy="128016"/>
+          <p:cNvPr id="16" name="TextBox 15"/>
+          <p:cNvSpPr txBox="1"/>
+          <p:nvPr/>
+        </p:nvSpPr>
+        <p:spPr>
+          <a:xfrm>
+            <a:off x="7973568" y="4425696"/>
+            <a:ext cx="3520440" cy="566928"/>
           </a:xfrm>
           <a:prstGeom prst="rect">
             <a:avLst/>
           </a:prstGeom>
+          <a:noFill/>
+        </p:spPr>
+        <p:txBody>
+          <a:bodyPr wrap="square" anchor="t" lIns="0" rIns="0" tIns="0" bIns="0">
+            <a:spAutoFit/>
+          </a:bodyPr>
+          <a:lstStyle/>
+          <a:p>
+            <a:pPr>
+              <a:lnSpc>
+                <a:spcPct val="113000"/>
+              </a:lnSpc>
+              <a:spcBef>
+                <a:spcPts val="0"/>
+              </a:spcBef>
+              <a:spcAft>
+                <a:spcPts val="100"/>
+              </a:spcAft>
+            </a:pPr>
+            <a:r>
+              <a:rPr sz="1050" b="1">
+                <a:solidFill>
+                  <a:srgbClr val="C75B7F"/>
+                </a:solidFill>
+                <a:latin typeface="Noto Sans"/>
+              </a:rPr>
+              <a:t>Halaman 4</a:t>
+            </a:r>
+          </a:p>
+          <a:p>
+            <a:pPr>
+              <a:lnSpc>
+                <a:spcPct val="113000"/>
+              </a:lnSpc>
+              <a:spcBef>
+                <a:spcPts val="0"/>
+              </a:spcBef>
+              <a:spcAft>
+                <a:spcPts val="0"/>
+              </a:spcAft>
+            </a:pPr>
+            <a:r>
+              <a:rPr sz="1300" b="1">
+                <a:solidFill>
+                  <a:srgbClr val="2E3138"/>
+                </a:solidFill>
+                <a:latin typeface="Noto Sans"/>
+              </a:rPr>
+              <a:t>Pendapatan Berisiko dan Metodologi</a:t>
+            </a:r>
+          </a:p>
+        </p:txBody>
+      </p:sp>
+      <p:sp>
+        <p:nvSpPr>
+          <p:cNvPr id="17" name="TextBox 16"/>
+          <p:cNvSpPr txBox="1"/>
+          <p:nvPr/>
+        </p:nvSpPr>
+        <p:spPr>
+          <a:xfrm>
+            <a:off x="7726679" y="5212080"/>
+            <a:ext cx="3959352" cy="914400"/>
+          </a:xfrm>
+          <a:prstGeom prst="rect">
+            <a:avLst/>
+          </a:prstGeom>
+          <a:noFill/>
+        </p:spPr>
+        <p:txBody>
+          <a:bodyPr wrap="square" anchor="t" lIns="0" rIns="0" tIns="0" bIns="0">
+            <a:spAutoFit/>
+          </a:bodyPr>
+          <a:lstStyle/>
+          <a:p>
+            <a:pPr>
+              <a:lnSpc>
+                <a:spcPct val="113000"/>
+              </a:lnSpc>
+              <a:spcBef>
+                <a:spcPts val="0"/>
+              </a:spcBef>
+              <a:spcAft>
+                <a:spcPts val="0"/>
+              </a:spcAft>
+            </a:pPr>
+            <a:r>
+              <a:rPr sz="1200" b="0">
+                <a:solidFill>
+                  <a:srgbClr val="2E3138"/>
+                </a:solidFill>
+                <a:latin typeface="Noto Sans"/>
+              </a:rPr>
+              <a:t>Satu tabel fakta berisi 7.032 pelanggan bersih; semua measure membaca grain yang sama, jadi angka antarhalaman selalu konsisten.</a:t>
+            </a:r>
+          </a:p>
+        </p:txBody>
+      </p:sp>
+      <p:sp>
+        <p:nvSpPr>
+          <p:cNvPr id="18" name="Rounded Rectangle 17"/>
+          <p:cNvSpPr/>
+          <p:nvPr/>
+        </p:nvSpPr>
+        <p:spPr>
+          <a:xfrm>
+            <a:off x="502920" y="5961888"/>
+            <a:ext cx="11183112" cy="603504"/>
+          </a:xfrm>
+          <a:prstGeom prst="roundRect">
+            <a:avLst>
+              <a:gd name="adj" fmla="val 5500"/>
+            </a:avLst>
+          </a:prstGeom>
           <a:solidFill>
-            <a:srgbClr val="C75B7F"/>
+            <a:srgbClr val="4E7FA6"/>
           </a:solidFill>
           <a:ln>
             <a:noFill/>
           </a:ln>
           <a:effectLst/>
         </p:spPr>
+        <p:style>
+          <a:lnRef idx="1">
+            <a:schemeClr val="accent1"/>
+          </a:lnRef>
+          <a:fillRef idx="3">
+            <a:schemeClr val="accent1"/>
+          </a:fillRef>
+          <a:effectRef idx="2">
+            <a:schemeClr val="accent1"/>
+          </a:effectRef>
+          <a:fontRef idx="minor">
+            <a:schemeClr val="lt1"/>
+          </a:fontRef>
+        </p:style>
         <p:txBody>
           <a:bodyPr rtlCol="0" anchor="ctr"/>
           <a:lstStyle/>
@@ -6877,14 +8669,14 @@
       </p:sp>
       <p:sp>
         <p:nvSpPr>
-          <p:cNvPr id="18" name="TextBox 17"/>
+          <p:cNvPr id="19" name="TextBox 18"/>
           <p:cNvSpPr txBox="1"/>
           <p:nvPr/>
         </p:nvSpPr>
         <p:spPr>
           <a:xfrm>
-            <a:off x="1143000" y="4745736"/>
-            <a:ext cx="4617720" cy="1097280"/>
+            <a:off x="777240" y="5961888"/>
+            <a:ext cx="10698480" cy="603504"/>
           </a:xfrm>
           <a:prstGeom prst="rect">
             <a:avLst/>
@@ -6892,129 +8684,39 @@
           <a:noFill/>
         </p:spPr>
         <p:txBody>
-          <a:bodyPr wrap="square" lIns="0" rIns="0" tIns="0" bIns="0">
+          <a:bodyPr wrap="square" anchor="ctr" lIns="0" rIns="0" tIns="0" bIns="0">
             <a:spAutoFit/>
           </a:bodyPr>
           <a:lstStyle/>
           <a:p>
             <a:pPr>
               <a:lnSpc>
-                <a:spcPct val="118000"/>
+                <a:spcPct val="110000"/>
               </a:lnSpc>
+              <a:spcBef>
+                <a:spcPts val="0"/>
+              </a:spcBef>
               <a:spcAft>
                 <a:spcPts val="0"/>
               </a:spcAft>
             </a:pPr>
             <a:r>
-              <a:rPr sz="1450" b="0" i="0">
-                <a:solidFill>
-                  <a:srgbClr val="2E3138"/>
+              <a:rPr sz="1250" b="1">
+                <a:solidFill>
+                  <a:srgbClr val="FFFFFF"/>
                 </a:solidFill>
                 <a:latin typeface="Noto Sans"/>
               </a:rPr>
-              <a:t>Tawarkan Tech Support dan Online Security proaktif, bundel dukungan gratis 3 bulan untuk segmen rawan</a:t>
-            </a:r>
-          </a:p>
-        </p:txBody>
-      </p:sp>
-      <p:sp>
-        <p:nvSpPr>
-          <p:cNvPr id="19" name="Rectangle 18"/>
-          <p:cNvSpPr/>
-          <p:nvPr/>
-        </p:nvSpPr>
-        <p:spPr>
-          <a:xfrm>
-            <a:off x="6227064" y="4562856"/>
-            <a:ext cx="5321808" cy="1408176"/>
-          </a:xfrm>
-          <a:prstGeom prst="rect">
-            <a:avLst/>
-          </a:prstGeom>
-          <a:solidFill>
-            <a:srgbClr val="F7F1E5"/>
-          </a:solidFill>
-          <a:ln>
-            <a:noFill/>
-          </a:ln>
-          <a:effectLst/>
-        </p:spPr>
-        <p:txBody>
-          <a:bodyPr rtlCol="0" anchor="ctr"/>
-          <a:lstStyle/>
-          <a:p>
-            <a:pPr algn="ctr"/>
-          </a:p>
-        </p:txBody>
-      </p:sp>
-      <p:sp>
-        <p:nvSpPr>
-          <p:cNvPr id="20" name="Rectangle 19"/>
-          <p:cNvSpPr/>
-          <p:nvPr/>
-        </p:nvSpPr>
-        <p:spPr>
-          <a:xfrm>
-            <a:off x="6428232" y="4782312"/>
-            <a:ext cx="128016" cy="128016"/>
-          </a:xfrm>
-          <a:prstGeom prst="rect">
-            <a:avLst/>
-          </a:prstGeom>
-          <a:solidFill>
-            <a:srgbClr val="C75B7F"/>
-          </a:solidFill>
-          <a:ln>
-            <a:noFill/>
-          </a:ln>
-          <a:effectLst/>
-        </p:spPr>
-        <p:txBody>
-          <a:bodyPr rtlCol="0" anchor="ctr"/>
-          <a:lstStyle/>
-          <a:p>
-            <a:pPr algn="ctr"/>
-          </a:p>
-        </p:txBody>
-      </p:sp>
-      <p:sp>
-        <p:nvSpPr>
-          <p:cNvPr id="21" name="TextBox 20"/>
-          <p:cNvSpPr txBox="1"/>
-          <p:nvPr/>
-        </p:nvSpPr>
-        <p:spPr>
-          <a:xfrm>
-            <a:off x="6729984" y="4745736"/>
-            <a:ext cx="4617720" cy="1097280"/>
-          </a:xfrm>
-          <a:prstGeom prst="rect">
-            <a:avLst/>
-          </a:prstGeom>
-          <a:noFill/>
-        </p:spPr>
-        <p:txBody>
-          <a:bodyPr wrap="square" lIns="0" rIns="0" tIns="0" bIns="0">
-            <a:spAutoFit/>
-          </a:bodyPr>
-          <a:lstStyle/>
-          <a:p>
-            <a:pPr>
-              <a:lnSpc>
-                <a:spcPct val="118000"/>
-              </a:lnSpc>
-              <a:spcAft>
-                <a:spcPts val="0"/>
-              </a:spcAft>
-            </a:pPr>
-            <a:r>
-              <a:rPr sz="1450" b="0" i="0">
-                <a:solidFill>
-                  <a:srgbClr val="2E3138"/>
+              <a:t>Telco-Churn-Analysis.pbix</a:t>
+            </a:r>
+            <a:r>
+              <a:rPr sz="1250" b="0">
+                <a:solidFill>
+                  <a:srgbClr val="F7F1E5"/>
                 </a:solidFill>
                 <a:latin typeface="Noto Sans"/>
               </a:rPr>
-              <a:t>Perhatian khusus untuk lansia dan pelanggan yang hidup sendiri dengan jalur dukungan yang lebih personal</a:t>
+              <a:t>: star schema, measure DAX terverifikasi, layout 4 halaman, dan panduan rakit ada di folder powerbi pada repo ini.</a:t>
             </a:r>
           </a:p>
         </p:txBody>
